--- a/tese/presentation/Ap Tese.pptx
+++ b/tese/presentation/Ap Tese.pptx
@@ -5,7 +5,7 @@
     <p:sldMasterId id="2147483672" r:id="rId1"/>
   </p:sldMasterIdLst>
   <p:notesMasterIdLst>
-    <p:notesMasterId r:id="rId55"/>
+    <p:notesMasterId r:id="rId56"/>
   </p:notesMasterIdLst>
   <p:sldIdLst>
     <p:sldId id="256" r:id="rId2"/>
@@ -14,53 +14,54 @@
     <p:sldId id="257" r:id="rId5"/>
     <p:sldId id="294" r:id="rId6"/>
     <p:sldId id="308" r:id="rId7"/>
-    <p:sldId id="302" r:id="rId8"/>
-    <p:sldId id="306" r:id="rId9"/>
-    <p:sldId id="305" r:id="rId10"/>
-    <p:sldId id="295" r:id="rId11"/>
-    <p:sldId id="314" r:id="rId12"/>
-    <p:sldId id="304" r:id="rId13"/>
-    <p:sldId id="303" r:id="rId14"/>
-    <p:sldId id="313" r:id="rId15"/>
-    <p:sldId id="296" r:id="rId16"/>
-    <p:sldId id="311" r:id="rId17"/>
-    <p:sldId id="312" r:id="rId18"/>
-    <p:sldId id="309" r:id="rId19"/>
-    <p:sldId id="310" r:id="rId20"/>
-    <p:sldId id="315" r:id="rId21"/>
-    <p:sldId id="316" r:id="rId22"/>
-    <p:sldId id="317" r:id="rId23"/>
-    <p:sldId id="318" r:id="rId24"/>
-    <p:sldId id="297" r:id="rId25"/>
-    <p:sldId id="298" r:id="rId26"/>
-    <p:sldId id="300" r:id="rId27"/>
-    <p:sldId id="299" r:id="rId28"/>
-    <p:sldId id="301" r:id="rId29"/>
-    <p:sldId id="280" r:id="rId30"/>
-    <p:sldId id="286" r:id="rId31"/>
-    <p:sldId id="281" r:id="rId32"/>
-    <p:sldId id="282" r:id="rId33"/>
-    <p:sldId id="259" r:id="rId34"/>
-    <p:sldId id="269" r:id="rId35"/>
-    <p:sldId id="283" r:id="rId36"/>
-    <p:sldId id="268" r:id="rId37"/>
-    <p:sldId id="285" r:id="rId38"/>
-    <p:sldId id="271" r:id="rId39"/>
-    <p:sldId id="272" r:id="rId40"/>
-    <p:sldId id="273" r:id="rId41"/>
-    <p:sldId id="260" r:id="rId42"/>
-    <p:sldId id="274" r:id="rId43"/>
-    <p:sldId id="275" r:id="rId44"/>
-    <p:sldId id="276" r:id="rId45"/>
-    <p:sldId id="290" r:id="rId46"/>
-    <p:sldId id="291" r:id="rId47"/>
-    <p:sldId id="261" r:id="rId48"/>
-    <p:sldId id="278" r:id="rId49"/>
-    <p:sldId id="279" r:id="rId50"/>
-    <p:sldId id="289" r:id="rId51"/>
-    <p:sldId id="288" r:id="rId52"/>
-    <p:sldId id="262" r:id="rId53"/>
-    <p:sldId id="263" r:id="rId54"/>
+    <p:sldId id="319" r:id="rId8"/>
+    <p:sldId id="302" r:id="rId9"/>
+    <p:sldId id="306" r:id="rId10"/>
+    <p:sldId id="305" r:id="rId11"/>
+    <p:sldId id="295" r:id="rId12"/>
+    <p:sldId id="314" r:id="rId13"/>
+    <p:sldId id="304" r:id="rId14"/>
+    <p:sldId id="303" r:id="rId15"/>
+    <p:sldId id="313" r:id="rId16"/>
+    <p:sldId id="296" r:id="rId17"/>
+    <p:sldId id="311" r:id="rId18"/>
+    <p:sldId id="312" r:id="rId19"/>
+    <p:sldId id="309" r:id="rId20"/>
+    <p:sldId id="310" r:id="rId21"/>
+    <p:sldId id="315" r:id="rId22"/>
+    <p:sldId id="316" r:id="rId23"/>
+    <p:sldId id="317" r:id="rId24"/>
+    <p:sldId id="318" r:id="rId25"/>
+    <p:sldId id="297" r:id="rId26"/>
+    <p:sldId id="298" r:id="rId27"/>
+    <p:sldId id="300" r:id="rId28"/>
+    <p:sldId id="299" r:id="rId29"/>
+    <p:sldId id="301" r:id="rId30"/>
+    <p:sldId id="280" r:id="rId31"/>
+    <p:sldId id="286" r:id="rId32"/>
+    <p:sldId id="281" r:id="rId33"/>
+    <p:sldId id="282" r:id="rId34"/>
+    <p:sldId id="259" r:id="rId35"/>
+    <p:sldId id="269" r:id="rId36"/>
+    <p:sldId id="283" r:id="rId37"/>
+    <p:sldId id="268" r:id="rId38"/>
+    <p:sldId id="285" r:id="rId39"/>
+    <p:sldId id="271" r:id="rId40"/>
+    <p:sldId id="272" r:id="rId41"/>
+    <p:sldId id="273" r:id="rId42"/>
+    <p:sldId id="260" r:id="rId43"/>
+    <p:sldId id="274" r:id="rId44"/>
+    <p:sldId id="275" r:id="rId45"/>
+    <p:sldId id="276" r:id="rId46"/>
+    <p:sldId id="290" r:id="rId47"/>
+    <p:sldId id="291" r:id="rId48"/>
+    <p:sldId id="261" r:id="rId49"/>
+    <p:sldId id="278" r:id="rId50"/>
+    <p:sldId id="279" r:id="rId51"/>
+    <p:sldId id="289" r:id="rId52"/>
+    <p:sldId id="288" r:id="rId53"/>
+    <p:sldId id="262" r:id="rId54"/>
+    <p:sldId id="263" r:id="rId55"/>
   </p:sldIdLst>
   <p:sldSz cx="9144000" cy="5715000" type="screen16x10"/>
   <p:notesSz cx="6858000" cy="9144000"/>
@@ -3719,6 +3720,189 @@
         <p:cNvPr id="1" name="">
           <a:extLst>
             <a:ext uri="{FF2B5EF4-FFF2-40B4-BE49-F238E27FC236}">
+              <a16:creationId xmlns:a16="http://schemas.microsoft.com/office/drawing/2014/main" id="{9DE1F5A8-F169-2814-0EC4-DF33D094EA16}"/>
+            </a:ext>
+          </a:extLst>
+        </p:cNvPr>
+        <p:cNvGrpSpPr/>
+        <p:nvPr/>
+      </p:nvGrpSpPr>
+      <p:grpSpPr>
+        <a:xfrm>
+          <a:off x="0" y="0"/>
+          <a:ext cx="0" cy="0"/>
+          <a:chOff x="0" y="0"/>
+          <a:chExt cx="0" cy="0"/>
+        </a:xfrm>
+      </p:grpSpPr>
+      <p:sp>
+        <p:nvSpPr>
+          <p:cNvPr id="2" name="TextBox 1">
+            <a:extLst>
+              <a:ext uri="{FF2B5EF4-FFF2-40B4-BE49-F238E27FC236}">
+                <a16:creationId xmlns:a16="http://schemas.microsoft.com/office/drawing/2014/main" id="{458B3932-2A7C-3A6E-6E7E-EEAB07A52280}"/>
+              </a:ext>
+            </a:extLst>
+          </p:cNvPr>
+          <p:cNvSpPr txBox="1"/>
+          <p:nvPr/>
+        </p:nvSpPr>
+        <p:spPr>
+          <a:xfrm>
+            <a:off x="469556" y="626071"/>
+            <a:ext cx="6845644" cy="523220"/>
+          </a:xfrm>
+          <a:prstGeom prst="rect">
+            <a:avLst/>
+          </a:prstGeom>
+          <a:noFill/>
+        </p:spPr>
+        <p:txBody>
+          <a:bodyPr wrap="square" rtlCol="0">
+            <a:spAutoFit/>
+          </a:bodyPr>
+          <a:lstStyle/>
+          <a:p>
+            <a:r>
+              <a:rPr lang="pt-PT" sz="2800" noProof="1">
+                <a:solidFill>
+                  <a:srgbClr val="002060"/>
+                </a:solidFill>
+              </a:rPr>
+              <a:t>From bip2ml 2 WhyRel</a:t>
+            </a:r>
+            <a:endParaRPr lang="en-US" sz="2800" noProof="1"/>
+          </a:p>
+        </p:txBody>
+      </p:sp>
+      <p:sp>
+        <p:nvSpPr>
+          <p:cNvPr id="4" name="Slide Number Placeholder 3">
+            <a:extLst>
+              <a:ext uri="{FF2B5EF4-FFF2-40B4-BE49-F238E27FC236}">
+                <a16:creationId xmlns:a16="http://schemas.microsoft.com/office/drawing/2014/main" id="{3122067F-F56B-7D25-A9C7-976D469A4E69}"/>
+              </a:ext>
+            </a:extLst>
+          </p:cNvPr>
+          <p:cNvSpPr>
+            <a:spLocks noGrp="1"/>
+          </p:cNvSpPr>
+          <p:nvPr>
+            <p:ph type="sldNum" sz="quarter" idx="12"/>
+          </p:nvPr>
+        </p:nvSpPr>
+        <p:spPr/>
+        <p:txBody>
+          <a:bodyPr/>
+          <a:lstStyle/>
+          <a:p>
+            <a:fld id="{292A9FD8-515A-4698-9313-0AB17EE9632B}" type="slidenum">
+              <a:rPr lang="en-US" noProof="1" dirty="0" smtClean="0"/>
+              <a:t>10</a:t>
+            </a:fld>
+            <a:endParaRPr lang="en-US" noProof="1"/>
+          </a:p>
+        </p:txBody>
+      </p:sp>
+      <p:sp>
+        <p:nvSpPr>
+          <p:cNvPr id="10" name="TextBox 9">
+            <a:extLst>
+              <a:ext uri="{FF2B5EF4-FFF2-40B4-BE49-F238E27FC236}">
+                <a16:creationId xmlns:a16="http://schemas.microsoft.com/office/drawing/2014/main" id="{AF01DFD2-1A28-5BB8-86A8-B175A9BADBA6}"/>
+              </a:ext>
+            </a:extLst>
+          </p:cNvPr>
+          <p:cNvSpPr txBox="1"/>
+          <p:nvPr/>
+        </p:nvSpPr>
+        <p:spPr>
+          <a:xfrm>
+            <a:off x="469556" y="1884297"/>
+            <a:ext cx="6960974" cy="2308324"/>
+          </a:xfrm>
+          <a:prstGeom prst="rect">
+            <a:avLst/>
+          </a:prstGeom>
+          <a:noFill/>
+        </p:spPr>
+        <p:txBody>
+          <a:bodyPr wrap="square" rtlCol="0">
+            <a:spAutoFit/>
+          </a:bodyPr>
+          <a:lstStyle/>
+          <a:p>
+            <a:r>
+              <a:rPr lang="en-US" sz="2400" i="1" noProof="1">
+                <a:solidFill>
+                  <a:srgbClr val="002060"/>
+                </a:solidFill>
+              </a:rPr>
+              <a:t>Why?</a:t>
+            </a:r>
+          </a:p>
+          <a:p>
+            <a:endParaRPr lang="en-US" sz="2400" i="1" noProof="1">
+              <a:solidFill>
+                <a:srgbClr val="002060"/>
+              </a:solidFill>
+            </a:endParaRPr>
+          </a:p>
+          <a:p>
+            <a:r>
+              <a:rPr lang="en-US" sz="2400" noProof="1">
+                <a:solidFill>
+                  <a:srgbClr val="002060"/>
+                </a:solidFill>
+              </a:rPr>
+              <a:t>To allow programmers to verify relational properties about their OCaml projects without needing to:</a:t>
+            </a:r>
+          </a:p>
+          <a:p>
+            <a:pPr lvl="1"/>
+            <a:r>
+              <a:rPr lang="en-US" sz="2400" noProof="1">
+                <a:solidFill>
+                  <a:srgbClr val="002060"/>
+                </a:solidFill>
+              </a:rPr>
+              <a:t>- Completely rewrite the code</a:t>
+            </a:r>
+          </a:p>
+          <a:p>
+            <a:pPr lvl="1"/>
+            <a:r>
+              <a:rPr lang="en-US" sz="2400" noProof="1">
+                <a:solidFill>
+                  <a:srgbClr val="002060"/>
+                </a:solidFill>
+              </a:rPr>
+              <a:t>- Learn a different programming language</a:t>
+            </a:r>
+          </a:p>
+        </p:txBody>
+      </p:sp>
+    </p:spTree>
+    <p:extLst>
+      <p:ext uri="{BB962C8B-B14F-4D97-AF65-F5344CB8AC3E}">
+        <p14:creationId xmlns:p14="http://schemas.microsoft.com/office/powerpoint/2010/main" val="3292277797"/>
+      </p:ext>
+    </p:extLst>
+  </p:cSld>
+  <p:clrMapOvr>
+    <a:masterClrMapping/>
+  </p:clrMapOvr>
+</p:sld>
+</file>
+
+<file path=ppt/slides/slide11.xml><?xml version="1.0" encoding="utf-8"?>
+<p:sld xmlns:a="http://schemas.openxmlformats.org/drawingml/2006/main" xmlns:r="http://schemas.openxmlformats.org/officeDocument/2006/relationships" xmlns:p="http://schemas.openxmlformats.org/presentationml/2006/main">
+  <p:cSld>
+    <p:spTree>
+      <p:nvGrpSpPr>
+        <p:cNvPr id="1" name="">
+          <a:extLst>
+            <a:ext uri="{FF2B5EF4-FFF2-40B4-BE49-F238E27FC236}">
               <a16:creationId xmlns:a16="http://schemas.microsoft.com/office/drawing/2014/main" id="{0690D219-590C-B954-1A55-6E398BBB899C}"/>
             </a:ext>
           </a:extLst>
@@ -3798,7 +3982,7 @@
           <a:p>
             <a:fld id="{292A9FD8-515A-4698-9313-0AB17EE9632B}" type="slidenum">
               <a:rPr lang="en-US" noProof="1" dirty="0" smtClean="0"/>
-              <a:t>10</a:t>
+              <a:t>11</a:t>
             </a:fld>
             <a:endParaRPr lang="en-US" noProof="1"/>
           </a:p>
@@ -3817,7 +4001,7 @@
 </p:sld>
 </file>
 
-<file path=ppt/slides/slide11.xml><?xml version="1.0" encoding="utf-8"?>
+<file path=ppt/slides/slide12.xml><?xml version="1.0" encoding="utf-8"?>
 <p:sld xmlns:a="http://schemas.openxmlformats.org/drawingml/2006/main" xmlns:r="http://schemas.openxmlformats.org/officeDocument/2006/relationships" xmlns:p="http://schemas.openxmlformats.org/presentationml/2006/main">
   <p:cSld>
     <p:spTree>
@@ -3903,7 +4087,7 @@
           <a:p>
             <a:fld id="{292A9FD8-515A-4698-9313-0AB17EE9632B}" type="slidenum">
               <a:rPr lang="en-US" noProof="1" dirty="0" smtClean="0"/>
-              <a:t>11</a:t>
+              <a:t>12</a:t>
             </a:fld>
             <a:endParaRPr lang="en-US" noProof="1"/>
           </a:p>
@@ -3961,7 +4145,7 @@
                   <a:srgbClr val="002060"/>
                 </a:solidFill>
               </a:rPr>
-              <a:t>Transpile biprograms using the translation rules defined by WhyRel’s authors</a:t>
+              <a:t>Transpiles biprograms using the translation rules defined by WhyRel’s authors</a:t>
             </a:r>
           </a:p>
           <a:p>
@@ -4007,7 +4191,7 @@
 </p:sld>
 </file>
 
-<file path=ppt/slides/slide12.xml><?xml version="1.0" encoding="utf-8"?>
+<file path=ppt/slides/slide13.xml><?xml version="1.0" encoding="utf-8"?>
 <p:sld xmlns:a="http://schemas.openxmlformats.org/drawingml/2006/main" xmlns:r="http://schemas.openxmlformats.org/officeDocument/2006/relationships" xmlns:p="http://schemas.openxmlformats.org/presentationml/2006/main">
   <p:cSld>
     <p:spTree>
@@ -4093,7 +4277,7 @@
           <a:p>
             <a:fld id="{292A9FD8-515A-4698-9313-0AB17EE9632B}" type="slidenum">
               <a:rPr lang="en-US" noProof="1" dirty="0" smtClean="0"/>
-              <a:t>12</a:t>
+              <a:t>13</a:t>
             </a:fld>
             <a:endParaRPr lang="en-US" noProof="1"/>
           </a:p>
@@ -4158,7 +4342,7 @@
 </p:sld>
 </file>
 
-<file path=ppt/slides/slide13.xml><?xml version="1.0" encoding="utf-8"?>
+<file path=ppt/slides/slide14.xml><?xml version="1.0" encoding="utf-8"?>
 <p:sld xmlns:a="http://schemas.openxmlformats.org/drawingml/2006/main" xmlns:r="http://schemas.openxmlformats.org/officeDocument/2006/relationships" xmlns:p="http://schemas.openxmlformats.org/presentationml/2006/main">
   <p:cSld>
     <p:spTree>
@@ -4244,7 +4428,7 @@
           <a:p>
             <a:fld id="{292A9FD8-515A-4698-9313-0AB17EE9632B}" type="slidenum">
               <a:rPr lang="en-US" noProof="1" dirty="0" smtClean="0"/>
-              <a:t>13</a:t>
+              <a:t>14</a:t>
             </a:fld>
             <a:endParaRPr lang="en-US" noProof="1"/>
           </a:p>
@@ -4309,7 +4493,7 @@
 </p:sld>
 </file>
 
-<file path=ppt/slides/slide14.xml><?xml version="1.0" encoding="utf-8"?>
+<file path=ppt/slides/slide15.xml><?xml version="1.0" encoding="utf-8"?>
 <p:sld xmlns:a="http://schemas.openxmlformats.org/drawingml/2006/main" xmlns:r="http://schemas.openxmlformats.org/officeDocument/2006/relationships" xmlns:p="http://schemas.openxmlformats.org/presentationml/2006/main">
   <p:cSld>
     <p:spTree>
@@ -4395,7 +4579,7 @@
           <a:p>
             <a:fld id="{292A9FD8-515A-4698-9313-0AB17EE9632B}" type="slidenum">
               <a:rPr lang="en-US" noProof="1" dirty="0" smtClean="0"/>
-              <a:t>14</a:t>
+              <a:t>15</a:t>
             </a:fld>
             <a:endParaRPr lang="en-US" noProof="1"/>
           </a:p>
@@ -4515,7 +4699,7 @@
 </p:sld>
 </file>
 
-<file path=ppt/slides/slide15.xml><?xml version="1.0" encoding="utf-8"?>
+<file path=ppt/slides/slide16.xml><?xml version="1.0" encoding="utf-8"?>
 <p:sld xmlns:a="http://schemas.openxmlformats.org/drawingml/2006/main" xmlns:r="http://schemas.openxmlformats.org/officeDocument/2006/relationships" xmlns:p="http://schemas.openxmlformats.org/presentationml/2006/main">
   <p:cSld>
     <p:spTree>
@@ -4602,7 +4786,7 @@
           <a:p>
             <a:fld id="{292A9FD8-515A-4698-9313-0AB17EE9632B}" type="slidenum">
               <a:rPr lang="en-US" noProof="1" dirty="0" smtClean="0"/>
-              <a:t>15</a:t>
+              <a:t>16</a:t>
             </a:fld>
             <a:endParaRPr lang="en-US" noProof="1"/>
           </a:p>
@@ -4621,7 +4805,7 @@
 </p:sld>
 </file>
 
-<file path=ppt/slides/slide16.xml><?xml version="1.0" encoding="utf-8"?>
+<file path=ppt/slides/slide17.xml><?xml version="1.0" encoding="utf-8"?>
 <p:sld xmlns:a="http://schemas.openxmlformats.org/drawingml/2006/main" xmlns:r="http://schemas.openxmlformats.org/officeDocument/2006/relationships" xmlns:p="http://schemas.openxmlformats.org/presentationml/2006/main">
   <p:cSld>
     <p:spTree>
@@ -4707,7 +4891,7 @@
           <a:p>
             <a:fld id="{292A9FD8-515A-4698-9313-0AB17EE9632B}" type="slidenum">
               <a:rPr lang="en-US" noProof="1" dirty="0" smtClean="0"/>
-              <a:t>16</a:t>
+              <a:t>17</a:t>
             </a:fld>
             <a:endParaRPr lang="en-US" noProof="1"/>
           </a:p>
@@ -4744,7 +4928,7 @@
             <a:r>
               <a:rPr lang="en-US" sz="1600" dirty="0">
                 <a:solidFill>
-                  <a:schemeClr val="accent2"/>
+                  <a:srgbClr val="F3530B"/>
                 </a:solidFill>
               </a:rPr>
               <a:t>let</a:t>
@@ -4764,7 +4948,7 @@
             <a:r>
               <a:rPr lang="en-US" sz="1600" dirty="0">
                 <a:solidFill>
-                  <a:schemeClr val="accent2"/>
+                  <a:srgbClr val="F3530B"/>
                 </a:solidFill>
               </a:rPr>
               <a:t>int</a:t>
@@ -4776,7 +4960,7 @@
             <a:r>
               <a:rPr lang="en-US" sz="1600" dirty="0">
                 <a:solidFill>
-                  <a:schemeClr val="accent2"/>
+                  <a:srgbClr val="F3530B"/>
                 </a:solidFill>
               </a:rPr>
               <a:t>int</a:t>
@@ -4788,7 +4972,7 @@
             <a:r>
               <a:rPr lang="en-US" sz="1600" dirty="0">
                 <a:solidFill>
-                  <a:schemeClr val="accent2"/>
+                  <a:srgbClr val="F3530B"/>
                 </a:solidFill>
               </a:rPr>
               <a:t>int</a:t>
@@ -4800,7 +4984,7 @@
             <a:r>
               <a:rPr lang="en-US" sz="1600" dirty="0">
                 <a:solidFill>
-                  <a:schemeClr val="accent2"/>
+                  <a:srgbClr val="F3530B"/>
                 </a:solidFill>
               </a:rPr>
               <a:t>begin</a:t>
@@ -4815,7 +4999,7 @@
             <a:r>
               <a:rPr lang="en-US" sz="1600" dirty="0">
                 <a:solidFill>
-                  <a:schemeClr val="accent2"/>
+                  <a:srgbClr val="F3530B"/>
                 </a:solidFill>
               </a:rPr>
               <a:t>let</a:t>
@@ -4835,7 +5019,7 @@
             <a:r>
               <a:rPr lang="en-US" sz="1600" dirty="0">
                 <a:solidFill>
-                  <a:schemeClr val="accent2"/>
+                  <a:srgbClr val="F3530B"/>
                 </a:solidFill>
               </a:rPr>
               <a:t>in</a:t>
@@ -4850,7 +5034,7 @@
             <a:r>
               <a:rPr lang="en-US" sz="1600" dirty="0">
                 <a:solidFill>
-                  <a:schemeClr val="accent2"/>
+                  <a:srgbClr val="F3530B"/>
                 </a:solidFill>
               </a:rPr>
               <a:t>let</a:t>
@@ -4862,7 +5046,7 @@
             <a:r>
               <a:rPr lang="en-US" sz="1600" dirty="0">
                 <a:solidFill>
-                  <a:schemeClr val="accent2"/>
+                  <a:srgbClr val="F3530B"/>
                 </a:solidFill>
               </a:rPr>
               <a:t>in</a:t>
@@ -4881,7 +5065,7 @@
             <a:r>
               <a:rPr lang="en-US" sz="1600" dirty="0">
                 <a:solidFill>
-                  <a:schemeClr val="accent2"/>
+                  <a:srgbClr val="F3530B"/>
                 </a:solidFill>
               </a:rPr>
               <a:t>while</a:t>
@@ -4901,7 +5085,7 @@
             <a:r>
               <a:rPr lang="en-US" sz="1600" dirty="0">
                 <a:solidFill>
-                  <a:schemeClr val="accent2"/>
+                  <a:srgbClr val="F3530B"/>
                 </a:solidFill>
               </a:rPr>
               <a:t>do</a:t>
@@ -4916,7 +5100,7 @@
             <a:r>
               <a:rPr lang="en-US" sz="1600" dirty="0">
                 <a:solidFill>
-                  <a:schemeClr val="accent2"/>
+                  <a:srgbClr val="F3530B"/>
                 </a:solidFill>
               </a:rPr>
               <a:t>variant</a:t>
@@ -4951,14 +5135,14 @@
             <a:r>
               <a:rPr lang="en-US" sz="1600" dirty="0">
                 <a:solidFill>
-                  <a:schemeClr val="accent2"/>
+                  <a:srgbClr val="F3530B"/>
                 </a:solidFill>
               </a:rPr>
               <a:t>invariant</a:t>
             </a:r>
             <a:r>
               <a:rPr lang="en-US" sz="1600" dirty="0"/>
-              <a:t> !</a:t>
+              <a:t>  !</a:t>
             </a:r>
             <a:r>
               <a:rPr lang="en-US" sz="1600" dirty="0" err="1"/>
@@ -5002,7 +5186,7 @@
             <a:r>
               <a:rPr lang="en-US" sz="1600" dirty="0">
                 <a:solidFill>
-                  <a:schemeClr val="accent2"/>
+                  <a:srgbClr val="F3530B"/>
                 </a:solidFill>
               </a:rPr>
               <a:t>let</a:t>
@@ -5030,7 +5214,7 @@
             <a:r>
               <a:rPr lang="en-US" sz="1600" dirty="0">
                 <a:solidFill>
-                  <a:schemeClr val="accent2"/>
+                  <a:srgbClr val="F3530B"/>
                 </a:solidFill>
               </a:rPr>
               <a:t>in</a:t>
@@ -5049,7 +5233,7 @@
             <a:r>
               <a:rPr lang="en-US" sz="1600" dirty="0">
                 <a:solidFill>
-                  <a:schemeClr val="accent2"/>
+                  <a:srgbClr val="F3530B"/>
                 </a:solidFill>
               </a:rPr>
               <a:t>let</a:t>
@@ -5061,7 +5245,7 @@
             <a:r>
               <a:rPr lang="en-US" sz="1600" dirty="0">
                 <a:solidFill>
-                  <a:schemeClr val="accent2"/>
+                  <a:srgbClr val="F3530B"/>
                 </a:solidFill>
               </a:rPr>
               <a:t>in</a:t>
@@ -5087,7 +5271,7 @@
             <a:r>
               <a:rPr lang="en-US" sz="1600" dirty="0">
                 <a:solidFill>
-                  <a:schemeClr val="accent2"/>
+                  <a:srgbClr val="F3530B"/>
                 </a:solidFill>
               </a:rPr>
               <a:t>while</a:t>
@@ -5099,7 +5283,7 @@
             <a:r>
               <a:rPr lang="en-US" sz="1600" dirty="0">
                 <a:solidFill>
-                  <a:schemeClr val="accent2"/>
+                  <a:srgbClr val="F3530B"/>
                 </a:solidFill>
               </a:rPr>
               <a:t>do</a:t>
@@ -5118,7 +5302,7 @@
             <a:r>
               <a:rPr lang="en-US" sz="1600" dirty="0">
                 <a:solidFill>
-                  <a:schemeClr val="accent2"/>
+                  <a:srgbClr val="F3530B"/>
                 </a:solidFill>
               </a:rPr>
               <a:t>variant</a:t>
@@ -5153,7 +5337,7 @@
             <a:r>
               <a:rPr lang="en-US" sz="1600" dirty="0">
                 <a:solidFill>
-                  <a:schemeClr val="accent2"/>
+                  <a:srgbClr val="F3530B"/>
                 </a:solidFill>
               </a:rPr>
               <a:t>invariant</a:t>
@@ -5226,7 +5410,7 @@
             <a:r>
               <a:rPr lang="en-US" sz="1600" dirty="0">
                 <a:solidFill>
-                  <a:schemeClr val="accent2"/>
+                  <a:srgbClr val="F3530B"/>
                 </a:solidFill>
               </a:rPr>
               <a:t>done</a:t>
@@ -5262,7 +5446,7 @@
 </p:sld>
 </file>
 
-<file path=ppt/slides/slide17.xml><?xml version="1.0" encoding="utf-8"?>
+<file path=ppt/slides/slide18.xml><?xml version="1.0" encoding="utf-8"?>
 <p:sld xmlns:a="http://schemas.openxmlformats.org/drawingml/2006/main" xmlns:r="http://schemas.openxmlformats.org/officeDocument/2006/relationships" xmlns:p="http://schemas.openxmlformats.org/presentationml/2006/main">
   <p:cSld>
     <p:spTree>
@@ -5348,7 +5532,7 @@
           <a:p>
             <a:fld id="{292A9FD8-515A-4698-9313-0AB17EE9632B}" type="slidenum">
               <a:rPr lang="en-US" noProof="1" dirty="0" smtClean="0"/>
-              <a:t>17</a:t>
+              <a:t>18</a:t>
             </a:fld>
             <a:endParaRPr lang="en-US" noProof="1"/>
           </a:p>
@@ -5404,7 +5588,7 @@
             <a:r>
               <a:rPr lang="en-US" sz="1600" dirty="0">
                 <a:solidFill>
-                  <a:schemeClr val="accent2"/>
+                  <a:srgbClr val="F3530B"/>
                 </a:solidFill>
               </a:rPr>
               <a:t>assert</a:t>
@@ -5470,7 +5654,7 @@
             <a:r>
               <a:rPr lang="en-US" sz="1600" dirty="0">
                 <a:solidFill>
-                  <a:schemeClr val="accent2"/>
+                  <a:srgbClr val="F3530B"/>
                 </a:solidFill>
               </a:rPr>
               <a:t>done</a:t>
@@ -5496,7 +5680,7 @@
             <a:r>
               <a:rPr lang="en-US" sz="1600" dirty="0">
                 <a:solidFill>
-                  <a:schemeClr val="accent2"/>
+                  <a:srgbClr val="F3530B"/>
                 </a:solidFill>
               </a:rPr>
               <a:t>end</a:t>
@@ -5515,7 +5699,7 @@
             <a:r>
               <a:rPr lang="en-US" sz="1600" dirty="0">
                 <a:solidFill>
-                  <a:schemeClr val="accent2"/>
+                  <a:srgbClr val="F3530B"/>
                 </a:solidFill>
               </a:rPr>
               <a:t>requires</a:t>
@@ -5574,7 +5758,7 @@
             <a:r>
               <a:rPr lang="en-US" sz="1600" dirty="0">
                 <a:solidFill>
-                  <a:schemeClr val="accent2"/>
+                  <a:srgbClr val="F3530B"/>
                 </a:solidFill>
               </a:rPr>
               <a:t>ensures</a:t>
@@ -5638,7 +5822,7 @@
 </p:sld>
 </file>
 
-<file path=ppt/slides/slide18.xml><?xml version="1.0" encoding="utf-8"?>
+<file path=ppt/slides/slide19.xml><?xml version="1.0" encoding="utf-8"?>
 <p:sld xmlns:a="http://schemas.openxmlformats.org/drawingml/2006/main" xmlns:r="http://schemas.openxmlformats.org/officeDocument/2006/relationships" xmlns:p="http://schemas.openxmlformats.org/presentationml/2006/main">
   <p:cSld>
     <p:spTree>
@@ -5724,7 +5908,7 @@
           <a:p>
             <a:fld id="{292A9FD8-515A-4698-9313-0AB17EE9632B}" type="slidenum">
               <a:rPr lang="en-US" noProof="1" dirty="0" smtClean="0"/>
-              <a:t>18</a:t>
+              <a:t>19</a:t>
             </a:fld>
             <a:endParaRPr lang="en-US" noProof="1"/>
           </a:p>
@@ -5761,7 +5945,7 @@
             <a:r>
               <a:rPr lang="en-US" sz="1600" dirty="0">
                 <a:solidFill>
-                  <a:schemeClr val="accent2"/>
+                  <a:srgbClr val="F3530B"/>
                 </a:solidFill>
               </a:rPr>
               <a:t>let</a:t>
@@ -5793,7 +5977,7 @@
             <a:r>
               <a:rPr lang="pt-PT" sz="1600" dirty="0" err="1">
                 <a:solidFill>
-                  <a:schemeClr val="accent2"/>
+                  <a:srgbClr val="F3530B"/>
                 </a:solidFill>
               </a:rPr>
               <a:t>int</a:t>
@@ -5813,7 +5997,7 @@
             <a:r>
               <a:rPr lang="pt-PT" sz="1600" dirty="0" err="1">
                 <a:solidFill>
-                  <a:schemeClr val="accent2"/>
+                  <a:srgbClr val="F3530B"/>
                 </a:solidFill>
               </a:rPr>
               <a:t>int</a:t>
@@ -5833,7 +6017,7 @@
             <a:r>
               <a:rPr lang="pt-PT" sz="1600" dirty="0" err="1">
                 <a:solidFill>
-                  <a:schemeClr val="accent2"/>
+                  <a:srgbClr val="F3530B"/>
                 </a:solidFill>
               </a:rPr>
               <a:t>int</a:t>
@@ -5853,7 +6037,7 @@
             <a:r>
               <a:rPr lang="pt-PT" sz="1600" dirty="0" err="1">
                 <a:solidFill>
-                  <a:schemeClr val="accent2"/>
+                  <a:srgbClr val="F3530B"/>
                 </a:solidFill>
               </a:rPr>
               <a:t>int</a:t>
@@ -5869,7 +6053,7 @@
             <a:r>
               <a:rPr lang="en-US" sz="1600" dirty="0">
                 <a:solidFill>
-                  <a:schemeClr val="accent2"/>
+                  <a:srgbClr val="F3530B"/>
                 </a:solidFill>
               </a:rPr>
               <a:t>int</a:t>
@@ -5881,7 +6065,7 @@
             <a:r>
               <a:rPr lang="en-US" sz="1600" dirty="0">
                 <a:solidFill>
-                  <a:schemeClr val="accent2"/>
+                  <a:srgbClr val="F3530B"/>
                 </a:solidFill>
               </a:rPr>
               <a:t>int</a:t>
@@ -5899,7 +6083,7 @@
             <a:r>
               <a:rPr lang="en-US" sz="1600" dirty="0">
                 <a:solidFill>
-                  <a:schemeClr val="accent2"/>
+                  <a:srgbClr val="F3530B"/>
                 </a:solidFill>
               </a:rPr>
               <a:t>let</a:t>
@@ -5919,7 +6103,7 @@
             <a:r>
               <a:rPr lang="en-US" sz="1600" dirty="0">
                 <a:solidFill>
-                  <a:schemeClr val="accent2"/>
+                  <a:srgbClr val="F3530B"/>
                 </a:solidFill>
               </a:rPr>
               <a:t>in</a:t>
@@ -5930,7 +6114,7 @@
             <a:r>
               <a:rPr lang="en-US" sz="1600" dirty="0">
                 <a:solidFill>
-                  <a:schemeClr val="accent2"/>
+                  <a:srgbClr val="F3530B"/>
                 </a:solidFill>
               </a:rPr>
               <a:t>let</a:t>
@@ -5945,7 +6129,15 @@
             </a:r>
             <a:r>
               <a:rPr lang="en-US" sz="1600" dirty="0"/>
-              <a:t> = ref (0) in</a:t>
+              <a:t> = ref (0) </a:t>
+            </a:r>
+            <a:r>
+              <a:rPr lang="en-US" sz="1600" dirty="0">
+                <a:solidFill>
+                  <a:srgbClr val="F3530B"/>
+                </a:solidFill>
+              </a:rPr>
+              <a:t>in</a:t>
             </a:r>
           </a:p>
           <a:p>
@@ -5953,7 +6145,7 @@
             <a:r>
               <a:rPr lang="en-US" sz="1600" dirty="0">
                 <a:solidFill>
-                  <a:schemeClr val="accent2"/>
+                  <a:srgbClr val="F3530B"/>
                 </a:solidFill>
               </a:rPr>
               <a:t>let</a:t>
@@ -5973,7 +6165,7 @@
             <a:r>
               <a:rPr lang="en-US" sz="1600" dirty="0">
                 <a:solidFill>
-                  <a:schemeClr val="accent2"/>
+                  <a:srgbClr val="F3530B"/>
                 </a:solidFill>
               </a:rPr>
               <a:t>in</a:t>
@@ -5984,7 +6176,7 @@
             <a:r>
               <a:rPr lang="en-US" sz="1600" dirty="0">
                 <a:solidFill>
-                  <a:schemeClr val="accent2"/>
+                  <a:srgbClr val="F3530B"/>
                 </a:solidFill>
               </a:rPr>
               <a:t>let</a:t>
@@ -6004,7 +6196,7 @@
             <a:r>
               <a:rPr lang="en-US" sz="1600" dirty="0">
                 <a:solidFill>
-                  <a:schemeClr val="accent2"/>
+                  <a:srgbClr val="F3530B"/>
                 </a:solidFill>
               </a:rPr>
               <a:t>in</a:t>
@@ -6019,7 +6211,7 @@
             <a:r>
               <a:rPr lang="en-US" sz="1600" dirty="0">
                 <a:solidFill>
-                  <a:schemeClr val="accent2"/>
+                  <a:srgbClr val="F3530B"/>
                 </a:solidFill>
               </a:rPr>
               <a:t>while</a:t>
@@ -6047,7 +6239,7 @@
             <a:r>
               <a:rPr lang="en-US" sz="1600" dirty="0">
                 <a:solidFill>
-                  <a:schemeClr val="accent2"/>
+                  <a:srgbClr val="F3530B"/>
                 </a:solidFill>
               </a:rPr>
               <a:t>do</a:t>
@@ -6066,7 +6258,7 @@
             <a:r>
               <a:rPr lang="pt-PT" sz="1600" dirty="0" err="1">
                 <a:solidFill>
-                  <a:schemeClr val="accent2"/>
+                  <a:srgbClr val="F3530B"/>
                 </a:solidFill>
               </a:rPr>
               <a:t>invariant</a:t>
@@ -6117,7 +6309,7 @@
             <a:r>
               <a:rPr lang="pt-PT" sz="1600" dirty="0" err="1">
                 <a:solidFill>
-                  <a:schemeClr val="accent2"/>
+                  <a:srgbClr val="F3530B"/>
                 </a:solidFill>
               </a:rPr>
               <a:t>variant</a:t>
@@ -6152,7 +6344,7 @@
             <a:r>
               <a:rPr lang="pt-PT" sz="1600" dirty="0" err="1">
                 <a:solidFill>
-                  <a:schemeClr val="accent2"/>
+                  <a:srgbClr val="F3530B"/>
                 </a:solidFill>
               </a:rPr>
               <a:t>invariant</a:t>
@@ -6210,7 +6402,7 @@
             <a:r>
               <a:rPr lang="en-US" sz="1600" dirty="0">
                 <a:solidFill>
-                  <a:schemeClr val="accent2"/>
+                  <a:srgbClr val="F3530B"/>
                 </a:solidFill>
               </a:rPr>
               <a:t>let</a:t>
@@ -6238,7 +6430,7 @@
             <a:r>
               <a:rPr lang="en-US" sz="1600" dirty="0">
                 <a:solidFill>
-                  <a:schemeClr val="accent2"/>
+                  <a:srgbClr val="F3530B"/>
                 </a:solidFill>
               </a:rPr>
               <a:t>in</a:t>
@@ -6257,7 +6449,7 @@
             <a:r>
               <a:rPr lang="en-US" sz="1600" dirty="0">
                 <a:solidFill>
-                  <a:schemeClr val="accent2"/>
+                  <a:srgbClr val="F3530B"/>
                 </a:solidFill>
               </a:rPr>
               <a:t>let</a:t>
@@ -6277,7 +6469,7 @@
             <a:r>
               <a:rPr lang="en-US" sz="1600" dirty="0">
                 <a:solidFill>
-                  <a:schemeClr val="accent2"/>
+                  <a:srgbClr val="F3530B"/>
                 </a:solidFill>
               </a:rPr>
               <a:t>in</a:t>
@@ -6296,7 +6488,7 @@
             <a:r>
               <a:rPr lang="en-US" sz="1600" dirty="0">
                 <a:solidFill>
-                  <a:schemeClr val="accent2"/>
+                  <a:srgbClr val="F3530B"/>
                 </a:solidFill>
               </a:rPr>
               <a:t>let</a:t>
@@ -6316,7 +6508,7 @@
             <a:r>
               <a:rPr lang="en-US" sz="1600" dirty="0">
                 <a:solidFill>
-                  <a:schemeClr val="accent2"/>
+                  <a:srgbClr val="F3530B"/>
                 </a:solidFill>
               </a:rPr>
               <a:t>in</a:t>
@@ -6342,655 +6534,6 @@
     <p:extLst>
       <p:ext uri="{BB962C8B-B14F-4D97-AF65-F5344CB8AC3E}">
         <p14:creationId xmlns:p14="http://schemas.microsoft.com/office/powerpoint/2010/main" val="4242151965"/>
-      </p:ext>
-    </p:extLst>
-  </p:cSld>
-  <p:clrMapOvr>
-    <a:masterClrMapping/>
-  </p:clrMapOvr>
-</p:sld>
-</file>
-
-<file path=ppt/slides/slide19.xml><?xml version="1.0" encoding="utf-8"?>
-<p:sld xmlns:a="http://schemas.openxmlformats.org/drawingml/2006/main" xmlns:r="http://schemas.openxmlformats.org/officeDocument/2006/relationships" xmlns:p="http://schemas.openxmlformats.org/presentationml/2006/main">
-  <p:cSld>
-    <p:spTree>
-      <p:nvGrpSpPr>
-        <p:cNvPr id="1" name="">
-          <a:extLst>
-            <a:ext uri="{FF2B5EF4-FFF2-40B4-BE49-F238E27FC236}">
-              <a16:creationId xmlns:a16="http://schemas.microsoft.com/office/drawing/2014/main" id="{A5320333-94D6-A776-B862-B795AF7C6BE0}"/>
-            </a:ext>
-          </a:extLst>
-        </p:cNvPr>
-        <p:cNvGrpSpPr/>
-        <p:nvPr/>
-      </p:nvGrpSpPr>
-      <p:grpSpPr>
-        <a:xfrm>
-          <a:off x="0" y="0"/>
-          <a:ext cx="0" cy="0"/>
-          <a:chOff x="0" y="0"/>
-          <a:chExt cx="0" cy="0"/>
-        </a:xfrm>
-      </p:grpSpPr>
-      <p:sp>
-        <p:nvSpPr>
-          <p:cNvPr id="2" name="TextBox 1">
-            <a:extLst>
-              <a:ext uri="{FF2B5EF4-FFF2-40B4-BE49-F238E27FC236}">
-                <a16:creationId xmlns:a16="http://schemas.microsoft.com/office/drawing/2014/main" id="{33E7386D-40D1-775D-9328-BEFA5142C258}"/>
-              </a:ext>
-            </a:extLst>
-          </p:cNvPr>
-          <p:cNvSpPr txBox="1"/>
-          <p:nvPr/>
-        </p:nvSpPr>
-        <p:spPr>
-          <a:xfrm>
-            <a:off x="469556" y="626071"/>
-            <a:ext cx="6845644" cy="523220"/>
-          </a:xfrm>
-          <a:prstGeom prst="rect">
-            <a:avLst/>
-          </a:prstGeom>
-          <a:noFill/>
-        </p:spPr>
-        <p:txBody>
-          <a:bodyPr wrap="square" rtlCol="0">
-            <a:spAutoFit/>
-          </a:bodyPr>
-          <a:lstStyle/>
-          <a:p>
-            <a:r>
-              <a:rPr lang="pt-PT" sz="2800" noProof="1">
-                <a:solidFill>
-                  <a:srgbClr val="002060"/>
-                </a:solidFill>
-              </a:rPr>
-              <a:t>mult - OCaml  (2/2)</a:t>
-            </a:r>
-            <a:endParaRPr lang="en-US" sz="2800" noProof="1"/>
-          </a:p>
-        </p:txBody>
-      </p:sp>
-      <p:sp>
-        <p:nvSpPr>
-          <p:cNvPr id="4" name="Slide Number Placeholder 3">
-            <a:extLst>
-              <a:ext uri="{FF2B5EF4-FFF2-40B4-BE49-F238E27FC236}">
-                <a16:creationId xmlns:a16="http://schemas.microsoft.com/office/drawing/2014/main" id="{AA22059E-5343-3455-7802-BB23200843AE}"/>
-              </a:ext>
-            </a:extLst>
-          </p:cNvPr>
-          <p:cNvSpPr>
-            <a:spLocks noGrp="1"/>
-          </p:cNvSpPr>
-          <p:nvPr>
-            <p:ph type="sldNum" sz="quarter" idx="12"/>
-          </p:nvPr>
-        </p:nvSpPr>
-        <p:spPr/>
-        <p:txBody>
-          <a:bodyPr/>
-          <a:lstStyle/>
-          <a:p>
-            <a:fld id="{292A9FD8-515A-4698-9313-0AB17EE9632B}" type="slidenum">
-              <a:rPr lang="en-US" noProof="1" dirty="0" smtClean="0"/>
-              <a:t>19</a:t>
-            </a:fld>
-            <a:endParaRPr lang="en-US" noProof="1"/>
-          </a:p>
-        </p:txBody>
-      </p:sp>
-      <p:sp>
-        <p:nvSpPr>
-          <p:cNvPr id="3" name="TextBox 2">
-            <a:extLst>
-              <a:ext uri="{FF2B5EF4-FFF2-40B4-BE49-F238E27FC236}">
-                <a16:creationId xmlns:a16="http://schemas.microsoft.com/office/drawing/2014/main" id="{185495DE-E673-BFF5-0798-A90B073A9545}"/>
-              </a:ext>
-            </a:extLst>
-          </p:cNvPr>
-          <p:cNvSpPr txBox="1"/>
-          <p:nvPr/>
-        </p:nvSpPr>
-        <p:spPr>
-          <a:xfrm>
-            <a:off x="0" y="1246936"/>
-            <a:ext cx="7103868" cy="4278094"/>
-          </a:xfrm>
-          <a:prstGeom prst="rect">
-            <a:avLst/>
-          </a:prstGeom>
-          <a:noFill/>
-        </p:spPr>
-        <p:txBody>
-          <a:bodyPr wrap="none" rtlCol="0">
-            <a:spAutoFit/>
-          </a:bodyPr>
-          <a:lstStyle/>
-          <a:p>
-            <a:pPr lvl="1"/>
-            <a:r>
-              <a:rPr lang="pt-PT" sz="1600" dirty="0"/>
-              <a:t>		</a:t>
-            </a:r>
-            <a:r>
-              <a:rPr lang="pt-PT" sz="1600" dirty="0" err="1">
-                <a:solidFill>
-                  <a:schemeClr val="accent2"/>
-                </a:solidFill>
-              </a:rPr>
-              <a:t>while</a:t>
-            </a:r>
-            <a:r>
-              <a:rPr lang="pt-PT" sz="1600" dirty="0"/>
-              <a:t> (!</a:t>
-            </a:r>
-            <a:r>
-              <a:rPr lang="pt-PT" sz="1600" dirty="0" err="1"/>
-              <a:t>j_l</a:t>
-            </a:r>
-            <a:r>
-              <a:rPr lang="pt-PT" sz="1600" dirty="0"/>
-              <a:t> &lt; </a:t>
-            </a:r>
-            <a:r>
-              <a:rPr lang="pt-PT" sz="1600" dirty="0" err="1"/>
-              <a:t>m_l</a:t>
-            </a:r>
-            <a:r>
-              <a:rPr lang="pt-PT" sz="1600" dirty="0"/>
-              <a:t>) </a:t>
-            </a:r>
-            <a:r>
-              <a:rPr lang="pt-PT" sz="1600" dirty="0">
-                <a:solidFill>
-                  <a:schemeClr val="accent2"/>
-                </a:solidFill>
-              </a:rPr>
-              <a:t>do</a:t>
-            </a:r>
-            <a:r>
-              <a:rPr lang="pt-PT" sz="1600" dirty="0"/>
-              <a:t> </a:t>
-            </a:r>
-          </a:p>
-          <a:p>
-            <a:pPr lvl="1"/>
-            <a:r>
-              <a:rPr lang="pt-PT" sz="1600" dirty="0"/>
-              <a:t>			(*@ </a:t>
-            </a:r>
-            <a:r>
-              <a:rPr lang="pt-PT" sz="1600" dirty="0" err="1">
-                <a:solidFill>
-                  <a:schemeClr val="accent2"/>
-                </a:solidFill>
-              </a:rPr>
-              <a:t>variant</a:t>
-            </a:r>
-            <a:r>
-              <a:rPr lang="pt-PT" sz="1600" dirty="0"/>
-              <a:t>     </a:t>
-            </a:r>
-            <a:r>
-              <a:rPr lang="pt-PT" sz="1600" dirty="0" err="1"/>
-              <a:t>m_l</a:t>
-            </a:r>
-            <a:r>
-              <a:rPr lang="pt-PT" sz="1600" dirty="0"/>
-              <a:t> - !</a:t>
-            </a:r>
-            <a:r>
-              <a:rPr lang="pt-PT" sz="1600" dirty="0" err="1"/>
-              <a:t>j_l</a:t>
-            </a:r>
-            <a:r>
-              <a:rPr lang="pt-PT" sz="1600" dirty="0"/>
-              <a:t> </a:t>
-            </a:r>
-          </a:p>
-          <a:p>
-            <a:pPr lvl="1"/>
-            <a:r>
-              <a:rPr lang="pt-PT" sz="1600" dirty="0"/>
-              <a:t>			         </a:t>
-            </a:r>
-            <a:r>
-              <a:rPr lang="pt-PT" sz="1600" dirty="0" err="1">
-                <a:solidFill>
-                  <a:schemeClr val="accent2"/>
-                </a:solidFill>
-              </a:rPr>
-              <a:t>invariant</a:t>
-            </a:r>
-            <a:r>
-              <a:rPr lang="pt-PT" sz="1600" dirty="0"/>
-              <a:t>  0 ≤ !</a:t>
-            </a:r>
-            <a:r>
-              <a:rPr lang="pt-PT" sz="1600" dirty="0" err="1"/>
-              <a:t>j_l</a:t>
-            </a:r>
-            <a:r>
-              <a:rPr lang="pt-PT" sz="1600" dirty="0"/>
-              <a:t> &amp;&amp; !</a:t>
-            </a:r>
-            <a:r>
-              <a:rPr lang="pt-PT" sz="1600" dirty="0" err="1"/>
-              <a:t>j_l</a:t>
-            </a:r>
-            <a:r>
-              <a:rPr lang="pt-PT" sz="1600" dirty="0"/>
-              <a:t> ≤ </a:t>
-            </a:r>
-            <a:r>
-              <a:rPr lang="pt-PT" sz="1600" dirty="0" err="1"/>
-              <a:t>m_l</a:t>
-            </a:r>
-            <a:r>
-              <a:rPr lang="pt-PT" sz="1600" dirty="0"/>
-              <a:t> &amp;&amp; !</a:t>
-            </a:r>
-            <a:r>
-              <a:rPr lang="pt-PT" sz="1600" dirty="0" err="1"/>
-              <a:t>res_l</a:t>
-            </a:r>
-            <a:r>
-              <a:rPr lang="pt-PT" sz="1600" dirty="0"/>
-              <a:t> = !</a:t>
-            </a:r>
-            <a:r>
-              <a:rPr lang="pt-PT" sz="1600" dirty="0" err="1"/>
-              <a:t>res_r</a:t>
-            </a:r>
-            <a:r>
-              <a:rPr lang="pt-PT" sz="1600" dirty="0"/>
-              <a:t> + !</a:t>
-            </a:r>
-            <a:r>
-              <a:rPr lang="pt-PT" sz="1600" dirty="0" err="1"/>
-              <a:t>j_l</a:t>
-            </a:r>
-            <a:r>
-              <a:rPr lang="pt-PT" sz="1600" dirty="0"/>
-              <a:t> *)</a:t>
-            </a:r>
-          </a:p>
-          <a:p>
-            <a:pPr lvl="1"/>
-            <a:endParaRPr lang="pt-PT" sz="1600" dirty="0"/>
-          </a:p>
-          <a:p>
-            <a:pPr lvl="1"/>
-            <a:r>
-              <a:rPr lang="pt-PT" sz="1600" dirty="0"/>
-              <a:t>			</a:t>
-            </a:r>
-            <a:r>
-              <a:rPr lang="pt-PT" sz="1600" dirty="0" err="1"/>
-              <a:t>res_l</a:t>
-            </a:r>
-            <a:r>
-              <a:rPr lang="pt-PT" sz="1600" dirty="0"/>
-              <a:t> := (!</a:t>
-            </a:r>
-            <a:r>
-              <a:rPr lang="pt-PT" sz="1600" dirty="0" err="1"/>
-              <a:t>res_l</a:t>
-            </a:r>
-            <a:r>
-              <a:rPr lang="pt-PT" sz="1600" dirty="0"/>
-              <a:t> + 1); </a:t>
-            </a:r>
-          </a:p>
-          <a:p>
-            <a:pPr lvl="1"/>
-            <a:r>
-              <a:rPr lang="pt-PT" sz="1600" dirty="0"/>
-              <a:t>			</a:t>
-            </a:r>
-            <a:r>
-              <a:rPr lang="pt-PT" sz="1600" dirty="0" err="1"/>
-              <a:t>j_l</a:t>
-            </a:r>
-            <a:r>
-              <a:rPr lang="pt-PT" sz="1600" dirty="0"/>
-              <a:t> := (!</a:t>
-            </a:r>
-            <a:r>
-              <a:rPr lang="pt-PT" sz="1600" dirty="0" err="1"/>
-              <a:t>j_l</a:t>
-            </a:r>
-            <a:r>
-              <a:rPr lang="pt-PT" sz="1600" dirty="0"/>
-              <a:t> + 1) </a:t>
-            </a:r>
-          </a:p>
-          <a:p>
-            <a:pPr lvl="1"/>
-            <a:r>
-              <a:rPr lang="pt-PT" sz="1600" dirty="0"/>
-              <a:t>		</a:t>
-            </a:r>
-            <a:r>
-              <a:rPr lang="pt-PT" sz="1600" dirty="0" err="1">
-                <a:solidFill>
-                  <a:schemeClr val="accent2"/>
-                </a:solidFill>
-              </a:rPr>
-              <a:t>done</a:t>
-            </a:r>
-            <a:r>
-              <a:rPr lang="pt-PT" sz="1600" dirty="0"/>
-              <a:t>;</a:t>
-            </a:r>
-          </a:p>
-          <a:p>
-            <a:pPr lvl="1"/>
-            <a:endParaRPr lang="pt-PT" sz="1600" dirty="0"/>
-          </a:p>
-          <a:p>
-            <a:pPr lvl="1"/>
-            <a:r>
-              <a:rPr lang="pt-PT" sz="1600" dirty="0"/>
-              <a:t>		</a:t>
-            </a:r>
-            <a:r>
-              <a:rPr lang="pt-PT" sz="1600" dirty="0" err="1"/>
-              <a:t>res_r</a:t>
-            </a:r>
-            <a:r>
-              <a:rPr lang="pt-PT" sz="1600" dirty="0"/>
-              <a:t> := (!</a:t>
-            </a:r>
-            <a:r>
-              <a:rPr lang="pt-PT" sz="1600" dirty="0" err="1"/>
-              <a:t>res_r</a:t>
-            </a:r>
-            <a:r>
-              <a:rPr lang="pt-PT" sz="1600" dirty="0"/>
-              <a:t> + </a:t>
-            </a:r>
-            <a:r>
-              <a:rPr lang="pt-PT" sz="1600" dirty="0" err="1"/>
-              <a:t>m_r</a:t>
-            </a:r>
-            <a:r>
-              <a:rPr lang="pt-PT" sz="1600" dirty="0"/>
-              <a:t>); </a:t>
-            </a:r>
-          </a:p>
-          <a:p>
-            <a:pPr lvl="1"/>
-            <a:r>
-              <a:rPr lang="pt-PT" sz="1600" dirty="0"/>
-              <a:t>		</a:t>
-            </a:r>
-            <a:r>
-              <a:rPr lang="pt-PT" sz="1600" dirty="0" err="1">
-                <a:solidFill>
-                  <a:schemeClr val="accent2"/>
-                </a:solidFill>
-              </a:rPr>
-              <a:t>assert</a:t>
-            </a:r>
-            <a:r>
-              <a:rPr lang="pt-PT" sz="1600" dirty="0"/>
-              <a:t> ((!</a:t>
-            </a:r>
-            <a:r>
-              <a:rPr lang="pt-PT" sz="1600" dirty="0" err="1"/>
-              <a:t>res_l</a:t>
-            </a:r>
-            <a:r>
-              <a:rPr lang="pt-PT" sz="1600" dirty="0"/>
-              <a:t> = (</a:t>
-            </a:r>
-            <a:r>
-              <a:rPr lang="pt-PT" sz="1600" dirty="0" err="1"/>
-              <a:t>previous_res_l</a:t>
-            </a:r>
-            <a:r>
-              <a:rPr lang="pt-PT" sz="1600" dirty="0"/>
-              <a:t> + </a:t>
-            </a:r>
-            <a:r>
-              <a:rPr lang="pt-PT" sz="1600" dirty="0" err="1"/>
-              <a:t>m_l</a:t>
-            </a:r>
-            <a:r>
-              <a:rPr lang="pt-PT" sz="1600" dirty="0"/>
-              <a:t>))); </a:t>
-            </a:r>
-          </a:p>
-          <a:p>
-            <a:pPr lvl="1"/>
-            <a:r>
-              <a:rPr lang="pt-PT" sz="1600" dirty="0"/>
-              <a:t>		</a:t>
-            </a:r>
-            <a:r>
-              <a:rPr lang="pt-PT" sz="1600" dirty="0" err="1"/>
-              <a:t>i_l</a:t>
-            </a:r>
-            <a:r>
-              <a:rPr lang="pt-PT" sz="1600" dirty="0"/>
-              <a:t> := (!</a:t>
-            </a:r>
-            <a:r>
-              <a:rPr lang="pt-PT" sz="1600" dirty="0" err="1"/>
-              <a:t>i_l</a:t>
-            </a:r>
-            <a:r>
-              <a:rPr lang="pt-PT" sz="1600" dirty="0"/>
-              <a:t> + 1); </a:t>
-            </a:r>
-          </a:p>
-          <a:p>
-            <a:pPr lvl="1"/>
-            <a:r>
-              <a:rPr lang="pt-PT" sz="1600" dirty="0"/>
-              <a:t>		</a:t>
-            </a:r>
-            <a:r>
-              <a:rPr lang="pt-PT" sz="1600" dirty="0" err="1"/>
-              <a:t>i_r</a:t>
-            </a:r>
-            <a:r>
-              <a:rPr lang="pt-PT" sz="1600" dirty="0"/>
-              <a:t> := (!</a:t>
-            </a:r>
-            <a:r>
-              <a:rPr lang="pt-PT" sz="1600" dirty="0" err="1"/>
-              <a:t>i_r</a:t>
-            </a:r>
-            <a:r>
-              <a:rPr lang="pt-PT" sz="1600" dirty="0"/>
-              <a:t> + 1) </a:t>
-            </a:r>
-          </a:p>
-          <a:p>
-            <a:pPr lvl="1"/>
-            <a:r>
-              <a:rPr lang="pt-PT" sz="1600" dirty="0"/>
-              <a:t>	</a:t>
-            </a:r>
-            <a:r>
-              <a:rPr lang="pt-PT" sz="1600" dirty="0" err="1">
-                <a:solidFill>
-                  <a:schemeClr val="accent2"/>
-                </a:solidFill>
-              </a:rPr>
-              <a:t>done</a:t>
-            </a:r>
-            <a:r>
-              <a:rPr lang="pt-PT" sz="1600" dirty="0"/>
-              <a:t>; </a:t>
-            </a:r>
-          </a:p>
-          <a:p>
-            <a:pPr lvl="1"/>
-            <a:endParaRPr lang="pt-PT" sz="1600" dirty="0"/>
-          </a:p>
-          <a:p>
-            <a:pPr lvl="1"/>
-            <a:r>
-              <a:rPr lang="pt-PT" sz="1600" dirty="0"/>
-              <a:t>	(!</a:t>
-            </a:r>
-            <a:r>
-              <a:rPr lang="pt-PT" sz="1600" dirty="0" err="1"/>
-              <a:t>res_l</a:t>
-            </a:r>
-            <a:r>
-              <a:rPr lang="pt-PT" sz="1600" dirty="0"/>
-              <a:t>, !</a:t>
-            </a:r>
-            <a:r>
-              <a:rPr lang="pt-PT" sz="1600" dirty="0" err="1"/>
-              <a:t>res_r</a:t>
-            </a:r>
-            <a:r>
-              <a:rPr lang="pt-PT" sz="1600" dirty="0"/>
-              <a:t>) </a:t>
-            </a:r>
-          </a:p>
-          <a:p>
-            <a:pPr lvl="1"/>
-            <a:r>
-              <a:rPr lang="pt-PT" sz="1600" dirty="0"/>
-              <a:t>(*@ </a:t>
-            </a:r>
-            <a:r>
-              <a:rPr lang="pt-PT" sz="1600" dirty="0" err="1">
-                <a:solidFill>
-                  <a:schemeClr val="accent2"/>
-                </a:solidFill>
-              </a:rPr>
-              <a:t>requires</a:t>
-            </a:r>
-            <a:r>
-              <a:rPr lang="pt-PT" sz="1600" dirty="0"/>
-              <a:t>  </a:t>
-            </a:r>
-            <a:r>
-              <a:rPr lang="pt-PT" sz="1600" dirty="0" err="1"/>
-              <a:t>n_l</a:t>
-            </a:r>
-            <a:r>
-              <a:rPr lang="pt-PT" sz="1600" dirty="0"/>
-              <a:t> = </a:t>
-            </a:r>
-            <a:r>
-              <a:rPr lang="pt-PT" sz="1600" dirty="0" err="1"/>
-              <a:t>n_r</a:t>
-            </a:r>
-            <a:r>
-              <a:rPr lang="pt-PT" sz="1600" dirty="0"/>
-              <a:t> &amp;&amp; </a:t>
-            </a:r>
-            <a:r>
-              <a:rPr lang="pt-PT" sz="1600" dirty="0" err="1"/>
-              <a:t>m_l</a:t>
-            </a:r>
-            <a:r>
-              <a:rPr lang="pt-PT" sz="1600" dirty="0"/>
-              <a:t> = </a:t>
-            </a:r>
-            <a:r>
-              <a:rPr lang="pt-PT" sz="1600" dirty="0" err="1"/>
-              <a:t>m_r</a:t>
-            </a:r>
-            <a:r>
-              <a:rPr lang="pt-PT" sz="1600" dirty="0"/>
-              <a:t> &amp;&amp; </a:t>
-            </a:r>
-            <a:r>
-              <a:rPr lang="pt-PT" sz="1600" dirty="0" err="1"/>
-              <a:t>m_l</a:t>
-            </a:r>
-            <a:r>
-              <a:rPr lang="pt-PT" sz="1600" dirty="0"/>
-              <a:t> ≥ 0 </a:t>
-            </a:r>
-          </a:p>
-          <a:p>
-            <a:pPr lvl="1"/>
-            <a:r>
-              <a:rPr lang="pt-PT" sz="1600" dirty="0"/>
-              <a:t>         </a:t>
-            </a:r>
-            <a:r>
-              <a:rPr lang="pt-PT" sz="1600" dirty="0" err="1">
-                <a:solidFill>
-                  <a:schemeClr val="accent2"/>
-                </a:solidFill>
-              </a:rPr>
-              <a:t>ensures</a:t>
-            </a:r>
-            <a:r>
-              <a:rPr lang="pt-PT" sz="1600" dirty="0"/>
-              <a:t>  match </a:t>
-            </a:r>
-            <a:r>
-              <a:rPr lang="pt-PT" sz="1600" dirty="0" err="1"/>
-              <a:t>result</a:t>
-            </a:r>
-            <a:r>
-              <a:rPr lang="pt-PT" sz="1600" dirty="0"/>
-              <a:t> </a:t>
-            </a:r>
-            <a:r>
-              <a:rPr lang="pt-PT" sz="1600" dirty="0" err="1"/>
-              <a:t>with</a:t>
-            </a:r>
-            <a:r>
-              <a:rPr lang="pt-PT" sz="1600" dirty="0"/>
-              <a:t> (</a:t>
-            </a:r>
-            <a:r>
-              <a:rPr lang="pt-PT" sz="1600" dirty="0" err="1"/>
-              <a:t>l_res</a:t>
-            </a:r>
-            <a:r>
-              <a:rPr lang="pt-PT" sz="1600" dirty="0"/>
-              <a:t>, </a:t>
-            </a:r>
-            <a:r>
-              <a:rPr lang="pt-PT" sz="1600" dirty="0" err="1"/>
-              <a:t>r_res</a:t>
-            </a:r>
-            <a:r>
-              <a:rPr lang="pt-PT" sz="1600" dirty="0"/>
-              <a:t>) → </a:t>
-            </a:r>
-            <a:r>
-              <a:rPr lang="pt-PT" sz="1600" dirty="0" err="1"/>
-              <a:t>l_res</a:t>
-            </a:r>
-            <a:r>
-              <a:rPr lang="pt-PT" sz="1600" dirty="0"/>
-              <a:t> = </a:t>
-            </a:r>
-            <a:r>
-              <a:rPr lang="pt-PT" sz="1600" dirty="0" err="1"/>
-              <a:t>r_res</a:t>
-            </a:r>
-            <a:r>
-              <a:rPr lang="pt-PT" sz="1600" dirty="0"/>
-              <a:t> *)</a:t>
-            </a:r>
-            <a:endParaRPr lang="en-US" sz="1600" dirty="0"/>
-          </a:p>
-        </p:txBody>
-      </p:sp>
-    </p:spTree>
-    <p:extLst>
-      <p:ext uri="{BB962C8B-B14F-4D97-AF65-F5344CB8AC3E}">
-        <p14:creationId xmlns:p14="http://schemas.microsoft.com/office/powerpoint/2010/main" val="1001263086"/>
       </p:ext>
     </p:extLst>
   </p:cSld>
@@ -7370,6 +6913,655 @@
         <p:cNvPr id="1" name="">
           <a:extLst>
             <a:ext uri="{FF2B5EF4-FFF2-40B4-BE49-F238E27FC236}">
+              <a16:creationId xmlns:a16="http://schemas.microsoft.com/office/drawing/2014/main" id="{A5320333-94D6-A776-B862-B795AF7C6BE0}"/>
+            </a:ext>
+          </a:extLst>
+        </p:cNvPr>
+        <p:cNvGrpSpPr/>
+        <p:nvPr/>
+      </p:nvGrpSpPr>
+      <p:grpSpPr>
+        <a:xfrm>
+          <a:off x="0" y="0"/>
+          <a:ext cx="0" cy="0"/>
+          <a:chOff x="0" y="0"/>
+          <a:chExt cx="0" cy="0"/>
+        </a:xfrm>
+      </p:grpSpPr>
+      <p:sp>
+        <p:nvSpPr>
+          <p:cNvPr id="2" name="TextBox 1">
+            <a:extLst>
+              <a:ext uri="{FF2B5EF4-FFF2-40B4-BE49-F238E27FC236}">
+                <a16:creationId xmlns:a16="http://schemas.microsoft.com/office/drawing/2014/main" id="{33E7386D-40D1-775D-9328-BEFA5142C258}"/>
+              </a:ext>
+            </a:extLst>
+          </p:cNvPr>
+          <p:cNvSpPr txBox="1"/>
+          <p:nvPr/>
+        </p:nvSpPr>
+        <p:spPr>
+          <a:xfrm>
+            <a:off x="469556" y="626071"/>
+            <a:ext cx="6845644" cy="523220"/>
+          </a:xfrm>
+          <a:prstGeom prst="rect">
+            <a:avLst/>
+          </a:prstGeom>
+          <a:noFill/>
+        </p:spPr>
+        <p:txBody>
+          <a:bodyPr wrap="square" rtlCol="0">
+            <a:spAutoFit/>
+          </a:bodyPr>
+          <a:lstStyle/>
+          <a:p>
+            <a:r>
+              <a:rPr lang="pt-PT" sz="2800" noProof="1">
+                <a:solidFill>
+                  <a:srgbClr val="002060"/>
+                </a:solidFill>
+              </a:rPr>
+              <a:t>mult - OCaml  (2/2)</a:t>
+            </a:r>
+            <a:endParaRPr lang="en-US" sz="2800" noProof="1"/>
+          </a:p>
+        </p:txBody>
+      </p:sp>
+      <p:sp>
+        <p:nvSpPr>
+          <p:cNvPr id="4" name="Slide Number Placeholder 3">
+            <a:extLst>
+              <a:ext uri="{FF2B5EF4-FFF2-40B4-BE49-F238E27FC236}">
+                <a16:creationId xmlns:a16="http://schemas.microsoft.com/office/drawing/2014/main" id="{AA22059E-5343-3455-7802-BB23200843AE}"/>
+              </a:ext>
+            </a:extLst>
+          </p:cNvPr>
+          <p:cNvSpPr>
+            <a:spLocks noGrp="1"/>
+          </p:cNvSpPr>
+          <p:nvPr>
+            <p:ph type="sldNum" sz="quarter" idx="12"/>
+          </p:nvPr>
+        </p:nvSpPr>
+        <p:spPr/>
+        <p:txBody>
+          <a:bodyPr/>
+          <a:lstStyle/>
+          <a:p>
+            <a:fld id="{292A9FD8-515A-4698-9313-0AB17EE9632B}" type="slidenum">
+              <a:rPr lang="en-US" noProof="1" dirty="0" smtClean="0"/>
+              <a:t>20</a:t>
+            </a:fld>
+            <a:endParaRPr lang="en-US" noProof="1"/>
+          </a:p>
+        </p:txBody>
+      </p:sp>
+      <p:sp>
+        <p:nvSpPr>
+          <p:cNvPr id="3" name="TextBox 2">
+            <a:extLst>
+              <a:ext uri="{FF2B5EF4-FFF2-40B4-BE49-F238E27FC236}">
+                <a16:creationId xmlns:a16="http://schemas.microsoft.com/office/drawing/2014/main" id="{185495DE-E673-BFF5-0798-A90B073A9545}"/>
+              </a:ext>
+            </a:extLst>
+          </p:cNvPr>
+          <p:cNvSpPr txBox="1"/>
+          <p:nvPr/>
+        </p:nvSpPr>
+        <p:spPr>
+          <a:xfrm>
+            <a:off x="0" y="1238698"/>
+            <a:ext cx="7103868" cy="4278094"/>
+          </a:xfrm>
+          <a:prstGeom prst="rect">
+            <a:avLst/>
+          </a:prstGeom>
+          <a:noFill/>
+        </p:spPr>
+        <p:txBody>
+          <a:bodyPr wrap="none" rtlCol="0">
+            <a:spAutoFit/>
+          </a:bodyPr>
+          <a:lstStyle/>
+          <a:p>
+            <a:pPr lvl="1"/>
+            <a:r>
+              <a:rPr lang="pt-PT" sz="1600" dirty="0"/>
+              <a:t>		</a:t>
+            </a:r>
+            <a:r>
+              <a:rPr lang="pt-PT" sz="1600" dirty="0" err="1">
+                <a:solidFill>
+                  <a:srgbClr val="F3530B"/>
+                </a:solidFill>
+              </a:rPr>
+              <a:t>while</a:t>
+            </a:r>
+            <a:r>
+              <a:rPr lang="pt-PT" sz="1600" dirty="0"/>
+              <a:t> (!</a:t>
+            </a:r>
+            <a:r>
+              <a:rPr lang="pt-PT" sz="1600" dirty="0" err="1"/>
+              <a:t>j_l</a:t>
+            </a:r>
+            <a:r>
+              <a:rPr lang="pt-PT" sz="1600" dirty="0"/>
+              <a:t> &lt; </a:t>
+            </a:r>
+            <a:r>
+              <a:rPr lang="pt-PT" sz="1600" dirty="0" err="1"/>
+              <a:t>m_l</a:t>
+            </a:r>
+            <a:r>
+              <a:rPr lang="pt-PT" sz="1600" dirty="0"/>
+              <a:t>) </a:t>
+            </a:r>
+            <a:r>
+              <a:rPr lang="pt-PT" sz="1600" dirty="0">
+                <a:solidFill>
+                  <a:srgbClr val="F3530B"/>
+                </a:solidFill>
+              </a:rPr>
+              <a:t>do</a:t>
+            </a:r>
+            <a:r>
+              <a:rPr lang="pt-PT" sz="1600" dirty="0"/>
+              <a:t> </a:t>
+            </a:r>
+          </a:p>
+          <a:p>
+            <a:pPr lvl="1"/>
+            <a:r>
+              <a:rPr lang="pt-PT" sz="1600" dirty="0"/>
+              <a:t>			(*@ </a:t>
+            </a:r>
+            <a:r>
+              <a:rPr lang="pt-PT" sz="1600" dirty="0" err="1">
+                <a:solidFill>
+                  <a:srgbClr val="F3530B"/>
+                </a:solidFill>
+              </a:rPr>
+              <a:t>variant</a:t>
+            </a:r>
+            <a:r>
+              <a:rPr lang="pt-PT" sz="1600" dirty="0"/>
+              <a:t>     </a:t>
+            </a:r>
+            <a:r>
+              <a:rPr lang="pt-PT" sz="1600" dirty="0" err="1"/>
+              <a:t>m_l</a:t>
+            </a:r>
+            <a:r>
+              <a:rPr lang="pt-PT" sz="1600" dirty="0"/>
+              <a:t> - !</a:t>
+            </a:r>
+            <a:r>
+              <a:rPr lang="pt-PT" sz="1600" dirty="0" err="1"/>
+              <a:t>j_l</a:t>
+            </a:r>
+            <a:r>
+              <a:rPr lang="pt-PT" sz="1600" dirty="0"/>
+              <a:t> </a:t>
+            </a:r>
+          </a:p>
+          <a:p>
+            <a:pPr lvl="1"/>
+            <a:r>
+              <a:rPr lang="pt-PT" sz="1600" dirty="0"/>
+              <a:t>			         </a:t>
+            </a:r>
+            <a:r>
+              <a:rPr lang="pt-PT" sz="1600" dirty="0" err="1">
+                <a:solidFill>
+                  <a:srgbClr val="F3530B"/>
+                </a:solidFill>
+              </a:rPr>
+              <a:t>invariant</a:t>
+            </a:r>
+            <a:r>
+              <a:rPr lang="pt-PT" sz="1600" dirty="0"/>
+              <a:t>  0 ≤ !</a:t>
+            </a:r>
+            <a:r>
+              <a:rPr lang="pt-PT" sz="1600" dirty="0" err="1"/>
+              <a:t>j_l</a:t>
+            </a:r>
+            <a:r>
+              <a:rPr lang="pt-PT" sz="1600" dirty="0"/>
+              <a:t> &amp;&amp; !</a:t>
+            </a:r>
+            <a:r>
+              <a:rPr lang="pt-PT" sz="1600" dirty="0" err="1"/>
+              <a:t>j_l</a:t>
+            </a:r>
+            <a:r>
+              <a:rPr lang="pt-PT" sz="1600" dirty="0"/>
+              <a:t> ≤ </a:t>
+            </a:r>
+            <a:r>
+              <a:rPr lang="pt-PT" sz="1600" dirty="0" err="1"/>
+              <a:t>m_l</a:t>
+            </a:r>
+            <a:r>
+              <a:rPr lang="pt-PT" sz="1600" dirty="0"/>
+              <a:t> &amp;&amp; !</a:t>
+            </a:r>
+            <a:r>
+              <a:rPr lang="pt-PT" sz="1600" dirty="0" err="1"/>
+              <a:t>res_l</a:t>
+            </a:r>
+            <a:r>
+              <a:rPr lang="pt-PT" sz="1600" dirty="0"/>
+              <a:t> = !</a:t>
+            </a:r>
+            <a:r>
+              <a:rPr lang="pt-PT" sz="1600" dirty="0" err="1"/>
+              <a:t>res_r</a:t>
+            </a:r>
+            <a:r>
+              <a:rPr lang="pt-PT" sz="1600" dirty="0"/>
+              <a:t> + !</a:t>
+            </a:r>
+            <a:r>
+              <a:rPr lang="pt-PT" sz="1600" dirty="0" err="1"/>
+              <a:t>j_l</a:t>
+            </a:r>
+            <a:r>
+              <a:rPr lang="pt-PT" sz="1600" dirty="0"/>
+              <a:t> *)</a:t>
+            </a:r>
+          </a:p>
+          <a:p>
+            <a:pPr lvl="1"/>
+            <a:endParaRPr lang="pt-PT" sz="1600" dirty="0"/>
+          </a:p>
+          <a:p>
+            <a:pPr lvl="1"/>
+            <a:r>
+              <a:rPr lang="pt-PT" sz="1600" dirty="0"/>
+              <a:t>			</a:t>
+            </a:r>
+            <a:r>
+              <a:rPr lang="pt-PT" sz="1600" dirty="0" err="1"/>
+              <a:t>res_l</a:t>
+            </a:r>
+            <a:r>
+              <a:rPr lang="pt-PT" sz="1600" dirty="0"/>
+              <a:t> := (!</a:t>
+            </a:r>
+            <a:r>
+              <a:rPr lang="pt-PT" sz="1600" dirty="0" err="1"/>
+              <a:t>res_l</a:t>
+            </a:r>
+            <a:r>
+              <a:rPr lang="pt-PT" sz="1600" dirty="0"/>
+              <a:t> + 1); </a:t>
+            </a:r>
+          </a:p>
+          <a:p>
+            <a:pPr lvl="1"/>
+            <a:r>
+              <a:rPr lang="pt-PT" sz="1600" dirty="0"/>
+              <a:t>			</a:t>
+            </a:r>
+            <a:r>
+              <a:rPr lang="pt-PT" sz="1600" dirty="0" err="1"/>
+              <a:t>j_l</a:t>
+            </a:r>
+            <a:r>
+              <a:rPr lang="pt-PT" sz="1600" dirty="0"/>
+              <a:t> := (!</a:t>
+            </a:r>
+            <a:r>
+              <a:rPr lang="pt-PT" sz="1600" dirty="0" err="1"/>
+              <a:t>j_l</a:t>
+            </a:r>
+            <a:r>
+              <a:rPr lang="pt-PT" sz="1600" dirty="0"/>
+              <a:t> + 1) </a:t>
+            </a:r>
+          </a:p>
+          <a:p>
+            <a:pPr lvl="1"/>
+            <a:r>
+              <a:rPr lang="pt-PT" sz="1600" dirty="0"/>
+              <a:t>		</a:t>
+            </a:r>
+            <a:r>
+              <a:rPr lang="pt-PT" sz="1600" dirty="0" err="1">
+                <a:solidFill>
+                  <a:srgbClr val="F3530B"/>
+                </a:solidFill>
+              </a:rPr>
+              <a:t>done</a:t>
+            </a:r>
+            <a:r>
+              <a:rPr lang="pt-PT" sz="1600" dirty="0"/>
+              <a:t>;</a:t>
+            </a:r>
+          </a:p>
+          <a:p>
+            <a:pPr lvl="1"/>
+            <a:endParaRPr lang="pt-PT" sz="1600" dirty="0"/>
+          </a:p>
+          <a:p>
+            <a:pPr lvl="1"/>
+            <a:r>
+              <a:rPr lang="pt-PT" sz="1600" dirty="0"/>
+              <a:t>		</a:t>
+            </a:r>
+            <a:r>
+              <a:rPr lang="pt-PT" sz="1600" dirty="0" err="1"/>
+              <a:t>res_r</a:t>
+            </a:r>
+            <a:r>
+              <a:rPr lang="pt-PT" sz="1600" dirty="0"/>
+              <a:t> := (!</a:t>
+            </a:r>
+            <a:r>
+              <a:rPr lang="pt-PT" sz="1600" dirty="0" err="1"/>
+              <a:t>res_r</a:t>
+            </a:r>
+            <a:r>
+              <a:rPr lang="pt-PT" sz="1600" dirty="0"/>
+              <a:t> + </a:t>
+            </a:r>
+            <a:r>
+              <a:rPr lang="pt-PT" sz="1600" dirty="0" err="1"/>
+              <a:t>m_r</a:t>
+            </a:r>
+            <a:r>
+              <a:rPr lang="pt-PT" sz="1600" dirty="0"/>
+              <a:t>); </a:t>
+            </a:r>
+          </a:p>
+          <a:p>
+            <a:pPr lvl="1"/>
+            <a:r>
+              <a:rPr lang="pt-PT" sz="1600" dirty="0"/>
+              <a:t>		</a:t>
+            </a:r>
+            <a:r>
+              <a:rPr lang="pt-PT" sz="1600" dirty="0" err="1">
+                <a:solidFill>
+                  <a:srgbClr val="F3530B"/>
+                </a:solidFill>
+              </a:rPr>
+              <a:t>assert</a:t>
+            </a:r>
+            <a:r>
+              <a:rPr lang="pt-PT" sz="1600" dirty="0"/>
+              <a:t> ((!</a:t>
+            </a:r>
+            <a:r>
+              <a:rPr lang="pt-PT" sz="1600" dirty="0" err="1"/>
+              <a:t>res_l</a:t>
+            </a:r>
+            <a:r>
+              <a:rPr lang="pt-PT" sz="1600" dirty="0"/>
+              <a:t> = (</a:t>
+            </a:r>
+            <a:r>
+              <a:rPr lang="pt-PT" sz="1600" dirty="0" err="1"/>
+              <a:t>previous_res_l</a:t>
+            </a:r>
+            <a:r>
+              <a:rPr lang="pt-PT" sz="1600" dirty="0"/>
+              <a:t> + </a:t>
+            </a:r>
+            <a:r>
+              <a:rPr lang="pt-PT" sz="1600" dirty="0" err="1"/>
+              <a:t>m_l</a:t>
+            </a:r>
+            <a:r>
+              <a:rPr lang="pt-PT" sz="1600" dirty="0"/>
+              <a:t>))); </a:t>
+            </a:r>
+          </a:p>
+          <a:p>
+            <a:pPr lvl="1"/>
+            <a:r>
+              <a:rPr lang="pt-PT" sz="1600" dirty="0"/>
+              <a:t>		</a:t>
+            </a:r>
+            <a:r>
+              <a:rPr lang="pt-PT" sz="1600" dirty="0" err="1"/>
+              <a:t>i_l</a:t>
+            </a:r>
+            <a:r>
+              <a:rPr lang="pt-PT" sz="1600" dirty="0"/>
+              <a:t> := (!</a:t>
+            </a:r>
+            <a:r>
+              <a:rPr lang="pt-PT" sz="1600" dirty="0" err="1"/>
+              <a:t>i_l</a:t>
+            </a:r>
+            <a:r>
+              <a:rPr lang="pt-PT" sz="1600" dirty="0"/>
+              <a:t> + 1); </a:t>
+            </a:r>
+          </a:p>
+          <a:p>
+            <a:pPr lvl="1"/>
+            <a:r>
+              <a:rPr lang="pt-PT" sz="1600" dirty="0"/>
+              <a:t>		</a:t>
+            </a:r>
+            <a:r>
+              <a:rPr lang="pt-PT" sz="1600" dirty="0" err="1"/>
+              <a:t>i_r</a:t>
+            </a:r>
+            <a:r>
+              <a:rPr lang="pt-PT" sz="1600" dirty="0"/>
+              <a:t> := (!</a:t>
+            </a:r>
+            <a:r>
+              <a:rPr lang="pt-PT" sz="1600" dirty="0" err="1"/>
+              <a:t>i_r</a:t>
+            </a:r>
+            <a:r>
+              <a:rPr lang="pt-PT" sz="1600" dirty="0"/>
+              <a:t> + 1) </a:t>
+            </a:r>
+          </a:p>
+          <a:p>
+            <a:pPr lvl="1"/>
+            <a:r>
+              <a:rPr lang="pt-PT" sz="1600" dirty="0"/>
+              <a:t>	</a:t>
+            </a:r>
+            <a:r>
+              <a:rPr lang="pt-PT" sz="1600" dirty="0" err="1">
+                <a:solidFill>
+                  <a:srgbClr val="F3530B"/>
+                </a:solidFill>
+              </a:rPr>
+              <a:t>done</a:t>
+            </a:r>
+            <a:r>
+              <a:rPr lang="pt-PT" sz="1600" dirty="0"/>
+              <a:t>; </a:t>
+            </a:r>
+          </a:p>
+          <a:p>
+            <a:pPr lvl="1"/>
+            <a:endParaRPr lang="pt-PT" sz="1600" dirty="0"/>
+          </a:p>
+          <a:p>
+            <a:pPr lvl="1"/>
+            <a:r>
+              <a:rPr lang="pt-PT" sz="1600" dirty="0"/>
+              <a:t>	(!</a:t>
+            </a:r>
+            <a:r>
+              <a:rPr lang="pt-PT" sz="1600" dirty="0" err="1"/>
+              <a:t>res_l</a:t>
+            </a:r>
+            <a:r>
+              <a:rPr lang="pt-PT" sz="1600" dirty="0"/>
+              <a:t>, !</a:t>
+            </a:r>
+            <a:r>
+              <a:rPr lang="pt-PT" sz="1600" dirty="0" err="1"/>
+              <a:t>res_r</a:t>
+            </a:r>
+            <a:r>
+              <a:rPr lang="pt-PT" sz="1600" dirty="0"/>
+              <a:t>) </a:t>
+            </a:r>
+          </a:p>
+          <a:p>
+            <a:pPr lvl="1"/>
+            <a:r>
+              <a:rPr lang="pt-PT" sz="1600" dirty="0"/>
+              <a:t>(*@ </a:t>
+            </a:r>
+            <a:r>
+              <a:rPr lang="pt-PT" sz="1600" dirty="0" err="1">
+                <a:solidFill>
+                  <a:srgbClr val="F3530B"/>
+                </a:solidFill>
+              </a:rPr>
+              <a:t>requires</a:t>
+            </a:r>
+            <a:r>
+              <a:rPr lang="pt-PT" sz="1600" dirty="0"/>
+              <a:t>  </a:t>
+            </a:r>
+            <a:r>
+              <a:rPr lang="pt-PT" sz="1600" dirty="0" err="1"/>
+              <a:t>n_l</a:t>
+            </a:r>
+            <a:r>
+              <a:rPr lang="pt-PT" sz="1600" dirty="0"/>
+              <a:t> = </a:t>
+            </a:r>
+            <a:r>
+              <a:rPr lang="pt-PT" sz="1600" dirty="0" err="1"/>
+              <a:t>n_r</a:t>
+            </a:r>
+            <a:r>
+              <a:rPr lang="pt-PT" sz="1600" dirty="0"/>
+              <a:t> &amp;&amp; </a:t>
+            </a:r>
+            <a:r>
+              <a:rPr lang="pt-PT" sz="1600" dirty="0" err="1"/>
+              <a:t>m_l</a:t>
+            </a:r>
+            <a:r>
+              <a:rPr lang="pt-PT" sz="1600" dirty="0"/>
+              <a:t> = </a:t>
+            </a:r>
+            <a:r>
+              <a:rPr lang="pt-PT" sz="1600" dirty="0" err="1"/>
+              <a:t>m_r</a:t>
+            </a:r>
+            <a:r>
+              <a:rPr lang="pt-PT" sz="1600" dirty="0"/>
+              <a:t> &amp;&amp; </a:t>
+            </a:r>
+            <a:r>
+              <a:rPr lang="pt-PT" sz="1600" dirty="0" err="1"/>
+              <a:t>m_l</a:t>
+            </a:r>
+            <a:r>
+              <a:rPr lang="pt-PT" sz="1600" dirty="0"/>
+              <a:t> ≥ 0 </a:t>
+            </a:r>
+          </a:p>
+          <a:p>
+            <a:pPr lvl="1"/>
+            <a:r>
+              <a:rPr lang="pt-PT" sz="1600" dirty="0"/>
+              <a:t>         </a:t>
+            </a:r>
+            <a:r>
+              <a:rPr lang="pt-PT" sz="1600" dirty="0" err="1">
+                <a:solidFill>
+                  <a:srgbClr val="F3530B"/>
+                </a:solidFill>
+              </a:rPr>
+              <a:t>ensures</a:t>
+            </a:r>
+            <a:r>
+              <a:rPr lang="pt-PT" sz="1600" dirty="0"/>
+              <a:t>  match </a:t>
+            </a:r>
+            <a:r>
+              <a:rPr lang="pt-PT" sz="1600" dirty="0" err="1"/>
+              <a:t>result</a:t>
+            </a:r>
+            <a:r>
+              <a:rPr lang="pt-PT" sz="1600" dirty="0"/>
+              <a:t> </a:t>
+            </a:r>
+            <a:r>
+              <a:rPr lang="pt-PT" sz="1600" dirty="0" err="1"/>
+              <a:t>with</a:t>
+            </a:r>
+            <a:r>
+              <a:rPr lang="pt-PT" sz="1600" dirty="0"/>
+              <a:t> (</a:t>
+            </a:r>
+            <a:r>
+              <a:rPr lang="pt-PT" sz="1600" dirty="0" err="1"/>
+              <a:t>l_res</a:t>
+            </a:r>
+            <a:r>
+              <a:rPr lang="pt-PT" sz="1600" dirty="0"/>
+              <a:t>, </a:t>
+            </a:r>
+            <a:r>
+              <a:rPr lang="pt-PT" sz="1600" dirty="0" err="1"/>
+              <a:t>r_res</a:t>
+            </a:r>
+            <a:r>
+              <a:rPr lang="pt-PT" sz="1600" dirty="0"/>
+              <a:t>) → </a:t>
+            </a:r>
+            <a:r>
+              <a:rPr lang="pt-PT" sz="1600" dirty="0" err="1"/>
+              <a:t>l_res</a:t>
+            </a:r>
+            <a:r>
+              <a:rPr lang="pt-PT" sz="1600" dirty="0"/>
+              <a:t> = </a:t>
+            </a:r>
+            <a:r>
+              <a:rPr lang="pt-PT" sz="1600" dirty="0" err="1"/>
+              <a:t>r_res</a:t>
+            </a:r>
+            <a:r>
+              <a:rPr lang="pt-PT" sz="1600" dirty="0"/>
+              <a:t> *)</a:t>
+            </a:r>
+            <a:endParaRPr lang="en-US" sz="1600" dirty="0"/>
+          </a:p>
+        </p:txBody>
+      </p:sp>
+    </p:spTree>
+    <p:extLst>
+      <p:ext uri="{BB962C8B-B14F-4D97-AF65-F5344CB8AC3E}">
+        <p14:creationId xmlns:p14="http://schemas.microsoft.com/office/powerpoint/2010/main" val="1001263086"/>
+      </p:ext>
+    </p:extLst>
+  </p:cSld>
+  <p:clrMapOvr>
+    <a:masterClrMapping/>
+  </p:clrMapOvr>
+</p:sld>
+</file>
+
+<file path=ppt/slides/slide21.xml><?xml version="1.0" encoding="utf-8"?>
+<p:sld xmlns:a="http://schemas.openxmlformats.org/drawingml/2006/main" xmlns:r="http://schemas.openxmlformats.org/officeDocument/2006/relationships" xmlns:p="http://schemas.openxmlformats.org/presentationml/2006/main">
+  <p:cSld>
+    <p:spTree>
+      <p:nvGrpSpPr>
+        <p:cNvPr id="1" name="">
+          <a:extLst>
+            <a:ext uri="{FF2B5EF4-FFF2-40B4-BE49-F238E27FC236}">
               <a16:creationId xmlns:a16="http://schemas.microsoft.com/office/drawing/2014/main" id="{DCEDB641-193F-38C8-53D8-87AE74B902E1}"/>
             </a:ext>
           </a:extLst>
@@ -7448,7 +7640,7 @@
           <a:p>
             <a:fld id="{292A9FD8-515A-4698-9313-0AB17EE9632B}" type="slidenum">
               <a:rPr lang="en-US" noProof="1" dirty="0" smtClean="0"/>
-              <a:t>20</a:t>
+              <a:t>21</a:t>
             </a:fld>
             <a:endParaRPr lang="en-US" noProof="1"/>
           </a:p>
@@ -7485,7 +7677,7 @@
             <a:r>
               <a:rPr lang="en-US" sz="1600" dirty="0">
                 <a:solidFill>
-                  <a:schemeClr val="accent2"/>
+                  <a:srgbClr val="F3530B"/>
                 </a:solidFill>
               </a:rPr>
               <a:t>let</a:t>
@@ -7505,7 +7697,7 @@
             <a:r>
               <a:rPr lang="en-US" sz="1600" dirty="0">
                 <a:solidFill>
-                  <a:schemeClr val="accent2"/>
+                  <a:srgbClr val="F3530B"/>
                 </a:solidFill>
               </a:rPr>
               <a:t>int</a:t>
@@ -7517,7 +7709,7 @@
             <a:r>
               <a:rPr lang="en-US" sz="1600" dirty="0">
                 <a:solidFill>
-                  <a:schemeClr val="accent2"/>
+                  <a:srgbClr val="F3530B"/>
                 </a:solidFill>
               </a:rPr>
               <a:t>int</a:t>
@@ -7529,7 +7721,7 @@
             <a:r>
               <a:rPr lang="en-US" sz="1600" dirty="0">
                 <a:solidFill>
-                  <a:schemeClr val="accent2"/>
+                  <a:srgbClr val="F3530B"/>
                 </a:solidFill>
               </a:rPr>
               <a:t>int</a:t>
@@ -7541,7 +7733,7 @@
             <a:r>
               <a:rPr lang="en-US" sz="1600" dirty="0">
                 <a:solidFill>
-                  <a:schemeClr val="accent2"/>
+                  <a:srgbClr val="F3530B"/>
                 </a:solidFill>
               </a:rPr>
               <a:t>int</a:t>
@@ -7553,7 +7745,7 @@
             <a:r>
               <a:rPr lang="en-US" sz="1600" dirty="0">
                 <a:solidFill>
-                  <a:schemeClr val="accent2"/>
+                  <a:srgbClr val="F3530B"/>
                 </a:solidFill>
               </a:rPr>
               <a:t>begin</a:t>
@@ -7567,7 +7759,7 @@
             <a:r>
               <a:rPr lang="en-US" sz="1600" dirty="0">
                 <a:solidFill>
-                  <a:schemeClr val="accent2"/>
+                  <a:srgbClr val="F3530B"/>
                 </a:solidFill>
               </a:rPr>
               <a:t>let</a:t>
@@ -7587,7 +7779,7 @@
             <a:r>
               <a:rPr lang="en-US" sz="1600" dirty="0">
                 <a:solidFill>
-                  <a:schemeClr val="accent2"/>
+                  <a:srgbClr val="F3530B"/>
                 </a:solidFill>
               </a:rPr>
               <a:t>in</a:t>
@@ -7601,7 +7793,7 @@
             <a:r>
               <a:rPr lang="en-US" sz="1600" dirty="0">
                 <a:solidFill>
-                  <a:schemeClr val="accent2"/>
+                  <a:srgbClr val="F3530B"/>
                 </a:solidFill>
               </a:rPr>
               <a:t>let</a:t>
@@ -7613,7 +7805,7 @@
             <a:r>
               <a:rPr lang="en-US" sz="1600" dirty="0">
                 <a:solidFill>
-                  <a:schemeClr val="accent2"/>
+                  <a:srgbClr val="F3530B"/>
                 </a:solidFill>
               </a:rPr>
               <a:t>in</a:t>
@@ -7627,7 +7819,7 @@
             <a:r>
               <a:rPr lang="en-US" sz="1600" dirty="0">
                 <a:solidFill>
-                  <a:schemeClr val="accent2"/>
+                  <a:srgbClr val="F3530B"/>
                 </a:solidFill>
               </a:rPr>
               <a:t>let</a:t>
@@ -7639,7 +7831,7 @@
             <a:r>
               <a:rPr lang="en-US" sz="1600" dirty="0">
                 <a:solidFill>
-                  <a:schemeClr val="accent2"/>
+                  <a:srgbClr val="F3530B"/>
                 </a:solidFill>
               </a:rPr>
               <a:t>in</a:t>
@@ -7656,7 +7848,7 @@
             <a:r>
               <a:rPr lang="pt-PT" sz="1600" dirty="0" err="1">
                 <a:solidFill>
-                  <a:schemeClr val="accent2"/>
+                  <a:srgbClr val="F3530B"/>
                 </a:solidFill>
               </a:rPr>
               <a:t>while</a:t>
@@ -7668,7 +7860,7 @@
             <a:r>
               <a:rPr lang="pt-PT" sz="1600" dirty="0">
                 <a:solidFill>
-                  <a:schemeClr val="accent2"/>
+                  <a:srgbClr val="F3530B"/>
                 </a:solidFill>
               </a:rPr>
               <a:t>do</a:t>
@@ -7686,7 +7878,7 @@
             <a:r>
               <a:rPr lang="pt-PT" sz="1600" dirty="0" err="1">
                 <a:solidFill>
-                  <a:schemeClr val="accent2"/>
+                  <a:srgbClr val="F3530B"/>
                 </a:solidFill>
               </a:rPr>
               <a:t>variant</a:t>
@@ -7720,7 +7912,7 @@
             <a:r>
               <a:rPr lang="pt-PT" sz="1600" dirty="0" err="1">
                 <a:solidFill>
-                  <a:schemeClr val="accent2"/>
+                  <a:srgbClr val="F3530B"/>
                 </a:solidFill>
               </a:rPr>
               <a:t>invariant</a:t>
@@ -7754,7 +7946,7 @@
             <a:r>
               <a:rPr lang="pt-PT" sz="1600" dirty="0" err="1">
                 <a:solidFill>
-                  <a:schemeClr val="accent2"/>
+                  <a:srgbClr val="F3530B"/>
                 </a:solidFill>
               </a:rPr>
               <a:t>invariant</a:t>
@@ -7788,7 +7980,7 @@
             <a:r>
               <a:rPr lang="pt-PT" sz="1600" dirty="0" err="1">
                 <a:solidFill>
-                  <a:schemeClr val="accent2"/>
+                  <a:srgbClr val="F3530B"/>
                 </a:solidFill>
               </a:rPr>
               <a:t>invariant</a:t>
@@ -7859,7 +8051,7 @@
             <a:r>
               <a:rPr lang="pt-PT" sz="1600" dirty="0" err="1">
                 <a:solidFill>
-                  <a:schemeClr val="accent2"/>
+                  <a:srgbClr val="F3530B"/>
                 </a:solidFill>
               </a:rPr>
               <a:t>done</a:t>
@@ -7888,7 +8080,7 @@
 </p:sld>
 </file>
 
-<file path=ppt/slides/slide21.xml><?xml version="1.0" encoding="utf-8"?>
+<file path=ppt/slides/slide22.xml><?xml version="1.0" encoding="utf-8"?>
 <p:sld xmlns:a="http://schemas.openxmlformats.org/drawingml/2006/main" xmlns:r="http://schemas.openxmlformats.org/officeDocument/2006/relationships" xmlns:p="http://schemas.openxmlformats.org/presentationml/2006/main">
   <p:cSld>
     <p:spTree>
@@ -7974,7 +8166,7 @@
           <a:p>
             <a:fld id="{292A9FD8-515A-4698-9313-0AB17EE9632B}" type="slidenum">
               <a:rPr lang="en-US" noProof="1" dirty="0" smtClean="0"/>
-              <a:t>21</a:t>
+              <a:t>22</a:t>
             </a:fld>
             <a:endParaRPr lang="en-US" noProof="1"/>
           </a:p>
@@ -8017,7 +8209,7 @@
             <a:r>
               <a:rPr lang="pt-PT" sz="1600" dirty="0" err="1">
                 <a:solidFill>
-                  <a:schemeClr val="accent2"/>
+                  <a:srgbClr val="F3530B"/>
                 </a:solidFill>
               </a:rPr>
               <a:t>end</a:t>
@@ -8035,7 +8227,7 @@
             <a:r>
               <a:rPr lang="pt-PT" sz="1600" dirty="0" err="1">
                 <a:solidFill>
-                  <a:schemeClr val="accent2"/>
+                  <a:srgbClr val="F3530B"/>
                 </a:solidFill>
               </a:rPr>
               <a:t>requires</a:t>
@@ -8101,7 +8293,7 @@
             <a:r>
               <a:rPr lang="pt-PT" sz="1600" dirty="0" err="1">
                 <a:solidFill>
-                  <a:schemeClr val="accent2"/>
+                  <a:srgbClr val="F3530B"/>
                 </a:solidFill>
               </a:rPr>
               <a:t>ensures</a:t>
@@ -8175,7 +8367,7 @@
 </p:sld>
 </file>
 
-<file path=ppt/slides/slide22.xml><?xml version="1.0" encoding="utf-8"?>
+<file path=ppt/slides/slide23.xml><?xml version="1.0" encoding="utf-8"?>
 <p:sld xmlns:a="http://schemas.openxmlformats.org/drawingml/2006/main" xmlns:r="http://schemas.openxmlformats.org/officeDocument/2006/relationships" xmlns:p="http://schemas.openxmlformats.org/presentationml/2006/main">
   <p:cSld>
     <p:spTree>
@@ -8261,7 +8453,7 @@
           <a:p>
             <a:fld id="{292A9FD8-515A-4698-9313-0AB17EE9632B}" type="slidenum">
               <a:rPr lang="en-US" noProof="1" dirty="0" smtClean="0"/>
-              <a:t>22</a:t>
+              <a:t>23</a:t>
             </a:fld>
             <a:endParaRPr lang="en-US" noProof="1"/>
           </a:p>
@@ -8298,7 +8490,7 @@
             <a:r>
               <a:rPr lang="en-US" sz="1600" dirty="0">
                 <a:solidFill>
-                  <a:schemeClr val="accent2"/>
+                  <a:srgbClr val="F3530B"/>
                 </a:solidFill>
               </a:rPr>
               <a:t>let</a:t>
@@ -8322,7 +8514,7 @@
             <a:r>
               <a:rPr lang="sv-SE" sz="1600" dirty="0">
                 <a:solidFill>
-                  <a:schemeClr val="accent2"/>
+                  <a:srgbClr val="F3530B"/>
                 </a:solidFill>
               </a:rPr>
               <a:t>int</a:t>
@@ -8334,7 +8526,7 @@
             <a:r>
               <a:rPr lang="sv-SE" sz="1600" dirty="0">
                 <a:solidFill>
-                  <a:schemeClr val="accent2"/>
+                  <a:srgbClr val="F3530B"/>
                 </a:solidFill>
               </a:rPr>
               <a:t>int</a:t>
@@ -8346,7 +8538,7 @@
             <a:r>
               <a:rPr lang="sv-SE" sz="1600" dirty="0">
                 <a:solidFill>
-                  <a:schemeClr val="accent2"/>
+                  <a:srgbClr val="F3530B"/>
                 </a:solidFill>
               </a:rPr>
               <a:t>int</a:t>
@@ -8358,7 +8550,7 @@
             <a:r>
               <a:rPr lang="sv-SE" sz="1600" dirty="0">
                 <a:solidFill>
-                  <a:schemeClr val="accent2"/>
+                  <a:srgbClr val="F3530B"/>
                 </a:solidFill>
               </a:rPr>
               <a:t>int</a:t>
@@ -8370,7 +8562,7 @@
             <a:r>
               <a:rPr lang="sv-SE" sz="1600" dirty="0">
                 <a:solidFill>
-                  <a:schemeClr val="accent2"/>
+                  <a:srgbClr val="F3530B"/>
                 </a:solidFill>
               </a:rPr>
               <a:t>int</a:t>
@@ -8382,7 +8574,7 @@
             <a:r>
               <a:rPr lang="sv-SE" sz="1600" dirty="0">
                 <a:solidFill>
-                  <a:schemeClr val="accent2"/>
+                  <a:srgbClr val="F3530B"/>
                 </a:solidFill>
               </a:rPr>
               <a:t>int</a:t>
@@ -8400,7 +8592,7 @@
             <a:r>
               <a:rPr lang="sv-SE" sz="1600" dirty="0">
                 <a:solidFill>
-                  <a:schemeClr val="accent2"/>
+                  <a:srgbClr val="F3530B"/>
                 </a:solidFill>
               </a:rPr>
               <a:t>int</a:t>
@@ -8412,7 +8604,7 @@
             <a:r>
               <a:rPr lang="sv-SE" sz="1600" dirty="0">
                 <a:solidFill>
-                  <a:schemeClr val="accent2"/>
+                  <a:srgbClr val="F3530B"/>
                 </a:solidFill>
               </a:rPr>
               <a:t>int</a:t>
@@ -8437,7 +8629,7 @@
             <a:r>
               <a:rPr lang="en-US" sz="1600" dirty="0">
                 <a:solidFill>
-                  <a:schemeClr val="accent2"/>
+                  <a:srgbClr val="F3530B"/>
                 </a:solidFill>
               </a:rPr>
               <a:t>let</a:t>
@@ -8457,7 +8649,7 @@
             <a:r>
               <a:rPr lang="en-US" sz="1600" dirty="0">
                 <a:solidFill>
-                  <a:schemeClr val="accent2"/>
+                  <a:srgbClr val="F3530B"/>
                 </a:solidFill>
               </a:rPr>
               <a:t>in</a:t>
@@ -8475,7 +8667,7 @@
             <a:r>
               <a:rPr lang="en-US" sz="1600" dirty="0">
                 <a:solidFill>
-                  <a:schemeClr val="accent2"/>
+                  <a:srgbClr val="F3530B"/>
                 </a:solidFill>
               </a:rPr>
               <a:t>let</a:t>
@@ -8495,7 +8687,7 @@
             <a:r>
               <a:rPr lang="en-US" sz="1600" dirty="0">
                 <a:solidFill>
-                  <a:schemeClr val="accent2"/>
+                  <a:srgbClr val="F3530B"/>
                 </a:solidFill>
               </a:rPr>
               <a:t>in</a:t>
@@ -8509,7 +8701,7 @@
             <a:r>
               <a:rPr lang="en-US" sz="1600" dirty="0">
                 <a:solidFill>
-                  <a:schemeClr val="accent2"/>
+                  <a:srgbClr val="F3530B"/>
                 </a:solidFill>
               </a:rPr>
               <a:t>let</a:t>
@@ -8529,7 +8721,7 @@
             <a:r>
               <a:rPr lang="en-US" sz="1600" dirty="0">
                 <a:solidFill>
-                  <a:schemeClr val="accent2"/>
+                  <a:srgbClr val="F3530B"/>
                 </a:solidFill>
               </a:rPr>
               <a:t>in</a:t>
@@ -8543,7 +8735,7 @@
             <a:r>
               <a:rPr lang="en-US" sz="1600" dirty="0">
                 <a:solidFill>
-                  <a:schemeClr val="accent2"/>
+                  <a:srgbClr val="F3530B"/>
                 </a:solidFill>
               </a:rPr>
               <a:t>let</a:t>
@@ -8571,7 +8763,7 @@
             <a:r>
               <a:rPr lang="en-US" sz="1600" dirty="0">
                 <a:solidFill>
-                  <a:schemeClr val="accent2"/>
+                  <a:srgbClr val="F3530B"/>
                 </a:solidFill>
               </a:rPr>
               <a:t>in</a:t>
@@ -8589,7 +8781,7 @@
             <a:r>
               <a:rPr lang="en-US" sz="1600" dirty="0">
                 <a:solidFill>
-                  <a:schemeClr val="accent2"/>
+                  <a:srgbClr val="F3530B"/>
                 </a:solidFill>
               </a:rPr>
               <a:t>let</a:t>
@@ -8609,7 +8801,7 @@
             <a:r>
               <a:rPr lang="en-US" sz="1600" dirty="0">
                 <a:solidFill>
-                  <a:schemeClr val="accent2"/>
+                  <a:srgbClr val="F3530B"/>
                 </a:solidFill>
               </a:rPr>
               <a:t>in</a:t>
@@ -8627,7 +8819,7 @@
             <a:r>
               <a:rPr lang="en-US" sz="1600" dirty="0">
                 <a:solidFill>
-                  <a:schemeClr val="accent2"/>
+                  <a:srgbClr val="F3530B"/>
                 </a:solidFill>
               </a:rPr>
               <a:t>let</a:t>
@@ -8647,7 +8839,7 @@
             <a:r>
               <a:rPr lang="en-US" sz="1600" dirty="0">
                 <a:solidFill>
-                  <a:schemeClr val="accent2"/>
+                  <a:srgbClr val="F3530B"/>
                 </a:solidFill>
               </a:rPr>
               <a:t>in</a:t>
@@ -8664,7 +8856,7 @@
             <a:r>
               <a:rPr lang="pt-PT" sz="1600" dirty="0" err="1">
                 <a:solidFill>
-                  <a:schemeClr val="accent2"/>
+                  <a:srgbClr val="F3530B"/>
                 </a:solidFill>
               </a:rPr>
               <a:t>while</a:t>
@@ -8696,7 +8888,7 @@
             <a:r>
               <a:rPr lang="pt-PT" sz="1600" dirty="0">
                 <a:solidFill>
-                  <a:schemeClr val="accent2"/>
+                  <a:srgbClr val="F3530B"/>
                 </a:solidFill>
               </a:rPr>
               <a:t>do</a:t>
@@ -8714,7 +8906,7 @@
             <a:r>
               <a:rPr lang="pt-PT" sz="1600" dirty="0" err="1">
                 <a:solidFill>
-                  <a:schemeClr val="accent2"/>
+                  <a:srgbClr val="F3530B"/>
                 </a:solidFill>
               </a:rPr>
               <a:t>invariant</a:t>
@@ -8768,7 +8960,7 @@
             <a:r>
               <a:rPr lang="pt-PT" sz="1600" dirty="0" err="1">
                 <a:solidFill>
-                  <a:schemeClr val="accent2"/>
+                  <a:srgbClr val="F3530B"/>
                 </a:solidFill>
               </a:rPr>
               <a:t>variant</a:t>
@@ -8802,7 +8994,7 @@
             <a:r>
               <a:rPr lang="pt-PT" sz="1600" dirty="0" err="1">
                 <a:solidFill>
-                  <a:schemeClr val="accent2"/>
+                  <a:srgbClr val="F3530B"/>
                 </a:solidFill>
               </a:rPr>
               <a:t>invariant</a:t>
@@ -8836,7 +9028,7 @@
             <a:r>
               <a:rPr lang="pt-PT" sz="1600" dirty="0" err="1">
                 <a:solidFill>
-                  <a:schemeClr val="accent2"/>
+                  <a:srgbClr val="F3530B"/>
                 </a:solidFill>
               </a:rPr>
               <a:t>invariant</a:t>
@@ -8870,7 +9062,7 @@
             <a:r>
               <a:rPr lang="pt-PT" sz="1600" dirty="0" err="1">
                 <a:solidFill>
-                  <a:schemeClr val="accent2"/>
+                  <a:srgbClr val="F3530B"/>
                 </a:solidFill>
               </a:rPr>
               <a:t>invariant</a:t>
@@ -8927,7 +9119,7 @@
 </p:sld>
 </file>
 
-<file path=ppt/slides/slide23.xml><?xml version="1.0" encoding="utf-8"?>
+<file path=ppt/slides/slide24.xml><?xml version="1.0" encoding="utf-8"?>
 <p:sld xmlns:a="http://schemas.openxmlformats.org/drawingml/2006/main" xmlns:r="http://schemas.openxmlformats.org/officeDocument/2006/relationships" xmlns:p="http://schemas.openxmlformats.org/presentationml/2006/main">
   <p:cSld>
     <p:spTree>
@@ -9013,7 +9205,7 @@
           <a:p>
             <a:fld id="{292A9FD8-515A-4698-9313-0AB17EE9632B}" type="slidenum">
               <a:rPr lang="en-US" noProof="1" dirty="0" smtClean="0"/>
-              <a:t>23</a:t>
+              <a:t>24</a:t>
             </a:fld>
             <a:endParaRPr lang="en-US" noProof="1"/>
           </a:p>
@@ -9217,7 +9409,7 @@
             <a:r>
               <a:rPr lang="pt-PT" sz="1600" dirty="0" err="1">
                 <a:solidFill>
-                  <a:schemeClr val="accent2"/>
+                  <a:srgbClr val="F3530B"/>
                 </a:solidFill>
               </a:rPr>
               <a:t>done</a:t>
@@ -9260,7 +9452,7 @@
             <a:r>
               <a:rPr lang="pt-PT" sz="1600" dirty="0" err="1">
                 <a:solidFill>
-                  <a:schemeClr val="accent2"/>
+                  <a:srgbClr val="F3530B"/>
                 </a:solidFill>
               </a:rPr>
               <a:t>requires</a:t>
@@ -9326,7 +9518,7 @@
             <a:r>
               <a:rPr lang="pt-PT" sz="1600" dirty="0" err="1">
                 <a:solidFill>
-                  <a:schemeClr val="accent2"/>
+                  <a:srgbClr val="F3530B"/>
                 </a:solidFill>
               </a:rPr>
               <a:t>ensures</a:t>
@@ -9400,7 +9592,7 @@
 </p:sld>
 </file>
 
-<file path=ppt/slides/slide24.xml><?xml version="1.0" encoding="utf-8"?>
+<file path=ppt/slides/slide25.xml><?xml version="1.0" encoding="utf-8"?>
 <p:sld xmlns:a="http://schemas.openxmlformats.org/drawingml/2006/main" xmlns:r="http://schemas.openxmlformats.org/officeDocument/2006/relationships" xmlns:p="http://schemas.openxmlformats.org/presentationml/2006/main">
   <p:cSld>
     <p:spTree>
@@ -9487,7 +9679,7 @@
           <a:p>
             <a:fld id="{292A9FD8-515A-4698-9313-0AB17EE9632B}" type="slidenum">
               <a:rPr lang="en-US" noProof="1" dirty="0" smtClean="0"/>
-              <a:t>24</a:t>
+              <a:t>25</a:t>
             </a:fld>
             <a:endParaRPr lang="en-US" noProof="1"/>
           </a:p>
@@ -9506,7 +9698,7 @@
 </p:sld>
 </file>
 
-<file path=ppt/slides/slide25.xml><?xml version="1.0" encoding="utf-8"?>
+<file path=ppt/slides/slide26.xml><?xml version="1.0" encoding="utf-8"?>
 <p:sld xmlns:a="http://schemas.openxmlformats.org/drawingml/2006/main" xmlns:r="http://schemas.openxmlformats.org/officeDocument/2006/relationships" xmlns:p="http://schemas.openxmlformats.org/presentationml/2006/main">
   <p:cSld>
     <p:spTree>
@@ -9592,7 +9784,7 @@
           <a:p>
             <a:fld id="{292A9FD8-515A-4698-9313-0AB17EE9632B}" type="slidenum">
               <a:rPr lang="en-US" noProof="1" dirty="0" smtClean="0"/>
-              <a:t>25</a:t>
+              <a:t>26</a:t>
             </a:fld>
             <a:endParaRPr lang="en-US" noProof="1"/>
           </a:p>
@@ -9628,7 +9820,7 @@
           <a:p>
             <a:pPr algn="ctr"/>
             <a:r>
-              <a:rPr lang="en-US" sz="2000" noProof="1">
+              <a:rPr lang="en-US" sz="2000" u="sng" noProof="1">
                 <a:solidFill>
                   <a:srgbClr val="002060"/>
                 </a:solidFill>
@@ -9863,8 +10055,8 @@
         </p:nvSpPr>
         <p:spPr>
           <a:xfrm>
-            <a:off x="1976656" y="3571023"/>
-            <a:ext cx="4799391" cy="400110"/>
+            <a:off x="1892563" y="3571023"/>
+            <a:ext cx="4967578" cy="400110"/>
           </a:xfrm>
           <a:prstGeom prst="rect">
             <a:avLst/>
@@ -9884,7 +10076,7 @@
                   <a:srgbClr val="002060"/>
                 </a:solidFill>
               </a:rPr>
-              <a:t>Bip2ml </a:t>
+              <a:t>bip2ml </a:t>
             </a:r>
             <a:r>
               <a:rPr lang="en-US" sz="2000" noProof="1">
@@ -9908,7 +10100,7 @@
                   <a:srgbClr val="002060"/>
                 </a:solidFill>
               </a:rPr>
-              <a:t>caml relational verification tool</a:t>
+              <a:t>Caml relational verification tool</a:t>
             </a:r>
           </a:p>
         </p:txBody>
@@ -9926,7 +10118,7 @@
 </p:sld>
 </file>
 
-<file path=ppt/slides/slide26.xml><?xml version="1.0" encoding="utf-8"?>
+<file path=ppt/slides/slide27.xml><?xml version="1.0" encoding="utf-8"?>
 <p:sld xmlns:a="http://schemas.openxmlformats.org/drawingml/2006/main" xmlns:r="http://schemas.openxmlformats.org/officeDocument/2006/relationships" xmlns:p="http://schemas.openxmlformats.org/presentationml/2006/main">
   <p:cSld>
     <p:spTree>
@@ -10012,7 +10204,7 @@
           <a:p>
             <a:fld id="{292A9FD8-515A-4698-9313-0AB17EE9632B}" type="slidenum">
               <a:rPr lang="en-US" noProof="1" dirty="0" smtClean="0"/>
-              <a:t>26</a:t>
+              <a:t>27</a:t>
             </a:fld>
             <a:endParaRPr lang="en-US" noProof="1"/>
           </a:p>
@@ -10088,7 +10280,7 @@
 </p:sld>
 </file>
 
-<file path=ppt/slides/slide27.xml><?xml version="1.0" encoding="utf-8"?>
+<file path=ppt/slides/slide28.xml><?xml version="1.0" encoding="utf-8"?>
 <p:sld xmlns:a="http://schemas.openxmlformats.org/drawingml/2006/main" xmlns:r="http://schemas.openxmlformats.org/officeDocument/2006/relationships" xmlns:p="http://schemas.openxmlformats.org/presentationml/2006/main">
   <p:cSld>
     <p:spTree>
@@ -10174,7 +10366,7 @@
           <a:p>
             <a:fld id="{292A9FD8-515A-4698-9313-0AB17EE9632B}" type="slidenum">
               <a:rPr lang="en-US" noProof="1" dirty="0" smtClean="0"/>
-              <a:t>27</a:t>
+              <a:t>28</a:t>
             </a:fld>
             <a:endParaRPr lang="en-US" noProof="1"/>
           </a:p>
@@ -10278,7 +10470,7 @@
 </p:sld>
 </file>
 
-<file path=ppt/slides/slide28.xml><?xml version="1.0" encoding="utf-8"?>
+<file path=ppt/slides/slide29.xml><?xml version="1.0" encoding="utf-8"?>
 <p:sld xmlns:a="http://schemas.openxmlformats.org/drawingml/2006/main" xmlns:r="http://schemas.openxmlformats.org/officeDocument/2006/relationships" xmlns:p="http://schemas.openxmlformats.org/presentationml/2006/main">
   <p:cSld>
     <p:spTree>
@@ -10439,7 +10631,7 @@
           <a:p>
             <a:fld id="{292A9FD8-515A-4698-9313-0AB17EE9632B}" type="slidenum">
               <a:rPr lang="en-US" noProof="1" dirty="0" smtClean="0"/>
-              <a:t>28</a:t>
+              <a:t>29</a:t>
             </a:fld>
             <a:endParaRPr lang="en-US" noProof="1"/>
           </a:p>
@@ -10516,7 +10708,152 @@
 </p:sld>
 </file>
 
-<file path=ppt/slides/slide29.xml><?xml version="1.0" encoding="utf-8"?>
+<file path=ppt/slides/slide3.xml><?xml version="1.0" encoding="utf-8"?>
+<p:sld xmlns:a="http://schemas.openxmlformats.org/drawingml/2006/main" xmlns:r="http://schemas.openxmlformats.org/officeDocument/2006/relationships" xmlns:p="http://schemas.openxmlformats.org/presentationml/2006/main">
+  <p:cSld>
+    <p:spTree>
+      <p:nvGrpSpPr>
+        <p:cNvPr id="1" name="">
+          <a:extLst>
+            <a:ext uri="{FF2B5EF4-FFF2-40B4-BE49-F238E27FC236}">
+              <a16:creationId xmlns:a16="http://schemas.microsoft.com/office/drawing/2014/main" id="{0D1AFA4B-9E40-839C-CC14-2188445C4A4C}"/>
+            </a:ext>
+          </a:extLst>
+        </p:cNvPr>
+        <p:cNvGrpSpPr/>
+        <p:nvPr/>
+      </p:nvGrpSpPr>
+      <p:grpSpPr>
+        <a:xfrm>
+          <a:off x="0" y="0"/>
+          <a:ext cx="0" cy="0"/>
+          <a:chOff x="0" y="0"/>
+          <a:chExt cx="0" cy="0"/>
+        </a:xfrm>
+      </p:grpSpPr>
+      <p:sp>
+        <p:nvSpPr>
+          <p:cNvPr id="2" name="TextBox 1">
+            <a:extLst>
+              <a:ext uri="{FF2B5EF4-FFF2-40B4-BE49-F238E27FC236}">
+                <a16:creationId xmlns:a16="http://schemas.microsoft.com/office/drawing/2014/main" id="{294F06FF-0B28-EDDA-5C04-CF110DABB56F}"/>
+              </a:ext>
+            </a:extLst>
+          </p:cNvPr>
+          <p:cNvSpPr txBox="1"/>
+          <p:nvPr/>
+        </p:nvSpPr>
+        <p:spPr>
+          <a:xfrm>
+            <a:off x="469556" y="626071"/>
+            <a:ext cx="6845644" cy="523220"/>
+          </a:xfrm>
+          <a:prstGeom prst="rect">
+            <a:avLst/>
+          </a:prstGeom>
+          <a:noFill/>
+        </p:spPr>
+        <p:txBody>
+          <a:bodyPr wrap="square" rtlCol="0">
+            <a:spAutoFit/>
+          </a:bodyPr>
+          <a:lstStyle/>
+          <a:p>
+            <a:r>
+              <a:rPr lang="en-US" sz="2800" noProof="1">
+                <a:solidFill>
+                  <a:srgbClr val="002060"/>
+                </a:solidFill>
+              </a:rPr>
+              <a:t>Problem Definition</a:t>
+            </a:r>
+            <a:endParaRPr lang="en-US" sz="2800" noProof="1"/>
+          </a:p>
+        </p:txBody>
+      </p:sp>
+      <p:sp>
+        <p:nvSpPr>
+          <p:cNvPr id="3" name="TextBox 2">
+            <a:extLst>
+              <a:ext uri="{FF2B5EF4-FFF2-40B4-BE49-F238E27FC236}">
+                <a16:creationId xmlns:a16="http://schemas.microsoft.com/office/drawing/2014/main" id="{DD05CD8D-715D-ECB2-4829-9F818F4400C8}"/>
+              </a:ext>
+            </a:extLst>
+          </p:cNvPr>
+          <p:cNvSpPr txBox="1"/>
+          <p:nvPr/>
+        </p:nvSpPr>
+        <p:spPr>
+          <a:xfrm>
+            <a:off x="1357184" y="2549093"/>
+            <a:ext cx="6429632" cy="830997"/>
+          </a:xfrm>
+          <a:prstGeom prst="rect">
+            <a:avLst/>
+          </a:prstGeom>
+          <a:noFill/>
+        </p:spPr>
+        <p:txBody>
+          <a:bodyPr wrap="square" rtlCol="0">
+            <a:spAutoFit/>
+          </a:bodyPr>
+          <a:lstStyle/>
+          <a:p>
+            <a:pPr algn="ctr"/>
+            <a:r>
+              <a:rPr lang="en-US" sz="2400" i="1" noProof="1">
+                <a:solidFill>
+                  <a:srgbClr val="002060"/>
+                </a:solidFill>
+              </a:rPr>
+              <a:t>Can we automatically prove that two different programs are equivalent?</a:t>
+            </a:r>
+          </a:p>
+        </p:txBody>
+      </p:sp>
+      <p:sp>
+        <p:nvSpPr>
+          <p:cNvPr id="4" name="Slide Number Placeholder 3">
+            <a:extLst>
+              <a:ext uri="{FF2B5EF4-FFF2-40B4-BE49-F238E27FC236}">
+                <a16:creationId xmlns:a16="http://schemas.microsoft.com/office/drawing/2014/main" id="{8AE23ED2-DECC-485A-D894-EB1A353D8A27}"/>
+              </a:ext>
+            </a:extLst>
+          </p:cNvPr>
+          <p:cNvSpPr>
+            <a:spLocks noGrp="1"/>
+          </p:cNvSpPr>
+          <p:nvPr>
+            <p:ph type="sldNum" sz="quarter" idx="12"/>
+          </p:nvPr>
+        </p:nvSpPr>
+        <p:spPr/>
+        <p:txBody>
+          <a:bodyPr/>
+          <a:lstStyle/>
+          <a:p>
+            <a:fld id="{292A9FD8-515A-4698-9313-0AB17EE9632B}" type="slidenum">
+              <a:rPr lang="en-US" noProof="1" dirty="0" smtClean="0"/>
+              <a:t>3</a:t>
+            </a:fld>
+            <a:endParaRPr lang="en-US" noProof="1"/>
+          </a:p>
+        </p:txBody>
+      </p:sp>
+    </p:spTree>
+    <p:extLst>
+      <p:ext uri="{BB962C8B-B14F-4D97-AF65-F5344CB8AC3E}">
+        <p14:creationId xmlns:p14="http://schemas.microsoft.com/office/powerpoint/2010/main" val="3472323131"/>
+      </p:ext>
+    </p:extLst>
+  </p:cSld>
+  <p:clrMapOvr>
+    <a:masterClrMapping/>
+  </p:clrMapOvr>
+</p:sld>
+</file>
+
+<file path=ppt/slides/slide30.xml><?xml version="1.0" encoding="utf-8"?>
 <p:sld xmlns:a="http://schemas.openxmlformats.org/drawingml/2006/main" xmlns:r="http://schemas.openxmlformats.org/officeDocument/2006/relationships" xmlns:p="http://schemas.openxmlformats.org/presentationml/2006/main" show="0">
   <p:cSld>
     <p:spTree>
@@ -10873,7 +11210,7 @@
           <a:p>
             <a:fld id="{292A9FD8-515A-4698-9313-0AB17EE9632B}" type="slidenum">
               <a:rPr lang="en-US" noProof="1" dirty="0" smtClean="0"/>
-              <a:t>29</a:t>
+              <a:t>30</a:t>
             </a:fld>
             <a:endParaRPr lang="en-US" noProof="1"/>
           </a:p>
@@ -10892,152 +11229,7 @@
 </p:sld>
 </file>
 
-<file path=ppt/slides/slide3.xml><?xml version="1.0" encoding="utf-8"?>
-<p:sld xmlns:a="http://schemas.openxmlformats.org/drawingml/2006/main" xmlns:r="http://schemas.openxmlformats.org/officeDocument/2006/relationships" xmlns:p="http://schemas.openxmlformats.org/presentationml/2006/main">
-  <p:cSld>
-    <p:spTree>
-      <p:nvGrpSpPr>
-        <p:cNvPr id="1" name="">
-          <a:extLst>
-            <a:ext uri="{FF2B5EF4-FFF2-40B4-BE49-F238E27FC236}">
-              <a16:creationId xmlns:a16="http://schemas.microsoft.com/office/drawing/2014/main" id="{0D1AFA4B-9E40-839C-CC14-2188445C4A4C}"/>
-            </a:ext>
-          </a:extLst>
-        </p:cNvPr>
-        <p:cNvGrpSpPr/>
-        <p:nvPr/>
-      </p:nvGrpSpPr>
-      <p:grpSpPr>
-        <a:xfrm>
-          <a:off x="0" y="0"/>
-          <a:ext cx="0" cy="0"/>
-          <a:chOff x="0" y="0"/>
-          <a:chExt cx="0" cy="0"/>
-        </a:xfrm>
-      </p:grpSpPr>
-      <p:sp>
-        <p:nvSpPr>
-          <p:cNvPr id="2" name="TextBox 1">
-            <a:extLst>
-              <a:ext uri="{FF2B5EF4-FFF2-40B4-BE49-F238E27FC236}">
-                <a16:creationId xmlns:a16="http://schemas.microsoft.com/office/drawing/2014/main" id="{294F06FF-0B28-EDDA-5C04-CF110DABB56F}"/>
-              </a:ext>
-            </a:extLst>
-          </p:cNvPr>
-          <p:cNvSpPr txBox="1"/>
-          <p:nvPr/>
-        </p:nvSpPr>
-        <p:spPr>
-          <a:xfrm>
-            <a:off x="469556" y="626071"/>
-            <a:ext cx="6845644" cy="523220"/>
-          </a:xfrm>
-          <a:prstGeom prst="rect">
-            <a:avLst/>
-          </a:prstGeom>
-          <a:noFill/>
-        </p:spPr>
-        <p:txBody>
-          <a:bodyPr wrap="square" rtlCol="0">
-            <a:spAutoFit/>
-          </a:bodyPr>
-          <a:lstStyle/>
-          <a:p>
-            <a:r>
-              <a:rPr lang="en-US" sz="2800" noProof="1">
-                <a:solidFill>
-                  <a:srgbClr val="002060"/>
-                </a:solidFill>
-              </a:rPr>
-              <a:t>Problem Definition</a:t>
-            </a:r>
-            <a:endParaRPr lang="en-US" sz="2800" noProof="1"/>
-          </a:p>
-        </p:txBody>
-      </p:sp>
-      <p:sp>
-        <p:nvSpPr>
-          <p:cNvPr id="3" name="TextBox 2">
-            <a:extLst>
-              <a:ext uri="{FF2B5EF4-FFF2-40B4-BE49-F238E27FC236}">
-                <a16:creationId xmlns:a16="http://schemas.microsoft.com/office/drawing/2014/main" id="{DD05CD8D-715D-ECB2-4829-9F818F4400C8}"/>
-              </a:ext>
-            </a:extLst>
-          </p:cNvPr>
-          <p:cNvSpPr txBox="1"/>
-          <p:nvPr/>
-        </p:nvSpPr>
-        <p:spPr>
-          <a:xfrm>
-            <a:off x="1357184" y="2549093"/>
-            <a:ext cx="6429632" cy="830997"/>
-          </a:xfrm>
-          <a:prstGeom prst="rect">
-            <a:avLst/>
-          </a:prstGeom>
-          <a:noFill/>
-        </p:spPr>
-        <p:txBody>
-          <a:bodyPr wrap="square" rtlCol="0">
-            <a:spAutoFit/>
-          </a:bodyPr>
-          <a:lstStyle/>
-          <a:p>
-            <a:pPr algn="ctr"/>
-            <a:r>
-              <a:rPr lang="en-US" sz="2400" i="1" noProof="1">
-                <a:solidFill>
-                  <a:srgbClr val="002060"/>
-                </a:solidFill>
-              </a:rPr>
-              <a:t>Can we automatically prove that two different programs are equivalent?</a:t>
-            </a:r>
-          </a:p>
-        </p:txBody>
-      </p:sp>
-      <p:sp>
-        <p:nvSpPr>
-          <p:cNvPr id="4" name="Slide Number Placeholder 3">
-            <a:extLst>
-              <a:ext uri="{FF2B5EF4-FFF2-40B4-BE49-F238E27FC236}">
-                <a16:creationId xmlns:a16="http://schemas.microsoft.com/office/drawing/2014/main" id="{8AE23ED2-DECC-485A-D894-EB1A353D8A27}"/>
-              </a:ext>
-            </a:extLst>
-          </p:cNvPr>
-          <p:cNvSpPr>
-            <a:spLocks noGrp="1"/>
-          </p:cNvSpPr>
-          <p:nvPr>
-            <p:ph type="sldNum" sz="quarter" idx="12"/>
-          </p:nvPr>
-        </p:nvSpPr>
-        <p:spPr/>
-        <p:txBody>
-          <a:bodyPr/>
-          <a:lstStyle/>
-          <a:p>
-            <a:fld id="{292A9FD8-515A-4698-9313-0AB17EE9632B}" type="slidenum">
-              <a:rPr lang="en-US" noProof="1" dirty="0" smtClean="0"/>
-              <a:t>3</a:t>
-            </a:fld>
-            <a:endParaRPr lang="en-US" noProof="1"/>
-          </a:p>
-        </p:txBody>
-      </p:sp>
-    </p:spTree>
-    <p:extLst>
-      <p:ext uri="{BB962C8B-B14F-4D97-AF65-F5344CB8AC3E}">
-        <p14:creationId xmlns:p14="http://schemas.microsoft.com/office/powerpoint/2010/main" val="3472323131"/>
-      </p:ext>
-    </p:extLst>
-  </p:cSld>
-  <p:clrMapOvr>
-    <a:masterClrMapping/>
-  </p:clrMapOvr>
-</p:sld>
-</file>
-
-<file path=ppt/slides/slide30.xml><?xml version="1.0" encoding="utf-8"?>
+<file path=ppt/slides/slide31.xml><?xml version="1.0" encoding="utf-8"?>
 <p:sld xmlns:a="http://schemas.openxmlformats.org/drawingml/2006/main" xmlns:r="http://schemas.openxmlformats.org/officeDocument/2006/relationships" xmlns:p="http://schemas.openxmlformats.org/presentationml/2006/main" show="0">
   <p:cSld>
     <p:spTree>
@@ -11123,7 +11315,7 @@
           <a:p>
             <a:fld id="{292A9FD8-515A-4698-9313-0AB17EE9632B}" type="slidenum">
               <a:rPr lang="en-US" noProof="1" dirty="0" smtClean="0"/>
-              <a:t>30</a:t>
+              <a:t>31</a:t>
             </a:fld>
             <a:endParaRPr lang="en-US" noProof="1"/>
           </a:p>
@@ -11230,7 +11422,7 @@
 </p:sld>
 </file>
 
-<file path=ppt/slides/slide31.xml><?xml version="1.0" encoding="utf-8"?>
+<file path=ppt/slides/slide32.xml><?xml version="1.0" encoding="utf-8"?>
 <p:sld xmlns:a="http://schemas.openxmlformats.org/drawingml/2006/main" xmlns:r="http://schemas.openxmlformats.org/officeDocument/2006/relationships" xmlns:p="http://schemas.openxmlformats.org/presentationml/2006/main" show="0">
   <p:cSld>
     <p:spTree>
@@ -11356,7 +11548,7 @@
           <a:p>
             <a:fld id="{292A9FD8-515A-4698-9313-0AB17EE9632B}" type="slidenum">
               <a:rPr lang="en-US" noProof="1" dirty="0" smtClean="0"/>
-              <a:t>31</a:t>
+              <a:t>32</a:t>
             </a:fld>
             <a:endParaRPr lang="en-US" noProof="1"/>
           </a:p>
@@ -11375,7 +11567,7 @@
 </p:sld>
 </file>
 
-<file path=ppt/slides/slide32.xml><?xml version="1.0" encoding="utf-8"?>
+<file path=ppt/slides/slide33.xml><?xml version="1.0" encoding="utf-8"?>
 <p:sld xmlns:a="http://schemas.openxmlformats.org/drawingml/2006/main" xmlns:r="http://schemas.openxmlformats.org/officeDocument/2006/relationships" xmlns:p="http://schemas.openxmlformats.org/presentationml/2006/main" show="0">
   <p:cSld>
     <p:spTree>
@@ -11518,7 +11710,7 @@
           <a:p>
             <a:fld id="{292A9FD8-515A-4698-9313-0AB17EE9632B}" type="slidenum">
               <a:rPr lang="en-US" noProof="1" dirty="0" smtClean="0"/>
-              <a:t>32</a:t>
+              <a:t>33</a:t>
             </a:fld>
             <a:endParaRPr lang="en-US" noProof="1"/>
           </a:p>
@@ -11537,7 +11729,7 @@
 </p:sld>
 </file>
 
-<file path=ppt/slides/slide33.xml><?xml version="1.0" encoding="utf-8"?>
+<file path=ppt/slides/slide34.xml><?xml version="1.0" encoding="utf-8"?>
 <p:sld xmlns:a="http://schemas.openxmlformats.org/drawingml/2006/main" xmlns:r="http://schemas.openxmlformats.org/officeDocument/2006/relationships" xmlns:p="http://schemas.openxmlformats.org/presentationml/2006/main" show="0">
   <p:cSld>
     <p:spTree>
@@ -11624,7 +11816,7 @@
           <a:p>
             <a:fld id="{292A9FD8-515A-4698-9313-0AB17EE9632B}" type="slidenum">
               <a:rPr lang="en-US" noProof="1" dirty="0" smtClean="0"/>
-              <a:t>33</a:t>
+              <a:t>34</a:t>
             </a:fld>
             <a:endParaRPr lang="en-US" noProof="1"/>
           </a:p>
@@ -11877,7 +12069,7 @@
 </p:sld>
 </file>
 
-<file path=ppt/slides/slide34.xml><?xml version="1.0" encoding="utf-8"?>
+<file path=ppt/slides/slide35.xml><?xml version="1.0" encoding="utf-8"?>
 <p:sld xmlns:a="http://schemas.openxmlformats.org/drawingml/2006/main" xmlns:r="http://schemas.openxmlformats.org/officeDocument/2006/relationships" xmlns:p="http://schemas.openxmlformats.org/presentationml/2006/main" show="0">
   <p:cSld>
     <p:spTree>
@@ -12348,7 +12540,7 @@
           <a:p>
             <a:fld id="{292A9FD8-515A-4698-9313-0AB17EE9632B}" type="slidenum">
               <a:rPr lang="en-US" noProof="1" dirty="0" smtClean="0"/>
-              <a:t>34</a:t>
+              <a:t>35</a:t>
             </a:fld>
             <a:endParaRPr lang="en-US" noProof="1"/>
           </a:p>
@@ -12367,7 +12559,7 @@
 </p:sld>
 </file>
 
-<file path=ppt/slides/slide35.xml><?xml version="1.0" encoding="utf-8"?>
+<file path=ppt/slides/slide36.xml><?xml version="1.0" encoding="utf-8"?>
 <p:sld xmlns:a="http://schemas.openxmlformats.org/drawingml/2006/main" xmlns:r="http://schemas.openxmlformats.org/officeDocument/2006/relationships" xmlns:p="http://schemas.openxmlformats.org/presentationml/2006/main" show="0">
   <p:cSld>
     <p:spTree>
@@ -12628,7 +12820,7 @@
           <a:p>
             <a:fld id="{292A9FD8-515A-4698-9313-0AB17EE9632B}" type="slidenum">
               <a:rPr lang="en-US" noProof="1" dirty="0" smtClean="0"/>
-              <a:t>35</a:t>
+              <a:t>36</a:t>
             </a:fld>
             <a:endParaRPr lang="en-US" noProof="1"/>
           </a:p>
@@ -12647,7 +12839,7 @@
 </p:sld>
 </file>
 
-<file path=ppt/slides/slide36.xml><?xml version="1.0" encoding="utf-8"?>
+<file path=ppt/slides/slide37.xml><?xml version="1.0" encoding="utf-8"?>
 <p:sld xmlns:a="http://schemas.openxmlformats.org/drawingml/2006/main" xmlns:r="http://schemas.openxmlformats.org/officeDocument/2006/relationships" xmlns:p="http://schemas.openxmlformats.org/presentationml/2006/main" show="0">
   <p:cSld>
     <p:spTree>
@@ -12818,7 +13010,7 @@
           <a:p>
             <a:fld id="{292A9FD8-515A-4698-9313-0AB17EE9632B}" type="slidenum">
               <a:rPr lang="en-US" noProof="1" dirty="0" smtClean="0"/>
-              <a:t>36</a:t>
+              <a:t>37</a:t>
             </a:fld>
             <a:endParaRPr lang="en-US" noProof="1"/>
           </a:p>
@@ -12837,7 +13029,7 @@
 </p:sld>
 </file>
 
-<file path=ppt/slides/slide37.xml><?xml version="1.0" encoding="utf-8"?>
+<file path=ppt/slides/slide38.xml><?xml version="1.0" encoding="utf-8"?>
 <p:sld xmlns:a="http://schemas.openxmlformats.org/drawingml/2006/main" xmlns:r="http://schemas.openxmlformats.org/officeDocument/2006/relationships" xmlns:p="http://schemas.openxmlformats.org/presentationml/2006/main" show="0">
   <p:cSld>
     <p:spTree>
@@ -13181,7 +13373,7 @@
           <a:p>
             <a:fld id="{292A9FD8-515A-4698-9313-0AB17EE9632B}" type="slidenum">
               <a:rPr lang="en-US" noProof="1" dirty="0" smtClean="0"/>
-              <a:t>37</a:t>
+              <a:t>38</a:t>
             </a:fld>
             <a:endParaRPr lang="en-US" noProof="1"/>
           </a:p>
@@ -13200,7 +13392,7 @@
 </p:sld>
 </file>
 
-<file path=ppt/slides/slide38.xml><?xml version="1.0" encoding="utf-8"?>
+<file path=ppt/slides/slide39.xml><?xml version="1.0" encoding="utf-8"?>
 <p:sld xmlns:a="http://schemas.openxmlformats.org/drawingml/2006/main" xmlns:r="http://schemas.openxmlformats.org/officeDocument/2006/relationships" xmlns:p="http://schemas.openxmlformats.org/presentationml/2006/main" show="0">
   <p:cSld>
     <p:spTree>
@@ -13286,7 +13478,7 @@
           <a:p>
             <a:fld id="{292A9FD8-515A-4698-9313-0AB17EE9632B}" type="slidenum">
               <a:rPr lang="en-US" noProof="1" dirty="0" smtClean="0"/>
-              <a:t>38</a:t>
+              <a:t>39</a:t>
             </a:fld>
             <a:endParaRPr lang="en-US" noProof="1"/>
           </a:p>
@@ -13402,196 +13594,6 @@
     <p:extLst>
       <p:ext uri="{BB962C8B-B14F-4D97-AF65-F5344CB8AC3E}">
         <p14:creationId xmlns:p14="http://schemas.microsoft.com/office/powerpoint/2010/main" val="3776110183"/>
-      </p:ext>
-    </p:extLst>
-  </p:cSld>
-  <p:clrMapOvr>
-    <a:masterClrMapping/>
-  </p:clrMapOvr>
-</p:sld>
-</file>
-
-<file path=ppt/slides/slide39.xml><?xml version="1.0" encoding="utf-8"?>
-<p:sld xmlns:a="http://schemas.openxmlformats.org/drawingml/2006/main" xmlns:r="http://schemas.openxmlformats.org/officeDocument/2006/relationships" xmlns:p="http://schemas.openxmlformats.org/presentationml/2006/main" show="0">
-  <p:cSld>
-    <p:spTree>
-      <p:nvGrpSpPr>
-        <p:cNvPr id="1" name="">
-          <a:extLst>
-            <a:ext uri="{FF2B5EF4-FFF2-40B4-BE49-F238E27FC236}">
-              <a16:creationId xmlns:a16="http://schemas.microsoft.com/office/drawing/2014/main" id="{8127E46C-B7E3-BC72-C1D0-B12AEC6C989E}"/>
-            </a:ext>
-          </a:extLst>
-        </p:cNvPr>
-        <p:cNvGrpSpPr/>
-        <p:nvPr/>
-      </p:nvGrpSpPr>
-      <p:grpSpPr>
-        <a:xfrm>
-          <a:off x="0" y="0"/>
-          <a:ext cx="0" cy="0"/>
-          <a:chOff x="0" y="0"/>
-          <a:chExt cx="0" cy="0"/>
-        </a:xfrm>
-      </p:grpSpPr>
-      <p:sp>
-        <p:nvSpPr>
-          <p:cNvPr id="2" name="TextBox 1">
-            <a:extLst>
-              <a:ext uri="{FF2B5EF4-FFF2-40B4-BE49-F238E27FC236}">
-                <a16:creationId xmlns:a16="http://schemas.microsoft.com/office/drawing/2014/main" id="{EDFDFAB5-13B5-35FB-F401-88513722720F}"/>
-              </a:ext>
-            </a:extLst>
-          </p:cNvPr>
-          <p:cNvSpPr txBox="1"/>
-          <p:nvPr/>
-        </p:nvSpPr>
-        <p:spPr>
-          <a:xfrm>
-            <a:off x="469556" y="626071"/>
-            <a:ext cx="4572000" cy="523220"/>
-          </a:xfrm>
-          <a:prstGeom prst="rect">
-            <a:avLst/>
-          </a:prstGeom>
-          <a:noFill/>
-        </p:spPr>
-        <p:txBody>
-          <a:bodyPr wrap="square" rtlCol="0">
-            <a:spAutoFit/>
-          </a:bodyPr>
-          <a:lstStyle/>
-          <a:p>
-            <a:r>
-              <a:rPr lang="en-US" sz="2800" noProof="1">
-                <a:solidFill>
-                  <a:srgbClr val="002060"/>
-                </a:solidFill>
-              </a:rPr>
-              <a:t>GOSPEL</a:t>
-            </a:r>
-            <a:endParaRPr lang="en-US" sz="2800" noProof="1"/>
-          </a:p>
-        </p:txBody>
-      </p:sp>
-      <p:sp>
-        <p:nvSpPr>
-          <p:cNvPr id="3" name="Slide Number Placeholder 2">
-            <a:extLst>
-              <a:ext uri="{FF2B5EF4-FFF2-40B4-BE49-F238E27FC236}">
-                <a16:creationId xmlns:a16="http://schemas.microsoft.com/office/drawing/2014/main" id="{27724ABA-31BB-719D-DEBF-ACDE275300DC}"/>
-              </a:ext>
-            </a:extLst>
-          </p:cNvPr>
-          <p:cNvSpPr>
-            <a:spLocks noGrp="1"/>
-          </p:cNvSpPr>
-          <p:nvPr>
-            <p:ph type="sldNum" sz="quarter" idx="12"/>
-          </p:nvPr>
-        </p:nvSpPr>
-        <p:spPr/>
-        <p:txBody>
-          <a:bodyPr/>
-          <a:lstStyle/>
-          <a:p>
-            <a:fld id="{292A9FD8-515A-4698-9313-0AB17EE9632B}" type="slidenum">
-              <a:rPr lang="en-US" noProof="1" dirty="0" smtClean="0"/>
-              <a:t>39</a:t>
-            </a:fld>
-            <a:endParaRPr lang="en-US" noProof="1"/>
-          </a:p>
-        </p:txBody>
-      </p:sp>
-      <p:sp>
-        <p:nvSpPr>
-          <p:cNvPr id="4" name="TextBox 3">
-            <a:extLst>
-              <a:ext uri="{FF2B5EF4-FFF2-40B4-BE49-F238E27FC236}">
-                <a16:creationId xmlns:a16="http://schemas.microsoft.com/office/drawing/2014/main" id="{D643DD99-F8E6-4314-CA0C-0FDCCDFDA6AB}"/>
-              </a:ext>
-            </a:extLst>
-          </p:cNvPr>
-          <p:cNvSpPr txBox="1"/>
-          <p:nvPr/>
-        </p:nvSpPr>
-        <p:spPr>
-          <a:xfrm>
-            <a:off x="469557" y="1914771"/>
-            <a:ext cx="6862120" cy="1938992"/>
-          </a:xfrm>
-          <a:prstGeom prst="rect">
-            <a:avLst/>
-          </a:prstGeom>
-          <a:noFill/>
-        </p:spPr>
-        <p:txBody>
-          <a:bodyPr wrap="square" rtlCol="0">
-            <a:spAutoFit/>
-          </a:bodyPr>
-          <a:lstStyle/>
-          <a:p>
-            <a:pPr marL="342900" indent="-342900">
-              <a:buFont typeface="Arial" panose="020B0604020202020204" pitchFamily="34" charset="0"/>
-              <a:buChar char="•"/>
-            </a:pPr>
-            <a:r>
-              <a:rPr lang="en-US" sz="2400" noProof="1">
-                <a:solidFill>
-                  <a:srgbClr val="002060"/>
-                </a:solidFill>
-              </a:rPr>
-              <a:t>Generic Ocaml SPEcification Language</a:t>
-            </a:r>
-          </a:p>
-          <a:p>
-            <a:pPr marL="342900" indent="-342900">
-              <a:buFont typeface="Arial" panose="020B0604020202020204" pitchFamily="34" charset="0"/>
-              <a:buChar char="•"/>
-            </a:pPr>
-            <a:r>
-              <a:rPr lang="en-US" sz="2400" noProof="1">
-                <a:solidFill>
-                  <a:srgbClr val="002060"/>
-                </a:solidFill>
-              </a:rPr>
-              <a:t>Specification language for OCaml </a:t>
-            </a:r>
-          </a:p>
-          <a:p>
-            <a:pPr marL="342900" indent="-342900">
-              <a:buFont typeface="Arial" panose="020B0604020202020204" pitchFamily="34" charset="0"/>
-              <a:buChar char="•"/>
-            </a:pPr>
-            <a:r>
-              <a:rPr lang="en-US" sz="2400" noProof="1">
-                <a:solidFill>
-                  <a:srgbClr val="002060"/>
-                </a:solidFill>
-              </a:rPr>
-              <a:t>Allows program correctness verification</a:t>
-            </a:r>
-          </a:p>
-          <a:p>
-            <a:pPr marL="342900" indent="-342900">
-              <a:buFont typeface="Arial" panose="020B0604020202020204" pitchFamily="34" charset="0"/>
-              <a:buChar char="•"/>
-            </a:pPr>
-            <a:r>
-              <a:rPr lang="en-US" sz="2400" noProof="1">
-                <a:solidFill>
-                  <a:srgbClr val="002060"/>
-                </a:solidFill>
-              </a:rPr>
-              <a:t>Created to significantly improve conciseness and accessibility</a:t>
-            </a:r>
-          </a:p>
-        </p:txBody>
-      </p:sp>
-    </p:spTree>
-    <p:extLst>
-      <p:ext uri="{BB962C8B-B14F-4D97-AF65-F5344CB8AC3E}">
-        <p14:creationId xmlns:p14="http://schemas.microsoft.com/office/powerpoint/2010/main" val="3186017765"/>
       </p:ext>
     </p:extLst>
   </p:cSld>
@@ -13800,6 +13802,196 @@
         <p:cNvPr id="1" name="">
           <a:extLst>
             <a:ext uri="{FF2B5EF4-FFF2-40B4-BE49-F238E27FC236}">
+              <a16:creationId xmlns:a16="http://schemas.microsoft.com/office/drawing/2014/main" id="{8127E46C-B7E3-BC72-C1D0-B12AEC6C989E}"/>
+            </a:ext>
+          </a:extLst>
+        </p:cNvPr>
+        <p:cNvGrpSpPr/>
+        <p:nvPr/>
+      </p:nvGrpSpPr>
+      <p:grpSpPr>
+        <a:xfrm>
+          <a:off x="0" y="0"/>
+          <a:ext cx="0" cy="0"/>
+          <a:chOff x="0" y="0"/>
+          <a:chExt cx="0" cy="0"/>
+        </a:xfrm>
+      </p:grpSpPr>
+      <p:sp>
+        <p:nvSpPr>
+          <p:cNvPr id="2" name="TextBox 1">
+            <a:extLst>
+              <a:ext uri="{FF2B5EF4-FFF2-40B4-BE49-F238E27FC236}">
+                <a16:creationId xmlns:a16="http://schemas.microsoft.com/office/drawing/2014/main" id="{EDFDFAB5-13B5-35FB-F401-88513722720F}"/>
+              </a:ext>
+            </a:extLst>
+          </p:cNvPr>
+          <p:cNvSpPr txBox="1"/>
+          <p:nvPr/>
+        </p:nvSpPr>
+        <p:spPr>
+          <a:xfrm>
+            <a:off x="469556" y="626071"/>
+            <a:ext cx="4572000" cy="523220"/>
+          </a:xfrm>
+          <a:prstGeom prst="rect">
+            <a:avLst/>
+          </a:prstGeom>
+          <a:noFill/>
+        </p:spPr>
+        <p:txBody>
+          <a:bodyPr wrap="square" rtlCol="0">
+            <a:spAutoFit/>
+          </a:bodyPr>
+          <a:lstStyle/>
+          <a:p>
+            <a:r>
+              <a:rPr lang="en-US" sz="2800" noProof="1">
+                <a:solidFill>
+                  <a:srgbClr val="002060"/>
+                </a:solidFill>
+              </a:rPr>
+              <a:t>GOSPEL</a:t>
+            </a:r>
+            <a:endParaRPr lang="en-US" sz="2800" noProof="1"/>
+          </a:p>
+        </p:txBody>
+      </p:sp>
+      <p:sp>
+        <p:nvSpPr>
+          <p:cNvPr id="3" name="Slide Number Placeholder 2">
+            <a:extLst>
+              <a:ext uri="{FF2B5EF4-FFF2-40B4-BE49-F238E27FC236}">
+                <a16:creationId xmlns:a16="http://schemas.microsoft.com/office/drawing/2014/main" id="{27724ABA-31BB-719D-DEBF-ACDE275300DC}"/>
+              </a:ext>
+            </a:extLst>
+          </p:cNvPr>
+          <p:cNvSpPr>
+            <a:spLocks noGrp="1"/>
+          </p:cNvSpPr>
+          <p:nvPr>
+            <p:ph type="sldNum" sz="quarter" idx="12"/>
+          </p:nvPr>
+        </p:nvSpPr>
+        <p:spPr/>
+        <p:txBody>
+          <a:bodyPr/>
+          <a:lstStyle/>
+          <a:p>
+            <a:fld id="{292A9FD8-515A-4698-9313-0AB17EE9632B}" type="slidenum">
+              <a:rPr lang="en-US" noProof="1" dirty="0" smtClean="0"/>
+              <a:t>40</a:t>
+            </a:fld>
+            <a:endParaRPr lang="en-US" noProof="1"/>
+          </a:p>
+        </p:txBody>
+      </p:sp>
+      <p:sp>
+        <p:nvSpPr>
+          <p:cNvPr id="4" name="TextBox 3">
+            <a:extLst>
+              <a:ext uri="{FF2B5EF4-FFF2-40B4-BE49-F238E27FC236}">
+                <a16:creationId xmlns:a16="http://schemas.microsoft.com/office/drawing/2014/main" id="{D643DD99-F8E6-4314-CA0C-0FDCCDFDA6AB}"/>
+              </a:ext>
+            </a:extLst>
+          </p:cNvPr>
+          <p:cNvSpPr txBox="1"/>
+          <p:nvPr/>
+        </p:nvSpPr>
+        <p:spPr>
+          <a:xfrm>
+            <a:off x="469557" y="1914771"/>
+            <a:ext cx="6862120" cy="1938992"/>
+          </a:xfrm>
+          <a:prstGeom prst="rect">
+            <a:avLst/>
+          </a:prstGeom>
+          <a:noFill/>
+        </p:spPr>
+        <p:txBody>
+          <a:bodyPr wrap="square" rtlCol="0">
+            <a:spAutoFit/>
+          </a:bodyPr>
+          <a:lstStyle/>
+          <a:p>
+            <a:pPr marL="342900" indent="-342900">
+              <a:buFont typeface="Arial" panose="020B0604020202020204" pitchFamily="34" charset="0"/>
+              <a:buChar char="•"/>
+            </a:pPr>
+            <a:r>
+              <a:rPr lang="en-US" sz="2400" noProof="1">
+                <a:solidFill>
+                  <a:srgbClr val="002060"/>
+                </a:solidFill>
+              </a:rPr>
+              <a:t>Generic Ocaml SPEcification Language</a:t>
+            </a:r>
+          </a:p>
+          <a:p>
+            <a:pPr marL="342900" indent="-342900">
+              <a:buFont typeface="Arial" panose="020B0604020202020204" pitchFamily="34" charset="0"/>
+              <a:buChar char="•"/>
+            </a:pPr>
+            <a:r>
+              <a:rPr lang="en-US" sz="2400" noProof="1">
+                <a:solidFill>
+                  <a:srgbClr val="002060"/>
+                </a:solidFill>
+              </a:rPr>
+              <a:t>Specification language for OCaml </a:t>
+            </a:r>
+          </a:p>
+          <a:p>
+            <a:pPr marL="342900" indent="-342900">
+              <a:buFont typeface="Arial" panose="020B0604020202020204" pitchFamily="34" charset="0"/>
+              <a:buChar char="•"/>
+            </a:pPr>
+            <a:r>
+              <a:rPr lang="en-US" sz="2400" noProof="1">
+                <a:solidFill>
+                  <a:srgbClr val="002060"/>
+                </a:solidFill>
+              </a:rPr>
+              <a:t>Allows program correctness verification</a:t>
+            </a:r>
+          </a:p>
+          <a:p>
+            <a:pPr marL="342900" indent="-342900">
+              <a:buFont typeface="Arial" panose="020B0604020202020204" pitchFamily="34" charset="0"/>
+              <a:buChar char="•"/>
+            </a:pPr>
+            <a:r>
+              <a:rPr lang="en-US" sz="2400" noProof="1">
+                <a:solidFill>
+                  <a:srgbClr val="002060"/>
+                </a:solidFill>
+              </a:rPr>
+              <a:t>Created to significantly improve conciseness and accessibility</a:t>
+            </a:r>
+          </a:p>
+        </p:txBody>
+      </p:sp>
+    </p:spTree>
+    <p:extLst>
+      <p:ext uri="{BB962C8B-B14F-4D97-AF65-F5344CB8AC3E}">
+        <p14:creationId xmlns:p14="http://schemas.microsoft.com/office/powerpoint/2010/main" val="3186017765"/>
+      </p:ext>
+    </p:extLst>
+  </p:cSld>
+  <p:clrMapOvr>
+    <a:masterClrMapping/>
+  </p:clrMapOvr>
+</p:sld>
+</file>
+
+<file path=ppt/slides/slide41.xml><?xml version="1.0" encoding="utf-8"?>
+<p:sld xmlns:a="http://schemas.openxmlformats.org/drawingml/2006/main" xmlns:r="http://schemas.openxmlformats.org/officeDocument/2006/relationships" xmlns:p="http://schemas.openxmlformats.org/presentationml/2006/main" show="0">
+  <p:cSld>
+    <p:spTree>
+      <p:nvGrpSpPr>
+        <p:cNvPr id="1" name="">
+          <a:extLst>
+            <a:ext uri="{FF2B5EF4-FFF2-40B4-BE49-F238E27FC236}">
               <a16:creationId xmlns:a16="http://schemas.microsoft.com/office/drawing/2014/main" id="{366EB30A-7619-4D99-481F-0CBBC3A27216}"/>
             </a:ext>
           </a:extLst>
@@ -13878,7 +14070,7 @@
           <a:p>
             <a:fld id="{292A9FD8-515A-4698-9313-0AB17EE9632B}" type="slidenum">
               <a:rPr lang="en-US" noProof="1" dirty="0" smtClean="0"/>
-              <a:t>40</a:t>
+              <a:t>41</a:t>
             </a:fld>
             <a:endParaRPr lang="en-US" noProof="1"/>
           </a:p>
@@ -13968,7 +14160,7 @@
 </p:sld>
 </file>
 
-<file path=ppt/slides/slide41.xml><?xml version="1.0" encoding="utf-8"?>
+<file path=ppt/slides/slide42.xml><?xml version="1.0" encoding="utf-8"?>
 <p:sld xmlns:a="http://schemas.openxmlformats.org/drawingml/2006/main" xmlns:r="http://schemas.openxmlformats.org/officeDocument/2006/relationships" xmlns:p="http://schemas.openxmlformats.org/presentationml/2006/main" show="0">
   <p:cSld>
     <p:spTree>
@@ -14055,7 +14247,7 @@
           <a:p>
             <a:fld id="{292A9FD8-515A-4698-9313-0AB17EE9632B}" type="slidenum">
               <a:rPr lang="en-US" noProof="1" dirty="0" smtClean="0"/>
-              <a:t>41</a:t>
+              <a:t>42</a:t>
             </a:fld>
             <a:endParaRPr lang="en-US" noProof="1"/>
           </a:p>
@@ -14074,7 +14266,7 @@
 </p:sld>
 </file>
 
-<file path=ppt/slides/slide42.xml><?xml version="1.0" encoding="utf-8"?>
+<file path=ppt/slides/slide43.xml><?xml version="1.0" encoding="utf-8"?>
 <p:sld xmlns:a="http://schemas.openxmlformats.org/drawingml/2006/main" xmlns:r="http://schemas.openxmlformats.org/officeDocument/2006/relationships" xmlns:p="http://schemas.openxmlformats.org/presentationml/2006/main" show="0">
   <p:cSld>
     <p:spTree>
@@ -14160,7 +14352,7 @@
           <a:p>
             <a:fld id="{292A9FD8-515A-4698-9313-0AB17EE9632B}" type="slidenum">
               <a:rPr lang="en-US" noProof="1" dirty="0" smtClean="0"/>
-              <a:t>42</a:t>
+              <a:t>43</a:t>
             </a:fld>
             <a:endParaRPr lang="en-US" noProof="1"/>
           </a:p>
@@ -14250,7 +14442,7 @@
 </p:sld>
 </file>
 
-<file path=ppt/slides/slide43.xml><?xml version="1.0" encoding="utf-8"?>
+<file path=ppt/slides/slide44.xml><?xml version="1.0" encoding="utf-8"?>
 <p:sld xmlns:a="http://schemas.openxmlformats.org/drawingml/2006/main" xmlns:r="http://schemas.openxmlformats.org/officeDocument/2006/relationships" xmlns:p="http://schemas.openxmlformats.org/presentationml/2006/main" show="0">
   <p:cSld>
     <p:spTree>
@@ -14336,7 +14528,7 @@
           <a:p>
             <a:fld id="{292A9FD8-515A-4698-9313-0AB17EE9632B}" type="slidenum">
               <a:rPr lang="en-US" noProof="1" dirty="0" smtClean="0"/>
-              <a:t>43</a:t>
+              <a:t>44</a:t>
             </a:fld>
             <a:endParaRPr lang="en-US" noProof="1"/>
           </a:p>
@@ -14426,7 +14618,7 @@
 </p:sld>
 </file>
 
-<file path=ppt/slides/slide44.xml><?xml version="1.0" encoding="utf-8"?>
+<file path=ppt/slides/slide45.xml><?xml version="1.0" encoding="utf-8"?>
 <p:sld xmlns:a="http://schemas.openxmlformats.org/drawingml/2006/main" xmlns:r="http://schemas.openxmlformats.org/officeDocument/2006/relationships" xmlns:p="http://schemas.openxmlformats.org/presentationml/2006/main" show="0">
   <p:cSld>
     <p:spTree>
@@ -14512,7 +14704,7 @@
           <a:p>
             <a:fld id="{292A9FD8-515A-4698-9313-0AB17EE9632B}" type="slidenum">
               <a:rPr lang="en-US" noProof="1" dirty="0" smtClean="0"/>
-              <a:t>44</a:t>
+              <a:t>45</a:t>
             </a:fld>
             <a:endParaRPr lang="en-US" noProof="1"/>
           </a:p>
@@ -14652,7 +14844,7 @@
 </p:sld>
 </file>
 
-<file path=ppt/slides/slide45.xml><?xml version="1.0" encoding="utf-8"?>
+<file path=ppt/slides/slide46.xml><?xml version="1.0" encoding="utf-8"?>
 <p:sld xmlns:a="http://schemas.openxmlformats.org/drawingml/2006/main" xmlns:r="http://schemas.openxmlformats.org/officeDocument/2006/relationships" xmlns:p="http://schemas.openxmlformats.org/presentationml/2006/main" show="0">
   <p:cSld>
     <p:spTree>
@@ -14750,7 +14942,7 @@
           <a:p>
             <a:fld id="{292A9FD8-515A-4698-9313-0AB17EE9632B}" type="slidenum">
               <a:rPr lang="en-US" noProof="1" dirty="0" smtClean="0"/>
-              <a:t>45</a:t>
+              <a:t>46</a:t>
             </a:fld>
             <a:endParaRPr lang="en-US" noProof="1"/>
           </a:p>
@@ -15107,7 +15299,7 @@
 </p:sld>
 </file>
 
-<file path=ppt/slides/slide46.xml><?xml version="1.0" encoding="utf-8"?>
+<file path=ppt/slides/slide47.xml><?xml version="1.0" encoding="utf-8"?>
 <p:sld xmlns:a="http://schemas.openxmlformats.org/drawingml/2006/main" xmlns:r="http://schemas.openxmlformats.org/officeDocument/2006/relationships" xmlns:p="http://schemas.openxmlformats.org/presentationml/2006/main" show="0">
   <p:cSld>
     <p:spTree>
@@ -15193,7 +15385,7 @@
           <a:p>
             <a:fld id="{292A9FD8-515A-4698-9313-0AB17EE9632B}" type="slidenum">
               <a:rPr lang="en-US" noProof="1" dirty="0" smtClean="0"/>
-              <a:t>46</a:t>
+              <a:t>47</a:t>
             </a:fld>
             <a:endParaRPr lang="en-US" noProof="1"/>
           </a:p>
@@ -15470,7 +15662,7 @@
 </p:sld>
 </file>
 
-<file path=ppt/slides/slide47.xml><?xml version="1.0" encoding="utf-8"?>
+<file path=ppt/slides/slide48.xml><?xml version="1.0" encoding="utf-8"?>
 <p:sld xmlns:a="http://schemas.openxmlformats.org/drawingml/2006/main" xmlns:r="http://schemas.openxmlformats.org/officeDocument/2006/relationships" xmlns:p="http://schemas.openxmlformats.org/presentationml/2006/main" show="0">
   <p:cSld>
     <p:spTree>
@@ -15557,7 +15749,7 @@
           <a:p>
             <a:fld id="{292A9FD8-515A-4698-9313-0AB17EE9632B}" type="slidenum">
               <a:rPr lang="en-US" noProof="1" dirty="0" smtClean="0"/>
-              <a:t>47</a:t>
+              <a:t>48</a:t>
             </a:fld>
             <a:endParaRPr lang="en-US" noProof="1"/>
           </a:p>
@@ -15576,7 +15768,7 @@
 </p:sld>
 </file>
 
-<file path=ppt/slides/slide48.xml><?xml version="1.0" encoding="utf-8"?>
+<file path=ppt/slides/slide49.xml><?xml version="1.0" encoding="utf-8"?>
 <p:sld xmlns:a="http://schemas.openxmlformats.org/drawingml/2006/main" xmlns:r="http://schemas.openxmlformats.org/officeDocument/2006/relationships" xmlns:p="http://schemas.openxmlformats.org/presentationml/2006/main" show="0">
   <p:cSld>
     <p:spTree>
@@ -15662,7 +15854,7 @@
           <a:p>
             <a:fld id="{292A9FD8-515A-4698-9313-0AB17EE9632B}" type="slidenum">
               <a:rPr lang="en-US" noProof="1" dirty="0" smtClean="0"/>
-              <a:t>48</a:t>
+              <a:t>49</a:t>
             </a:fld>
             <a:endParaRPr lang="en-US" noProof="1"/>
           </a:p>
@@ -15994,565 +16186,6 @@
     <p:extLst>
       <p:ext uri="{BB962C8B-B14F-4D97-AF65-F5344CB8AC3E}">
         <p14:creationId xmlns:p14="http://schemas.microsoft.com/office/powerpoint/2010/main" val="1923614958"/>
-      </p:ext>
-    </p:extLst>
-  </p:cSld>
-  <p:clrMapOvr>
-    <a:masterClrMapping/>
-  </p:clrMapOvr>
-</p:sld>
-</file>
-
-<file path=ppt/slides/slide49.xml><?xml version="1.0" encoding="utf-8"?>
-<p:sld xmlns:a="http://schemas.openxmlformats.org/drawingml/2006/main" xmlns:r="http://schemas.openxmlformats.org/officeDocument/2006/relationships" xmlns:p="http://schemas.openxmlformats.org/presentationml/2006/main" show="0">
-  <p:cSld>
-    <p:spTree>
-      <p:nvGrpSpPr>
-        <p:cNvPr id="1" name="">
-          <a:extLst>
-            <a:ext uri="{FF2B5EF4-FFF2-40B4-BE49-F238E27FC236}">
-              <a16:creationId xmlns:a16="http://schemas.microsoft.com/office/drawing/2014/main" id="{9AC8D082-1553-7A18-544C-877009A95BAC}"/>
-            </a:ext>
-          </a:extLst>
-        </p:cNvPr>
-        <p:cNvGrpSpPr/>
-        <p:nvPr/>
-      </p:nvGrpSpPr>
-      <p:grpSpPr>
-        <a:xfrm>
-          <a:off x="0" y="0"/>
-          <a:ext cx="0" cy="0"/>
-          <a:chOff x="0" y="0"/>
-          <a:chExt cx="0" cy="0"/>
-        </a:xfrm>
-      </p:grpSpPr>
-      <p:sp>
-        <p:nvSpPr>
-          <p:cNvPr id="2" name="TextBox 1">
-            <a:extLst>
-              <a:ext uri="{FF2B5EF4-FFF2-40B4-BE49-F238E27FC236}">
-                <a16:creationId xmlns:a16="http://schemas.microsoft.com/office/drawing/2014/main" id="{33F4502D-F07D-F841-D1E8-B1968807A964}"/>
-              </a:ext>
-            </a:extLst>
-          </p:cNvPr>
-          <p:cNvSpPr txBox="1"/>
-          <p:nvPr/>
-        </p:nvSpPr>
-        <p:spPr>
-          <a:xfrm>
-            <a:off x="469555" y="626071"/>
-            <a:ext cx="7512909" cy="523220"/>
-          </a:xfrm>
-          <a:prstGeom prst="rect">
-            <a:avLst/>
-          </a:prstGeom>
-          <a:noFill/>
-        </p:spPr>
-        <p:txBody>
-          <a:bodyPr wrap="square" rtlCol="0">
-            <a:spAutoFit/>
-          </a:bodyPr>
-          <a:lstStyle/>
-          <a:p>
-            <a:r>
-              <a:rPr lang="en-US" sz="2800" noProof="1">
-                <a:solidFill>
-                  <a:srgbClr val="002060"/>
-                </a:solidFill>
-              </a:rPr>
-              <a:t>Simple Product Program</a:t>
-            </a:r>
-            <a:endParaRPr lang="en-US" sz="2800" noProof="1"/>
-          </a:p>
-        </p:txBody>
-      </p:sp>
-      <p:sp>
-        <p:nvSpPr>
-          <p:cNvPr id="3" name="Slide Number Placeholder 2">
-            <a:extLst>
-              <a:ext uri="{FF2B5EF4-FFF2-40B4-BE49-F238E27FC236}">
-                <a16:creationId xmlns:a16="http://schemas.microsoft.com/office/drawing/2014/main" id="{A2790DA9-F599-59FB-0135-024CFF9CE765}"/>
-              </a:ext>
-            </a:extLst>
-          </p:cNvPr>
-          <p:cNvSpPr>
-            <a:spLocks noGrp="1"/>
-          </p:cNvSpPr>
-          <p:nvPr>
-            <p:ph type="sldNum" sz="quarter" idx="12"/>
-          </p:nvPr>
-        </p:nvSpPr>
-        <p:spPr/>
-        <p:txBody>
-          <a:bodyPr/>
-          <a:lstStyle/>
-          <a:p>
-            <a:fld id="{292A9FD8-515A-4698-9313-0AB17EE9632B}" type="slidenum">
-              <a:rPr lang="en-US" noProof="1" dirty="0" smtClean="0"/>
-              <a:t>49</a:t>
-            </a:fld>
-            <a:endParaRPr lang="en-US" noProof="1"/>
-          </a:p>
-        </p:txBody>
-      </p:sp>
-      <p:sp>
-        <p:nvSpPr>
-          <p:cNvPr id="4" name="TextBox 3">
-            <a:extLst>
-              <a:ext uri="{FF2B5EF4-FFF2-40B4-BE49-F238E27FC236}">
-                <a16:creationId xmlns:a16="http://schemas.microsoft.com/office/drawing/2014/main" id="{337D949A-38E4-6435-CD39-34D6E452C940}"/>
-              </a:ext>
-            </a:extLst>
-          </p:cNvPr>
-          <p:cNvSpPr txBox="1"/>
-          <p:nvPr/>
-        </p:nvSpPr>
-        <p:spPr>
-          <a:xfrm>
-            <a:off x="469556" y="1971219"/>
-            <a:ext cx="2181226" cy="2246769"/>
-          </a:xfrm>
-          <a:prstGeom prst="rect">
-            <a:avLst/>
-          </a:prstGeom>
-          <a:noFill/>
-        </p:spPr>
-        <p:txBody>
-          <a:bodyPr wrap="square" rtlCol="0">
-            <a:spAutoFit/>
-          </a:bodyPr>
-          <a:lstStyle/>
-          <a:p>
-            <a:r>
-              <a:rPr lang="en-US" sz="2000" noProof="1">
-                <a:solidFill>
-                  <a:srgbClr val="002060"/>
-                </a:solidFill>
-              </a:rPr>
-              <a:t>val ref x : int</a:t>
-            </a:r>
-          </a:p>
-          <a:p>
-            <a:r>
-              <a:rPr lang="en-US" sz="2000" noProof="1">
-                <a:solidFill>
-                  <a:srgbClr val="002060"/>
-                </a:solidFill>
-              </a:rPr>
-              <a:t>val ref y : int</a:t>
-            </a:r>
-          </a:p>
-          <a:p>
-            <a:r>
-              <a:rPr lang="en-US" sz="2000" noProof="1">
-                <a:solidFill>
-                  <a:srgbClr val="002060"/>
-                </a:solidFill>
-              </a:rPr>
-              <a:t>val ref z : int</a:t>
-            </a:r>
-          </a:p>
-          <a:p>
-            <a:endParaRPr lang="en-US" sz="2000" noProof="1">
-              <a:solidFill>
-                <a:srgbClr val="002060"/>
-              </a:solidFill>
-            </a:endParaRPr>
-          </a:p>
-          <a:p>
-            <a:r>
-              <a:rPr lang="en-US" sz="2000" noProof="1">
-                <a:solidFill>
-                  <a:srgbClr val="002060"/>
-                </a:solidFill>
-              </a:rPr>
-              <a:t>let original () =</a:t>
-            </a:r>
-          </a:p>
-          <a:p>
-            <a:r>
-              <a:rPr lang="en-US" sz="2000" noProof="1">
-                <a:solidFill>
-                  <a:srgbClr val="002060"/>
-                </a:solidFill>
-              </a:rPr>
-              <a:t>    y &lt;- x + 1; </a:t>
-            </a:r>
-          </a:p>
-          <a:p>
-            <a:r>
-              <a:rPr lang="en-US" sz="2000" noProof="1">
-                <a:solidFill>
-                  <a:srgbClr val="002060"/>
-                </a:solidFill>
-              </a:rPr>
-              <a:t>    z &lt;- y + 1;</a:t>
-            </a:r>
-            <a:endParaRPr lang="en-US" noProof="1"/>
-          </a:p>
-        </p:txBody>
-      </p:sp>
-      <p:sp>
-        <p:nvSpPr>
-          <p:cNvPr id="5" name="TextBox 4">
-            <a:extLst>
-              <a:ext uri="{FF2B5EF4-FFF2-40B4-BE49-F238E27FC236}">
-                <a16:creationId xmlns:a16="http://schemas.microsoft.com/office/drawing/2014/main" id="{42D647A4-9760-5FD9-452D-5BE8515A49FF}"/>
-              </a:ext>
-            </a:extLst>
-          </p:cNvPr>
-          <p:cNvSpPr txBox="1"/>
-          <p:nvPr/>
-        </p:nvSpPr>
-        <p:spPr>
-          <a:xfrm>
-            <a:off x="469556" y="1409004"/>
-            <a:ext cx="1762899" cy="430887"/>
-          </a:xfrm>
-          <a:prstGeom prst="rect">
-            <a:avLst/>
-          </a:prstGeom>
-          <a:noFill/>
-        </p:spPr>
-        <p:txBody>
-          <a:bodyPr wrap="square" rtlCol="0">
-            <a:spAutoFit/>
-          </a:bodyPr>
-          <a:lstStyle/>
-          <a:p>
-            <a:pPr algn="ctr"/>
-            <a:r>
-              <a:rPr lang="en-US" sz="2200" b="1" noProof="1">
-                <a:solidFill>
-                  <a:srgbClr val="002060"/>
-                </a:solidFill>
-              </a:rPr>
-              <a:t>Original</a:t>
-            </a:r>
-          </a:p>
-        </p:txBody>
-      </p:sp>
-      <p:sp>
-        <p:nvSpPr>
-          <p:cNvPr id="6" name="TextBox 5">
-            <a:extLst>
-              <a:ext uri="{FF2B5EF4-FFF2-40B4-BE49-F238E27FC236}">
-                <a16:creationId xmlns:a16="http://schemas.microsoft.com/office/drawing/2014/main" id="{C1BE2CDF-15DB-17AA-BDEC-6B0FDC33B650}"/>
-              </a:ext>
-            </a:extLst>
-          </p:cNvPr>
-          <p:cNvSpPr txBox="1"/>
-          <p:nvPr/>
-        </p:nvSpPr>
-        <p:spPr>
-          <a:xfrm>
-            <a:off x="3055045" y="1971218"/>
-            <a:ext cx="2443101" cy="2246769"/>
-          </a:xfrm>
-          <a:prstGeom prst="rect">
-            <a:avLst/>
-          </a:prstGeom>
-          <a:noFill/>
-        </p:spPr>
-        <p:txBody>
-          <a:bodyPr wrap="square" rtlCol="0">
-            <a:spAutoFit/>
-          </a:bodyPr>
-          <a:lstStyle/>
-          <a:p>
-            <a:r>
-              <a:rPr lang="en-US" sz="2000" noProof="1">
-                <a:solidFill>
-                  <a:srgbClr val="002060"/>
-                </a:solidFill>
-              </a:rPr>
-              <a:t>val ref x : int</a:t>
-            </a:r>
-          </a:p>
-          <a:p>
-            <a:r>
-              <a:rPr lang="en-US" sz="2000" noProof="1">
-                <a:solidFill>
-                  <a:srgbClr val="002060"/>
-                </a:solidFill>
-              </a:rPr>
-              <a:t>val ref y : int</a:t>
-            </a:r>
-          </a:p>
-          <a:p>
-            <a:r>
-              <a:rPr lang="en-US" sz="2000" noProof="1">
-                <a:solidFill>
-                  <a:srgbClr val="002060"/>
-                </a:solidFill>
-              </a:rPr>
-              <a:t>val ref z : int</a:t>
-            </a:r>
-          </a:p>
-          <a:p>
-            <a:endParaRPr lang="en-US" sz="2000" noProof="1">
-              <a:solidFill>
-                <a:srgbClr val="002060"/>
-              </a:solidFill>
-            </a:endParaRPr>
-          </a:p>
-          <a:p>
-            <a:r>
-              <a:rPr lang="en-US" sz="2000" noProof="1">
-                <a:solidFill>
-                  <a:srgbClr val="002060"/>
-                </a:solidFill>
-              </a:rPr>
-              <a:t>let transformed () =</a:t>
-            </a:r>
-          </a:p>
-          <a:p>
-            <a:r>
-              <a:rPr lang="en-US" sz="2000" noProof="1">
-                <a:solidFill>
-                  <a:srgbClr val="002060"/>
-                </a:solidFill>
-              </a:rPr>
-              <a:t>    z &lt;- x + 2; </a:t>
-            </a:r>
-          </a:p>
-          <a:p>
-            <a:r>
-              <a:rPr lang="en-US" sz="2000" noProof="1">
-                <a:solidFill>
-                  <a:srgbClr val="002060"/>
-                </a:solidFill>
-              </a:rPr>
-              <a:t>    y &lt;- z - 1;</a:t>
-            </a:r>
-            <a:endParaRPr lang="en-US" sz="2000" noProof="1"/>
-          </a:p>
-        </p:txBody>
-      </p:sp>
-      <p:sp>
-        <p:nvSpPr>
-          <p:cNvPr id="7" name="TextBox 6">
-            <a:extLst>
-              <a:ext uri="{FF2B5EF4-FFF2-40B4-BE49-F238E27FC236}">
-                <a16:creationId xmlns:a16="http://schemas.microsoft.com/office/drawing/2014/main" id="{AAEAFED1-B1C3-074F-FABF-01CC640A4942}"/>
-              </a:ext>
-            </a:extLst>
-          </p:cNvPr>
-          <p:cNvSpPr txBox="1"/>
-          <p:nvPr/>
-        </p:nvSpPr>
-        <p:spPr>
-          <a:xfrm>
-            <a:off x="3152706" y="1406265"/>
-            <a:ext cx="1850047" cy="430887"/>
-          </a:xfrm>
-          <a:prstGeom prst="rect">
-            <a:avLst/>
-          </a:prstGeom>
-          <a:noFill/>
-        </p:spPr>
-        <p:txBody>
-          <a:bodyPr wrap="square" rtlCol="0">
-            <a:spAutoFit/>
-          </a:bodyPr>
-          <a:lstStyle/>
-          <a:p>
-            <a:pPr algn="ctr"/>
-            <a:r>
-              <a:rPr lang="en-US" sz="2200" b="1" noProof="1">
-                <a:solidFill>
-                  <a:srgbClr val="002060"/>
-                </a:solidFill>
-              </a:rPr>
-              <a:t>Transformed</a:t>
-            </a:r>
-          </a:p>
-        </p:txBody>
-      </p:sp>
-      <p:sp>
-        <p:nvSpPr>
-          <p:cNvPr id="8" name="TextBox 7">
-            <a:extLst>
-              <a:ext uri="{FF2B5EF4-FFF2-40B4-BE49-F238E27FC236}">
-                <a16:creationId xmlns:a16="http://schemas.microsoft.com/office/drawing/2014/main" id="{7CE8A61B-3F7F-A926-EB4E-C7E2EF324B04}"/>
-              </a:ext>
-            </a:extLst>
-          </p:cNvPr>
-          <p:cNvSpPr txBox="1"/>
-          <p:nvPr/>
-        </p:nvSpPr>
-        <p:spPr>
-          <a:xfrm>
-            <a:off x="5848864" y="1971218"/>
-            <a:ext cx="2825580" cy="3477875"/>
-          </a:xfrm>
-          <a:prstGeom prst="rect">
-            <a:avLst/>
-          </a:prstGeom>
-          <a:noFill/>
-        </p:spPr>
-        <p:txBody>
-          <a:bodyPr wrap="square" rtlCol="0">
-            <a:spAutoFit/>
-          </a:bodyPr>
-          <a:lstStyle/>
-          <a:p>
-            <a:r>
-              <a:rPr lang="en-US" sz="2000" noProof="1">
-                <a:solidFill>
-                  <a:srgbClr val="002060"/>
-                </a:solidFill>
-              </a:rPr>
-              <a:t>val ref x1, y1, z1 : int</a:t>
-            </a:r>
-          </a:p>
-          <a:p>
-            <a:r>
-              <a:rPr lang="en-US" sz="2000" noProof="1">
-                <a:solidFill>
-                  <a:srgbClr val="002060"/>
-                </a:solidFill>
-              </a:rPr>
-              <a:t>val ref x2, y2, z2 : int</a:t>
-            </a:r>
-          </a:p>
-          <a:p>
-            <a:r>
-              <a:rPr lang="en-US" sz="2000" noProof="1">
-                <a:solidFill>
-                  <a:srgbClr val="002060"/>
-                </a:solidFill>
-              </a:rPr>
-              <a:t>      </a:t>
-            </a:r>
-          </a:p>
-          <a:p>
-            <a:r>
-              <a:rPr lang="en-US" sz="2000" noProof="1">
-                <a:solidFill>
-                  <a:srgbClr val="002060"/>
-                </a:solidFill>
-              </a:rPr>
-              <a:t>let product ()</a:t>
-            </a:r>
-          </a:p>
-          <a:p>
-            <a:r>
-              <a:rPr lang="en-US" sz="2000" noProof="1">
-                <a:solidFill>
-                  <a:srgbClr val="002060"/>
-                </a:solidFill>
-              </a:rPr>
-              <a:t>    requires { x1 = x2 }</a:t>
-            </a:r>
-          </a:p>
-          <a:p>
-            <a:r>
-              <a:rPr lang="en-US" sz="2000" noProof="1">
-                <a:solidFill>
-                  <a:srgbClr val="002060"/>
-                </a:solidFill>
-              </a:rPr>
-              <a:t>    ensures { y1 = y2 }</a:t>
-            </a:r>
-          </a:p>
-          <a:p>
-            <a:r>
-              <a:rPr lang="en-US" sz="2000" noProof="1">
-                <a:solidFill>
-                  <a:srgbClr val="002060"/>
-                </a:solidFill>
-              </a:rPr>
-              <a:t>    ensures { z1 = z2 } =</a:t>
-            </a:r>
-          </a:p>
-          <a:p>
-            <a:r>
-              <a:rPr lang="en-US" sz="2000" noProof="1">
-                <a:solidFill>
-                  <a:srgbClr val="002060"/>
-                </a:solidFill>
-              </a:rPr>
-              <a:t>          y1 &lt;- x1 + 1; </a:t>
-            </a:r>
-          </a:p>
-          <a:p>
-            <a:r>
-              <a:rPr lang="en-US" sz="2000" noProof="1">
-                <a:solidFill>
-                  <a:srgbClr val="002060"/>
-                </a:solidFill>
-              </a:rPr>
-              <a:t>          z2 &lt;- x2 + 2;</a:t>
-            </a:r>
-          </a:p>
-          <a:p>
-            <a:r>
-              <a:rPr lang="en-US" sz="2000" noProof="1">
-                <a:solidFill>
-                  <a:srgbClr val="002060"/>
-                </a:solidFill>
-              </a:rPr>
-              <a:t>          z1 &lt;- y1 + 1;</a:t>
-            </a:r>
-          </a:p>
-          <a:p>
-            <a:r>
-              <a:rPr lang="en-US" sz="2000" noProof="1">
-                <a:solidFill>
-                  <a:srgbClr val="002060"/>
-                </a:solidFill>
-              </a:rPr>
-              <a:t>          y2 &lt;- z2 - 1;</a:t>
-            </a:r>
-            <a:endParaRPr lang="en-US" noProof="1"/>
-          </a:p>
-        </p:txBody>
-      </p:sp>
-      <p:sp>
-        <p:nvSpPr>
-          <p:cNvPr id="9" name="TextBox 8">
-            <a:extLst>
-              <a:ext uri="{FF2B5EF4-FFF2-40B4-BE49-F238E27FC236}">
-                <a16:creationId xmlns:a16="http://schemas.microsoft.com/office/drawing/2014/main" id="{0693B13C-A56F-280A-96AA-2FC544F3C61E}"/>
-              </a:ext>
-            </a:extLst>
-          </p:cNvPr>
-          <p:cNvSpPr txBox="1"/>
-          <p:nvPr/>
-        </p:nvSpPr>
-        <p:spPr>
-          <a:xfrm>
-            <a:off x="5923004" y="1406264"/>
-            <a:ext cx="2387891" cy="430887"/>
-          </a:xfrm>
-          <a:prstGeom prst="rect">
-            <a:avLst/>
-          </a:prstGeom>
-          <a:noFill/>
-        </p:spPr>
-        <p:txBody>
-          <a:bodyPr wrap="square" rtlCol="0">
-            <a:spAutoFit/>
-          </a:bodyPr>
-          <a:lstStyle/>
-          <a:p>
-            <a:pPr algn="ctr"/>
-            <a:r>
-              <a:rPr lang="en-US" sz="2200" b="1" noProof="1">
-                <a:solidFill>
-                  <a:srgbClr val="002060"/>
-                </a:solidFill>
-              </a:rPr>
-              <a:t>Product Program</a:t>
-            </a:r>
-          </a:p>
-        </p:txBody>
-      </p:sp>
-    </p:spTree>
-    <p:extLst>
-      <p:ext uri="{BB962C8B-B14F-4D97-AF65-F5344CB8AC3E}">
-        <p14:creationId xmlns:p14="http://schemas.microsoft.com/office/powerpoint/2010/main" val="2195157632"/>
       </p:ext>
     </p:extLst>
   </p:cSld>
@@ -16676,6 +16309,565 @@
         <p:cNvPr id="1" name="">
           <a:extLst>
             <a:ext uri="{FF2B5EF4-FFF2-40B4-BE49-F238E27FC236}">
+              <a16:creationId xmlns:a16="http://schemas.microsoft.com/office/drawing/2014/main" id="{9AC8D082-1553-7A18-544C-877009A95BAC}"/>
+            </a:ext>
+          </a:extLst>
+        </p:cNvPr>
+        <p:cNvGrpSpPr/>
+        <p:nvPr/>
+      </p:nvGrpSpPr>
+      <p:grpSpPr>
+        <a:xfrm>
+          <a:off x="0" y="0"/>
+          <a:ext cx="0" cy="0"/>
+          <a:chOff x="0" y="0"/>
+          <a:chExt cx="0" cy="0"/>
+        </a:xfrm>
+      </p:grpSpPr>
+      <p:sp>
+        <p:nvSpPr>
+          <p:cNvPr id="2" name="TextBox 1">
+            <a:extLst>
+              <a:ext uri="{FF2B5EF4-FFF2-40B4-BE49-F238E27FC236}">
+                <a16:creationId xmlns:a16="http://schemas.microsoft.com/office/drawing/2014/main" id="{33F4502D-F07D-F841-D1E8-B1968807A964}"/>
+              </a:ext>
+            </a:extLst>
+          </p:cNvPr>
+          <p:cNvSpPr txBox="1"/>
+          <p:nvPr/>
+        </p:nvSpPr>
+        <p:spPr>
+          <a:xfrm>
+            <a:off x="469555" y="626071"/>
+            <a:ext cx="7512909" cy="523220"/>
+          </a:xfrm>
+          <a:prstGeom prst="rect">
+            <a:avLst/>
+          </a:prstGeom>
+          <a:noFill/>
+        </p:spPr>
+        <p:txBody>
+          <a:bodyPr wrap="square" rtlCol="0">
+            <a:spAutoFit/>
+          </a:bodyPr>
+          <a:lstStyle/>
+          <a:p>
+            <a:r>
+              <a:rPr lang="en-US" sz="2800" noProof="1">
+                <a:solidFill>
+                  <a:srgbClr val="002060"/>
+                </a:solidFill>
+              </a:rPr>
+              <a:t>Simple Product Program</a:t>
+            </a:r>
+            <a:endParaRPr lang="en-US" sz="2800" noProof="1"/>
+          </a:p>
+        </p:txBody>
+      </p:sp>
+      <p:sp>
+        <p:nvSpPr>
+          <p:cNvPr id="3" name="Slide Number Placeholder 2">
+            <a:extLst>
+              <a:ext uri="{FF2B5EF4-FFF2-40B4-BE49-F238E27FC236}">
+                <a16:creationId xmlns:a16="http://schemas.microsoft.com/office/drawing/2014/main" id="{A2790DA9-F599-59FB-0135-024CFF9CE765}"/>
+              </a:ext>
+            </a:extLst>
+          </p:cNvPr>
+          <p:cNvSpPr>
+            <a:spLocks noGrp="1"/>
+          </p:cNvSpPr>
+          <p:nvPr>
+            <p:ph type="sldNum" sz="quarter" idx="12"/>
+          </p:nvPr>
+        </p:nvSpPr>
+        <p:spPr/>
+        <p:txBody>
+          <a:bodyPr/>
+          <a:lstStyle/>
+          <a:p>
+            <a:fld id="{292A9FD8-515A-4698-9313-0AB17EE9632B}" type="slidenum">
+              <a:rPr lang="en-US" noProof="1" dirty="0" smtClean="0"/>
+              <a:t>50</a:t>
+            </a:fld>
+            <a:endParaRPr lang="en-US" noProof="1"/>
+          </a:p>
+        </p:txBody>
+      </p:sp>
+      <p:sp>
+        <p:nvSpPr>
+          <p:cNvPr id="4" name="TextBox 3">
+            <a:extLst>
+              <a:ext uri="{FF2B5EF4-FFF2-40B4-BE49-F238E27FC236}">
+                <a16:creationId xmlns:a16="http://schemas.microsoft.com/office/drawing/2014/main" id="{337D949A-38E4-6435-CD39-34D6E452C940}"/>
+              </a:ext>
+            </a:extLst>
+          </p:cNvPr>
+          <p:cNvSpPr txBox="1"/>
+          <p:nvPr/>
+        </p:nvSpPr>
+        <p:spPr>
+          <a:xfrm>
+            <a:off x="469556" y="1971219"/>
+            <a:ext cx="2181226" cy="2246769"/>
+          </a:xfrm>
+          <a:prstGeom prst="rect">
+            <a:avLst/>
+          </a:prstGeom>
+          <a:noFill/>
+        </p:spPr>
+        <p:txBody>
+          <a:bodyPr wrap="square" rtlCol="0">
+            <a:spAutoFit/>
+          </a:bodyPr>
+          <a:lstStyle/>
+          <a:p>
+            <a:r>
+              <a:rPr lang="en-US" sz="2000" noProof="1">
+                <a:solidFill>
+                  <a:srgbClr val="002060"/>
+                </a:solidFill>
+              </a:rPr>
+              <a:t>val ref x : int</a:t>
+            </a:r>
+          </a:p>
+          <a:p>
+            <a:r>
+              <a:rPr lang="en-US" sz="2000" noProof="1">
+                <a:solidFill>
+                  <a:srgbClr val="002060"/>
+                </a:solidFill>
+              </a:rPr>
+              <a:t>val ref y : int</a:t>
+            </a:r>
+          </a:p>
+          <a:p>
+            <a:r>
+              <a:rPr lang="en-US" sz="2000" noProof="1">
+                <a:solidFill>
+                  <a:srgbClr val="002060"/>
+                </a:solidFill>
+              </a:rPr>
+              <a:t>val ref z : int</a:t>
+            </a:r>
+          </a:p>
+          <a:p>
+            <a:endParaRPr lang="en-US" sz="2000" noProof="1">
+              <a:solidFill>
+                <a:srgbClr val="002060"/>
+              </a:solidFill>
+            </a:endParaRPr>
+          </a:p>
+          <a:p>
+            <a:r>
+              <a:rPr lang="en-US" sz="2000" noProof="1">
+                <a:solidFill>
+                  <a:srgbClr val="002060"/>
+                </a:solidFill>
+              </a:rPr>
+              <a:t>let original () =</a:t>
+            </a:r>
+          </a:p>
+          <a:p>
+            <a:r>
+              <a:rPr lang="en-US" sz="2000" noProof="1">
+                <a:solidFill>
+                  <a:srgbClr val="002060"/>
+                </a:solidFill>
+              </a:rPr>
+              <a:t>    y &lt;- x + 1; </a:t>
+            </a:r>
+          </a:p>
+          <a:p>
+            <a:r>
+              <a:rPr lang="en-US" sz="2000" noProof="1">
+                <a:solidFill>
+                  <a:srgbClr val="002060"/>
+                </a:solidFill>
+              </a:rPr>
+              <a:t>    z &lt;- y + 1;</a:t>
+            </a:r>
+            <a:endParaRPr lang="en-US" noProof="1"/>
+          </a:p>
+        </p:txBody>
+      </p:sp>
+      <p:sp>
+        <p:nvSpPr>
+          <p:cNvPr id="5" name="TextBox 4">
+            <a:extLst>
+              <a:ext uri="{FF2B5EF4-FFF2-40B4-BE49-F238E27FC236}">
+                <a16:creationId xmlns:a16="http://schemas.microsoft.com/office/drawing/2014/main" id="{42D647A4-9760-5FD9-452D-5BE8515A49FF}"/>
+              </a:ext>
+            </a:extLst>
+          </p:cNvPr>
+          <p:cNvSpPr txBox="1"/>
+          <p:nvPr/>
+        </p:nvSpPr>
+        <p:spPr>
+          <a:xfrm>
+            <a:off x="469556" y="1409004"/>
+            <a:ext cx="1762899" cy="430887"/>
+          </a:xfrm>
+          <a:prstGeom prst="rect">
+            <a:avLst/>
+          </a:prstGeom>
+          <a:noFill/>
+        </p:spPr>
+        <p:txBody>
+          <a:bodyPr wrap="square" rtlCol="0">
+            <a:spAutoFit/>
+          </a:bodyPr>
+          <a:lstStyle/>
+          <a:p>
+            <a:pPr algn="ctr"/>
+            <a:r>
+              <a:rPr lang="en-US" sz="2200" b="1" noProof="1">
+                <a:solidFill>
+                  <a:srgbClr val="002060"/>
+                </a:solidFill>
+              </a:rPr>
+              <a:t>Original</a:t>
+            </a:r>
+          </a:p>
+        </p:txBody>
+      </p:sp>
+      <p:sp>
+        <p:nvSpPr>
+          <p:cNvPr id="6" name="TextBox 5">
+            <a:extLst>
+              <a:ext uri="{FF2B5EF4-FFF2-40B4-BE49-F238E27FC236}">
+                <a16:creationId xmlns:a16="http://schemas.microsoft.com/office/drawing/2014/main" id="{C1BE2CDF-15DB-17AA-BDEC-6B0FDC33B650}"/>
+              </a:ext>
+            </a:extLst>
+          </p:cNvPr>
+          <p:cNvSpPr txBox="1"/>
+          <p:nvPr/>
+        </p:nvSpPr>
+        <p:spPr>
+          <a:xfrm>
+            <a:off x="3055045" y="1971218"/>
+            <a:ext cx="2443101" cy="2246769"/>
+          </a:xfrm>
+          <a:prstGeom prst="rect">
+            <a:avLst/>
+          </a:prstGeom>
+          <a:noFill/>
+        </p:spPr>
+        <p:txBody>
+          <a:bodyPr wrap="square" rtlCol="0">
+            <a:spAutoFit/>
+          </a:bodyPr>
+          <a:lstStyle/>
+          <a:p>
+            <a:r>
+              <a:rPr lang="en-US" sz="2000" noProof="1">
+                <a:solidFill>
+                  <a:srgbClr val="002060"/>
+                </a:solidFill>
+              </a:rPr>
+              <a:t>val ref x : int</a:t>
+            </a:r>
+          </a:p>
+          <a:p>
+            <a:r>
+              <a:rPr lang="en-US" sz="2000" noProof="1">
+                <a:solidFill>
+                  <a:srgbClr val="002060"/>
+                </a:solidFill>
+              </a:rPr>
+              <a:t>val ref y : int</a:t>
+            </a:r>
+          </a:p>
+          <a:p>
+            <a:r>
+              <a:rPr lang="en-US" sz="2000" noProof="1">
+                <a:solidFill>
+                  <a:srgbClr val="002060"/>
+                </a:solidFill>
+              </a:rPr>
+              <a:t>val ref z : int</a:t>
+            </a:r>
+          </a:p>
+          <a:p>
+            <a:endParaRPr lang="en-US" sz="2000" noProof="1">
+              <a:solidFill>
+                <a:srgbClr val="002060"/>
+              </a:solidFill>
+            </a:endParaRPr>
+          </a:p>
+          <a:p>
+            <a:r>
+              <a:rPr lang="en-US" sz="2000" noProof="1">
+                <a:solidFill>
+                  <a:srgbClr val="002060"/>
+                </a:solidFill>
+              </a:rPr>
+              <a:t>let transformed () =</a:t>
+            </a:r>
+          </a:p>
+          <a:p>
+            <a:r>
+              <a:rPr lang="en-US" sz="2000" noProof="1">
+                <a:solidFill>
+                  <a:srgbClr val="002060"/>
+                </a:solidFill>
+              </a:rPr>
+              <a:t>    z &lt;- x + 2; </a:t>
+            </a:r>
+          </a:p>
+          <a:p>
+            <a:r>
+              <a:rPr lang="en-US" sz="2000" noProof="1">
+                <a:solidFill>
+                  <a:srgbClr val="002060"/>
+                </a:solidFill>
+              </a:rPr>
+              <a:t>    y &lt;- z - 1;</a:t>
+            </a:r>
+            <a:endParaRPr lang="en-US" sz="2000" noProof="1"/>
+          </a:p>
+        </p:txBody>
+      </p:sp>
+      <p:sp>
+        <p:nvSpPr>
+          <p:cNvPr id="7" name="TextBox 6">
+            <a:extLst>
+              <a:ext uri="{FF2B5EF4-FFF2-40B4-BE49-F238E27FC236}">
+                <a16:creationId xmlns:a16="http://schemas.microsoft.com/office/drawing/2014/main" id="{AAEAFED1-B1C3-074F-FABF-01CC640A4942}"/>
+              </a:ext>
+            </a:extLst>
+          </p:cNvPr>
+          <p:cNvSpPr txBox="1"/>
+          <p:nvPr/>
+        </p:nvSpPr>
+        <p:spPr>
+          <a:xfrm>
+            <a:off x="3152706" y="1406265"/>
+            <a:ext cx="1850047" cy="430887"/>
+          </a:xfrm>
+          <a:prstGeom prst="rect">
+            <a:avLst/>
+          </a:prstGeom>
+          <a:noFill/>
+        </p:spPr>
+        <p:txBody>
+          <a:bodyPr wrap="square" rtlCol="0">
+            <a:spAutoFit/>
+          </a:bodyPr>
+          <a:lstStyle/>
+          <a:p>
+            <a:pPr algn="ctr"/>
+            <a:r>
+              <a:rPr lang="en-US" sz="2200" b="1" noProof="1">
+                <a:solidFill>
+                  <a:srgbClr val="002060"/>
+                </a:solidFill>
+              </a:rPr>
+              <a:t>Transformed</a:t>
+            </a:r>
+          </a:p>
+        </p:txBody>
+      </p:sp>
+      <p:sp>
+        <p:nvSpPr>
+          <p:cNvPr id="8" name="TextBox 7">
+            <a:extLst>
+              <a:ext uri="{FF2B5EF4-FFF2-40B4-BE49-F238E27FC236}">
+                <a16:creationId xmlns:a16="http://schemas.microsoft.com/office/drawing/2014/main" id="{7CE8A61B-3F7F-A926-EB4E-C7E2EF324B04}"/>
+              </a:ext>
+            </a:extLst>
+          </p:cNvPr>
+          <p:cNvSpPr txBox="1"/>
+          <p:nvPr/>
+        </p:nvSpPr>
+        <p:spPr>
+          <a:xfrm>
+            <a:off x="5848864" y="1971218"/>
+            <a:ext cx="2825580" cy="3477875"/>
+          </a:xfrm>
+          <a:prstGeom prst="rect">
+            <a:avLst/>
+          </a:prstGeom>
+          <a:noFill/>
+        </p:spPr>
+        <p:txBody>
+          <a:bodyPr wrap="square" rtlCol="0">
+            <a:spAutoFit/>
+          </a:bodyPr>
+          <a:lstStyle/>
+          <a:p>
+            <a:r>
+              <a:rPr lang="en-US" sz="2000" noProof="1">
+                <a:solidFill>
+                  <a:srgbClr val="002060"/>
+                </a:solidFill>
+              </a:rPr>
+              <a:t>val ref x1, y1, z1 : int</a:t>
+            </a:r>
+          </a:p>
+          <a:p>
+            <a:r>
+              <a:rPr lang="en-US" sz="2000" noProof="1">
+                <a:solidFill>
+                  <a:srgbClr val="002060"/>
+                </a:solidFill>
+              </a:rPr>
+              <a:t>val ref x2, y2, z2 : int</a:t>
+            </a:r>
+          </a:p>
+          <a:p>
+            <a:r>
+              <a:rPr lang="en-US" sz="2000" noProof="1">
+                <a:solidFill>
+                  <a:srgbClr val="002060"/>
+                </a:solidFill>
+              </a:rPr>
+              <a:t>      </a:t>
+            </a:r>
+          </a:p>
+          <a:p>
+            <a:r>
+              <a:rPr lang="en-US" sz="2000" noProof="1">
+                <a:solidFill>
+                  <a:srgbClr val="002060"/>
+                </a:solidFill>
+              </a:rPr>
+              <a:t>let product ()</a:t>
+            </a:r>
+          </a:p>
+          <a:p>
+            <a:r>
+              <a:rPr lang="en-US" sz="2000" noProof="1">
+                <a:solidFill>
+                  <a:srgbClr val="002060"/>
+                </a:solidFill>
+              </a:rPr>
+              <a:t>    requires { x1 = x2 }</a:t>
+            </a:r>
+          </a:p>
+          <a:p>
+            <a:r>
+              <a:rPr lang="en-US" sz="2000" noProof="1">
+                <a:solidFill>
+                  <a:srgbClr val="002060"/>
+                </a:solidFill>
+              </a:rPr>
+              <a:t>    ensures { y1 = y2 }</a:t>
+            </a:r>
+          </a:p>
+          <a:p>
+            <a:r>
+              <a:rPr lang="en-US" sz="2000" noProof="1">
+                <a:solidFill>
+                  <a:srgbClr val="002060"/>
+                </a:solidFill>
+              </a:rPr>
+              <a:t>    ensures { z1 = z2 } =</a:t>
+            </a:r>
+          </a:p>
+          <a:p>
+            <a:r>
+              <a:rPr lang="en-US" sz="2000" noProof="1">
+                <a:solidFill>
+                  <a:srgbClr val="002060"/>
+                </a:solidFill>
+              </a:rPr>
+              <a:t>          y1 &lt;- x1 + 1; </a:t>
+            </a:r>
+          </a:p>
+          <a:p>
+            <a:r>
+              <a:rPr lang="en-US" sz="2000" noProof="1">
+                <a:solidFill>
+                  <a:srgbClr val="002060"/>
+                </a:solidFill>
+              </a:rPr>
+              <a:t>          z2 &lt;- x2 + 2;</a:t>
+            </a:r>
+          </a:p>
+          <a:p>
+            <a:r>
+              <a:rPr lang="en-US" sz="2000" noProof="1">
+                <a:solidFill>
+                  <a:srgbClr val="002060"/>
+                </a:solidFill>
+              </a:rPr>
+              <a:t>          z1 &lt;- y1 + 1;</a:t>
+            </a:r>
+          </a:p>
+          <a:p>
+            <a:r>
+              <a:rPr lang="en-US" sz="2000" noProof="1">
+                <a:solidFill>
+                  <a:srgbClr val="002060"/>
+                </a:solidFill>
+              </a:rPr>
+              <a:t>          y2 &lt;- z2 - 1;</a:t>
+            </a:r>
+            <a:endParaRPr lang="en-US" noProof="1"/>
+          </a:p>
+        </p:txBody>
+      </p:sp>
+      <p:sp>
+        <p:nvSpPr>
+          <p:cNvPr id="9" name="TextBox 8">
+            <a:extLst>
+              <a:ext uri="{FF2B5EF4-FFF2-40B4-BE49-F238E27FC236}">
+                <a16:creationId xmlns:a16="http://schemas.microsoft.com/office/drawing/2014/main" id="{0693B13C-A56F-280A-96AA-2FC544F3C61E}"/>
+              </a:ext>
+            </a:extLst>
+          </p:cNvPr>
+          <p:cNvSpPr txBox="1"/>
+          <p:nvPr/>
+        </p:nvSpPr>
+        <p:spPr>
+          <a:xfrm>
+            <a:off x="5923004" y="1406264"/>
+            <a:ext cx="2387891" cy="430887"/>
+          </a:xfrm>
+          <a:prstGeom prst="rect">
+            <a:avLst/>
+          </a:prstGeom>
+          <a:noFill/>
+        </p:spPr>
+        <p:txBody>
+          <a:bodyPr wrap="square" rtlCol="0">
+            <a:spAutoFit/>
+          </a:bodyPr>
+          <a:lstStyle/>
+          <a:p>
+            <a:pPr algn="ctr"/>
+            <a:r>
+              <a:rPr lang="en-US" sz="2200" b="1" noProof="1">
+                <a:solidFill>
+                  <a:srgbClr val="002060"/>
+                </a:solidFill>
+              </a:rPr>
+              <a:t>Product Program</a:t>
+            </a:r>
+          </a:p>
+        </p:txBody>
+      </p:sp>
+    </p:spTree>
+    <p:extLst>
+      <p:ext uri="{BB962C8B-B14F-4D97-AF65-F5344CB8AC3E}">
+        <p14:creationId xmlns:p14="http://schemas.microsoft.com/office/powerpoint/2010/main" val="2195157632"/>
+      </p:ext>
+    </p:extLst>
+  </p:cSld>
+  <p:clrMapOvr>
+    <a:masterClrMapping/>
+  </p:clrMapOvr>
+</p:sld>
+</file>
+
+<file path=ppt/slides/slide51.xml><?xml version="1.0" encoding="utf-8"?>
+<p:sld xmlns:a="http://schemas.openxmlformats.org/drawingml/2006/main" xmlns:r="http://schemas.openxmlformats.org/officeDocument/2006/relationships" xmlns:p="http://schemas.openxmlformats.org/presentationml/2006/main" show="0">
+  <p:cSld>
+    <p:spTree>
+      <p:nvGrpSpPr>
+        <p:cNvPr id="1" name="">
+          <a:extLst>
+            <a:ext uri="{FF2B5EF4-FFF2-40B4-BE49-F238E27FC236}">
               <a16:creationId xmlns:a16="http://schemas.microsoft.com/office/drawing/2014/main" id="{C110ABCC-D81C-6FB9-ECF0-29E19F4D5604}"/>
             </a:ext>
           </a:extLst>
@@ -16754,7 +16946,7 @@
           <a:p>
             <a:fld id="{292A9FD8-515A-4698-9313-0AB17EE9632B}" type="slidenum">
               <a:rPr lang="en-US" noProof="1" dirty="0" smtClean="0"/>
-              <a:t>50</a:t>
+              <a:t>51</a:t>
             </a:fld>
             <a:endParaRPr lang="en-US" noProof="1"/>
           </a:p>
@@ -17111,7 +17303,7 @@
 </p:sld>
 </file>
 
-<file path=ppt/slides/slide51.xml><?xml version="1.0" encoding="utf-8"?>
+<file path=ppt/slides/slide52.xml><?xml version="1.0" encoding="utf-8"?>
 <p:sld xmlns:a="http://schemas.openxmlformats.org/drawingml/2006/main" xmlns:r="http://schemas.openxmlformats.org/officeDocument/2006/relationships" xmlns:p="http://schemas.openxmlformats.org/presentationml/2006/main" show="0">
   <p:cSld>
     <p:spTree>
@@ -17197,7 +17389,7 @@
           <a:p>
             <a:fld id="{292A9FD8-515A-4698-9313-0AB17EE9632B}" type="slidenum">
               <a:rPr lang="en-US" noProof="1" dirty="0" smtClean="0"/>
-              <a:t>51</a:t>
+              <a:t>52</a:t>
             </a:fld>
             <a:endParaRPr lang="en-US" noProof="1"/>
           </a:p>
@@ -17524,7 +17716,7 @@
 </p:sld>
 </file>
 
-<file path=ppt/slides/slide52.xml><?xml version="1.0" encoding="utf-8"?>
+<file path=ppt/slides/slide53.xml><?xml version="1.0" encoding="utf-8"?>
 <p:sld xmlns:a="http://schemas.openxmlformats.org/drawingml/2006/main" xmlns:r="http://schemas.openxmlformats.org/officeDocument/2006/relationships" xmlns:p="http://schemas.openxmlformats.org/presentationml/2006/main" show="0">
   <p:cSld>
     <p:spTree>
@@ -17611,7 +17803,7 @@
           <a:p>
             <a:fld id="{292A9FD8-515A-4698-9313-0AB17EE9632B}" type="slidenum">
               <a:rPr lang="en-US" noProof="1" dirty="0" smtClean="0"/>
-              <a:t>52</a:t>
+              <a:t>53</a:t>
             </a:fld>
             <a:endParaRPr lang="en-US" noProof="1"/>
           </a:p>
@@ -17630,7 +17822,7 @@
 </p:sld>
 </file>
 
-<file path=ppt/slides/slide53.xml><?xml version="1.0" encoding="utf-8"?>
+<file path=ppt/slides/slide54.xml><?xml version="1.0" encoding="utf-8"?>
 <p:sld xmlns:a="http://schemas.openxmlformats.org/drawingml/2006/main" xmlns:r="http://schemas.openxmlformats.org/officeDocument/2006/relationships" xmlns:p="http://schemas.openxmlformats.org/presentationml/2006/main" show="0">
   <p:cSld>
     <p:spTree>
@@ -17865,7 +18057,7 @@
           <a:p>
             <a:fld id="{292A9FD8-515A-4698-9313-0AB17EE9632B}" type="slidenum">
               <a:rPr lang="en-US" noProof="1" dirty="0" smtClean="0"/>
-              <a:t>53</a:t>
+              <a:t>54</a:t>
             </a:fld>
             <a:endParaRPr lang="en-US" noProof="1"/>
           </a:p>
@@ -17990,8 +18182,8 @@
         </p:nvSpPr>
         <p:spPr>
           <a:xfrm>
-            <a:off x="469556" y="2022795"/>
-            <a:ext cx="6664412" cy="830997"/>
+            <a:off x="469555" y="1792136"/>
+            <a:ext cx="7199872" cy="2893100"/>
           </a:xfrm>
           <a:prstGeom prst="rect">
             <a:avLst/>
@@ -18014,8 +18206,15 @@
                   <a:srgbClr val="002060"/>
                 </a:solidFill>
               </a:rPr>
-              <a:t>ADD CONTENT</a:t>
-            </a:r>
+              <a:t>A tool that aims to verify relational properties of pointer programs based on relational region logic</a:t>
+            </a:r>
+          </a:p>
+          <a:p>
+            <a:endParaRPr lang="en-US" noProof="1">
+              <a:solidFill>
+                <a:srgbClr val="002060"/>
+              </a:solidFill>
+            </a:endParaRPr>
           </a:p>
           <a:p>
             <a:pPr marL="342900" indent="-342900">
@@ -18028,7 +18227,28 @@
                   <a:srgbClr val="002060"/>
                 </a:solidFill>
               </a:rPr>
-              <a:t>ADD CONTENT 2</a:t>
+              <a:t>These auto-active tools enable the verification of a larger set of programs but require more user input</a:t>
+            </a:r>
+          </a:p>
+          <a:p>
+            <a:endParaRPr lang="en-US" noProof="1">
+              <a:solidFill>
+                <a:srgbClr val="002060"/>
+              </a:solidFill>
+            </a:endParaRPr>
+          </a:p>
+          <a:p>
+            <a:pPr marL="342900" indent="-342900">
+              <a:buFont typeface="Arial" panose="020B0604020202020204" pitchFamily="34" charset="0"/>
+              <a:buChar char="•"/>
+            </a:pPr>
+            <a:r>
+              <a:rPr lang="en-US" sz="2400" noProof="1">
+                <a:solidFill>
+                  <a:srgbClr val="002060"/>
+                </a:solidFill>
+              </a:rPr>
+              <a:t>WhyRel is the most important practical work for this thesis</a:t>
             </a:r>
           </a:p>
         </p:txBody>
@@ -18047,6 +18267,154 @@
 </file>
 
 <file path=ppt/slides/slide7.xml><?xml version="1.0" encoding="utf-8"?>
+<p:sld xmlns:a="http://schemas.openxmlformats.org/drawingml/2006/main" xmlns:r="http://schemas.openxmlformats.org/officeDocument/2006/relationships" xmlns:p="http://schemas.openxmlformats.org/presentationml/2006/main">
+  <p:cSld>
+    <p:spTree>
+      <p:nvGrpSpPr>
+        <p:cNvPr id="1" name="">
+          <a:extLst>
+            <a:ext uri="{FF2B5EF4-FFF2-40B4-BE49-F238E27FC236}">
+              <a16:creationId xmlns:a16="http://schemas.microsoft.com/office/drawing/2014/main" id="{61945C93-CF66-E549-0468-A9C8D88FEF56}"/>
+            </a:ext>
+          </a:extLst>
+        </p:cNvPr>
+        <p:cNvGrpSpPr/>
+        <p:nvPr/>
+      </p:nvGrpSpPr>
+      <p:grpSpPr>
+        <a:xfrm>
+          <a:off x="0" y="0"/>
+          <a:ext cx="0" cy="0"/>
+          <a:chOff x="0" y="0"/>
+          <a:chExt cx="0" cy="0"/>
+        </a:xfrm>
+      </p:grpSpPr>
+      <p:sp>
+        <p:nvSpPr>
+          <p:cNvPr id="2" name="TextBox 1">
+            <a:extLst>
+              <a:ext uri="{FF2B5EF4-FFF2-40B4-BE49-F238E27FC236}">
+                <a16:creationId xmlns:a16="http://schemas.microsoft.com/office/drawing/2014/main" id="{F352EB2C-F447-9BA7-9D06-99E20A45CE9D}"/>
+              </a:ext>
+            </a:extLst>
+          </p:cNvPr>
+          <p:cNvSpPr txBox="1"/>
+          <p:nvPr/>
+        </p:nvSpPr>
+        <p:spPr>
+          <a:xfrm>
+            <a:off x="469556" y="626071"/>
+            <a:ext cx="6845644" cy="523220"/>
+          </a:xfrm>
+          <a:prstGeom prst="rect">
+            <a:avLst/>
+          </a:prstGeom>
+          <a:noFill/>
+        </p:spPr>
+        <p:txBody>
+          <a:bodyPr wrap="square" rtlCol="0">
+            <a:spAutoFit/>
+          </a:bodyPr>
+          <a:lstStyle/>
+          <a:p>
+            <a:r>
+              <a:rPr lang="pt-PT" sz="2800" noProof="1">
+                <a:solidFill>
+                  <a:srgbClr val="002060"/>
+                </a:solidFill>
+              </a:rPr>
+              <a:t>Patterns of program alignment</a:t>
+            </a:r>
+            <a:endParaRPr lang="en-US" sz="2800" noProof="1"/>
+          </a:p>
+        </p:txBody>
+      </p:sp>
+      <p:sp>
+        <p:nvSpPr>
+          <p:cNvPr id="4" name="Slide Number Placeholder 3">
+            <a:extLst>
+              <a:ext uri="{FF2B5EF4-FFF2-40B4-BE49-F238E27FC236}">
+                <a16:creationId xmlns:a16="http://schemas.microsoft.com/office/drawing/2014/main" id="{B4D16682-A440-87DD-5EB5-FA356417033E}"/>
+              </a:ext>
+            </a:extLst>
+          </p:cNvPr>
+          <p:cNvSpPr>
+            <a:spLocks noGrp="1"/>
+          </p:cNvSpPr>
+          <p:nvPr>
+            <p:ph type="sldNum" sz="quarter" idx="12"/>
+          </p:nvPr>
+        </p:nvSpPr>
+        <p:spPr/>
+        <p:txBody>
+          <a:bodyPr/>
+          <a:lstStyle/>
+          <a:p>
+            <a:fld id="{292A9FD8-515A-4698-9313-0AB17EE9632B}" type="slidenum">
+              <a:rPr lang="en-US" noProof="1" dirty="0" smtClean="0"/>
+              <a:t>7</a:t>
+            </a:fld>
+            <a:endParaRPr lang="en-US" noProof="1"/>
+          </a:p>
+        </p:txBody>
+      </p:sp>
+      <p:sp>
+        <p:nvSpPr>
+          <p:cNvPr id="10" name="TextBox 9">
+            <a:extLst>
+              <a:ext uri="{FF2B5EF4-FFF2-40B4-BE49-F238E27FC236}">
+                <a16:creationId xmlns:a16="http://schemas.microsoft.com/office/drawing/2014/main" id="{33EF7F73-2C8F-BEB4-8C67-26EEE57BE57F}"/>
+              </a:ext>
+            </a:extLst>
+          </p:cNvPr>
+          <p:cNvSpPr txBox="1"/>
+          <p:nvPr/>
+        </p:nvSpPr>
+        <p:spPr>
+          <a:xfrm>
+            <a:off x="469556" y="2022795"/>
+            <a:ext cx="6664412" cy="461665"/>
+          </a:xfrm>
+          <a:prstGeom prst="rect">
+            <a:avLst/>
+          </a:prstGeom>
+          <a:noFill/>
+        </p:spPr>
+        <p:txBody>
+          <a:bodyPr wrap="square" rtlCol="0">
+            <a:spAutoFit/>
+          </a:bodyPr>
+          <a:lstStyle/>
+          <a:p>
+            <a:pPr marL="342900" indent="-342900">
+              <a:buFont typeface="Arial" panose="020B0604020202020204" pitchFamily="34" charset="0"/>
+              <a:buChar char="•"/>
+            </a:pPr>
+            <a:r>
+              <a:rPr lang="en-US" sz="2400" noProof="1">
+                <a:solidFill>
+                  <a:srgbClr val="002060"/>
+                </a:solidFill>
+              </a:rPr>
+              <a:t>Necessary/have time?</a:t>
+            </a:r>
+          </a:p>
+        </p:txBody>
+      </p:sp>
+    </p:spTree>
+    <p:extLst>
+      <p:ext uri="{BB962C8B-B14F-4D97-AF65-F5344CB8AC3E}">
+        <p14:creationId xmlns:p14="http://schemas.microsoft.com/office/powerpoint/2010/main" val="1637690001"/>
+      </p:ext>
+    </p:extLst>
+  </p:cSld>
+  <p:clrMapOvr>
+    <a:masterClrMapping/>
+  </p:clrMapOvr>
+</p:sld>
+</file>
+
+<file path=ppt/slides/slide8.xml><?xml version="1.0" encoding="utf-8"?>
 <p:sld xmlns:a="http://schemas.openxmlformats.org/drawingml/2006/main" xmlns:r="http://schemas.openxmlformats.org/officeDocument/2006/relationships" xmlns:p="http://schemas.openxmlformats.org/presentationml/2006/main">
   <p:cSld>
     <p:spTree>
@@ -18132,7 +18500,7 @@
           <a:p>
             <a:fld id="{292A9FD8-515A-4698-9313-0AB17EE9632B}" type="slidenum">
               <a:rPr lang="en-US" noProof="1" dirty="0" smtClean="0"/>
-              <a:t>7</a:t>
+              <a:t>8</a:t>
             </a:fld>
             <a:endParaRPr lang="en-US" noProof="1"/>
           </a:p>
@@ -18188,7 +18556,7 @@
 </p:sld>
 </file>
 
-<file path=ppt/slides/slide8.xml><?xml version="1.0" encoding="utf-8"?>
+<file path=ppt/slides/slide9.xml><?xml version="1.0" encoding="utf-8"?>
 <p:sld xmlns:a="http://schemas.openxmlformats.org/drawingml/2006/main" xmlns:r="http://schemas.openxmlformats.org/officeDocument/2006/relationships" xmlns:p="http://schemas.openxmlformats.org/presentationml/2006/main">
   <p:cSld>
     <p:spTree>
@@ -18274,7 +18642,7 @@
           <a:p>
             <a:fld id="{292A9FD8-515A-4698-9313-0AB17EE9632B}" type="slidenum">
               <a:rPr lang="en-US" noProof="1" dirty="0" smtClean="0"/>
-              <a:t>8</a:t>
+              <a:t>9</a:t>
             </a:fld>
             <a:endParaRPr lang="en-US" noProof="1"/>
           </a:p>
@@ -18358,202 +18726,6 @@
     <p:extLst>
       <p:ext uri="{BB962C8B-B14F-4D97-AF65-F5344CB8AC3E}">
         <p14:creationId xmlns:p14="http://schemas.microsoft.com/office/powerpoint/2010/main" val="2630974000"/>
-      </p:ext>
-    </p:extLst>
-  </p:cSld>
-  <p:clrMapOvr>
-    <a:masterClrMapping/>
-  </p:clrMapOvr>
-</p:sld>
-</file>
-
-<file path=ppt/slides/slide9.xml><?xml version="1.0" encoding="utf-8"?>
-<p:sld xmlns:a="http://schemas.openxmlformats.org/drawingml/2006/main" xmlns:r="http://schemas.openxmlformats.org/officeDocument/2006/relationships" xmlns:p="http://schemas.openxmlformats.org/presentationml/2006/main">
-  <p:cSld>
-    <p:spTree>
-      <p:nvGrpSpPr>
-        <p:cNvPr id="1" name="">
-          <a:extLst>
-            <a:ext uri="{FF2B5EF4-FFF2-40B4-BE49-F238E27FC236}">
-              <a16:creationId xmlns:a16="http://schemas.microsoft.com/office/drawing/2014/main" id="{9DE1F5A8-F169-2814-0EC4-DF33D094EA16}"/>
-            </a:ext>
-          </a:extLst>
-        </p:cNvPr>
-        <p:cNvGrpSpPr/>
-        <p:nvPr/>
-      </p:nvGrpSpPr>
-      <p:grpSpPr>
-        <a:xfrm>
-          <a:off x="0" y="0"/>
-          <a:ext cx="0" cy="0"/>
-          <a:chOff x="0" y="0"/>
-          <a:chExt cx="0" cy="0"/>
-        </a:xfrm>
-      </p:grpSpPr>
-      <p:sp>
-        <p:nvSpPr>
-          <p:cNvPr id="2" name="TextBox 1">
-            <a:extLst>
-              <a:ext uri="{FF2B5EF4-FFF2-40B4-BE49-F238E27FC236}">
-                <a16:creationId xmlns:a16="http://schemas.microsoft.com/office/drawing/2014/main" id="{458B3932-2A7C-3A6E-6E7E-EEAB07A52280}"/>
-              </a:ext>
-            </a:extLst>
-          </p:cNvPr>
-          <p:cNvSpPr txBox="1"/>
-          <p:nvPr/>
-        </p:nvSpPr>
-        <p:spPr>
-          <a:xfrm>
-            <a:off x="469556" y="626071"/>
-            <a:ext cx="6845644" cy="523220"/>
-          </a:xfrm>
-          <a:prstGeom prst="rect">
-            <a:avLst/>
-          </a:prstGeom>
-          <a:noFill/>
-        </p:spPr>
-        <p:txBody>
-          <a:bodyPr wrap="square" rtlCol="0">
-            <a:spAutoFit/>
-          </a:bodyPr>
-          <a:lstStyle/>
-          <a:p>
-            <a:r>
-              <a:rPr lang="pt-PT" sz="2800" noProof="1">
-                <a:solidFill>
-                  <a:srgbClr val="002060"/>
-                </a:solidFill>
-              </a:rPr>
-              <a:t>From bip2ml 2 WhyRel</a:t>
-            </a:r>
-            <a:endParaRPr lang="en-US" sz="2800" noProof="1"/>
-          </a:p>
-        </p:txBody>
-      </p:sp>
-      <p:sp>
-        <p:nvSpPr>
-          <p:cNvPr id="4" name="Slide Number Placeholder 3">
-            <a:extLst>
-              <a:ext uri="{FF2B5EF4-FFF2-40B4-BE49-F238E27FC236}">
-                <a16:creationId xmlns:a16="http://schemas.microsoft.com/office/drawing/2014/main" id="{3122067F-F56B-7D25-A9C7-976D469A4E69}"/>
-              </a:ext>
-            </a:extLst>
-          </p:cNvPr>
-          <p:cNvSpPr>
-            <a:spLocks noGrp="1"/>
-          </p:cNvSpPr>
-          <p:nvPr>
-            <p:ph type="sldNum" sz="quarter" idx="12"/>
-          </p:nvPr>
-        </p:nvSpPr>
-        <p:spPr/>
-        <p:txBody>
-          <a:bodyPr/>
-          <a:lstStyle/>
-          <a:p>
-            <a:fld id="{292A9FD8-515A-4698-9313-0AB17EE9632B}" type="slidenum">
-              <a:rPr lang="en-US" noProof="1" dirty="0" smtClean="0"/>
-              <a:t>9</a:t>
-            </a:fld>
-            <a:endParaRPr lang="en-US" noProof="1"/>
-          </a:p>
-        </p:txBody>
-      </p:sp>
-      <p:sp>
-        <p:nvSpPr>
-          <p:cNvPr id="10" name="TextBox 9">
-            <a:extLst>
-              <a:ext uri="{FF2B5EF4-FFF2-40B4-BE49-F238E27FC236}">
-                <a16:creationId xmlns:a16="http://schemas.microsoft.com/office/drawing/2014/main" id="{AF01DFD2-1A28-5BB8-86A8-B175A9BADBA6}"/>
-              </a:ext>
-            </a:extLst>
-          </p:cNvPr>
-          <p:cNvSpPr txBox="1"/>
-          <p:nvPr/>
-        </p:nvSpPr>
-        <p:spPr>
-          <a:xfrm>
-            <a:off x="469556" y="1884297"/>
-            <a:ext cx="6960974" cy="2677656"/>
-          </a:xfrm>
-          <a:prstGeom prst="rect">
-            <a:avLst/>
-          </a:prstGeom>
-          <a:noFill/>
-        </p:spPr>
-        <p:txBody>
-          <a:bodyPr wrap="square" rtlCol="0">
-            <a:spAutoFit/>
-          </a:bodyPr>
-          <a:lstStyle/>
-          <a:p>
-            <a:r>
-              <a:rPr lang="en-US" sz="2400" i="1" noProof="1">
-                <a:solidFill>
-                  <a:srgbClr val="002060"/>
-                </a:solidFill>
-              </a:rPr>
-              <a:t>Why?</a:t>
-            </a:r>
-          </a:p>
-          <a:p>
-            <a:endParaRPr lang="en-US" sz="2400" i="1" noProof="1">
-              <a:solidFill>
-                <a:srgbClr val="002060"/>
-              </a:solidFill>
-            </a:endParaRPr>
-          </a:p>
-          <a:p>
-            <a:r>
-              <a:rPr lang="en-US" sz="2400" noProof="1">
-                <a:solidFill>
-                  <a:srgbClr val="002060"/>
-                </a:solidFill>
-              </a:rPr>
-              <a:t>To allow programmers to verify relational properties about their OCaml projects without needing to:</a:t>
-            </a:r>
-          </a:p>
-          <a:p>
-            <a:endParaRPr lang="en-US" sz="2400" noProof="1">
-              <a:solidFill>
-                <a:srgbClr val="002060"/>
-              </a:solidFill>
-            </a:endParaRPr>
-          </a:p>
-          <a:p>
-            <a:pPr marL="342900" indent="-342900">
-              <a:buFontTx/>
-              <a:buChar char="-"/>
-            </a:pPr>
-            <a:r>
-              <a:rPr lang="en-US" sz="2400" noProof="1">
-                <a:solidFill>
-                  <a:srgbClr val="002060"/>
-                </a:solidFill>
-              </a:rPr>
-              <a:t>Completely rewrite the code</a:t>
-            </a:r>
-          </a:p>
-          <a:p>
-            <a:pPr marL="342900" indent="-342900">
-              <a:buFontTx/>
-              <a:buChar char="-"/>
-            </a:pPr>
-            <a:r>
-              <a:rPr lang="en-US" sz="2400" noProof="1">
-                <a:solidFill>
-                  <a:srgbClr val="002060"/>
-                </a:solidFill>
-              </a:rPr>
-              <a:t>Learn a different programming language</a:t>
-            </a:r>
-          </a:p>
-        </p:txBody>
-      </p:sp>
-    </p:spTree>
-    <p:extLst>
-      <p:ext uri="{BB962C8B-B14F-4D97-AF65-F5344CB8AC3E}">
-        <p14:creationId xmlns:p14="http://schemas.microsoft.com/office/powerpoint/2010/main" val="3292277797"/>
       </p:ext>
     </p:extLst>
   </p:cSld>

--- a/tese/presentation/Ap Tese.pptx
+++ b/tese/presentation/Ap Tese.pptx
@@ -5,7 +5,7 @@
     <p:sldMasterId id="2147483672" r:id="rId1"/>
   </p:sldMasterIdLst>
   <p:notesMasterIdLst>
-    <p:notesMasterId r:id="rId56"/>
+    <p:notesMasterId r:id="rId58"/>
   </p:notesMasterIdLst>
   <p:sldIdLst>
     <p:sldId id="256" r:id="rId2"/>
@@ -23,45 +23,47 @@
     <p:sldId id="304" r:id="rId14"/>
     <p:sldId id="303" r:id="rId15"/>
     <p:sldId id="313" r:id="rId16"/>
-    <p:sldId id="296" r:id="rId17"/>
-    <p:sldId id="311" r:id="rId18"/>
-    <p:sldId id="312" r:id="rId19"/>
-    <p:sldId id="309" r:id="rId20"/>
-    <p:sldId id="310" r:id="rId21"/>
-    <p:sldId id="315" r:id="rId22"/>
-    <p:sldId id="316" r:id="rId23"/>
-    <p:sldId id="317" r:id="rId24"/>
-    <p:sldId id="318" r:id="rId25"/>
-    <p:sldId id="297" r:id="rId26"/>
-    <p:sldId id="298" r:id="rId27"/>
-    <p:sldId id="300" r:id="rId28"/>
-    <p:sldId id="299" r:id="rId29"/>
-    <p:sldId id="301" r:id="rId30"/>
-    <p:sldId id="280" r:id="rId31"/>
-    <p:sldId id="286" r:id="rId32"/>
-    <p:sldId id="281" r:id="rId33"/>
-    <p:sldId id="282" r:id="rId34"/>
-    <p:sldId id="259" r:id="rId35"/>
-    <p:sldId id="269" r:id="rId36"/>
-    <p:sldId id="283" r:id="rId37"/>
-    <p:sldId id="268" r:id="rId38"/>
-    <p:sldId id="285" r:id="rId39"/>
-    <p:sldId id="271" r:id="rId40"/>
-    <p:sldId id="272" r:id="rId41"/>
-    <p:sldId id="273" r:id="rId42"/>
-    <p:sldId id="260" r:id="rId43"/>
-    <p:sldId id="274" r:id="rId44"/>
-    <p:sldId id="275" r:id="rId45"/>
-    <p:sldId id="276" r:id="rId46"/>
-    <p:sldId id="290" r:id="rId47"/>
-    <p:sldId id="291" r:id="rId48"/>
-    <p:sldId id="261" r:id="rId49"/>
-    <p:sldId id="278" r:id="rId50"/>
-    <p:sldId id="279" r:id="rId51"/>
-    <p:sldId id="289" r:id="rId52"/>
-    <p:sldId id="288" r:id="rId53"/>
-    <p:sldId id="262" r:id="rId54"/>
-    <p:sldId id="263" r:id="rId55"/>
+    <p:sldId id="320" r:id="rId17"/>
+    <p:sldId id="323" r:id="rId18"/>
+    <p:sldId id="296" r:id="rId19"/>
+    <p:sldId id="311" r:id="rId20"/>
+    <p:sldId id="312" r:id="rId21"/>
+    <p:sldId id="309" r:id="rId22"/>
+    <p:sldId id="310" r:id="rId23"/>
+    <p:sldId id="315" r:id="rId24"/>
+    <p:sldId id="316" r:id="rId25"/>
+    <p:sldId id="317" r:id="rId26"/>
+    <p:sldId id="318" r:id="rId27"/>
+    <p:sldId id="297" r:id="rId28"/>
+    <p:sldId id="298" r:id="rId29"/>
+    <p:sldId id="300" r:id="rId30"/>
+    <p:sldId id="299" r:id="rId31"/>
+    <p:sldId id="301" r:id="rId32"/>
+    <p:sldId id="280" r:id="rId33"/>
+    <p:sldId id="286" r:id="rId34"/>
+    <p:sldId id="281" r:id="rId35"/>
+    <p:sldId id="282" r:id="rId36"/>
+    <p:sldId id="259" r:id="rId37"/>
+    <p:sldId id="269" r:id="rId38"/>
+    <p:sldId id="283" r:id="rId39"/>
+    <p:sldId id="268" r:id="rId40"/>
+    <p:sldId id="285" r:id="rId41"/>
+    <p:sldId id="271" r:id="rId42"/>
+    <p:sldId id="272" r:id="rId43"/>
+    <p:sldId id="273" r:id="rId44"/>
+    <p:sldId id="260" r:id="rId45"/>
+    <p:sldId id="274" r:id="rId46"/>
+    <p:sldId id="275" r:id="rId47"/>
+    <p:sldId id="276" r:id="rId48"/>
+    <p:sldId id="290" r:id="rId49"/>
+    <p:sldId id="291" r:id="rId50"/>
+    <p:sldId id="261" r:id="rId51"/>
+    <p:sldId id="278" r:id="rId52"/>
+    <p:sldId id="279" r:id="rId53"/>
+    <p:sldId id="289" r:id="rId54"/>
+    <p:sldId id="288" r:id="rId55"/>
+    <p:sldId id="262" r:id="rId56"/>
+    <p:sldId id="263" r:id="rId57"/>
   </p:sldIdLst>
   <p:sldSz cx="9144000" cy="5715000" type="screen16x10"/>
   <p:notesSz cx="6858000" cy="9144000"/>
@@ -250,7 +252,7 @@
           <a:p>
             <a:fld id="{374D7271-F55A-4686-93D9-9528AEDA1906}" type="datetimeFigureOut">
               <a:rPr lang="en-US" smtClean="0"/>
-              <a:t>12/7/2025</a:t>
+              <a:t>12/8/2025</a:t>
             </a:fld>
             <a:endParaRPr lang="en-US"/>
           </a:p>
@@ -648,7 +650,7 @@
           <a:p>
             <a:fld id="{1E5BF2F9-84AD-46CB-8486-EB732804F762}" type="datetime1">
               <a:rPr lang="en-US" smtClean="0"/>
-              <a:t>12/7/2025</a:t>
+              <a:t>12/8/2025</a:t>
             </a:fld>
             <a:endParaRPr lang="en-US"/>
           </a:p>
@@ -827,7 +829,7 @@
           <a:p>
             <a:fld id="{23618752-90E6-4B57-86C0-C43DD2320A2D}" type="datetime1">
               <a:rPr lang="en-US" smtClean="0"/>
-              <a:t>12/7/2025</a:t>
+              <a:t>12/8/2025</a:t>
             </a:fld>
             <a:endParaRPr lang="en-US"/>
           </a:p>
@@ -1007,7 +1009,7 @@
           <a:p>
             <a:fld id="{85BE5269-252E-4ABC-B047-AD967E98EA5E}" type="datetime1">
               <a:rPr lang="en-US" smtClean="0"/>
-              <a:t>12/7/2025</a:t>
+              <a:t>12/8/2025</a:t>
             </a:fld>
             <a:endParaRPr lang="en-US"/>
           </a:p>
@@ -1177,7 +1179,7 @@
           <a:p>
             <a:fld id="{C4D54784-9B75-4DBC-ACA0-9F51227CD78F}" type="datetime1">
               <a:rPr lang="en-US" smtClean="0"/>
-              <a:t>12/7/2025</a:t>
+              <a:t>12/8/2025</a:t>
             </a:fld>
             <a:endParaRPr lang="en-US"/>
           </a:p>
@@ -1423,7 +1425,7 @@
           <a:p>
             <a:fld id="{3D9E4D52-32DE-4F35-8CB6-5A44573D3FC9}" type="datetime1">
               <a:rPr lang="en-US" smtClean="0"/>
-              <a:t>12/7/2025</a:t>
+              <a:t>12/8/2025</a:t>
             </a:fld>
             <a:endParaRPr lang="en-US"/>
           </a:p>
@@ -1655,7 +1657,7 @@
           <a:p>
             <a:fld id="{D0FFB22E-8A21-4AF6-BDE0-993A2F9B14BB}" type="datetime1">
               <a:rPr lang="en-US" smtClean="0"/>
-              <a:t>12/7/2025</a:t>
+              <a:t>12/8/2025</a:t>
             </a:fld>
             <a:endParaRPr lang="en-US"/>
           </a:p>
@@ -2022,7 +2024,7 @@
           <a:p>
             <a:fld id="{AC41D9E4-527D-47F1-B47F-963D62CCBC76}" type="datetime1">
               <a:rPr lang="en-US" smtClean="0"/>
-              <a:t>12/7/2025</a:t>
+              <a:t>12/8/2025</a:t>
             </a:fld>
             <a:endParaRPr lang="en-US"/>
           </a:p>
@@ -2140,7 +2142,7 @@
           <a:p>
             <a:fld id="{9906A608-925A-4874-BCA4-36BA40FADF76}" type="datetime1">
               <a:rPr lang="en-US" smtClean="0"/>
-              <a:t>12/7/2025</a:t>
+              <a:t>12/8/2025</a:t>
             </a:fld>
             <a:endParaRPr lang="en-US"/>
           </a:p>
@@ -2235,7 +2237,7 @@
           <a:p>
             <a:fld id="{45CCB426-3683-4E7C-B869-5155B20F8BC6}" type="datetime1">
               <a:rPr lang="en-US" smtClean="0"/>
-              <a:t>12/7/2025</a:t>
+              <a:t>12/8/2025</a:t>
             </a:fld>
             <a:endParaRPr lang="en-US"/>
           </a:p>
@@ -2512,7 +2514,7 @@
           <a:p>
             <a:fld id="{3351EA60-24F6-40E8-A0D7-2067F6ECA6B2}" type="datetime1">
               <a:rPr lang="en-US" smtClean="0"/>
-              <a:t>12/7/2025</a:t>
+              <a:t>12/8/2025</a:t>
             </a:fld>
             <a:endParaRPr lang="en-US"/>
           </a:p>
@@ -2769,7 +2771,7 @@
           <a:p>
             <a:fld id="{C6106440-8C5F-4111-9AD5-D0C1FDF01CE9}" type="datetime1">
               <a:rPr lang="en-US" smtClean="0"/>
-              <a:t>12/7/2025</a:t>
+              <a:t>12/8/2025</a:t>
             </a:fld>
             <a:endParaRPr lang="en-US"/>
           </a:p>
@@ -2985,7 +2987,7 @@
           <a:p>
             <a:fld id="{2A16FEB8-5B01-4F5E-B573-CC516A2AD5E4}" type="datetime1">
               <a:rPr lang="en-US" smtClean="0"/>
-              <a:t>12/7/2025</a:t>
+              <a:t>12/8/2025</a:t>
             </a:fld>
             <a:endParaRPr lang="en-US"/>
           </a:p>
@@ -4707,6 +4709,281 @@
         <p:cNvPr id="1" name="">
           <a:extLst>
             <a:ext uri="{FF2B5EF4-FFF2-40B4-BE49-F238E27FC236}">
+              <a16:creationId xmlns:a16="http://schemas.microsoft.com/office/drawing/2014/main" id="{C5A3BAF1-5FD1-166B-7045-0EE556BBB6FF}"/>
+            </a:ext>
+          </a:extLst>
+        </p:cNvPr>
+        <p:cNvGrpSpPr/>
+        <p:nvPr/>
+      </p:nvGrpSpPr>
+      <p:grpSpPr>
+        <a:xfrm>
+          <a:off x="0" y="0"/>
+          <a:ext cx="0" cy="0"/>
+          <a:chOff x="0" y="0"/>
+          <a:chExt cx="0" cy="0"/>
+        </a:xfrm>
+      </p:grpSpPr>
+      <p:sp>
+        <p:nvSpPr>
+          <p:cNvPr id="2" name="TextBox 1">
+            <a:extLst>
+              <a:ext uri="{FF2B5EF4-FFF2-40B4-BE49-F238E27FC236}">
+                <a16:creationId xmlns:a16="http://schemas.microsoft.com/office/drawing/2014/main" id="{E9DB56FE-145E-B781-5DD4-F5F6270AE1EE}"/>
+              </a:ext>
+            </a:extLst>
+          </p:cNvPr>
+          <p:cNvSpPr txBox="1"/>
+          <p:nvPr/>
+        </p:nvSpPr>
+        <p:spPr>
+          <a:xfrm>
+            <a:off x="469556" y="626071"/>
+            <a:ext cx="6845644" cy="523220"/>
+          </a:xfrm>
+          <a:prstGeom prst="rect">
+            <a:avLst/>
+          </a:prstGeom>
+          <a:noFill/>
+        </p:spPr>
+        <p:txBody>
+          <a:bodyPr wrap="square" rtlCol="0">
+            <a:spAutoFit/>
+          </a:bodyPr>
+          <a:lstStyle/>
+          <a:p>
+            <a:r>
+              <a:rPr lang="pt-PT" sz="2800" noProof="1">
+                <a:solidFill>
+                  <a:srgbClr val="002060"/>
+                </a:solidFill>
+              </a:rPr>
+              <a:t>bip2ml Visualizer</a:t>
+            </a:r>
+            <a:endParaRPr lang="en-US" sz="2800" noProof="1"/>
+          </a:p>
+        </p:txBody>
+      </p:sp>
+      <p:sp>
+        <p:nvSpPr>
+          <p:cNvPr id="4" name="Slide Number Placeholder 3">
+            <a:extLst>
+              <a:ext uri="{FF2B5EF4-FFF2-40B4-BE49-F238E27FC236}">
+                <a16:creationId xmlns:a16="http://schemas.microsoft.com/office/drawing/2014/main" id="{3D0573BA-FFA0-1BB5-B186-E9DBF90850DB}"/>
+              </a:ext>
+            </a:extLst>
+          </p:cNvPr>
+          <p:cNvSpPr>
+            <a:spLocks noGrp="1"/>
+          </p:cNvSpPr>
+          <p:nvPr>
+            <p:ph type="sldNum" sz="quarter" idx="12"/>
+          </p:nvPr>
+        </p:nvSpPr>
+        <p:spPr/>
+        <p:txBody>
+          <a:bodyPr/>
+          <a:lstStyle/>
+          <a:p>
+            <a:fld id="{292A9FD8-515A-4698-9313-0AB17EE9632B}" type="slidenum">
+              <a:rPr lang="en-US" noProof="1" dirty="0" smtClean="0"/>
+              <a:t>16</a:t>
+            </a:fld>
+            <a:endParaRPr lang="en-US" noProof="1"/>
+          </a:p>
+        </p:txBody>
+      </p:sp>
+      <p:sp>
+        <p:nvSpPr>
+          <p:cNvPr id="10" name="TextBox 9">
+            <a:extLst>
+              <a:ext uri="{FF2B5EF4-FFF2-40B4-BE49-F238E27FC236}">
+                <a16:creationId xmlns:a16="http://schemas.microsoft.com/office/drawing/2014/main" id="{CA742195-A529-A857-26D9-2279AE52A266}"/>
+              </a:ext>
+            </a:extLst>
+          </p:cNvPr>
+          <p:cNvSpPr txBox="1"/>
+          <p:nvPr/>
+        </p:nvSpPr>
+        <p:spPr>
+          <a:xfrm>
+            <a:off x="469556" y="1984521"/>
+            <a:ext cx="6845643" cy="1938992"/>
+          </a:xfrm>
+          <a:prstGeom prst="rect">
+            <a:avLst/>
+          </a:prstGeom>
+          <a:noFill/>
+        </p:spPr>
+        <p:txBody>
+          <a:bodyPr wrap="square" rtlCol="0">
+            <a:spAutoFit/>
+          </a:bodyPr>
+          <a:lstStyle/>
+          <a:p>
+            <a:pPr marL="342900" indent="-342900">
+              <a:buFont typeface="Arial" panose="020B0604020202020204" pitchFamily="34" charset="0"/>
+              <a:buChar char="•"/>
+            </a:pPr>
+            <a:r>
+              <a:rPr lang="en-US" sz="2400" noProof="1">
+                <a:solidFill>
+                  <a:srgbClr val="002060"/>
+                </a:solidFill>
+              </a:rPr>
+              <a:t>Allows using bip2ml in a website through a client-server dynamic (local only for now)</a:t>
+            </a:r>
+          </a:p>
+          <a:p>
+            <a:endParaRPr lang="en-US" sz="2400" noProof="1">
+              <a:solidFill>
+                <a:srgbClr val="002060"/>
+              </a:solidFill>
+            </a:endParaRPr>
+          </a:p>
+          <a:p>
+            <a:pPr marL="342900" indent="-342900">
+              <a:buFont typeface="Arial" panose="020B0604020202020204" pitchFamily="34" charset="0"/>
+              <a:buChar char="•"/>
+            </a:pPr>
+            <a:r>
+              <a:rPr lang="en-US" sz="2400" noProof="1">
+                <a:solidFill>
+                  <a:srgbClr val="002060"/>
+                </a:solidFill>
+              </a:rPr>
+              <a:t>Enables visualization of BipLang and OCaml ASTs, as well as simplifying their comparison</a:t>
+            </a:r>
+          </a:p>
+        </p:txBody>
+      </p:sp>
+    </p:spTree>
+    <p:extLst>
+      <p:ext uri="{BB962C8B-B14F-4D97-AF65-F5344CB8AC3E}">
+        <p14:creationId xmlns:p14="http://schemas.microsoft.com/office/powerpoint/2010/main" val="441316188"/>
+      </p:ext>
+    </p:extLst>
+  </p:cSld>
+  <p:clrMapOvr>
+    <a:masterClrMapping/>
+  </p:clrMapOvr>
+</p:sld>
+</file>
+
+<file path=ppt/slides/slide17.xml><?xml version="1.0" encoding="utf-8"?>
+<p:sld xmlns:a="http://schemas.openxmlformats.org/drawingml/2006/main" xmlns:r="http://schemas.openxmlformats.org/officeDocument/2006/relationships" xmlns:p="http://schemas.openxmlformats.org/presentationml/2006/main">
+  <p:cSld>
+    <p:spTree>
+      <p:nvGrpSpPr>
+        <p:cNvPr id="1" name="">
+          <a:extLst>
+            <a:ext uri="{FF2B5EF4-FFF2-40B4-BE49-F238E27FC236}">
+              <a16:creationId xmlns:a16="http://schemas.microsoft.com/office/drawing/2014/main" id="{75FF67E0-3A69-CABE-9E0A-9F587DEABA23}"/>
+            </a:ext>
+          </a:extLst>
+        </p:cNvPr>
+        <p:cNvGrpSpPr/>
+        <p:nvPr/>
+      </p:nvGrpSpPr>
+      <p:grpSpPr>
+        <a:xfrm>
+          <a:off x="0" y="0"/>
+          <a:ext cx="0" cy="0"/>
+          <a:chOff x="0" y="0"/>
+          <a:chExt cx="0" cy="0"/>
+        </a:xfrm>
+      </p:grpSpPr>
+      <p:sp>
+        <p:nvSpPr>
+          <p:cNvPr id="2" name="TextBox 1">
+            <a:extLst>
+              <a:ext uri="{FF2B5EF4-FFF2-40B4-BE49-F238E27FC236}">
+                <a16:creationId xmlns:a16="http://schemas.microsoft.com/office/drawing/2014/main" id="{DB3BB568-520D-6683-04BA-FA626968DD3E}"/>
+              </a:ext>
+            </a:extLst>
+          </p:cNvPr>
+          <p:cNvSpPr txBox="1"/>
+          <p:nvPr/>
+        </p:nvSpPr>
+        <p:spPr>
+          <a:xfrm>
+            <a:off x="1198606" y="2145439"/>
+            <a:ext cx="6746788" cy="830997"/>
+          </a:xfrm>
+          <a:prstGeom prst="rect">
+            <a:avLst/>
+          </a:prstGeom>
+          <a:noFill/>
+        </p:spPr>
+        <p:txBody>
+          <a:bodyPr wrap="square" rtlCol="0">
+            <a:spAutoFit/>
+          </a:bodyPr>
+          <a:lstStyle/>
+          <a:p>
+            <a:pPr algn="ctr"/>
+            <a:r>
+              <a:rPr lang="en-US" sz="4800" noProof="1">
+                <a:solidFill>
+                  <a:srgbClr val="002060"/>
+                </a:solidFill>
+              </a:rPr>
+              <a:t>bip2ml Visualizer Demo </a:t>
+            </a:r>
+            <a:endParaRPr lang="en-US" sz="4800" noProof="1"/>
+          </a:p>
+        </p:txBody>
+      </p:sp>
+      <p:sp>
+        <p:nvSpPr>
+          <p:cNvPr id="3" name="Slide Number Placeholder 2">
+            <a:extLst>
+              <a:ext uri="{FF2B5EF4-FFF2-40B4-BE49-F238E27FC236}">
+                <a16:creationId xmlns:a16="http://schemas.microsoft.com/office/drawing/2014/main" id="{5A1877AE-6DB9-1A26-C0BA-3E09B261676D}"/>
+              </a:ext>
+            </a:extLst>
+          </p:cNvPr>
+          <p:cNvSpPr>
+            <a:spLocks noGrp="1"/>
+          </p:cNvSpPr>
+          <p:nvPr>
+            <p:ph type="sldNum" sz="quarter" idx="12"/>
+          </p:nvPr>
+        </p:nvSpPr>
+        <p:spPr/>
+        <p:txBody>
+          <a:bodyPr/>
+          <a:lstStyle/>
+          <a:p>
+            <a:fld id="{292A9FD8-515A-4698-9313-0AB17EE9632B}" type="slidenum">
+              <a:rPr lang="en-US" noProof="1" dirty="0" smtClean="0"/>
+              <a:t>17</a:t>
+            </a:fld>
+            <a:endParaRPr lang="en-US" noProof="1"/>
+          </a:p>
+        </p:txBody>
+      </p:sp>
+    </p:spTree>
+    <p:extLst>
+      <p:ext uri="{BB962C8B-B14F-4D97-AF65-F5344CB8AC3E}">
+        <p14:creationId xmlns:p14="http://schemas.microsoft.com/office/powerpoint/2010/main" val="3140711837"/>
+      </p:ext>
+    </p:extLst>
+  </p:cSld>
+  <p:clrMapOvr>
+    <a:masterClrMapping/>
+  </p:clrMapOvr>
+</p:sld>
+</file>
+
+<file path=ppt/slides/slide18.xml><?xml version="1.0" encoding="utf-8"?>
+<p:sld xmlns:a="http://schemas.openxmlformats.org/drawingml/2006/main" xmlns:r="http://schemas.openxmlformats.org/officeDocument/2006/relationships" xmlns:p="http://schemas.openxmlformats.org/presentationml/2006/main">
+  <p:cSld>
+    <p:spTree>
+      <p:nvGrpSpPr>
+        <p:cNvPr id="1" name="">
+          <a:extLst>
+            <a:ext uri="{FF2B5EF4-FFF2-40B4-BE49-F238E27FC236}">
               <a16:creationId xmlns:a16="http://schemas.microsoft.com/office/drawing/2014/main" id="{F0C5B3A4-7FE9-F5E7-C57A-435740514E68}"/>
             </a:ext>
           </a:extLst>
@@ -4786,7 +5063,7 @@
           <a:p>
             <a:fld id="{292A9FD8-515A-4698-9313-0AB17EE9632B}" type="slidenum">
               <a:rPr lang="en-US" noProof="1" dirty="0" smtClean="0"/>
-              <a:t>16</a:t>
+              <a:t>18</a:t>
             </a:fld>
             <a:endParaRPr lang="en-US" noProof="1"/>
           </a:p>
@@ -4805,7 +5082,7 @@
 </p:sld>
 </file>
 
-<file path=ppt/slides/slide17.xml><?xml version="1.0" encoding="utf-8"?>
+<file path=ppt/slides/slide19.xml><?xml version="1.0" encoding="utf-8"?>
 <p:sld xmlns:a="http://schemas.openxmlformats.org/drawingml/2006/main" xmlns:r="http://schemas.openxmlformats.org/officeDocument/2006/relationships" xmlns:p="http://schemas.openxmlformats.org/presentationml/2006/main">
   <p:cSld>
     <p:spTree>
@@ -4891,7 +5168,7 @@
           <a:p>
             <a:fld id="{292A9FD8-515A-4698-9313-0AB17EE9632B}" type="slidenum">
               <a:rPr lang="en-US" noProof="1" dirty="0" smtClean="0"/>
-              <a:t>17</a:t>
+              <a:t>19</a:t>
             </a:fld>
             <a:endParaRPr lang="en-US" noProof="1"/>
           </a:p>
@@ -5437,1103 +5714,6 @@
     <p:extLst>
       <p:ext uri="{BB962C8B-B14F-4D97-AF65-F5344CB8AC3E}">
         <p14:creationId xmlns:p14="http://schemas.microsoft.com/office/powerpoint/2010/main" val="1468627397"/>
-      </p:ext>
-    </p:extLst>
-  </p:cSld>
-  <p:clrMapOvr>
-    <a:masterClrMapping/>
-  </p:clrMapOvr>
-</p:sld>
-</file>
-
-<file path=ppt/slides/slide18.xml><?xml version="1.0" encoding="utf-8"?>
-<p:sld xmlns:a="http://schemas.openxmlformats.org/drawingml/2006/main" xmlns:r="http://schemas.openxmlformats.org/officeDocument/2006/relationships" xmlns:p="http://schemas.openxmlformats.org/presentationml/2006/main">
-  <p:cSld>
-    <p:spTree>
-      <p:nvGrpSpPr>
-        <p:cNvPr id="1" name="">
-          <a:extLst>
-            <a:ext uri="{FF2B5EF4-FFF2-40B4-BE49-F238E27FC236}">
-              <a16:creationId xmlns:a16="http://schemas.microsoft.com/office/drawing/2014/main" id="{75D6C375-5114-E08A-ACF7-8DC5CC11E5B3}"/>
-            </a:ext>
-          </a:extLst>
-        </p:cNvPr>
-        <p:cNvGrpSpPr/>
-        <p:nvPr/>
-      </p:nvGrpSpPr>
-      <p:grpSpPr>
-        <a:xfrm>
-          <a:off x="0" y="0"/>
-          <a:ext cx="0" cy="0"/>
-          <a:chOff x="0" y="0"/>
-          <a:chExt cx="0" cy="0"/>
-        </a:xfrm>
-      </p:grpSpPr>
-      <p:sp>
-        <p:nvSpPr>
-          <p:cNvPr id="2" name="TextBox 1">
-            <a:extLst>
-              <a:ext uri="{FF2B5EF4-FFF2-40B4-BE49-F238E27FC236}">
-                <a16:creationId xmlns:a16="http://schemas.microsoft.com/office/drawing/2014/main" id="{A63A2B8F-A6DC-BB28-4D1C-1D15941CDB17}"/>
-              </a:ext>
-            </a:extLst>
-          </p:cNvPr>
-          <p:cNvSpPr txBox="1"/>
-          <p:nvPr/>
-        </p:nvSpPr>
-        <p:spPr>
-          <a:xfrm>
-            <a:off x="469556" y="626071"/>
-            <a:ext cx="6845644" cy="523220"/>
-          </a:xfrm>
-          <a:prstGeom prst="rect">
-            <a:avLst/>
-          </a:prstGeom>
-          <a:noFill/>
-        </p:spPr>
-        <p:txBody>
-          <a:bodyPr wrap="square" rtlCol="0">
-            <a:spAutoFit/>
-          </a:bodyPr>
-          <a:lstStyle/>
-          <a:p>
-            <a:r>
-              <a:rPr lang="pt-PT" sz="2800" noProof="1">
-                <a:solidFill>
-                  <a:srgbClr val="002060"/>
-                </a:solidFill>
-              </a:rPr>
-              <a:t>mult - BipLang  (2/2)</a:t>
-            </a:r>
-            <a:endParaRPr lang="en-US" sz="2800" noProof="1"/>
-          </a:p>
-        </p:txBody>
-      </p:sp>
-      <p:sp>
-        <p:nvSpPr>
-          <p:cNvPr id="4" name="Slide Number Placeholder 3">
-            <a:extLst>
-              <a:ext uri="{FF2B5EF4-FFF2-40B4-BE49-F238E27FC236}">
-                <a16:creationId xmlns:a16="http://schemas.microsoft.com/office/drawing/2014/main" id="{121CC79A-EDC9-9E72-C07B-E7F641CACDAA}"/>
-              </a:ext>
-            </a:extLst>
-          </p:cNvPr>
-          <p:cNvSpPr>
-            <a:spLocks noGrp="1"/>
-          </p:cNvSpPr>
-          <p:nvPr>
-            <p:ph type="sldNum" sz="quarter" idx="12"/>
-          </p:nvPr>
-        </p:nvSpPr>
-        <p:spPr/>
-        <p:txBody>
-          <a:bodyPr/>
-          <a:lstStyle/>
-          <a:p>
-            <a:fld id="{292A9FD8-515A-4698-9313-0AB17EE9632B}" type="slidenum">
-              <a:rPr lang="en-US" noProof="1" dirty="0" smtClean="0"/>
-              <a:t>18</a:t>
-            </a:fld>
-            <a:endParaRPr lang="en-US" noProof="1"/>
-          </a:p>
-        </p:txBody>
-      </p:sp>
-      <p:sp>
-        <p:nvSpPr>
-          <p:cNvPr id="3" name="TextBox 2">
-            <a:extLst>
-              <a:ext uri="{FF2B5EF4-FFF2-40B4-BE49-F238E27FC236}">
-                <a16:creationId xmlns:a16="http://schemas.microsoft.com/office/drawing/2014/main" id="{8590F0BC-BDEE-D826-69C7-37B335EBC49A}"/>
-              </a:ext>
-            </a:extLst>
-          </p:cNvPr>
-          <p:cNvSpPr txBox="1"/>
-          <p:nvPr/>
-        </p:nvSpPr>
-        <p:spPr>
-          <a:xfrm>
-            <a:off x="0" y="1407243"/>
-            <a:ext cx="5878404" cy="2800767"/>
-          </a:xfrm>
-          <a:prstGeom prst="rect">
-            <a:avLst/>
-          </a:prstGeom>
-          <a:noFill/>
-        </p:spPr>
-        <p:txBody>
-          <a:bodyPr wrap="none" rtlCol="0">
-            <a:spAutoFit/>
-          </a:bodyPr>
-          <a:lstStyle/>
-          <a:p>
-            <a:pPr lvl="1"/>
-            <a:r>
-              <a:rPr lang="en-US" sz="1600" dirty="0"/>
-              <a:t>		&lt;|&gt;</a:t>
-            </a:r>
-          </a:p>
-          <a:p>
-            <a:pPr lvl="1"/>
-            <a:r>
-              <a:rPr lang="en-US" sz="1600" dirty="0"/>
-              <a:t>		(res := !res + m)); </a:t>
-            </a:r>
-          </a:p>
-          <a:p>
-            <a:pPr lvl="1"/>
-            <a:r>
-              <a:rPr lang="en-US" sz="1600" dirty="0"/>
-              <a:t>		</a:t>
-            </a:r>
-            <a:r>
-              <a:rPr lang="en-US" sz="1600" dirty="0">
-                <a:solidFill>
-                  <a:srgbClr val="F3530B"/>
-                </a:solidFill>
-              </a:rPr>
-              <a:t>assert</a:t>
-            </a:r>
-            <a:r>
-              <a:rPr lang="en-US" sz="1600" dirty="0"/>
-              <a:t> ((!</a:t>
-            </a:r>
-            <a:r>
-              <a:rPr lang="en-US" sz="1600" dirty="0" err="1"/>
-              <a:t>res_l</a:t>
-            </a:r>
-            <a:r>
-              <a:rPr lang="en-US" sz="1600" dirty="0"/>
-              <a:t> = </a:t>
-            </a:r>
-            <a:r>
-              <a:rPr lang="en-US" sz="1600" dirty="0" err="1"/>
-              <a:t>previous_res_l</a:t>
-            </a:r>
-            <a:r>
-              <a:rPr lang="en-US" sz="1600" dirty="0"/>
-              <a:t> + </a:t>
-            </a:r>
-            <a:r>
-              <a:rPr lang="en-US" sz="1600" dirty="0" err="1"/>
-              <a:t>m_l</a:t>
-            </a:r>
-            <a:r>
-              <a:rPr lang="en-US" sz="1600" dirty="0"/>
-              <a:t>));</a:t>
-            </a:r>
-          </a:p>
-          <a:p>
-            <a:pPr lvl="1"/>
-            <a:r>
-              <a:rPr lang="en-US" sz="1600" dirty="0"/>
-              <a:t>		</a:t>
-            </a:r>
-            <a:r>
-              <a:rPr lang="en-US" sz="1600" dirty="0" err="1"/>
-              <a:t>i</a:t>
-            </a:r>
-            <a:r>
-              <a:rPr lang="en-US" sz="1600" dirty="0"/>
-              <a:t> := |_ !</a:t>
-            </a:r>
-            <a:r>
-              <a:rPr lang="en-US" sz="1600" dirty="0" err="1"/>
-              <a:t>i</a:t>
-            </a:r>
-            <a:r>
-              <a:rPr lang="en-US" sz="1600" dirty="0"/>
-              <a:t> + 1 _| </a:t>
-            </a:r>
-          </a:p>
-          <a:p>
-            <a:pPr lvl="1"/>
-            <a:r>
-              <a:rPr lang="en-US" sz="1600" dirty="0"/>
-              <a:t>	</a:t>
-            </a:r>
-            <a:r>
-              <a:rPr lang="en-US" sz="1600" dirty="0">
-                <a:solidFill>
-                  <a:srgbClr val="F3530B"/>
-                </a:solidFill>
-              </a:rPr>
-              <a:t>done</a:t>
-            </a:r>
-            <a:r>
-              <a:rPr lang="en-US" sz="1600" dirty="0"/>
-              <a:t>; </a:t>
-            </a:r>
-          </a:p>
-          <a:p>
-            <a:pPr lvl="1"/>
-            <a:endParaRPr lang="en-US" sz="1600" dirty="0"/>
-          </a:p>
-          <a:p>
-            <a:pPr lvl="1"/>
-            <a:r>
-              <a:rPr lang="en-US" sz="1600" dirty="0"/>
-              <a:t>	|_ !res _| </a:t>
-            </a:r>
-          </a:p>
-          <a:p>
-            <a:pPr lvl="1"/>
-            <a:r>
-              <a:rPr lang="en-US" sz="1600" dirty="0">
-                <a:solidFill>
-                  <a:srgbClr val="F3530B"/>
-                </a:solidFill>
-              </a:rPr>
-              <a:t>end</a:t>
-            </a:r>
-            <a:r>
-              <a:rPr lang="en-US" sz="1600" dirty="0"/>
-              <a:t> </a:t>
-            </a:r>
-          </a:p>
-          <a:p>
-            <a:pPr lvl="1"/>
-            <a:r>
-              <a:rPr lang="en-US" sz="1600" dirty="0"/>
-              <a:t>(*@ </a:t>
-            </a:r>
-            <a:r>
-              <a:rPr lang="en-US" sz="1600" dirty="0">
-                <a:solidFill>
-                  <a:srgbClr val="F3530B"/>
-                </a:solidFill>
-              </a:rPr>
-              <a:t>requires</a:t>
-            </a:r>
-            <a:r>
-              <a:rPr lang="en-US" sz="1600" dirty="0"/>
-              <a:t> </a:t>
-            </a:r>
-            <a:r>
-              <a:rPr lang="en-US" sz="1600" dirty="0" err="1"/>
-              <a:t>n_l</a:t>
-            </a:r>
-            <a:r>
-              <a:rPr lang="en-US" sz="1600" dirty="0"/>
-              <a:t> = </a:t>
-            </a:r>
-            <a:r>
-              <a:rPr lang="en-US" sz="1600" dirty="0" err="1"/>
-              <a:t>n_r</a:t>
-            </a:r>
-            <a:r>
-              <a:rPr lang="en-US" sz="1600" dirty="0"/>
-              <a:t> &amp;&amp; </a:t>
-            </a:r>
-            <a:r>
-              <a:rPr lang="en-US" sz="1600" dirty="0" err="1"/>
-              <a:t>m_l</a:t>
-            </a:r>
-            <a:r>
-              <a:rPr lang="en-US" sz="1600" dirty="0"/>
-              <a:t> = </a:t>
-            </a:r>
-            <a:r>
-              <a:rPr lang="en-US" sz="1600" dirty="0" err="1"/>
-              <a:t>m_r</a:t>
-            </a:r>
-            <a:r>
-              <a:rPr lang="en-US" sz="1600" dirty="0"/>
-              <a:t> &amp;&amp; </a:t>
-            </a:r>
-            <a:r>
-              <a:rPr lang="en-US" sz="1600" dirty="0" err="1"/>
-              <a:t>m_l</a:t>
-            </a:r>
-            <a:r>
-              <a:rPr lang="en-US" sz="1600" dirty="0"/>
-              <a:t> ≥ 0 </a:t>
-            </a:r>
-          </a:p>
-          <a:p>
-            <a:pPr lvl="1"/>
-            <a:r>
-              <a:rPr lang="en-US" sz="1600" dirty="0"/>
-              <a:t>         </a:t>
-            </a:r>
-            <a:r>
-              <a:rPr lang="en-US" sz="1600" dirty="0">
-                <a:solidFill>
-                  <a:srgbClr val="F3530B"/>
-                </a:solidFill>
-              </a:rPr>
-              <a:t>ensures</a:t>
-            </a:r>
-            <a:r>
-              <a:rPr lang="en-US" sz="1600" dirty="0"/>
-              <a:t> match result with (</a:t>
-            </a:r>
-            <a:r>
-              <a:rPr lang="en-US" sz="1600" dirty="0" err="1"/>
-              <a:t>l_res</a:t>
-            </a:r>
-            <a:r>
-              <a:rPr lang="en-US" sz="1600" dirty="0"/>
-              <a:t>, </a:t>
-            </a:r>
-            <a:r>
-              <a:rPr lang="en-US" sz="1600" dirty="0" err="1"/>
-              <a:t>r_res</a:t>
-            </a:r>
-            <a:r>
-              <a:rPr lang="en-US" sz="1600" dirty="0"/>
-              <a:t>) → </a:t>
-            </a:r>
-            <a:r>
-              <a:rPr lang="en-US" sz="1600" dirty="0" err="1"/>
-              <a:t>l_res</a:t>
-            </a:r>
-            <a:r>
-              <a:rPr lang="en-US" sz="1600" dirty="0"/>
-              <a:t> = </a:t>
-            </a:r>
-            <a:r>
-              <a:rPr lang="en-US" sz="1600" dirty="0" err="1"/>
-              <a:t>r_res</a:t>
-            </a:r>
-            <a:r>
-              <a:rPr lang="en-US" sz="1600" dirty="0"/>
-              <a:t> *)</a:t>
-            </a:r>
-          </a:p>
-          <a:p>
-            <a:pPr lvl="1"/>
-            <a:r>
-              <a:rPr lang="en-US" sz="1600" dirty="0"/>
-              <a:t>	 	</a:t>
-            </a:r>
-          </a:p>
-        </p:txBody>
-      </p:sp>
-    </p:spTree>
-    <p:extLst>
-      <p:ext uri="{BB962C8B-B14F-4D97-AF65-F5344CB8AC3E}">
-        <p14:creationId xmlns:p14="http://schemas.microsoft.com/office/powerpoint/2010/main" val="716072140"/>
-      </p:ext>
-    </p:extLst>
-  </p:cSld>
-  <p:clrMapOvr>
-    <a:masterClrMapping/>
-  </p:clrMapOvr>
-</p:sld>
-</file>
-
-<file path=ppt/slides/slide19.xml><?xml version="1.0" encoding="utf-8"?>
-<p:sld xmlns:a="http://schemas.openxmlformats.org/drawingml/2006/main" xmlns:r="http://schemas.openxmlformats.org/officeDocument/2006/relationships" xmlns:p="http://schemas.openxmlformats.org/presentationml/2006/main">
-  <p:cSld>
-    <p:spTree>
-      <p:nvGrpSpPr>
-        <p:cNvPr id="1" name="">
-          <a:extLst>
-            <a:ext uri="{FF2B5EF4-FFF2-40B4-BE49-F238E27FC236}">
-              <a16:creationId xmlns:a16="http://schemas.microsoft.com/office/drawing/2014/main" id="{B8B54E8D-B6D5-0230-DF37-1C43B702CADB}"/>
-            </a:ext>
-          </a:extLst>
-        </p:cNvPr>
-        <p:cNvGrpSpPr/>
-        <p:nvPr/>
-      </p:nvGrpSpPr>
-      <p:grpSpPr>
-        <a:xfrm>
-          <a:off x="0" y="0"/>
-          <a:ext cx="0" cy="0"/>
-          <a:chOff x="0" y="0"/>
-          <a:chExt cx="0" cy="0"/>
-        </a:xfrm>
-      </p:grpSpPr>
-      <p:sp>
-        <p:nvSpPr>
-          <p:cNvPr id="2" name="TextBox 1">
-            <a:extLst>
-              <a:ext uri="{FF2B5EF4-FFF2-40B4-BE49-F238E27FC236}">
-                <a16:creationId xmlns:a16="http://schemas.microsoft.com/office/drawing/2014/main" id="{B2A7A9C4-A0A2-C6B1-8BFE-2ABD7DBBE57A}"/>
-              </a:ext>
-            </a:extLst>
-          </p:cNvPr>
-          <p:cNvSpPr txBox="1"/>
-          <p:nvPr/>
-        </p:nvSpPr>
-        <p:spPr>
-          <a:xfrm>
-            <a:off x="469556" y="626071"/>
-            <a:ext cx="6845644" cy="523220"/>
-          </a:xfrm>
-          <a:prstGeom prst="rect">
-            <a:avLst/>
-          </a:prstGeom>
-          <a:noFill/>
-        </p:spPr>
-        <p:txBody>
-          <a:bodyPr wrap="square" rtlCol="0">
-            <a:spAutoFit/>
-          </a:bodyPr>
-          <a:lstStyle/>
-          <a:p>
-            <a:r>
-              <a:rPr lang="pt-PT" sz="2800" noProof="1">
-                <a:solidFill>
-                  <a:srgbClr val="002060"/>
-                </a:solidFill>
-              </a:rPr>
-              <a:t>mult - OCaml  (1/2)</a:t>
-            </a:r>
-            <a:endParaRPr lang="en-US" sz="2800" noProof="1"/>
-          </a:p>
-        </p:txBody>
-      </p:sp>
-      <p:sp>
-        <p:nvSpPr>
-          <p:cNvPr id="4" name="Slide Number Placeholder 3">
-            <a:extLst>
-              <a:ext uri="{FF2B5EF4-FFF2-40B4-BE49-F238E27FC236}">
-                <a16:creationId xmlns:a16="http://schemas.microsoft.com/office/drawing/2014/main" id="{56770F71-793B-9A14-6C40-D1E1BC1DD261}"/>
-              </a:ext>
-            </a:extLst>
-          </p:cNvPr>
-          <p:cNvSpPr>
-            <a:spLocks noGrp="1"/>
-          </p:cNvSpPr>
-          <p:nvPr>
-            <p:ph type="sldNum" sz="quarter" idx="12"/>
-          </p:nvPr>
-        </p:nvSpPr>
-        <p:spPr/>
-        <p:txBody>
-          <a:bodyPr/>
-          <a:lstStyle/>
-          <a:p>
-            <a:fld id="{292A9FD8-515A-4698-9313-0AB17EE9632B}" type="slidenum">
-              <a:rPr lang="en-US" noProof="1" dirty="0" smtClean="0"/>
-              <a:t>19</a:t>
-            </a:fld>
-            <a:endParaRPr lang="en-US" noProof="1"/>
-          </a:p>
-        </p:txBody>
-      </p:sp>
-      <p:sp>
-        <p:nvSpPr>
-          <p:cNvPr id="3" name="TextBox 2">
-            <a:extLst>
-              <a:ext uri="{FF2B5EF4-FFF2-40B4-BE49-F238E27FC236}">
-                <a16:creationId xmlns:a16="http://schemas.microsoft.com/office/drawing/2014/main" id="{6F1C708B-8C9C-C8CD-D68A-5E9330C457EC}"/>
-              </a:ext>
-            </a:extLst>
-          </p:cNvPr>
-          <p:cNvSpPr txBox="1"/>
-          <p:nvPr/>
-        </p:nvSpPr>
-        <p:spPr>
-          <a:xfrm>
-            <a:off x="469556" y="1417221"/>
-            <a:ext cx="5782737" cy="4031873"/>
-          </a:xfrm>
-          <a:prstGeom prst="rect">
-            <a:avLst/>
-          </a:prstGeom>
-          <a:noFill/>
-        </p:spPr>
-        <p:txBody>
-          <a:bodyPr wrap="none" rtlCol="0">
-            <a:spAutoFit/>
-          </a:bodyPr>
-          <a:lstStyle/>
-          <a:p>
-            <a:r>
-              <a:rPr lang="en-US" sz="1600" dirty="0">
-                <a:solidFill>
-                  <a:srgbClr val="F3530B"/>
-                </a:solidFill>
-              </a:rPr>
-              <a:t>let</a:t>
-            </a:r>
-            <a:r>
-              <a:rPr lang="en-US" sz="1600" dirty="0"/>
-              <a:t> </a:t>
-            </a:r>
-            <a:r>
-              <a:rPr lang="en-US" sz="1600" dirty="0" err="1"/>
-              <a:t>mult_ocaml</a:t>
-            </a:r>
-            <a:r>
-              <a:rPr lang="en-US" sz="1600" dirty="0"/>
-              <a:t> </a:t>
-            </a:r>
-            <a:r>
-              <a:rPr lang="pt-PT" sz="1600" dirty="0"/>
-              <a:t>(</a:t>
-            </a:r>
-            <a:r>
-              <a:rPr lang="pt-PT" sz="1600" dirty="0" err="1"/>
-              <a:t>n_l</a:t>
-            </a:r>
-            <a:r>
-              <a:rPr lang="pt-PT" sz="1600" dirty="0"/>
-              <a:t> : </a:t>
-            </a:r>
-            <a:r>
-              <a:rPr lang="pt-PT" sz="1600" dirty="0" err="1">
-                <a:solidFill>
-                  <a:srgbClr val="F3530B"/>
-                </a:solidFill>
-              </a:rPr>
-              <a:t>int</a:t>
-            </a:r>
-            <a:r>
-              <a:rPr lang="pt-PT" sz="1600" dirty="0"/>
-              <a:t>) (</a:t>
-            </a:r>
-            <a:r>
-              <a:rPr lang="pt-PT" sz="1600" dirty="0" err="1"/>
-              <a:t>n_r</a:t>
-            </a:r>
-            <a:r>
-              <a:rPr lang="pt-PT" sz="1600" dirty="0"/>
-              <a:t> : </a:t>
-            </a:r>
-            <a:r>
-              <a:rPr lang="pt-PT" sz="1600" dirty="0" err="1">
-                <a:solidFill>
-                  <a:srgbClr val="F3530B"/>
-                </a:solidFill>
-              </a:rPr>
-              <a:t>int</a:t>
-            </a:r>
-            <a:r>
-              <a:rPr lang="pt-PT" sz="1600" dirty="0"/>
-              <a:t>) (</a:t>
-            </a:r>
-            <a:r>
-              <a:rPr lang="pt-PT" sz="1600" dirty="0" err="1"/>
-              <a:t>m_l</a:t>
-            </a:r>
-            <a:r>
-              <a:rPr lang="pt-PT" sz="1600" dirty="0"/>
-              <a:t> : </a:t>
-            </a:r>
-            <a:r>
-              <a:rPr lang="pt-PT" sz="1600" dirty="0" err="1">
-                <a:solidFill>
-                  <a:srgbClr val="F3530B"/>
-                </a:solidFill>
-              </a:rPr>
-              <a:t>int</a:t>
-            </a:r>
-            <a:r>
-              <a:rPr lang="pt-PT" sz="1600" dirty="0"/>
-              <a:t>) (</a:t>
-            </a:r>
-            <a:r>
-              <a:rPr lang="pt-PT" sz="1600" dirty="0" err="1"/>
-              <a:t>m_r</a:t>
-            </a:r>
-            <a:r>
-              <a:rPr lang="pt-PT" sz="1600" dirty="0"/>
-              <a:t> : </a:t>
-            </a:r>
-            <a:r>
-              <a:rPr lang="pt-PT" sz="1600" dirty="0" err="1">
-                <a:solidFill>
-                  <a:srgbClr val="F3530B"/>
-                </a:solidFill>
-              </a:rPr>
-              <a:t>int</a:t>
-            </a:r>
-            <a:r>
-              <a:rPr lang="pt-PT" sz="1600" dirty="0"/>
-              <a:t>)</a:t>
-            </a:r>
-            <a:r>
-              <a:rPr lang="en-US" sz="1600" dirty="0"/>
-              <a:t> : </a:t>
-            </a:r>
-            <a:r>
-              <a:rPr lang="en-US" sz="1600" dirty="0">
-                <a:solidFill>
-                  <a:srgbClr val="F3530B"/>
-                </a:solidFill>
-              </a:rPr>
-              <a:t>int</a:t>
-            </a:r>
-            <a:r>
-              <a:rPr lang="en-US" sz="1600" dirty="0"/>
-              <a:t> * </a:t>
-            </a:r>
-            <a:r>
-              <a:rPr lang="en-US" sz="1600" dirty="0">
-                <a:solidFill>
-                  <a:srgbClr val="F3530B"/>
-                </a:solidFill>
-              </a:rPr>
-              <a:t>int</a:t>
-            </a:r>
-            <a:r>
-              <a:rPr lang="en-US" sz="1600" dirty="0"/>
-              <a:t> =</a:t>
-            </a:r>
-          </a:p>
-          <a:p>
-            <a:r>
-              <a:rPr lang="en-US" sz="1600" dirty="0"/>
-              <a:t>	</a:t>
-            </a:r>
-            <a:r>
-              <a:rPr lang="en-US" sz="1600" dirty="0">
-                <a:solidFill>
-                  <a:srgbClr val="F3530B"/>
-                </a:solidFill>
-              </a:rPr>
-              <a:t>let</a:t>
-            </a:r>
-            <a:r>
-              <a:rPr lang="en-US" sz="1600" dirty="0"/>
-              <a:t> </a:t>
-            </a:r>
-            <a:r>
-              <a:rPr lang="en-US" sz="1600" dirty="0" err="1"/>
-              <a:t>i_l</a:t>
-            </a:r>
-            <a:r>
-              <a:rPr lang="en-US" sz="1600" dirty="0"/>
-              <a:t> = ref (0) </a:t>
-            </a:r>
-            <a:r>
-              <a:rPr lang="en-US" sz="1600" dirty="0">
-                <a:solidFill>
-                  <a:srgbClr val="F3530B"/>
-                </a:solidFill>
-              </a:rPr>
-              <a:t>in</a:t>
-            </a:r>
-          </a:p>
-          <a:p>
-            <a:pPr lvl="1"/>
-            <a:r>
-              <a:rPr lang="en-US" sz="1600" dirty="0">
-                <a:solidFill>
-                  <a:srgbClr val="F3530B"/>
-                </a:solidFill>
-              </a:rPr>
-              <a:t>let</a:t>
-            </a:r>
-            <a:r>
-              <a:rPr lang="en-US" sz="1600" dirty="0"/>
-              <a:t> </a:t>
-            </a:r>
-            <a:r>
-              <a:rPr lang="en-US" sz="1600" dirty="0" err="1"/>
-              <a:t>i_r</a:t>
-            </a:r>
-            <a:r>
-              <a:rPr lang="en-US" sz="1600" dirty="0"/>
-              <a:t> = ref (0) </a:t>
-            </a:r>
-            <a:r>
-              <a:rPr lang="en-US" sz="1600" dirty="0">
-                <a:solidFill>
-                  <a:srgbClr val="F3530B"/>
-                </a:solidFill>
-              </a:rPr>
-              <a:t>in</a:t>
-            </a:r>
-          </a:p>
-          <a:p>
-            <a:pPr lvl="1"/>
-            <a:r>
-              <a:rPr lang="en-US" sz="1600" dirty="0">
-                <a:solidFill>
-                  <a:srgbClr val="F3530B"/>
-                </a:solidFill>
-              </a:rPr>
-              <a:t>let</a:t>
-            </a:r>
-            <a:r>
-              <a:rPr lang="en-US" sz="1600" dirty="0"/>
-              <a:t> </a:t>
-            </a:r>
-            <a:r>
-              <a:rPr lang="en-US" sz="1600" dirty="0" err="1"/>
-              <a:t>res_l</a:t>
-            </a:r>
-            <a:r>
-              <a:rPr lang="en-US" sz="1600" dirty="0"/>
-              <a:t> = ref (0) </a:t>
-            </a:r>
-            <a:r>
-              <a:rPr lang="en-US" sz="1600" dirty="0">
-                <a:solidFill>
-                  <a:srgbClr val="F3530B"/>
-                </a:solidFill>
-              </a:rPr>
-              <a:t>in</a:t>
-            </a:r>
-          </a:p>
-          <a:p>
-            <a:pPr lvl="1"/>
-            <a:r>
-              <a:rPr lang="en-US" sz="1600" dirty="0">
-                <a:solidFill>
-                  <a:srgbClr val="F3530B"/>
-                </a:solidFill>
-              </a:rPr>
-              <a:t>let</a:t>
-            </a:r>
-            <a:r>
-              <a:rPr lang="en-US" sz="1600" dirty="0"/>
-              <a:t> </a:t>
-            </a:r>
-            <a:r>
-              <a:rPr lang="en-US" sz="1600" dirty="0" err="1"/>
-              <a:t>res_r</a:t>
-            </a:r>
-            <a:r>
-              <a:rPr lang="en-US" sz="1600" dirty="0"/>
-              <a:t> = ref (0) </a:t>
-            </a:r>
-            <a:r>
-              <a:rPr lang="en-US" sz="1600" dirty="0">
-                <a:solidFill>
-                  <a:srgbClr val="F3530B"/>
-                </a:solidFill>
-              </a:rPr>
-              <a:t>in</a:t>
-            </a:r>
-          </a:p>
-          <a:p>
-            <a:pPr lvl="1"/>
-            <a:endParaRPr lang="en-US" sz="1600" dirty="0"/>
-          </a:p>
-          <a:p>
-            <a:pPr lvl="1"/>
-            <a:r>
-              <a:rPr lang="en-US" sz="1600" dirty="0">
-                <a:solidFill>
-                  <a:srgbClr val="F3530B"/>
-                </a:solidFill>
-              </a:rPr>
-              <a:t>while</a:t>
-            </a:r>
-            <a:r>
-              <a:rPr lang="en-US" sz="1600" dirty="0"/>
-              <a:t> (!</a:t>
-            </a:r>
-            <a:r>
-              <a:rPr lang="en-US" sz="1600" dirty="0" err="1"/>
-              <a:t>i_l</a:t>
-            </a:r>
-            <a:r>
-              <a:rPr lang="en-US" sz="1600" dirty="0"/>
-              <a:t> &lt; </a:t>
-            </a:r>
-            <a:r>
-              <a:rPr lang="en-US" sz="1600" dirty="0" err="1"/>
-              <a:t>n_l</a:t>
-            </a:r>
-            <a:r>
-              <a:rPr lang="en-US" sz="1600" dirty="0"/>
-              <a:t>) </a:t>
-            </a:r>
-            <a:r>
-              <a:rPr lang="en-US" sz="1600" dirty="0">
-                <a:solidFill>
-                  <a:srgbClr val="F3530B"/>
-                </a:solidFill>
-              </a:rPr>
-              <a:t>do</a:t>
-            </a:r>
-          </a:p>
-          <a:p>
-            <a:pPr lvl="1"/>
-            <a:r>
-              <a:rPr lang="en-US" sz="1600" dirty="0"/>
-              <a:t> 	</a:t>
-            </a:r>
-            <a:r>
-              <a:rPr lang="pt-PT" sz="1600" dirty="0"/>
-              <a:t>(*@ </a:t>
-            </a:r>
-            <a:r>
-              <a:rPr lang="pt-PT" sz="1600" dirty="0" err="1">
-                <a:solidFill>
-                  <a:srgbClr val="F3530B"/>
-                </a:solidFill>
-              </a:rPr>
-              <a:t>invariant</a:t>
-            </a:r>
-            <a:r>
-              <a:rPr lang="pt-PT" sz="1600" dirty="0"/>
-              <a:t>  ((!</a:t>
-            </a:r>
-            <a:r>
-              <a:rPr lang="pt-PT" sz="1600" dirty="0" err="1"/>
-              <a:t>i_l</a:t>
-            </a:r>
-            <a:r>
-              <a:rPr lang="pt-PT" sz="1600" dirty="0"/>
-              <a:t> &lt; </a:t>
-            </a:r>
-            <a:r>
-              <a:rPr lang="pt-PT" sz="1600" dirty="0" err="1"/>
-              <a:t>n_l</a:t>
-            </a:r>
-            <a:r>
-              <a:rPr lang="pt-PT" sz="1600" dirty="0"/>
-              <a:t>)) ↔ ((!</a:t>
-            </a:r>
-            <a:r>
-              <a:rPr lang="pt-PT" sz="1600" dirty="0" err="1"/>
-              <a:t>i_r</a:t>
-            </a:r>
-            <a:r>
-              <a:rPr lang="pt-PT" sz="1600" dirty="0"/>
-              <a:t> &lt; </a:t>
-            </a:r>
-            <a:r>
-              <a:rPr lang="pt-PT" sz="1600" dirty="0" err="1"/>
-              <a:t>n_r</a:t>
-            </a:r>
-            <a:r>
-              <a:rPr lang="pt-PT" sz="1600" dirty="0"/>
-              <a:t>)) </a:t>
-            </a:r>
-          </a:p>
-          <a:p>
-            <a:pPr lvl="1"/>
-            <a:r>
-              <a:rPr lang="pt-PT" sz="1600" dirty="0"/>
-              <a:t>	         </a:t>
-            </a:r>
-            <a:r>
-              <a:rPr lang="pt-PT" sz="1600" dirty="0" err="1">
-                <a:solidFill>
-                  <a:srgbClr val="F3530B"/>
-                </a:solidFill>
-              </a:rPr>
-              <a:t>variant</a:t>
-            </a:r>
-            <a:r>
-              <a:rPr lang="pt-PT" sz="1600" dirty="0"/>
-              <a:t>      </a:t>
-            </a:r>
-            <a:r>
-              <a:rPr lang="pt-PT" sz="1600" dirty="0" err="1"/>
-              <a:t>n_l</a:t>
-            </a:r>
-            <a:r>
-              <a:rPr lang="pt-PT" sz="1600" dirty="0"/>
-              <a:t> - !</a:t>
-            </a:r>
-            <a:r>
-              <a:rPr lang="pt-PT" sz="1600" dirty="0" err="1"/>
-              <a:t>i_l</a:t>
-            </a:r>
-            <a:r>
-              <a:rPr lang="pt-PT" sz="1600" dirty="0"/>
-              <a:t> </a:t>
-            </a:r>
-          </a:p>
-          <a:p>
-            <a:pPr lvl="1"/>
-            <a:r>
-              <a:rPr lang="pt-PT" sz="1600" dirty="0"/>
-              <a:t> 	         </a:t>
-            </a:r>
-            <a:r>
-              <a:rPr lang="pt-PT" sz="1600" dirty="0" err="1">
-                <a:solidFill>
-                  <a:srgbClr val="F3530B"/>
-                </a:solidFill>
-              </a:rPr>
-              <a:t>invariant</a:t>
-            </a:r>
-            <a:r>
-              <a:rPr lang="pt-PT" sz="1600" dirty="0"/>
-              <a:t>  !</a:t>
-            </a:r>
-            <a:r>
-              <a:rPr lang="pt-PT" sz="1600" dirty="0" err="1"/>
-              <a:t>i_l</a:t>
-            </a:r>
-            <a:r>
-              <a:rPr lang="pt-PT" sz="1600" dirty="0"/>
-              <a:t> = !</a:t>
-            </a:r>
-            <a:r>
-              <a:rPr lang="pt-PT" sz="1600" dirty="0" err="1"/>
-              <a:t>i_r</a:t>
-            </a:r>
-            <a:r>
-              <a:rPr lang="pt-PT" sz="1600" dirty="0"/>
-              <a:t> &amp;&amp; !</a:t>
-            </a:r>
-            <a:r>
-              <a:rPr lang="pt-PT" sz="1600" dirty="0" err="1"/>
-              <a:t>res_l</a:t>
-            </a:r>
-            <a:r>
-              <a:rPr lang="pt-PT" sz="1600" dirty="0"/>
-              <a:t> = ! </a:t>
-            </a:r>
-            <a:r>
-              <a:rPr lang="pt-PT" sz="1600" dirty="0" err="1"/>
-              <a:t>res_r</a:t>
-            </a:r>
-            <a:r>
-              <a:rPr lang="pt-PT" sz="1600" dirty="0"/>
-              <a:t> *)</a:t>
-            </a:r>
-          </a:p>
-          <a:p>
-            <a:pPr lvl="1"/>
-            <a:r>
-              <a:rPr lang="en-US" sz="1600" dirty="0"/>
-              <a:t>	</a:t>
-            </a:r>
-          </a:p>
-          <a:p>
-            <a:pPr lvl="1"/>
-            <a:r>
-              <a:rPr lang="en-US" sz="1600" dirty="0"/>
-              <a:t>	</a:t>
-            </a:r>
-            <a:r>
-              <a:rPr lang="en-US" sz="1600" dirty="0">
-                <a:solidFill>
-                  <a:srgbClr val="F3530B"/>
-                </a:solidFill>
-              </a:rPr>
-              <a:t>let</a:t>
-            </a:r>
-            <a:r>
-              <a:rPr lang="en-US" sz="1600" dirty="0"/>
-              <a:t> </a:t>
-            </a:r>
-            <a:r>
-              <a:rPr lang="en-US" sz="1600" dirty="0" err="1"/>
-              <a:t>previous_res_l</a:t>
-            </a:r>
-            <a:r>
-              <a:rPr lang="en-US" sz="1600" dirty="0"/>
-              <a:t> = !</a:t>
-            </a:r>
-            <a:r>
-              <a:rPr lang="en-US" sz="1600" dirty="0" err="1"/>
-              <a:t>res_l</a:t>
-            </a:r>
-            <a:r>
-              <a:rPr lang="en-US" sz="1600" dirty="0"/>
-              <a:t> </a:t>
-            </a:r>
-            <a:r>
-              <a:rPr lang="en-US" sz="1600" dirty="0">
-                <a:solidFill>
-                  <a:srgbClr val="F3530B"/>
-                </a:solidFill>
-              </a:rPr>
-              <a:t>in</a:t>
-            </a:r>
-            <a:r>
-              <a:rPr lang="en-US" sz="1600" dirty="0"/>
-              <a:t> </a:t>
-            </a:r>
-          </a:p>
-          <a:p>
-            <a:pPr lvl="1"/>
-            <a:r>
-              <a:rPr lang="en-US" sz="1600" dirty="0"/>
-              <a:t>	</a:t>
-            </a:r>
-            <a:r>
-              <a:rPr lang="en-US" sz="1600" dirty="0">
-                <a:solidFill>
-                  <a:srgbClr val="F3530B"/>
-                </a:solidFill>
-              </a:rPr>
-              <a:t>let</a:t>
-            </a:r>
-            <a:r>
-              <a:rPr lang="en-US" sz="1600" dirty="0"/>
-              <a:t> </a:t>
-            </a:r>
-            <a:r>
-              <a:rPr lang="en-US" sz="1600" dirty="0" err="1"/>
-              <a:t>j_l</a:t>
-            </a:r>
-            <a:r>
-              <a:rPr lang="en-US" sz="1600" dirty="0"/>
-              <a:t> = ref (0) </a:t>
-            </a:r>
-            <a:r>
-              <a:rPr lang="en-US" sz="1600" dirty="0">
-                <a:solidFill>
-                  <a:srgbClr val="F3530B"/>
-                </a:solidFill>
-              </a:rPr>
-              <a:t>in</a:t>
-            </a:r>
-            <a:r>
-              <a:rPr lang="en-US" sz="1600" dirty="0"/>
-              <a:t> </a:t>
-            </a:r>
-          </a:p>
-          <a:p>
-            <a:pPr lvl="1"/>
-            <a:r>
-              <a:rPr lang="en-US" sz="1600" dirty="0"/>
-              <a:t>	</a:t>
-            </a:r>
-            <a:r>
-              <a:rPr lang="en-US" sz="1600" dirty="0">
-                <a:solidFill>
-                  <a:srgbClr val="F3530B"/>
-                </a:solidFill>
-              </a:rPr>
-              <a:t>let</a:t>
-            </a:r>
-            <a:r>
-              <a:rPr lang="en-US" sz="1600" dirty="0"/>
-              <a:t> </a:t>
-            </a:r>
-            <a:r>
-              <a:rPr lang="en-US" sz="1600" dirty="0" err="1"/>
-              <a:t>j_r</a:t>
-            </a:r>
-            <a:r>
-              <a:rPr lang="en-US" sz="1600" dirty="0"/>
-              <a:t> = ref (0) </a:t>
-            </a:r>
-            <a:r>
-              <a:rPr lang="en-US" sz="1600" dirty="0">
-                <a:solidFill>
-                  <a:srgbClr val="F3530B"/>
-                </a:solidFill>
-              </a:rPr>
-              <a:t>in</a:t>
-            </a:r>
-          </a:p>
-          <a:p>
-            <a:pPr lvl="1"/>
-            <a:r>
-              <a:rPr lang="en-US" sz="1600" dirty="0"/>
-              <a:t>	</a:t>
-            </a:r>
-          </a:p>
-          <a:p>
-            <a:pPr lvl="1"/>
-            <a:r>
-              <a:rPr lang="en-US" sz="1600" dirty="0"/>
-              <a:t>	 	</a:t>
-            </a:r>
-          </a:p>
-        </p:txBody>
-      </p:sp>
-    </p:spTree>
-    <p:extLst>
-      <p:ext uri="{BB962C8B-B14F-4D97-AF65-F5344CB8AC3E}">
-        <p14:creationId xmlns:p14="http://schemas.microsoft.com/office/powerpoint/2010/main" val="4242151965"/>
       </p:ext>
     </p:extLst>
   </p:cSld>
@@ -6913,6 +6093,1103 @@
         <p:cNvPr id="1" name="">
           <a:extLst>
             <a:ext uri="{FF2B5EF4-FFF2-40B4-BE49-F238E27FC236}">
+              <a16:creationId xmlns:a16="http://schemas.microsoft.com/office/drawing/2014/main" id="{75D6C375-5114-E08A-ACF7-8DC5CC11E5B3}"/>
+            </a:ext>
+          </a:extLst>
+        </p:cNvPr>
+        <p:cNvGrpSpPr/>
+        <p:nvPr/>
+      </p:nvGrpSpPr>
+      <p:grpSpPr>
+        <a:xfrm>
+          <a:off x="0" y="0"/>
+          <a:ext cx="0" cy="0"/>
+          <a:chOff x="0" y="0"/>
+          <a:chExt cx="0" cy="0"/>
+        </a:xfrm>
+      </p:grpSpPr>
+      <p:sp>
+        <p:nvSpPr>
+          <p:cNvPr id="2" name="TextBox 1">
+            <a:extLst>
+              <a:ext uri="{FF2B5EF4-FFF2-40B4-BE49-F238E27FC236}">
+                <a16:creationId xmlns:a16="http://schemas.microsoft.com/office/drawing/2014/main" id="{A63A2B8F-A6DC-BB28-4D1C-1D15941CDB17}"/>
+              </a:ext>
+            </a:extLst>
+          </p:cNvPr>
+          <p:cNvSpPr txBox="1"/>
+          <p:nvPr/>
+        </p:nvSpPr>
+        <p:spPr>
+          <a:xfrm>
+            <a:off x="469556" y="626071"/>
+            <a:ext cx="6845644" cy="523220"/>
+          </a:xfrm>
+          <a:prstGeom prst="rect">
+            <a:avLst/>
+          </a:prstGeom>
+          <a:noFill/>
+        </p:spPr>
+        <p:txBody>
+          <a:bodyPr wrap="square" rtlCol="0">
+            <a:spAutoFit/>
+          </a:bodyPr>
+          <a:lstStyle/>
+          <a:p>
+            <a:r>
+              <a:rPr lang="pt-PT" sz="2800" noProof="1">
+                <a:solidFill>
+                  <a:srgbClr val="002060"/>
+                </a:solidFill>
+              </a:rPr>
+              <a:t>mult - BipLang  (2/2)</a:t>
+            </a:r>
+            <a:endParaRPr lang="en-US" sz="2800" noProof="1"/>
+          </a:p>
+        </p:txBody>
+      </p:sp>
+      <p:sp>
+        <p:nvSpPr>
+          <p:cNvPr id="4" name="Slide Number Placeholder 3">
+            <a:extLst>
+              <a:ext uri="{FF2B5EF4-FFF2-40B4-BE49-F238E27FC236}">
+                <a16:creationId xmlns:a16="http://schemas.microsoft.com/office/drawing/2014/main" id="{121CC79A-EDC9-9E72-C07B-E7F641CACDAA}"/>
+              </a:ext>
+            </a:extLst>
+          </p:cNvPr>
+          <p:cNvSpPr>
+            <a:spLocks noGrp="1"/>
+          </p:cNvSpPr>
+          <p:nvPr>
+            <p:ph type="sldNum" sz="quarter" idx="12"/>
+          </p:nvPr>
+        </p:nvSpPr>
+        <p:spPr/>
+        <p:txBody>
+          <a:bodyPr/>
+          <a:lstStyle/>
+          <a:p>
+            <a:fld id="{292A9FD8-515A-4698-9313-0AB17EE9632B}" type="slidenum">
+              <a:rPr lang="en-US" noProof="1" dirty="0" smtClean="0"/>
+              <a:t>20</a:t>
+            </a:fld>
+            <a:endParaRPr lang="en-US" noProof="1"/>
+          </a:p>
+        </p:txBody>
+      </p:sp>
+      <p:sp>
+        <p:nvSpPr>
+          <p:cNvPr id="3" name="TextBox 2">
+            <a:extLst>
+              <a:ext uri="{FF2B5EF4-FFF2-40B4-BE49-F238E27FC236}">
+                <a16:creationId xmlns:a16="http://schemas.microsoft.com/office/drawing/2014/main" id="{8590F0BC-BDEE-D826-69C7-37B335EBC49A}"/>
+              </a:ext>
+            </a:extLst>
+          </p:cNvPr>
+          <p:cNvSpPr txBox="1"/>
+          <p:nvPr/>
+        </p:nvSpPr>
+        <p:spPr>
+          <a:xfrm>
+            <a:off x="0" y="1407243"/>
+            <a:ext cx="5878404" cy="2800767"/>
+          </a:xfrm>
+          <a:prstGeom prst="rect">
+            <a:avLst/>
+          </a:prstGeom>
+          <a:noFill/>
+        </p:spPr>
+        <p:txBody>
+          <a:bodyPr wrap="none" rtlCol="0">
+            <a:spAutoFit/>
+          </a:bodyPr>
+          <a:lstStyle/>
+          <a:p>
+            <a:pPr lvl="1"/>
+            <a:r>
+              <a:rPr lang="en-US" sz="1600" dirty="0"/>
+              <a:t>		&lt;|&gt;</a:t>
+            </a:r>
+          </a:p>
+          <a:p>
+            <a:pPr lvl="1"/>
+            <a:r>
+              <a:rPr lang="en-US" sz="1600" dirty="0"/>
+              <a:t>		(res := !res + m)); </a:t>
+            </a:r>
+          </a:p>
+          <a:p>
+            <a:pPr lvl="1"/>
+            <a:r>
+              <a:rPr lang="en-US" sz="1600" dirty="0"/>
+              <a:t>		</a:t>
+            </a:r>
+            <a:r>
+              <a:rPr lang="en-US" sz="1600" dirty="0">
+                <a:solidFill>
+                  <a:srgbClr val="F3530B"/>
+                </a:solidFill>
+              </a:rPr>
+              <a:t>assert</a:t>
+            </a:r>
+            <a:r>
+              <a:rPr lang="en-US" sz="1600" dirty="0"/>
+              <a:t> ((!</a:t>
+            </a:r>
+            <a:r>
+              <a:rPr lang="en-US" sz="1600" dirty="0" err="1"/>
+              <a:t>res_l</a:t>
+            </a:r>
+            <a:r>
+              <a:rPr lang="en-US" sz="1600" dirty="0"/>
+              <a:t> = </a:t>
+            </a:r>
+            <a:r>
+              <a:rPr lang="en-US" sz="1600" dirty="0" err="1"/>
+              <a:t>previous_res_l</a:t>
+            </a:r>
+            <a:r>
+              <a:rPr lang="en-US" sz="1600" dirty="0"/>
+              <a:t> + </a:t>
+            </a:r>
+            <a:r>
+              <a:rPr lang="en-US" sz="1600" dirty="0" err="1"/>
+              <a:t>m_l</a:t>
+            </a:r>
+            <a:r>
+              <a:rPr lang="en-US" sz="1600" dirty="0"/>
+              <a:t>));</a:t>
+            </a:r>
+          </a:p>
+          <a:p>
+            <a:pPr lvl="1"/>
+            <a:r>
+              <a:rPr lang="en-US" sz="1600" dirty="0"/>
+              <a:t>		</a:t>
+            </a:r>
+            <a:r>
+              <a:rPr lang="en-US" sz="1600" dirty="0" err="1"/>
+              <a:t>i</a:t>
+            </a:r>
+            <a:r>
+              <a:rPr lang="en-US" sz="1600" dirty="0"/>
+              <a:t> := |_ !</a:t>
+            </a:r>
+            <a:r>
+              <a:rPr lang="en-US" sz="1600" dirty="0" err="1"/>
+              <a:t>i</a:t>
+            </a:r>
+            <a:r>
+              <a:rPr lang="en-US" sz="1600" dirty="0"/>
+              <a:t> + 1 _| </a:t>
+            </a:r>
+          </a:p>
+          <a:p>
+            <a:pPr lvl="1"/>
+            <a:r>
+              <a:rPr lang="en-US" sz="1600" dirty="0"/>
+              <a:t>	</a:t>
+            </a:r>
+            <a:r>
+              <a:rPr lang="en-US" sz="1600" dirty="0">
+                <a:solidFill>
+                  <a:srgbClr val="F3530B"/>
+                </a:solidFill>
+              </a:rPr>
+              <a:t>done</a:t>
+            </a:r>
+            <a:r>
+              <a:rPr lang="en-US" sz="1600" dirty="0"/>
+              <a:t>; </a:t>
+            </a:r>
+          </a:p>
+          <a:p>
+            <a:pPr lvl="1"/>
+            <a:endParaRPr lang="en-US" sz="1600" dirty="0"/>
+          </a:p>
+          <a:p>
+            <a:pPr lvl="1"/>
+            <a:r>
+              <a:rPr lang="en-US" sz="1600" dirty="0"/>
+              <a:t>	|_ !res _| </a:t>
+            </a:r>
+          </a:p>
+          <a:p>
+            <a:pPr lvl="1"/>
+            <a:r>
+              <a:rPr lang="en-US" sz="1600" dirty="0">
+                <a:solidFill>
+                  <a:srgbClr val="F3530B"/>
+                </a:solidFill>
+              </a:rPr>
+              <a:t>end</a:t>
+            </a:r>
+            <a:r>
+              <a:rPr lang="en-US" sz="1600" dirty="0"/>
+              <a:t> </a:t>
+            </a:r>
+          </a:p>
+          <a:p>
+            <a:pPr lvl="1"/>
+            <a:r>
+              <a:rPr lang="en-US" sz="1600" dirty="0"/>
+              <a:t>(*@ </a:t>
+            </a:r>
+            <a:r>
+              <a:rPr lang="en-US" sz="1600" dirty="0">
+                <a:solidFill>
+                  <a:srgbClr val="F3530B"/>
+                </a:solidFill>
+              </a:rPr>
+              <a:t>requires</a:t>
+            </a:r>
+            <a:r>
+              <a:rPr lang="en-US" sz="1600" dirty="0"/>
+              <a:t> </a:t>
+            </a:r>
+            <a:r>
+              <a:rPr lang="en-US" sz="1600" dirty="0" err="1"/>
+              <a:t>n_l</a:t>
+            </a:r>
+            <a:r>
+              <a:rPr lang="en-US" sz="1600" dirty="0"/>
+              <a:t> = </a:t>
+            </a:r>
+            <a:r>
+              <a:rPr lang="en-US" sz="1600" dirty="0" err="1"/>
+              <a:t>n_r</a:t>
+            </a:r>
+            <a:r>
+              <a:rPr lang="en-US" sz="1600" dirty="0"/>
+              <a:t> &amp;&amp; </a:t>
+            </a:r>
+            <a:r>
+              <a:rPr lang="en-US" sz="1600" dirty="0" err="1"/>
+              <a:t>m_l</a:t>
+            </a:r>
+            <a:r>
+              <a:rPr lang="en-US" sz="1600" dirty="0"/>
+              <a:t> = </a:t>
+            </a:r>
+            <a:r>
+              <a:rPr lang="en-US" sz="1600" dirty="0" err="1"/>
+              <a:t>m_r</a:t>
+            </a:r>
+            <a:r>
+              <a:rPr lang="en-US" sz="1600" dirty="0"/>
+              <a:t> &amp;&amp; </a:t>
+            </a:r>
+            <a:r>
+              <a:rPr lang="en-US" sz="1600" dirty="0" err="1"/>
+              <a:t>m_l</a:t>
+            </a:r>
+            <a:r>
+              <a:rPr lang="en-US" sz="1600" dirty="0"/>
+              <a:t> ≥ 0 </a:t>
+            </a:r>
+          </a:p>
+          <a:p>
+            <a:pPr lvl="1"/>
+            <a:r>
+              <a:rPr lang="en-US" sz="1600" dirty="0"/>
+              <a:t>         </a:t>
+            </a:r>
+            <a:r>
+              <a:rPr lang="en-US" sz="1600" dirty="0">
+                <a:solidFill>
+                  <a:srgbClr val="F3530B"/>
+                </a:solidFill>
+              </a:rPr>
+              <a:t>ensures</a:t>
+            </a:r>
+            <a:r>
+              <a:rPr lang="en-US" sz="1600" dirty="0"/>
+              <a:t> match result with (</a:t>
+            </a:r>
+            <a:r>
+              <a:rPr lang="en-US" sz="1600" dirty="0" err="1"/>
+              <a:t>l_res</a:t>
+            </a:r>
+            <a:r>
+              <a:rPr lang="en-US" sz="1600" dirty="0"/>
+              <a:t>, </a:t>
+            </a:r>
+            <a:r>
+              <a:rPr lang="en-US" sz="1600" dirty="0" err="1"/>
+              <a:t>r_res</a:t>
+            </a:r>
+            <a:r>
+              <a:rPr lang="en-US" sz="1600" dirty="0"/>
+              <a:t>) → </a:t>
+            </a:r>
+            <a:r>
+              <a:rPr lang="en-US" sz="1600" dirty="0" err="1"/>
+              <a:t>l_res</a:t>
+            </a:r>
+            <a:r>
+              <a:rPr lang="en-US" sz="1600" dirty="0"/>
+              <a:t> = </a:t>
+            </a:r>
+            <a:r>
+              <a:rPr lang="en-US" sz="1600" dirty="0" err="1"/>
+              <a:t>r_res</a:t>
+            </a:r>
+            <a:r>
+              <a:rPr lang="en-US" sz="1600" dirty="0"/>
+              <a:t> *)</a:t>
+            </a:r>
+          </a:p>
+          <a:p>
+            <a:pPr lvl="1"/>
+            <a:r>
+              <a:rPr lang="en-US" sz="1600" dirty="0"/>
+              <a:t>	 	</a:t>
+            </a:r>
+          </a:p>
+        </p:txBody>
+      </p:sp>
+    </p:spTree>
+    <p:extLst>
+      <p:ext uri="{BB962C8B-B14F-4D97-AF65-F5344CB8AC3E}">
+        <p14:creationId xmlns:p14="http://schemas.microsoft.com/office/powerpoint/2010/main" val="716072140"/>
+      </p:ext>
+    </p:extLst>
+  </p:cSld>
+  <p:clrMapOvr>
+    <a:masterClrMapping/>
+  </p:clrMapOvr>
+</p:sld>
+</file>
+
+<file path=ppt/slides/slide21.xml><?xml version="1.0" encoding="utf-8"?>
+<p:sld xmlns:a="http://schemas.openxmlformats.org/drawingml/2006/main" xmlns:r="http://schemas.openxmlformats.org/officeDocument/2006/relationships" xmlns:p="http://schemas.openxmlformats.org/presentationml/2006/main">
+  <p:cSld>
+    <p:spTree>
+      <p:nvGrpSpPr>
+        <p:cNvPr id="1" name="">
+          <a:extLst>
+            <a:ext uri="{FF2B5EF4-FFF2-40B4-BE49-F238E27FC236}">
+              <a16:creationId xmlns:a16="http://schemas.microsoft.com/office/drawing/2014/main" id="{B8B54E8D-B6D5-0230-DF37-1C43B702CADB}"/>
+            </a:ext>
+          </a:extLst>
+        </p:cNvPr>
+        <p:cNvGrpSpPr/>
+        <p:nvPr/>
+      </p:nvGrpSpPr>
+      <p:grpSpPr>
+        <a:xfrm>
+          <a:off x="0" y="0"/>
+          <a:ext cx="0" cy="0"/>
+          <a:chOff x="0" y="0"/>
+          <a:chExt cx="0" cy="0"/>
+        </a:xfrm>
+      </p:grpSpPr>
+      <p:sp>
+        <p:nvSpPr>
+          <p:cNvPr id="2" name="TextBox 1">
+            <a:extLst>
+              <a:ext uri="{FF2B5EF4-FFF2-40B4-BE49-F238E27FC236}">
+                <a16:creationId xmlns:a16="http://schemas.microsoft.com/office/drawing/2014/main" id="{B2A7A9C4-A0A2-C6B1-8BFE-2ABD7DBBE57A}"/>
+              </a:ext>
+            </a:extLst>
+          </p:cNvPr>
+          <p:cNvSpPr txBox="1"/>
+          <p:nvPr/>
+        </p:nvSpPr>
+        <p:spPr>
+          <a:xfrm>
+            <a:off x="469556" y="626071"/>
+            <a:ext cx="6845644" cy="523220"/>
+          </a:xfrm>
+          <a:prstGeom prst="rect">
+            <a:avLst/>
+          </a:prstGeom>
+          <a:noFill/>
+        </p:spPr>
+        <p:txBody>
+          <a:bodyPr wrap="square" rtlCol="0">
+            <a:spAutoFit/>
+          </a:bodyPr>
+          <a:lstStyle/>
+          <a:p>
+            <a:r>
+              <a:rPr lang="pt-PT" sz="2800" noProof="1">
+                <a:solidFill>
+                  <a:srgbClr val="002060"/>
+                </a:solidFill>
+              </a:rPr>
+              <a:t>mult - OCaml  (1/2)</a:t>
+            </a:r>
+            <a:endParaRPr lang="en-US" sz="2800" noProof="1"/>
+          </a:p>
+        </p:txBody>
+      </p:sp>
+      <p:sp>
+        <p:nvSpPr>
+          <p:cNvPr id="4" name="Slide Number Placeholder 3">
+            <a:extLst>
+              <a:ext uri="{FF2B5EF4-FFF2-40B4-BE49-F238E27FC236}">
+                <a16:creationId xmlns:a16="http://schemas.microsoft.com/office/drawing/2014/main" id="{56770F71-793B-9A14-6C40-D1E1BC1DD261}"/>
+              </a:ext>
+            </a:extLst>
+          </p:cNvPr>
+          <p:cNvSpPr>
+            <a:spLocks noGrp="1"/>
+          </p:cNvSpPr>
+          <p:nvPr>
+            <p:ph type="sldNum" sz="quarter" idx="12"/>
+          </p:nvPr>
+        </p:nvSpPr>
+        <p:spPr/>
+        <p:txBody>
+          <a:bodyPr/>
+          <a:lstStyle/>
+          <a:p>
+            <a:fld id="{292A9FD8-515A-4698-9313-0AB17EE9632B}" type="slidenum">
+              <a:rPr lang="en-US" noProof="1" dirty="0" smtClean="0"/>
+              <a:t>21</a:t>
+            </a:fld>
+            <a:endParaRPr lang="en-US" noProof="1"/>
+          </a:p>
+        </p:txBody>
+      </p:sp>
+      <p:sp>
+        <p:nvSpPr>
+          <p:cNvPr id="3" name="TextBox 2">
+            <a:extLst>
+              <a:ext uri="{FF2B5EF4-FFF2-40B4-BE49-F238E27FC236}">
+                <a16:creationId xmlns:a16="http://schemas.microsoft.com/office/drawing/2014/main" id="{6F1C708B-8C9C-C8CD-D68A-5E9330C457EC}"/>
+              </a:ext>
+            </a:extLst>
+          </p:cNvPr>
+          <p:cNvSpPr txBox="1"/>
+          <p:nvPr/>
+        </p:nvSpPr>
+        <p:spPr>
+          <a:xfrm>
+            <a:off x="469556" y="1417221"/>
+            <a:ext cx="5782737" cy="4031873"/>
+          </a:xfrm>
+          <a:prstGeom prst="rect">
+            <a:avLst/>
+          </a:prstGeom>
+          <a:noFill/>
+        </p:spPr>
+        <p:txBody>
+          <a:bodyPr wrap="none" rtlCol="0">
+            <a:spAutoFit/>
+          </a:bodyPr>
+          <a:lstStyle/>
+          <a:p>
+            <a:r>
+              <a:rPr lang="en-US" sz="1600" dirty="0">
+                <a:solidFill>
+                  <a:srgbClr val="F3530B"/>
+                </a:solidFill>
+              </a:rPr>
+              <a:t>let</a:t>
+            </a:r>
+            <a:r>
+              <a:rPr lang="en-US" sz="1600" dirty="0"/>
+              <a:t> </a:t>
+            </a:r>
+            <a:r>
+              <a:rPr lang="en-US" sz="1600" dirty="0" err="1"/>
+              <a:t>mult_ocaml</a:t>
+            </a:r>
+            <a:r>
+              <a:rPr lang="en-US" sz="1600" dirty="0"/>
+              <a:t> </a:t>
+            </a:r>
+            <a:r>
+              <a:rPr lang="pt-PT" sz="1600" dirty="0"/>
+              <a:t>(</a:t>
+            </a:r>
+            <a:r>
+              <a:rPr lang="pt-PT" sz="1600" dirty="0" err="1"/>
+              <a:t>n_l</a:t>
+            </a:r>
+            <a:r>
+              <a:rPr lang="pt-PT" sz="1600" dirty="0"/>
+              <a:t> : </a:t>
+            </a:r>
+            <a:r>
+              <a:rPr lang="pt-PT" sz="1600" dirty="0" err="1">
+                <a:solidFill>
+                  <a:srgbClr val="F3530B"/>
+                </a:solidFill>
+              </a:rPr>
+              <a:t>int</a:t>
+            </a:r>
+            <a:r>
+              <a:rPr lang="pt-PT" sz="1600" dirty="0"/>
+              <a:t>) (</a:t>
+            </a:r>
+            <a:r>
+              <a:rPr lang="pt-PT" sz="1600" dirty="0" err="1"/>
+              <a:t>n_r</a:t>
+            </a:r>
+            <a:r>
+              <a:rPr lang="pt-PT" sz="1600" dirty="0"/>
+              <a:t> : </a:t>
+            </a:r>
+            <a:r>
+              <a:rPr lang="pt-PT" sz="1600" dirty="0" err="1">
+                <a:solidFill>
+                  <a:srgbClr val="F3530B"/>
+                </a:solidFill>
+              </a:rPr>
+              <a:t>int</a:t>
+            </a:r>
+            <a:r>
+              <a:rPr lang="pt-PT" sz="1600" dirty="0"/>
+              <a:t>) (</a:t>
+            </a:r>
+            <a:r>
+              <a:rPr lang="pt-PT" sz="1600" dirty="0" err="1"/>
+              <a:t>m_l</a:t>
+            </a:r>
+            <a:r>
+              <a:rPr lang="pt-PT" sz="1600" dirty="0"/>
+              <a:t> : </a:t>
+            </a:r>
+            <a:r>
+              <a:rPr lang="pt-PT" sz="1600" dirty="0" err="1">
+                <a:solidFill>
+                  <a:srgbClr val="F3530B"/>
+                </a:solidFill>
+              </a:rPr>
+              <a:t>int</a:t>
+            </a:r>
+            <a:r>
+              <a:rPr lang="pt-PT" sz="1600" dirty="0"/>
+              <a:t>) (</a:t>
+            </a:r>
+            <a:r>
+              <a:rPr lang="pt-PT" sz="1600" dirty="0" err="1"/>
+              <a:t>m_r</a:t>
+            </a:r>
+            <a:r>
+              <a:rPr lang="pt-PT" sz="1600" dirty="0"/>
+              <a:t> : </a:t>
+            </a:r>
+            <a:r>
+              <a:rPr lang="pt-PT" sz="1600" dirty="0" err="1">
+                <a:solidFill>
+                  <a:srgbClr val="F3530B"/>
+                </a:solidFill>
+              </a:rPr>
+              <a:t>int</a:t>
+            </a:r>
+            <a:r>
+              <a:rPr lang="pt-PT" sz="1600" dirty="0"/>
+              <a:t>)</a:t>
+            </a:r>
+            <a:r>
+              <a:rPr lang="en-US" sz="1600" dirty="0"/>
+              <a:t> : </a:t>
+            </a:r>
+            <a:r>
+              <a:rPr lang="en-US" sz="1600" dirty="0">
+                <a:solidFill>
+                  <a:srgbClr val="F3530B"/>
+                </a:solidFill>
+              </a:rPr>
+              <a:t>int</a:t>
+            </a:r>
+            <a:r>
+              <a:rPr lang="en-US" sz="1600" dirty="0"/>
+              <a:t> * </a:t>
+            </a:r>
+            <a:r>
+              <a:rPr lang="en-US" sz="1600" dirty="0">
+                <a:solidFill>
+                  <a:srgbClr val="F3530B"/>
+                </a:solidFill>
+              </a:rPr>
+              <a:t>int</a:t>
+            </a:r>
+            <a:r>
+              <a:rPr lang="en-US" sz="1600" dirty="0"/>
+              <a:t> =</a:t>
+            </a:r>
+          </a:p>
+          <a:p>
+            <a:r>
+              <a:rPr lang="en-US" sz="1600" dirty="0"/>
+              <a:t>	</a:t>
+            </a:r>
+            <a:r>
+              <a:rPr lang="en-US" sz="1600" dirty="0">
+                <a:solidFill>
+                  <a:srgbClr val="F3530B"/>
+                </a:solidFill>
+              </a:rPr>
+              <a:t>let</a:t>
+            </a:r>
+            <a:r>
+              <a:rPr lang="en-US" sz="1600" dirty="0"/>
+              <a:t> </a:t>
+            </a:r>
+            <a:r>
+              <a:rPr lang="en-US" sz="1600" dirty="0" err="1"/>
+              <a:t>i_l</a:t>
+            </a:r>
+            <a:r>
+              <a:rPr lang="en-US" sz="1600" dirty="0"/>
+              <a:t> = ref (0) </a:t>
+            </a:r>
+            <a:r>
+              <a:rPr lang="en-US" sz="1600" dirty="0">
+                <a:solidFill>
+                  <a:srgbClr val="F3530B"/>
+                </a:solidFill>
+              </a:rPr>
+              <a:t>in</a:t>
+            </a:r>
+          </a:p>
+          <a:p>
+            <a:pPr lvl="1"/>
+            <a:r>
+              <a:rPr lang="en-US" sz="1600" dirty="0">
+                <a:solidFill>
+                  <a:srgbClr val="F3530B"/>
+                </a:solidFill>
+              </a:rPr>
+              <a:t>let</a:t>
+            </a:r>
+            <a:r>
+              <a:rPr lang="en-US" sz="1600" dirty="0"/>
+              <a:t> </a:t>
+            </a:r>
+            <a:r>
+              <a:rPr lang="en-US" sz="1600" dirty="0" err="1"/>
+              <a:t>i_r</a:t>
+            </a:r>
+            <a:r>
+              <a:rPr lang="en-US" sz="1600" dirty="0"/>
+              <a:t> = ref (0) </a:t>
+            </a:r>
+            <a:r>
+              <a:rPr lang="en-US" sz="1600" dirty="0">
+                <a:solidFill>
+                  <a:srgbClr val="F3530B"/>
+                </a:solidFill>
+              </a:rPr>
+              <a:t>in</a:t>
+            </a:r>
+          </a:p>
+          <a:p>
+            <a:pPr lvl="1"/>
+            <a:r>
+              <a:rPr lang="en-US" sz="1600" dirty="0">
+                <a:solidFill>
+                  <a:srgbClr val="F3530B"/>
+                </a:solidFill>
+              </a:rPr>
+              <a:t>let</a:t>
+            </a:r>
+            <a:r>
+              <a:rPr lang="en-US" sz="1600" dirty="0"/>
+              <a:t> </a:t>
+            </a:r>
+            <a:r>
+              <a:rPr lang="en-US" sz="1600" dirty="0" err="1"/>
+              <a:t>res_l</a:t>
+            </a:r>
+            <a:r>
+              <a:rPr lang="en-US" sz="1600" dirty="0"/>
+              <a:t> = ref (0) </a:t>
+            </a:r>
+            <a:r>
+              <a:rPr lang="en-US" sz="1600" dirty="0">
+                <a:solidFill>
+                  <a:srgbClr val="F3530B"/>
+                </a:solidFill>
+              </a:rPr>
+              <a:t>in</a:t>
+            </a:r>
+          </a:p>
+          <a:p>
+            <a:pPr lvl="1"/>
+            <a:r>
+              <a:rPr lang="en-US" sz="1600" dirty="0">
+                <a:solidFill>
+                  <a:srgbClr val="F3530B"/>
+                </a:solidFill>
+              </a:rPr>
+              <a:t>let</a:t>
+            </a:r>
+            <a:r>
+              <a:rPr lang="en-US" sz="1600" dirty="0"/>
+              <a:t> </a:t>
+            </a:r>
+            <a:r>
+              <a:rPr lang="en-US" sz="1600" dirty="0" err="1"/>
+              <a:t>res_r</a:t>
+            </a:r>
+            <a:r>
+              <a:rPr lang="en-US" sz="1600" dirty="0"/>
+              <a:t> = ref (0) </a:t>
+            </a:r>
+            <a:r>
+              <a:rPr lang="en-US" sz="1600" dirty="0">
+                <a:solidFill>
+                  <a:srgbClr val="F3530B"/>
+                </a:solidFill>
+              </a:rPr>
+              <a:t>in</a:t>
+            </a:r>
+          </a:p>
+          <a:p>
+            <a:pPr lvl="1"/>
+            <a:endParaRPr lang="en-US" sz="1600" dirty="0"/>
+          </a:p>
+          <a:p>
+            <a:pPr lvl="1"/>
+            <a:r>
+              <a:rPr lang="en-US" sz="1600" dirty="0">
+                <a:solidFill>
+                  <a:srgbClr val="F3530B"/>
+                </a:solidFill>
+              </a:rPr>
+              <a:t>while</a:t>
+            </a:r>
+            <a:r>
+              <a:rPr lang="en-US" sz="1600" dirty="0"/>
+              <a:t> (!</a:t>
+            </a:r>
+            <a:r>
+              <a:rPr lang="en-US" sz="1600" dirty="0" err="1"/>
+              <a:t>i_l</a:t>
+            </a:r>
+            <a:r>
+              <a:rPr lang="en-US" sz="1600" dirty="0"/>
+              <a:t> &lt; </a:t>
+            </a:r>
+            <a:r>
+              <a:rPr lang="en-US" sz="1600" dirty="0" err="1"/>
+              <a:t>n_l</a:t>
+            </a:r>
+            <a:r>
+              <a:rPr lang="en-US" sz="1600" dirty="0"/>
+              <a:t>) </a:t>
+            </a:r>
+            <a:r>
+              <a:rPr lang="en-US" sz="1600" dirty="0">
+                <a:solidFill>
+                  <a:srgbClr val="F3530B"/>
+                </a:solidFill>
+              </a:rPr>
+              <a:t>do</a:t>
+            </a:r>
+          </a:p>
+          <a:p>
+            <a:pPr lvl="1"/>
+            <a:r>
+              <a:rPr lang="en-US" sz="1600" dirty="0"/>
+              <a:t> 	</a:t>
+            </a:r>
+            <a:r>
+              <a:rPr lang="pt-PT" sz="1600" dirty="0"/>
+              <a:t>(*@ </a:t>
+            </a:r>
+            <a:r>
+              <a:rPr lang="pt-PT" sz="1600" dirty="0" err="1">
+                <a:solidFill>
+                  <a:srgbClr val="F3530B"/>
+                </a:solidFill>
+              </a:rPr>
+              <a:t>invariant</a:t>
+            </a:r>
+            <a:r>
+              <a:rPr lang="pt-PT" sz="1600" dirty="0"/>
+              <a:t>  ((!</a:t>
+            </a:r>
+            <a:r>
+              <a:rPr lang="pt-PT" sz="1600" dirty="0" err="1"/>
+              <a:t>i_l</a:t>
+            </a:r>
+            <a:r>
+              <a:rPr lang="pt-PT" sz="1600" dirty="0"/>
+              <a:t> &lt; </a:t>
+            </a:r>
+            <a:r>
+              <a:rPr lang="pt-PT" sz="1600" dirty="0" err="1"/>
+              <a:t>n_l</a:t>
+            </a:r>
+            <a:r>
+              <a:rPr lang="pt-PT" sz="1600" dirty="0"/>
+              <a:t>)) ↔ ((!</a:t>
+            </a:r>
+            <a:r>
+              <a:rPr lang="pt-PT" sz="1600" dirty="0" err="1"/>
+              <a:t>i_r</a:t>
+            </a:r>
+            <a:r>
+              <a:rPr lang="pt-PT" sz="1600" dirty="0"/>
+              <a:t> &lt; </a:t>
+            </a:r>
+            <a:r>
+              <a:rPr lang="pt-PT" sz="1600" dirty="0" err="1"/>
+              <a:t>n_r</a:t>
+            </a:r>
+            <a:r>
+              <a:rPr lang="pt-PT" sz="1600" dirty="0"/>
+              <a:t>)) </a:t>
+            </a:r>
+          </a:p>
+          <a:p>
+            <a:pPr lvl="1"/>
+            <a:r>
+              <a:rPr lang="pt-PT" sz="1600" dirty="0"/>
+              <a:t>	         </a:t>
+            </a:r>
+            <a:r>
+              <a:rPr lang="pt-PT" sz="1600" dirty="0" err="1">
+                <a:solidFill>
+                  <a:srgbClr val="F3530B"/>
+                </a:solidFill>
+              </a:rPr>
+              <a:t>variant</a:t>
+            </a:r>
+            <a:r>
+              <a:rPr lang="pt-PT" sz="1600" dirty="0"/>
+              <a:t>      </a:t>
+            </a:r>
+            <a:r>
+              <a:rPr lang="pt-PT" sz="1600" dirty="0" err="1"/>
+              <a:t>n_l</a:t>
+            </a:r>
+            <a:r>
+              <a:rPr lang="pt-PT" sz="1600" dirty="0"/>
+              <a:t> - !</a:t>
+            </a:r>
+            <a:r>
+              <a:rPr lang="pt-PT" sz="1600" dirty="0" err="1"/>
+              <a:t>i_l</a:t>
+            </a:r>
+            <a:r>
+              <a:rPr lang="pt-PT" sz="1600" dirty="0"/>
+              <a:t> </a:t>
+            </a:r>
+          </a:p>
+          <a:p>
+            <a:pPr lvl="1"/>
+            <a:r>
+              <a:rPr lang="pt-PT" sz="1600" dirty="0"/>
+              <a:t> 	         </a:t>
+            </a:r>
+            <a:r>
+              <a:rPr lang="pt-PT" sz="1600" dirty="0" err="1">
+                <a:solidFill>
+                  <a:srgbClr val="F3530B"/>
+                </a:solidFill>
+              </a:rPr>
+              <a:t>invariant</a:t>
+            </a:r>
+            <a:r>
+              <a:rPr lang="pt-PT" sz="1600" dirty="0"/>
+              <a:t>  !</a:t>
+            </a:r>
+            <a:r>
+              <a:rPr lang="pt-PT" sz="1600" dirty="0" err="1"/>
+              <a:t>i_l</a:t>
+            </a:r>
+            <a:r>
+              <a:rPr lang="pt-PT" sz="1600" dirty="0"/>
+              <a:t> = !</a:t>
+            </a:r>
+            <a:r>
+              <a:rPr lang="pt-PT" sz="1600" dirty="0" err="1"/>
+              <a:t>i_r</a:t>
+            </a:r>
+            <a:r>
+              <a:rPr lang="pt-PT" sz="1600" dirty="0"/>
+              <a:t> &amp;&amp; !</a:t>
+            </a:r>
+            <a:r>
+              <a:rPr lang="pt-PT" sz="1600" dirty="0" err="1"/>
+              <a:t>res_l</a:t>
+            </a:r>
+            <a:r>
+              <a:rPr lang="pt-PT" sz="1600" dirty="0"/>
+              <a:t> = ! </a:t>
+            </a:r>
+            <a:r>
+              <a:rPr lang="pt-PT" sz="1600" dirty="0" err="1"/>
+              <a:t>res_r</a:t>
+            </a:r>
+            <a:r>
+              <a:rPr lang="pt-PT" sz="1600" dirty="0"/>
+              <a:t> *)</a:t>
+            </a:r>
+          </a:p>
+          <a:p>
+            <a:pPr lvl="1"/>
+            <a:r>
+              <a:rPr lang="en-US" sz="1600" dirty="0"/>
+              <a:t>	</a:t>
+            </a:r>
+          </a:p>
+          <a:p>
+            <a:pPr lvl="1"/>
+            <a:r>
+              <a:rPr lang="en-US" sz="1600" dirty="0"/>
+              <a:t>	</a:t>
+            </a:r>
+            <a:r>
+              <a:rPr lang="en-US" sz="1600" dirty="0">
+                <a:solidFill>
+                  <a:srgbClr val="F3530B"/>
+                </a:solidFill>
+              </a:rPr>
+              <a:t>let</a:t>
+            </a:r>
+            <a:r>
+              <a:rPr lang="en-US" sz="1600" dirty="0"/>
+              <a:t> </a:t>
+            </a:r>
+            <a:r>
+              <a:rPr lang="en-US" sz="1600" dirty="0" err="1"/>
+              <a:t>previous_res_l</a:t>
+            </a:r>
+            <a:r>
+              <a:rPr lang="en-US" sz="1600" dirty="0"/>
+              <a:t> = !</a:t>
+            </a:r>
+            <a:r>
+              <a:rPr lang="en-US" sz="1600" dirty="0" err="1"/>
+              <a:t>res_l</a:t>
+            </a:r>
+            <a:r>
+              <a:rPr lang="en-US" sz="1600" dirty="0"/>
+              <a:t> </a:t>
+            </a:r>
+            <a:r>
+              <a:rPr lang="en-US" sz="1600" dirty="0">
+                <a:solidFill>
+                  <a:srgbClr val="F3530B"/>
+                </a:solidFill>
+              </a:rPr>
+              <a:t>in</a:t>
+            </a:r>
+            <a:r>
+              <a:rPr lang="en-US" sz="1600" dirty="0"/>
+              <a:t> </a:t>
+            </a:r>
+          </a:p>
+          <a:p>
+            <a:pPr lvl="1"/>
+            <a:r>
+              <a:rPr lang="en-US" sz="1600" dirty="0"/>
+              <a:t>	</a:t>
+            </a:r>
+            <a:r>
+              <a:rPr lang="en-US" sz="1600" dirty="0">
+                <a:solidFill>
+                  <a:srgbClr val="F3530B"/>
+                </a:solidFill>
+              </a:rPr>
+              <a:t>let</a:t>
+            </a:r>
+            <a:r>
+              <a:rPr lang="en-US" sz="1600" dirty="0"/>
+              <a:t> </a:t>
+            </a:r>
+            <a:r>
+              <a:rPr lang="en-US" sz="1600" dirty="0" err="1"/>
+              <a:t>j_l</a:t>
+            </a:r>
+            <a:r>
+              <a:rPr lang="en-US" sz="1600" dirty="0"/>
+              <a:t> = ref (0) </a:t>
+            </a:r>
+            <a:r>
+              <a:rPr lang="en-US" sz="1600" dirty="0">
+                <a:solidFill>
+                  <a:srgbClr val="F3530B"/>
+                </a:solidFill>
+              </a:rPr>
+              <a:t>in</a:t>
+            </a:r>
+            <a:r>
+              <a:rPr lang="en-US" sz="1600" dirty="0"/>
+              <a:t> </a:t>
+            </a:r>
+          </a:p>
+          <a:p>
+            <a:pPr lvl="1"/>
+            <a:r>
+              <a:rPr lang="en-US" sz="1600" dirty="0"/>
+              <a:t>	</a:t>
+            </a:r>
+            <a:r>
+              <a:rPr lang="en-US" sz="1600" dirty="0">
+                <a:solidFill>
+                  <a:srgbClr val="F3530B"/>
+                </a:solidFill>
+              </a:rPr>
+              <a:t>let</a:t>
+            </a:r>
+            <a:r>
+              <a:rPr lang="en-US" sz="1600" dirty="0"/>
+              <a:t> </a:t>
+            </a:r>
+            <a:r>
+              <a:rPr lang="en-US" sz="1600" dirty="0" err="1"/>
+              <a:t>j_r</a:t>
+            </a:r>
+            <a:r>
+              <a:rPr lang="en-US" sz="1600" dirty="0"/>
+              <a:t> = ref (0) </a:t>
+            </a:r>
+            <a:r>
+              <a:rPr lang="en-US" sz="1600" dirty="0">
+                <a:solidFill>
+                  <a:srgbClr val="F3530B"/>
+                </a:solidFill>
+              </a:rPr>
+              <a:t>in</a:t>
+            </a:r>
+          </a:p>
+          <a:p>
+            <a:pPr lvl="1"/>
+            <a:r>
+              <a:rPr lang="en-US" sz="1600" dirty="0"/>
+              <a:t>	</a:t>
+            </a:r>
+          </a:p>
+          <a:p>
+            <a:pPr lvl="1"/>
+            <a:r>
+              <a:rPr lang="en-US" sz="1600" dirty="0"/>
+              <a:t>	 	</a:t>
+            </a:r>
+          </a:p>
+        </p:txBody>
+      </p:sp>
+    </p:spTree>
+    <p:extLst>
+      <p:ext uri="{BB962C8B-B14F-4D97-AF65-F5344CB8AC3E}">
+        <p14:creationId xmlns:p14="http://schemas.microsoft.com/office/powerpoint/2010/main" val="4242151965"/>
+      </p:ext>
+    </p:extLst>
+  </p:cSld>
+  <p:clrMapOvr>
+    <a:masterClrMapping/>
+  </p:clrMapOvr>
+</p:sld>
+</file>
+
+<file path=ppt/slides/slide22.xml><?xml version="1.0" encoding="utf-8"?>
+<p:sld xmlns:a="http://schemas.openxmlformats.org/drawingml/2006/main" xmlns:r="http://schemas.openxmlformats.org/officeDocument/2006/relationships" xmlns:p="http://schemas.openxmlformats.org/presentationml/2006/main">
+  <p:cSld>
+    <p:spTree>
+      <p:nvGrpSpPr>
+        <p:cNvPr id="1" name="">
+          <a:extLst>
+            <a:ext uri="{FF2B5EF4-FFF2-40B4-BE49-F238E27FC236}">
               <a16:creationId xmlns:a16="http://schemas.microsoft.com/office/drawing/2014/main" id="{A5320333-94D6-A776-B862-B795AF7C6BE0}"/>
             </a:ext>
           </a:extLst>
@@ -6991,7 +7268,7 @@
           <a:p>
             <a:fld id="{292A9FD8-515A-4698-9313-0AB17EE9632B}" type="slidenum">
               <a:rPr lang="en-US" noProof="1" dirty="0" smtClean="0"/>
-              <a:t>20</a:t>
+              <a:t>22</a:t>
             </a:fld>
             <a:endParaRPr lang="en-US" noProof="1"/>
           </a:p>
@@ -7554,7 +7831,7 @@
 </p:sld>
 </file>
 
-<file path=ppt/slides/slide21.xml><?xml version="1.0" encoding="utf-8"?>
+<file path=ppt/slides/slide23.xml><?xml version="1.0" encoding="utf-8"?>
 <p:sld xmlns:a="http://schemas.openxmlformats.org/drawingml/2006/main" xmlns:r="http://schemas.openxmlformats.org/officeDocument/2006/relationships" xmlns:p="http://schemas.openxmlformats.org/presentationml/2006/main">
   <p:cSld>
     <p:spTree>
@@ -7640,7 +7917,7 @@
           <a:p>
             <a:fld id="{292A9FD8-515A-4698-9313-0AB17EE9632B}" type="slidenum">
               <a:rPr lang="en-US" noProof="1" dirty="0" smtClean="0"/>
-              <a:t>21</a:t>
+              <a:t>23</a:t>
             </a:fld>
             <a:endParaRPr lang="en-US" noProof="1"/>
           </a:p>
@@ -8080,7 +8357,7 @@
 </p:sld>
 </file>
 
-<file path=ppt/slides/slide22.xml><?xml version="1.0" encoding="utf-8"?>
+<file path=ppt/slides/slide24.xml><?xml version="1.0" encoding="utf-8"?>
 <p:sld xmlns:a="http://schemas.openxmlformats.org/drawingml/2006/main" xmlns:r="http://schemas.openxmlformats.org/officeDocument/2006/relationships" xmlns:p="http://schemas.openxmlformats.org/presentationml/2006/main">
   <p:cSld>
     <p:spTree>
@@ -8166,7 +8443,7 @@
           <a:p>
             <a:fld id="{292A9FD8-515A-4698-9313-0AB17EE9632B}" type="slidenum">
               <a:rPr lang="en-US" noProof="1" dirty="0" smtClean="0"/>
-              <a:t>22</a:t>
+              <a:t>24</a:t>
             </a:fld>
             <a:endParaRPr lang="en-US" noProof="1"/>
           </a:p>
@@ -8367,7 +8644,7 @@
 </p:sld>
 </file>
 
-<file path=ppt/slides/slide23.xml><?xml version="1.0" encoding="utf-8"?>
+<file path=ppt/slides/slide25.xml><?xml version="1.0" encoding="utf-8"?>
 <p:sld xmlns:a="http://schemas.openxmlformats.org/drawingml/2006/main" xmlns:r="http://schemas.openxmlformats.org/officeDocument/2006/relationships" xmlns:p="http://schemas.openxmlformats.org/presentationml/2006/main">
   <p:cSld>
     <p:spTree>
@@ -8453,7 +8730,7 @@
           <a:p>
             <a:fld id="{292A9FD8-515A-4698-9313-0AB17EE9632B}" type="slidenum">
               <a:rPr lang="en-US" noProof="1" dirty="0" smtClean="0"/>
-              <a:t>23</a:t>
+              <a:t>25</a:t>
             </a:fld>
             <a:endParaRPr lang="en-US" noProof="1"/>
           </a:p>
@@ -9119,7 +9396,7 @@
 </p:sld>
 </file>
 
-<file path=ppt/slides/slide24.xml><?xml version="1.0" encoding="utf-8"?>
+<file path=ppt/slides/slide26.xml><?xml version="1.0" encoding="utf-8"?>
 <p:sld xmlns:a="http://schemas.openxmlformats.org/drawingml/2006/main" xmlns:r="http://schemas.openxmlformats.org/officeDocument/2006/relationships" xmlns:p="http://schemas.openxmlformats.org/presentationml/2006/main">
   <p:cSld>
     <p:spTree>
@@ -9205,7 +9482,7 @@
           <a:p>
             <a:fld id="{292A9FD8-515A-4698-9313-0AB17EE9632B}" type="slidenum">
               <a:rPr lang="en-US" noProof="1" dirty="0" smtClean="0"/>
-              <a:t>24</a:t>
+              <a:t>26</a:t>
             </a:fld>
             <a:endParaRPr lang="en-US" noProof="1"/>
           </a:p>
@@ -9592,7 +9869,7 @@
 </p:sld>
 </file>
 
-<file path=ppt/slides/slide25.xml><?xml version="1.0" encoding="utf-8"?>
+<file path=ppt/slides/slide27.xml><?xml version="1.0" encoding="utf-8"?>
 <p:sld xmlns:a="http://schemas.openxmlformats.org/drawingml/2006/main" xmlns:r="http://schemas.openxmlformats.org/officeDocument/2006/relationships" xmlns:p="http://schemas.openxmlformats.org/presentationml/2006/main">
   <p:cSld>
     <p:spTree>
@@ -9679,7 +9956,7 @@
           <a:p>
             <a:fld id="{292A9FD8-515A-4698-9313-0AB17EE9632B}" type="slidenum">
               <a:rPr lang="en-US" noProof="1" dirty="0" smtClean="0"/>
-              <a:t>25</a:t>
+              <a:t>27</a:t>
             </a:fld>
             <a:endParaRPr lang="en-US" noProof="1"/>
           </a:p>
@@ -9698,7 +9975,7 @@
 </p:sld>
 </file>
 
-<file path=ppt/slides/slide26.xml><?xml version="1.0" encoding="utf-8"?>
+<file path=ppt/slides/slide28.xml><?xml version="1.0" encoding="utf-8"?>
 <p:sld xmlns:a="http://schemas.openxmlformats.org/drawingml/2006/main" xmlns:r="http://schemas.openxmlformats.org/officeDocument/2006/relationships" xmlns:p="http://schemas.openxmlformats.org/presentationml/2006/main">
   <p:cSld>
     <p:spTree>
@@ -9784,7 +10061,7 @@
           <a:p>
             <a:fld id="{292A9FD8-515A-4698-9313-0AB17EE9632B}" type="slidenum">
               <a:rPr lang="en-US" noProof="1" dirty="0" smtClean="0"/>
-              <a:t>26</a:t>
+              <a:t>28</a:t>
             </a:fld>
             <a:endParaRPr lang="en-US" noProof="1"/>
           </a:p>
@@ -10118,7 +10395,7 @@
 </p:sld>
 </file>
 
-<file path=ppt/slides/slide27.xml><?xml version="1.0" encoding="utf-8"?>
+<file path=ppt/slides/slide29.xml><?xml version="1.0" encoding="utf-8"?>
 <p:sld xmlns:a="http://schemas.openxmlformats.org/drawingml/2006/main" xmlns:r="http://schemas.openxmlformats.org/officeDocument/2006/relationships" xmlns:p="http://schemas.openxmlformats.org/presentationml/2006/main">
   <p:cSld>
     <p:spTree>
@@ -10204,7 +10481,7 @@
           <a:p>
             <a:fld id="{292A9FD8-515A-4698-9313-0AB17EE9632B}" type="slidenum">
               <a:rPr lang="en-US" noProof="1" dirty="0" smtClean="0"/>
-              <a:t>27</a:t>
+              <a:t>29</a:t>
             </a:fld>
             <a:endParaRPr lang="en-US" noProof="1"/>
           </a:p>
@@ -10271,434 +10548,6 @@
     <p:extLst>
       <p:ext uri="{BB962C8B-B14F-4D97-AF65-F5344CB8AC3E}">
         <p14:creationId xmlns:p14="http://schemas.microsoft.com/office/powerpoint/2010/main" val="2951561927"/>
-      </p:ext>
-    </p:extLst>
-  </p:cSld>
-  <p:clrMapOvr>
-    <a:masterClrMapping/>
-  </p:clrMapOvr>
-</p:sld>
-</file>
-
-<file path=ppt/slides/slide28.xml><?xml version="1.0" encoding="utf-8"?>
-<p:sld xmlns:a="http://schemas.openxmlformats.org/drawingml/2006/main" xmlns:r="http://schemas.openxmlformats.org/officeDocument/2006/relationships" xmlns:p="http://schemas.openxmlformats.org/presentationml/2006/main">
-  <p:cSld>
-    <p:spTree>
-      <p:nvGrpSpPr>
-        <p:cNvPr id="1" name="">
-          <a:extLst>
-            <a:ext uri="{FF2B5EF4-FFF2-40B4-BE49-F238E27FC236}">
-              <a16:creationId xmlns:a16="http://schemas.microsoft.com/office/drawing/2014/main" id="{50003A83-A2E0-75A9-CAF8-76845C1059FE}"/>
-            </a:ext>
-          </a:extLst>
-        </p:cNvPr>
-        <p:cNvGrpSpPr/>
-        <p:nvPr/>
-      </p:nvGrpSpPr>
-      <p:grpSpPr>
-        <a:xfrm>
-          <a:off x="0" y="0"/>
-          <a:ext cx="0" cy="0"/>
-          <a:chOff x="0" y="0"/>
-          <a:chExt cx="0" cy="0"/>
-        </a:xfrm>
-      </p:grpSpPr>
-      <p:sp>
-        <p:nvSpPr>
-          <p:cNvPr id="2" name="TextBox 1">
-            <a:extLst>
-              <a:ext uri="{FF2B5EF4-FFF2-40B4-BE49-F238E27FC236}">
-                <a16:creationId xmlns:a16="http://schemas.microsoft.com/office/drawing/2014/main" id="{2227CC9D-A2C0-8251-1C28-9FA3786BFE78}"/>
-              </a:ext>
-            </a:extLst>
-          </p:cNvPr>
-          <p:cNvSpPr txBox="1"/>
-          <p:nvPr/>
-        </p:nvSpPr>
-        <p:spPr>
-          <a:xfrm>
-            <a:off x="469556" y="626071"/>
-            <a:ext cx="6845644" cy="523220"/>
-          </a:xfrm>
-          <a:prstGeom prst="rect">
-            <a:avLst/>
-          </a:prstGeom>
-          <a:noFill/>
-        </p:spPr>
-        <p:txBody>
-          <a:bodyPr wrap="square" rtlCol="0">
-            <a:spAutoFit/>
-          </a:bodyPr>
-          <a:lstStyle/>
-          <a:p>
-            <a:r>
-              <a:rPr lang="pt-PT" sz="2800" noProof="1">
-                <a:solidFill>
-                  <a:srgbClr val="002060"/>
-                </a:solidFill>
-              </a:rPr>
-              <a:t>Future Work</a:t>
-            </a:r>
-            <a:endParaRPr lang="en-US" sz="2800" noProof="1"/>
-          </a:p>
-        </p:txBody>
-      </p:sp>
-      <p:sp>
-        <p:nvSpPr>
-          <p:cNvPr id="4" name="Slide Number Placeholder 3">
-            <a:extLst>
-              <a:ext uri="{FF2B5EF4-FFF2-40B4-BE49-F238E27FC236}">
-                <a16:creationId xmlns:a16="http://schemas.microsoft.com/office/drawing/2014/main" id="{35C48BCD-CB87-56DE-A29E-8F58536D6BB7}"/>
-              </a:ext>
-            </a:extLst>
-          </p:cNvPr>
-          <p:cNvSpPr>
-            <a:spLocks noGrp="1"/>
-          </p:cNvSpPr>
-          <p:nvPr>
-            <p:ph type="sldNum" sz="quarter" idx="12"/>
-          </p:nvPr>
-        </p:nvSpPr>
-        <p:spPr/>
-        <p:txBody>
-          <a:bodyPr/>
-          <a:lstStyle/>
-          <a:p>
-            <a:fld id="{292A9FD8-515A-4698-9313-0AB17EE9632B}" type="slidenum">
-              <a:rPr lang="en-US" noProof="1" dirty="0" smtClean="0"/>
-              <a:t>28</a:t>
-            </a:fld>
-            <a:endParaRPr lang="en-US" noProof="1"/>
-          </a:p>
-        </p:txBody>
-      </p:sp>
-      <p:sp>
-        <p:nvSpPr>
-          <p:cNvPr id="5" name="TextBox 4">
-            <a:extLst>
-              <a:ext uri="{FF2B5EF4-FFF2-40B4-BE49-F238E27FC236}">
-                <a16:creationId xmlns:a16="http://schemas.microsoft.com/office/drawing/2014/main" id="{CD67E19D-BC23-C69B-75B1-B3507E6D1851}"/>
-              </a:ext>
-            </a:extLst>
-          </p:cNvPr>
-          <p:cNvSpPr txBox="1"/>
-          <p:nvPr/>
-        </p:nvSpPr>
-        <p:spPr>
-          <a:xfrm>
-            <a:off x="469556" y="2022795"/>
-            <a:ext cx="6128951" cy="1569660"/>
-          </a:xfrm>
-          <a:prstGeom prst="rect">
-            <a:avLst/>
-          </a:prstGeom>
-          <a:noFill/>
-        </p:spPr>
-        <p:txBody>
-          <a:bodyPr wrap="square" rtlCol="0">
-            <a:spAutoFit/>
-          </a:bodyPr>
-          <a:lstStyle/>
-          <a:p>
-            <a:pPr marL="342900" indent="-342900">
-              <a:buFont typeface="Arial" panose="020B0604020202020204" pitchFamily="34" charset="0"/>
-              <a:buChar char="•"/>
-            </a:pPr>
-            <a:r>
-              <a:rPr lang="en-US" sz="2400" noProof="1">
-                <a:solidFill>
-                  <a:srgbClr val="002060"/>
-                </a:solidFill>
-              </a:rPr>
-              <a:t>Higher-order constructs (iter, fold…)</a:t>
-            </a:r>
-          </a:p>
-          <a:p>
-            <a:pPr marL="342900" indent="-342900">
-              <a:buFont typeface="Arial" panose="020B0604020202020204" pitchFamily="34" charset="0"/>
-              <a:buChar char="•"/>
-            </a:pPr>
-            <a:r>
-              <a:rPr lang="en-US" sz="2400" noProof="1">
-                <a:solidFill>
-                  <a:srgbClr val="002060"/>
-                </a:solidFill>
-              </a:rPr>
-              <a:t>Pointer based programs</a:t>
-            </a:r>
-          </a:p>
-          <a:p>
-            <a:pPr marL="342900" indent="-342900">
-              <a:buFont typeface="Arial" panose="020B0604020202020204" pitchFamily="34" charset="0"/>
-              <a:buChar char="•"/>
-            </a:pPr>
-            <a:r>
-              <a:rPr lang="en-US" sz="2400" noProof="1">
-                <a:solidFill>
-                  <a:srgbClr val="002060"/>
-                </a:solidFill>
-              </a:rPr>
-              <a:t>Dynamic programming</a:t>
-            </a:r>
-          </a:p>
-          <a:p>
-            <a:pPr marL="342900" indent="-342900">
-              <a:buFont typeface="Arial" panose="020B0604020202020204" pitchFamily="34" charset="0"/>
-              <a:buChar char="•"/>
-            </a:pPr>
-            <a:r>
-              <a:rPr lang="en-US" sz="2400" noProof="1">
-                <a:solidFill>
-                  <a:srgbClr val="002060"/>
-                </a:solidFill>
-              </a:rPr>
-              <a:t>Program evolution</a:t>
-            </a:r>
-          </a:p>
-        </p:txBody>
-      </p:sp>
-    </p:spTree>
-    <p:extLst>
-      <p:ext uri="{BB962C8B-B14F-4D97-AF65-F5344CB8AC3E}">
-        <p14:creationId xmlns:p14="http://schemas.microsoft.com/office/powerpoint/2010/main" val="2239026914"/>
-      </p:ext>
-    </p:extLst>
-  </p:cSld>
-  <p:clrMapOvr>
-    <a:masterClrMapping/>
-  </p:clrMapOvr>
-</p:sld>
-</file>
-
-<file path=ppt/slides/slide29.xml><?xml version="1.0" encoding="utf-8"?>
-<p:sld xmlns:a="http://schemas.openxmlformats.org/drawingml/2006/main" xmlns:r="http://schemas.openxmlformats.org/officeDocument/2006/relationships" xmlns:p="http://schemas.openxmlformats.org/presentationml/2006/main">
-  <p:cSld>
-    <p:spTree>
-      <p:nvGrpSpPr>
-        <p:cNvPr id="1" name="">
-          <a:extLst>
-            <a:ext uri="{FF2B5EF4-FFF2-40B4-BE49-F238E27FC236}">
-              <a16:creationId xmlns:a16="http://schemas.microsoft.com/office/drawing/2014/main" id="{2534C233-D244-61BA-BDF8-CB6D060B5B01}"/>
-            </a:ext>
-          </a:extLst>
-        </p:cNvPr>
-        <p:cNvGrpSpPr/>
-        <p:nvPr/>
-      </p:nvGrpSpPr>
-      <p:grpSpPr>
-        <a:xfrm>
-          <a:off x="0" y="0"/>
-          <a:ext cx="0" cy="0"/>
-          <a:chOff x="0" y="0"/>
-          <a:chExt cx="0" cy="0"/>
-        </a:xfrm>
-      </p:grpSpPr>
-      <p:sp>
-        <p:nvSpPr>
-          <p:cNvPr id="2" name="Título 1">
-            <a:extLst>
-              <a:ext uri="{FF2B5EF4-FFF2-40B4-BE49-F238E27FC236}">
-                <a16:creationId xmlns:a16="http://schemas.microsoft.com/office/drawing/2014/main" id="{A20274D2-09B6-D69D-1B09-52211756F812}"/>
-              </a:ext>
-            </a:extLst>
-          </p:cNvPr>
-          <p:cNvSpPr>
-            <a:spLocks noGrp="1"/>
-          </p:cNvSpPr>
-          <p:nvPr>
-            <p:ph type="ctrTitle"/>
-          </p:nvPr>
-        </p:nvSpPr>
-        <p:spPr>
-          <a:xfrm>
-            <a:off x="744494" y="716690"/>
-            <a:ext cx="7655011" cy="571043"/>
-          </a:xfrm>
-        </p:spPr>
-        <p:txBody>
-          <a:bodyPr>
-            <a:normAutofit/>
-          </a:bodyPr>
-          <a:lstStyle/>
-          <a:p>
-            <a:r>
-              <a:rPr lang="en-US" sz="3200" noProof="1">
-                <a:solidFill>
-                  <a:srgbClr val="002060"/>
-                </a:solidFill>
-              </a:rPr>
-              <a:t>Formal Verification of Programs Equivalence</a:t>
-            </a:r>
-          </a:p>
-        </p:txBody>
-      </p:sp>
-      <p:sp>
-        <p:nvSpPr>
-          <p:cNvPr id="3" name="Subtítulo 2">
-            <a:extLst>
-              <a:ext uri="{FF2B5EF4-FFF2-40B4-BE49-F238E27FC236}">
-                <a16:creationId xmlns:a16="http://schemas.microsoft.com/office/drawing/2014/main" id="{4D296B62-9DC8-8E89-BBD7-11E0414C0F12}"/>
-              </a:ext>
-            </a:extLst>
-          </p:cNvPr>
-          <p:cNvSpPr>
-            <a:spLocks noGrp="1"/>
-          </p:cNvSpPr>
-          <p:nvPr>
-            <p:ph type="subTitle" idx="1"/>
-          </p:nvPr>
-        </p:nvSpPr>
-        <p:spPr>
-          <a:xfrm>
-            <a:off x="1142999" y="3355925"/>
-            <a:ext cx="6858000" cy="1379802"/>
-          </a:xfrm>
-        </p:spPr>
-        <p:txBody>
-          <a:bodyPr>
-            <a:noAutofit/>
-          </a:bodyPr>
-          <a:lstStyle/>
-          <a:p>
-            <a:r>
-              <a:rPr lang="en-US" sz="2000" noProof="1">
-                <a:solidFill>
-                  <a:srgbClr val="002060"/>
-                </a:solidFill>
-              </a:rPr>
-              <a:t>João Nini</a:t>
-            </a:r>
-          </a:p>
-          <a:p>
-            <a:r>
-              <a:rPr lang="en-US" sz="2000" noProof="1">
-                <a:solidFill>
-                  <a:srgbClr val="002060"/>
-                </a:solidFill>
-              </a:rPr>
-              <a:t>Advisor: Mário Pereira</a:t>
-            </a:r>
-          </a:p>
-          <a:p>
-            <a:pPr>
-              <a:lnSpc>
-                <a:spcPct val="50000"/>
-              </a:lnSpc>
-            </a:pPr>
-            <a:endParaRPr lang="en-US" sz="2000" noProof="1">
-              <a:solidFill>
-                <a:srgbClr val="002060"/>
-              </a:solidFill>
-            </a:endParaRPr>
-          </a:p>
-          <a:p>
-            <a:pPr>
-              <a:lnSpc>
-                <a:spcPct val="50000"/>
-              </a:lnSpc>
-            </a:pPr>
-            <a:r>
-              <a:rPr lang="en-US" sz="2000" noProof="1">
-                <a:solidFill>
-                  <a:srgbClr val="002060"/>
-                </a:solidFill>
-              </a:rPr>
-              <a:t>December 16, 2025</a:t>
-            </a:r>
-          </a:p>
-        </p:txBody>
-      </p:sp>
-      <p:sp>
-        <p:nvSpPr>
-          <p:cNvPr id="4" name="Slide Number Placeholder 3">
-            <a:extLst>
-              <a:ext uri="{FF2B5EF4-FFF2-40B4-BE49-F238E27FC236}">
-                <a16:creationId xmlns:a16="http://schemas.microsoft.com/office/drawing/2014/main" id="{44788A04-F651-B4D5-7DA9-E26D50D91332}"/>
-              </a:ext>
-            </a:extLst>
-          </p:cNvPr>
-          <p:cNvSpPr>
-            <a:spLocks noGrp="1"/>
-          </p:cNvSpPr>
-          <p:nvPr>
-            <p:ph type="sldNum" sz="quarter" idx="12"/>
-          </p:nvPr>
-        </p:nvSpPr>
-        <p:spPr/>
-        <p:txBody>
-          <a:bodyPr/>
-          <a:lstStyle/>
-          <a:p>
-            <a:fld id="{292A9FD8-515A-4698-9313-0AB17EE9632B}" type="slidenum">
-              <a:rPr lang="en-US" noProof="1" dirty="0" smtClean="0"/>
-              <a:t>29</a:t>
-            </a:fld>
-            <a:endParaRPr lang="en-US" noProof="1"/>
-          </a:p>
-        </p:txBody>
-      </p:sp>
-      <p:sp>
-        <p:nvSpPr>
-          <p:cNvPr id="5" name="Título 1">
-            <a:extLst>
-              <a:ext uri="{FF2B5EF4-FFF2-40B4-BE49-F238E27FC236}">
-                <a16:creationId xmlns:a16="http://schemas.microsoft.com/office/drawing/2014/main" id="{DB787C8E-BF42-9283-4789-2CA358339C70}"/>
-              </a:ext>
-            </a:extLst>
-          </p:cNvPr>
-          <p:cNvSpPr txBox="1">
-            <a:spLocks/>
-          </p:cNvSpPr>
-          <p:nvPr/>
-        </p:nvSpPr>
-        <p:spPr>
-          <a:xfrm>
-            <a:off x="3189587" y="2091846"/>
-            <a:ext cx="2764824" cy="571043"/>
-          </a:xfrm>
-          <a:prstGeom prst="rect">
-            <a:avLst/>
-          </a:prstGeom>
-        </p:spPr>
-        <p:txBody>
-          <a:bodyPr vert="horz" lIns="91440" tIns="45720" rIns="91440" bIns="45720" rtlCol="0" anchor="b">
-            <a:noAutofit/>
-          </a:bodyPr>
-          <a:lstStyle>
-            <a:lvl1pPr algn="ctr" defTabSz="685800" rtl="0" eaLnBrk="1" latinLnBrk="0" hangingPunct="1">
-              <a:lnSpc>
-                <a:spcPct val="90000"/>
-              </a:lnSpc>
-              <a:spcBef>
-                <a:spcPct val="0"/>
-              </a:spcBef>
-              <a:buNone/>
-              <a:defRPr sz="4500" kern="1200">
-                <a:solidFill>
-                  <a:schemeClr val="tx1"/>
-                </a:solidFill>
-                <a:latin typeface="+mj-lt"/>
-                <a:ea typeface="+mj-ea"/>
-                <a:cs typeface="+mj-cs"/>
-              </a:defRPr>
-            </a:lvl1pPr>
-          </a:lstStyle>
-          <a:p>
-            <a:r>
-              <a:rPr lang="en-US" sz="4000" noProof="1">
-                <a:solidFill>
-                  <a:srgbClr val="002060"/>
-                </a:solidFill>
-              </a:rPr>
-              <a:t>Thank you!</a:t>
-            </a:r>
-          </a:p>
-        </p:txBody>
-      </p:sp>
-    </p:spTree>
-    <p:extLst>
-      <p:ext uri="{BB962C8B-B14F-4D97-AF65-F5344CB8AC3E}">
-        <p14:creationId xmlns:p14="http://schemas.microsoft.com/office/powerpoint/2010/main" val="2695353089"/>
       </p:ext>
     </p:extLst>
   </p:cSld>
@@ -10854,6 +10703,434 @@
 </file>
 
 <file path=ppt/slides/slide30.xml><?xml version="1.0" encoding="utf-8"?>
+<p:sld xmlns:a="http://schemas.openxmlformats.org/drawingml/2006/main" xmlns:r="http://schemas.openxmlformats.org/officeDocument/2006/relationships" xmlns:p="http://schemas.openxmlformats.org/presentationml/2006/main">
+  <p:cSld>
+    <p:spTree>
+      <p:nvGrpSpPr>
+        <p:cNvPr id="1" name="">
+          <a:extLst>
+            <a:ext uri="{FF2B5EF4-FFF2-40B4-BE49-F238E27FC236}">
+              <a16:creationId xmlns:a16="http://schemas.microsoft.com/office/drawing/2014/main" id="{50003A83-A2E0-75A9-CAF8-76845C1059FE}"/>
+            </a:ext>
+          </a:extLst>
+        </p:cNvPr>
+        <p:cNvGrpSpPr/>
+        <p:nvPr/>
+      </p:nvGrpSpPr>
+      <p:grpSpPr>
+        <a:xfrm>
+          <a:off x="0" y="0"/>
+          <a:ext cx="0" cy="0"/>
+          <a:chOff x="0" y="0"/>
+          <a:chExt cx="0" cy="0"/>
+        </a:xfrm>
+      </p:grpSpPr>
+      <p:sp>
+        <p:nvSpPr>
+          <p:cNvPr id="2" name="TextBox 1">
+            <a:extLst>
+              <a:ext uri="{FF2B5EF4-FFF2-40B4-BE49-F238E27FC236}">
+                <a16:creationId xmlns:a16="http://schemas.microsoft.com/office/drawing/2014/main" id="{2227CC9D-A2C0-8251-1C28-9FA3786BFE78}"/>
+              </a:ext>
+            </a:extLst>
+          </p:cNvPr>
+          <p:cNvSpPr txBox="1"/>
+          <p:nvPr/>
+        </p:nvSpPr>
+        <p:spPr>
+          <a:xfrm>
+            <a:off x="469556" y="626071"/>
+            <a:ext cx="6845644" cy="523220"/>
+          </a:xfrm>
+          <a:prstGeom prst="rect">
+            <a:avLst/>
+          </a:prstGeom>
+          <a:noFill/>
+        </p:spPr>
+        <p:txBody>
+          <a:bodyPr wrap="square" rtlCol="0">
+            <a:spAutoFit/>
+          </a:bodyPr>
+          <a:lstStyle/>
+          <a:p>
+            <a:r>
+              <a:rPr lang="pt-PT" sz="2800" noProof="1">
+                <a:solidFill>
+                  <a:srgbClr val="002060"/>
+                </a:solidFill>
+              </a:rPr>
+              <a:t>Future Work</a:t>
+            </a:r>
+            <a:endParaRPr lang="en-US" sz="2800" noProof="1"/>
+          </a:p>
+        </p:txBody>
+      </p:sp>
+      <p:sp>
+        <p:nvSpPr>
+          <p:cNvPr id="4" name="Slide Number Placeholder 3">
+            <a:extLst>
+              <a:ext uri="{FF2B5EF4-FFF2-40B4-BE49-F238E27FC236}">
+                <a16:creationId xmlns:a16="http://schemas.microsoft.com/office/drawing/2014/main" id="{35C48BCD-CB87-56DE-A29E-8F58536D6BB7}"/>
+              </a:ext>
+            </a:extLst>
+          </p:cNvPr>
+          <p:cNvSpPr>
+            <a:spLocks noGrp="1"/>
+          </p:cNvSpPr>
+          <p:nvPr>
+            <p:ph type="sldNum" sz="quarter" idx="12"/>
+          </p:nvPr>
+        </p:nvSpPr>
+        <p:spPr/>
+        <p:txBody>
+          <a:bodyPr/>
+          <a:lstStyle/>
+          <a:p>
+            <a:fld id="{292A9FD8-515A-4698-9313-0AB17EE9632B}" type="slidenum">
+              <a:rPr lang="en-US" noProof="1" dirty="0" smtClean="0"/>
+              <a:t>30</a:t>
+            </a:fld>
+            <a:endParaRPr lang="en-US" noProof="1"/>
+          </a:p>
+        </p:txBody>
+      </p:sp>
+      <p:sp>
+        <p:nvSpPr>
+          <p:cNvPr id="5" name="TextBox 4">
+            <a:extLst>
+              <a:ext uri="{FF2B5EF4-FFF2-40B4-BE49-F238E27FC236}">
+                <a16:creationId xmlns:a16="http://schemas.microsoft.com/office/drawing/2014/main" id="{CD67E19D-BC23-C69B-75B1-B3507E6D1851}"/>
+              </a:ext>
+            </a:extLst>
+          </p:cNvPr>
+          <p:cNvSpPr txBox="1"/>
+          <p:nvPr/>
+        </p:nvSpPr>
+        <p:spPr>
+          <a:xfrm>
+            <a:off x="469556" y="2022795"/>
+            <a:ext cx="6128951" cy="1569660"/>
+          </a:xfrm>
+          <a:prstGeom prst="rect">
+            <a:avLst/>
+          </a:prstGeom>
+          <a:noFill/>
+        </p:spPr>
+        <p:txBody>
+          <a:bodyPr wrap="square" rtlCol="0">
+            <a:spAutoFit/>
+          </a:bodyPr>
+          <a:lstStyle/>
+          <a:p>
+            <a:pPr marL="342900" indent="-342900">
+              <a:buFont typeface="Arial" panose="020B0604020202020204" pitchFamily="34" charset="0"/>
+              <a:buChar char="•"/>
+            </a:pPr>
+            <a:r>
+              <a:rPr lang="en-US" sz="2400" noProof="1">
+                <a:solidFill>
+                  <a:srgbClr val="002060"/>
+                </a:solidFill>
+              </a:rPr>
+              <a:t>Higher-order constructs (iter, fold…)</a:t>
+            </a:r>
+          </a:p>
+          <a:p>
+            <a:pPr marL="342900" indent="-342900">
+              <a:buFont typeface="Arial" panose="020B0604020202020204" pitchFamily="34" charset="0"/>
+              <a:buChar char="•"/>
+            </a:pPr>
+            <a:r>
+              <a:rPr lang="en-US" sz="2400" noProof="1">
+                <a:solidFill>
+                  <a:srgbClr val="002060"/>
+                </a:solidFill>
+              </a:rPr>
+              <a:t>Pointer based programs</a:t>
+            </a:r>
+          </a:p>
+          <a:p>
+            <a:pPr marL="342900" indent="-342900">
+              <a:buFont typeface="Arial" panose="020B0604020202020204" pitchFamily="34" charset="0"/>
+              <a:buChar char="•"/>
+            </a:pPr>
+            <a:r>
+              <a:rPr lang="en-US" sz="2400" noProof="1">
+                <a:solidFill>
+                  <a:srgbClr val="002060"/>
+                </a:solidFill>
+              </a:rPr>
+              <a:t>Dynamic programming</a:t>
+            </a:r>
+          </a:p>
+          <a:p>
+            <a:pPr marL="342900" indent="-342900">
+              <a:buFont typeface="Arial" panose="020B0604020202020204" pitchFamily="34" charset="0"/>
+              <a:buChar char="•"/>
+            </a:pPr>
+            <a:r>
+              <a:rPr lang="en-US" sz="2400" noProof="1">
+                <a:solidFill>
+                  <a:srgbClr val="002060"/>
+                </a:solidFill>
+              </a:rPr>
+              <a:t>Program evolution</a:t>
+            </a:r>
+          </a:p>
+        </p:txBody>
+      </p:sp>
+    </p:spTree>
+    <p:extLst>
+      <p:ext uri="{BB962C8B-B14F-4D97-AF65-F5344CB8AC3E}">
+        <p14:creationId xmlns:p14="http://schemas.microsoft.com/office/powerpoint/2010/main" val="2239026914"/>
+      </p:ext>
+    </p:extLst>
+  </p:cSld>
+  <p:clrMapOvr>
+    <a:masterClrMapping/>
+  </p:clrMapOvr>
+</p:sld>
+</file>
+
+<file path=ppt/slides/slide31.xml><?xml version="1.0" encoding="utf-8"?>
+<p:sld xmlns:a="http://schemas.openxmlformats.org/drawingml/2006/main" xmlns:r="http://schemas.openxmlformats.org/officeDocument/2006/relationships" xmlns:p="http://schemas.openxmlformats.org/presentationml/2006/main">
+  <p:cSld>
+    <p:spTree>
+      <p:nvGrpSpPr>
+        <p:cNvPr id="1" name="">
+          <a:extLst>
+            <a:ext uri="{FF2B5EF4-FFF2-40B4-BE49-F238E27FC236}">
+              <a16:creationId xmlns:a16="http://schemas.microsoft.com/office/drawing/2014/main" id="{2534C233-D244-61BA-BDF8-CB6D060B5B01}"/>
+            </a:ext>
+          </a:extLst>
+        </p:cNvPr>
+        <p:cNvGrpSpPr/>
+        <p:nvPr/>
+      </p:nvGrpSpPr>
+      <p:grpSpPr>
+        <a:xfrm>
+          <a:off x="0" y="0"/>
+          <a:ext cx="0" cy="0"/>
+          <a:chOff x="0" y="0"/>
+          <a:chExt cx="0" cy="0"/>
+        </a:xfrm>
+      </p:grpSpPr>
+      <p:sp>
+        <p:nvSpPr>
+          <p:cNvPr id="2" name="Título 1">
+            <a:extLst>
+              <a:ext uri="{FF2B5EF4-FFF2-40B4-BE49-F238E27FC236}">
+                <a16:creationId xmlns:a16="http://schemas.microsoft.com/office/drawing/2014/main" id="{A20274D2-09B6-D69D-1B09-52211756F812}"/>
+              </a:ext>
+            </a:extLst>
+          </p:cNvPr>
+          <p:cNvSpPr>
+            <a:spLocks noGrp="1"/>
+          </p:cNvSpPr>
+          <p:nvPr>
+            <p:ph type="ctrTitle"/>
+          </p:nvPr>
+        </p:nvSpPr>
+        <p:spPr>
+          <a:xfrm>
+            <a:off x="744494" y="716690"/>
+            <a:ext cx="7655011" cy="571043"/>
+          </a:xfrm>
+        </p:spPr>
+        <p:txBody>
+          <a:bodyPr>
+            <a:normAutofit/>
+          </a:bodyPr>
+          <a:lstStyle/>
+          <a:p>
+            <a:r>
+              <a:rPr lang="en-US" sz="3200" noProof="1">
+                <a:solidFill>
+                  <a:srgbClr val="002060"/>
+                </a:solidFill>
+              </a:rPr>
+              <a:t>Formal Verification of Programs Equivalence</a:t>
+            </a:r>
+          </a:p>
+        </p:txBody>
+      </p:sp>
+      <p:sp>
+        <p:nvSpPr>
+          <p:cNvPr id="3" name="Subtítulo 2">
+            <a:extLst>
+              <a:ext uri="{FF2B5EF4-FFF2-40B4-BE49-F238E27FC236}">
+                <a16:creationId xmlns:a16="http://schemas.microsoft.com/office/drawing/2014/main" id="{4D296B62-9DC8-8E89-BBD7-11E0414C0F12}"/>
+              </a:ext>
+            </a:extLst>
+          </p:cNvPr>
+          <p:cNvSpPr>
+            <a:spLocks noGrp="1"/>
+          </p:cNvSpPr>
+          <p:nvPr>
+            <p:ph type="subTitle" idx="1"/>
+          </p:nvPr>
+        </p:nvSpPr>
+        <p:spPr>
+          <a:xfrm>
+            <a:off x="1142999" y="3355925"/>
+            <a:ext cx="6858000" cy="1379802"/>
+          </a:xfrm>
+        </p:spPr>
+        <p:txBody>
+          <a:bodyPr>
+            <a:noAutofit/>
+          </a:bodyPr>
+          <a:lstStyle/>
+          <a:p>
+            <a:r>
+              <a:rPr lang="en-US" sz="2000" noProof="1">
+                <a:solidFill>
+                  <a:srgbClr val="002060"/>
+                </a:solidFill>
+              </a:rPr>
+              <a:t>João Nini</a:t>
+            </a:r>
+          </a:p>
+          <a:p>
+            <a:r>
+              <a:rPr lang="en-US" sz="2000" noProof="1">
+                <a:solidFill>
+                  <a:srgbClr val="002060"/>
+                </a:solidFill>
+              </a:rPr>
+              <a:t>Advisor: Mário Pereira</a:t>
+            </a:r>
+          </a:p>
+          <a:p>
+            <a:pPr>
+              <a:lnSpc>
+                <a:spcPct val="50000"/>
+              </a:lnSpc>
+            </a:pPr>
+            <a:endParaRPr lang="en-US" sz="2000" noProof="1">
+              <a:solidFill>
+                <a:srgbClr val="002060"/>
+              </a:solidFill>
+            </a:endParaRPr>
+          </a:p>
+          <a:p>
+            <a:pPr>
+              <a:lnSpc>
+                <a:spcPct val="50000"/>
+              </a:lnSpc>
+            </a:pPr>
+            <a:r>
+              <a:rPr lang="en-US" sz="2000" noProof="1">
+                <a:solidFill>
+                  <a:srgbClr val="002060"/>
+                </a:solidFill>
+              </a:rPr>
+              <a:t>December 16, 2025</a:t>
+            </a:r>
+          </a:p>
+        </p:txBody>
+      </p:sp>
+      <p:sp>
+        <p:nvSpPr>
+          <p:cNvPr id="4" name="Slide Number Placeholder 3">
+            <a:extLst>
+              <a:ext uri="{FF2B5EF4-FFF2-40B4-BE49-F238E27FC236}">
+                <a16:creationId xmlns:a16="http://schemas.microsoft.com/office/drawing/2014/main" id="{44788A04-F651-B4D5-7DA9-E26D50D91332}"/>
+              </a:ext>
+            </a:extLst>
+          </p:cNvPr>
+          <p:cNvSpPr>
+            <a:spLocks noGrp="1"/>
+          </p:cNvSpPr>
+          <p:nvPr>
+            <p:ph type="sldNum" sz="quarter" idx="12"/>
+          </p:nvPr>
+        </p:nvSpPr>
+        <p:spPr/>
+        <p:txBody>
+          <a:bodyPr/>
+          <a:lstStyle/>
+          <a:p>
+            <a:fld id="{292A9FD8-515A-4698-9313-0AB17EE9632B}" type="slidenum">
+              <a:rPr lang="en-US" noProof="1" dirty="0" smtClean="0"/>
+              <a:t>31</a:t>
+            </a:fld>
+            <a:endParaRPr lang="en-US" noProof="1"/>
+          </a:p>
+        </p:txBody>
+      </p:sp>
+      <p:sp>
+        <p:nvSpPr>
+          <p:cNvPr id="5" name="Título 1">
+            <a:extLst>
+              <a:ext uri="{FF2B5EF4-FFF2-40B4-BE49-F238E27FC236}">
+                <a16:creationId xmlns:a16="http://schemas.microsoft.com/office/drawing/2014/main" id="{DB787C8E-BF42-9283-4789-2CA358339C70}"/>
+              </a:ext>
+            </a:extLst>
+          </p:cNvPr>
+          <p:cNvSpPr txBox="1">
+            <a:spLocks/>
+          </p:cNvSpPr>
+          <p:nvPr/>
+        </p:nvSpPr>
+        <p:spPr>
+          <a:xfrm>
+            <a:off x="3189587" y="2091846"/>
+            <a:ext cx="2764824" cy="571043"/>
+          </a:xfrm>
+          <a:prstGeom prst="rect">
+            <a:avLst/>
+          </a:prstGeom>
+        </p:spPr>
+        <p:txBody>
+          <a:bodyPr vert="horz" lIns="91440" tIns="45720" rIns="91440" bIns="45720" rtlCol="0" anchor="b">
+            <a:noAutofit/>
+          </a:bodyPr>
+          <a:lstStyle>
+            <a:lvl1pPr algn="ctr" defTabSz="685800" rtl="0" eaLnBrk="1" latinLnBrk="0" hangingPunct="1">
+              <a:lnSpc>
+                <a:spcPct val="90000"/>
+              </a:lnSpc>
+              <a:spcBef>
+                <a:spcPct val="0"/>
+              </a:spcBef>
+              <a:buNone/>
+              <a:defRPr sz="4500" kern="1200">
+                <a:solidFill>
+                  <a:schemeClr val="tx1"/>
+                </a:solidFill>
+                <a:latin typeface="+mj-lt"/>
+                <a:ea typeface="+mj-ea"/>
+                <a:cs typeface="+mj-cs"/>
+              </a:defRPr>
+            </a:lvl1pPr>
+          </a:lstStyle>
+          <a:p>
+            <a:r>
+              <a:rPr lang="en-US" sz="4000" noProof="1">
+                <a:solidFill>
+                  <a:srgbClr val="002060"/>
+                </a:solidFill>
+              </a:rPr>
+              <a:t>Thank you!</a:t>
+            </a:r>
+          </a:p>
+        </p:txBody>
+      </p:sp>
+    </p:spTree>
+    <p:extLst>
+      <p:ext uri="{BB962C8B-B14F-4D97-AF65-F5344CB8AC3E}">
+        <p14:creationId xmlns:p14="http://schemas.microsoft.com/office/powerpoint/2010/main" val="2695353089"/>
+      </p:ext>
+    </p:extLst>
+  </p:cSld>
+  <p:clrMapOvr>
+    <a:masterClrMapping/>
+  </p:clrMapOvr>
+</p:sld>
+</file>
+
+<file path=ppt/slides/slide32.xml><?xml version="1.0" encoding="utf-8"?>
 <p:sld xmlns:a="http://schemas.openxmlformats.org/drawingml/2006/main" xmlns:r="http://schemas.openxmlformats.org/officeDocument/2006/relationships" xmlns:p="http://schemas.openxmlformats.org/presentationml/2006/main" show="0">
   <p:cSld>
     <p:spTree>
@@ -11210,7 +11487,7 @@
           <a:p>
             <a:fld id="{292A9FD8-515A-4698-9313-0AB17EE9632B}" type="slidenum">
               <a:rPr lang="en-US" noProof="1" dirty="0" smtClean="0"/>
-              <a:t>30</a:t>
+              <a:t>32</a:t>
             </a:fld>
             <a:endParaRPr lang="en-US" noProof="1"/>
           </a:p>
@@ -11229,7 +11506,7 @@
 </p:sld>
 </file>
 
-<file path=ppt/slides/slide31.xml><?xml version="1.0" encoding="utf-8"?>
+<file path=ppt/slides/slide33.xml><?xml version="1.0" encoding="utf-8"?>
 <p:sld xmlns:a="http://schemas.openxmlformats.org/drawingml/2006/main" xmlns:r="http://schemas.openxmlformats.org/officeDocument/2006/relationships" xmlns:p="http://schemas.openxmlformats.org/presentationml/2006/main" show="0">
   <p:cSld>
     <p:spTree>
@@ -11315,7 +11592,7 @@
           <a:p>
             <a:fld id="{292A9FD8-515A-4698-9313-0AB17EE9632B}" type="slidenum">
               <a:rPr lang="en-US" noProof="1" dirty="0" smtClean="0"/>
-              <a:t>31</a:t>
+              <a:t>33</a:t>
             </a:fld>
             <a:endParaRPr lang="en-US" noProof="1"/>
           </a:p>
@@ -11422,7 +11699,7 @@
 </p:sld>
 </file>
 
-<file path=ppt/slides/slide32.xml><?xml version="1.0" encoding="utf-8"?>
+<file path=ppt/slides/slide34.xml><?xml version="1.0" encoding="utf-8"?>
 <p:sld xmlns:a="http://schemas.openxmlformats.org/drawingml/2006/main" xmlns:r="http://schemas.openxmlformats.org/officeDocument/2006/relationships" xmlns:p="http://schemas.openxmlformats.org/presentationml/2006/main" show="0">
   <p:cSld>
     <p:spTree>
@@ -11548,7 +11825,7 @@
           <a:p>
             <a:fld id="{292A9FD8-515A-4698-9313-0AB17EE9632B}" type="slidenum">
               <a:rPr lang="en-US" noProof="1" dirty="0" smtClean="0"/>
-              <a:t>32</a:t>
+              <a:t>34</a:t>
             </a:fld>
             <a:endParaRPr lang="en-US" noProof="1"/>
           </a:p>
@@ -11567,7 +11844,7 @@
 </p:sld>
 </file>
 
-<file path=ppt/slides/slide33.xml><?xml version="1.0" encoding="utf-8"?>
+<file path=ppt/slides/slide35.xml><?xml version="1.0" encoding="utf-8"?>
 <p:sld xmlns:a="http://schemas.openxmlformats.org/drawingml/2006/main" xmlns:r="http://schemas.openxmlformats.org/officeDocument/2006/relationships" xmlns:p="http://schemas.openxmlformats.org/presentationml/2006/main" show="0">
   <p:cSld>
     <p:spTree>
@@ -11710,7 +11987,7 @@
           <a:p>
             <a:fld id="{292A9FD8-515A-4698-9313-0AB17EE9632B}" type="slidenum">
               <a:rPr lang="en-US" noProof="1" dirty="0" smtClean="0"/>
-              <a:t>33</a:t>
+              <a:t>35</a:t>
             </a:fld>
             <a:endParaRPr lang="en-US" noProof="1"/>
           </a:p>
@@ -11729,7 +12006,7 @@
 </p:sld>
 </file>
 
-<file path=ppt/slides/slide34.xml><?xml version="1.0" encoding="utf-8"?>
+<file path=ppt/slides/slide36.xml><?xml version="1.0" encoding="utf-8"?>
 <p:sld xmlns:a="http://schemas.openxmlformats.org/drawingml/2006/main" xmlns:r="http://schemas.openxmlformats.org/officeDocument/2006/relationships" xmlns:p="http://schemas.openxmlformats.org/presentationml/2006/main" show="0">
   <p:cSld>
     <p:spTree>
@@ -11816,7 +12093,7 @@
           <a:p>
             <a:fld id="{292A9FD8-515A-4698-9313-0AB17EE9632B}" type="slidenum">
               <a:rPr lang="en-US" noProof="1" dirty="0" smtClean="0"/>
-              <a:t>34</a:t>
+              <a:t>36</a:t>
             </a:fld>
             <a:endParaRPr lang="en-US" noProof="1"/>
           </a:p>
@@ -12069,7 +12346,7 @@
 </p:sld>
 </file>
 
-<file path=ppt/slides/slide35.xml><?xml version="1.0" encoding="utf-8"?>
+<file path=ppt/slides/slide37.xml><?xml version="1.0" encoding="utf-8"?>
 <p:sld xmlns:a="http://schemas.openxmlformats.org/drawingml/2006/main" xmlns:r="http://schemas.openxmlformats.org/officeDocument/2006/relationships" xmlns:p="http://schemas.openxmlformats.org/presentationml/2006/main" show="0">
   <p:cSld>
     <p:spTree>
@@ -12540,7 +12817,7 @@
           <a:p>
             <a:fld id="{292A9FD8-515A-4698-9313-0AB17EE9632B}" type="slidenum">
               <a:rPr lang="en-US" noProof="1" dirty="0" smtClean="0"/>
-              <a:t>35</a:t>
+              <a:t>37</a:t>
             </a:fld>
             <a:endParaRPr lang="en-US" noProof="1"/>
           </a:p>
@@ -12559,7 +12836,7 @@
 </p:sld>
 </file>
 
-<file path=ppt/slides/slide36.xml><?xml version="1.0" encoding="utf-8"?>
+<file path=ppt/slides/slide38.xml><?xml version="1.0" encoding="utf-8"?>
 <p:sld xmlns:a="http://schemas.openxmlformats.org/drawingml/2006/main" xmlns:r="http://schemas.openxmlformats.org/officeDocument/2006/relationships" xmlns:p="http://schemas.openxmlformats.org/presentationml/2006/main" show="0">
   <p:cSld>
     <p:spTree>
@@ -12820,7 +13097,7 @@
           <a:p>
             <a:fld id="{292A9FD8-515A-4698-9313-0AB17EE9632B}" type="slidenum">
               <a:rPr lang="en-US" noProof="1" dirty="0" smtClean="0"/>
-              <a:t>36</a:t>
+              <a:t>38</a:t>
             </a:fld>
             <a:endParaRPr lang="en-US" noProof="1"/>
           </a:p>
@@ -12839,7 +13116,7 @@
 </p:sld>
 </file>
 
-<file path=ppt/slides/slide37.xml><?xml version="1.0" encoding="utf-8"?>
+<file path=ppt/slides/slide39.xml><?xml version="1.0" encoding="utf-8"?>
 <p:sld xmlns:a="http://schemas.openxmlformats.org/drawingml/2006/main" xmlns:r="http://schemas.openxmlformats.org/officeDocument/2006/relationships" xmlns:p="http://schemas.openxmlformats.org/presentationml/2006/main" show="0">
   <p:cSld>
     <p:spTree>
@@ -13010,7 +13287,7 @@
           <a:p>
             <a:fld id="{292A9FD8-515A-4698-9313-0AB17EE9632B}" type="slidenum">
               <a:rPr lang="en-US" noProof="1" dirty="0" smtClean="0"/>
-              <a:t>37</a:t>
+              <a:t>39</a:t>
             </a:fld>
             <a:endParaRPr lang="en-US" noProof="1"/>
           </a:p>
@@ -13020,580 +13297,6 @@
     <p:extLst>
       <p:ext uri="{BB962C8B-B14F-4D97-AF65-F5344CB8AC3E}">
         <p14:creationId xmlns:p14="http://schemas.microsoft.com/office/powerpoint/2010/main" val="1854075027"/>
-      </p:ext>
-    </p:extLst>
-  </p:cSld>
-  <p:clrMapOvr>
-    <a:masterClrMapping/>
-  </p:clrMapOvr>
-</p:sld>
-</file>
-
-<file path=ppt/slides/slide38.xml><?xml version="1.0" encoding="utf-8"?>
-<p:sld xmlns:a="http://schemas.openxmlformats.org/drawingml/2006/main" xmlns:r="http://schemas.openxmlformats.org/officeDocument/2006/relationships" xmlns:p="http://schemas.openxmlformats.org/presentationml/2006/main" show="0">
-  <p:cSld>
-    <p:spTree>
-      <p:nvGrpSpPr>
-        <p:cNvPr id="1" name="">
-          <a:extLst>
-            <a:ext uri="{FF2B5EF4-FFF2-40B4-BE49-F238E27FC236}">
-              <a16:creationId xmlns:a16="http://schemas.microsoft.com/office/drawing/2014/main" id="{FCF8EE8F-22A6-F1D4-FBBB-BCC8F7947E63}"/>
-            </a:ext>
-          </a:extLst>
-        </p:cNvPr>
-        <p:cNvGrpSpPr/>
-        <p:nvPr/>
-      </p:nvGrpSpPr>
-      <p:grpSpPr>
-        <a:xfrm>
-          <a:off x="0" y="0"/>
-          <a:ext cx="0" cy="0"/>
-          <a:chOff x="0" y="0"/>
-          <a:chExt cx="0" cy="0"/>
-        </a:xfrm>
-      </p:grpSpPr>
-      <p:sp>
-        <p:nvSpPr>
-          <p:cNvPr id="2" name="TextBox 1">
-            <a:extLst>
-              <a:ext uri="{FF2B5EF4-FFF2-40B4-BE49-F238E27FC236}">
-                <a16:creationId xmlns:a16="http://schemas.microsoft.com/office/drawing/2014/main" id="{7B6E19D4-30CF-86A0-73E1-139F833182D9}"/>
-              </a:ext>
-            </a:extLst>
-          </p:cNvPr>
-          <p:cNvSpPr txBox="1"/>
-          <p:nvPr/>
-        </p:nvSpPr>
-        <p:spPr>
-          <a:xfrm>
-            <a:off x="469556" y="626071"/>
-            <a:ext cx="4572000" cy="523220"/>
-          </a:xfrm>
-          <a:prstGeom prst="rect">
-            <a:avLst/>
-          </a:prstGeom>
-          <a:noFill/>
-        </p:spPr>
-        <p:txBody>
-          <a:bodyPr wrap="square" rtlCol="0">
-            <a:spAutoFit/>
-          </a:bodyPr>
-          <a:lstStyle/>
-          <a:p>
-            <a:r>
-              <a:rPr lang="en-US" sz="2800" noProof="1">
-                <a:solidFill>
-                  <a:srgbClr val="002060"/>
-                </a:solidFill>
-              </a:rPr>
-              <a:t>Ocaml (2/2)</a:t>
-            </a:r>
-            <a:endParaRPr lang="en-US" sz="2800" noProof="1"/>
-          </a:p>
-        </p:txBody>
-      </p:sp>
-      <p:sp>
-        <p:nvSpPr>
-          <p:cNvPr id="4" name="TextBox 3">
-            <a:extLst>
-              <a:ext uri="{FF2B5EF4-FFF2-40B4-BE49-F238E27FC236}">
-                <a16:creationId xmlns:a16="http://schemas.microsoft.com/office/drawing/2014/main" id="{FA91A7A2-7DB7-9936-26EC-F405DD78909E}"/>
-              </a:ext>
-            </a:extLst>
-          </p:cNvPr>
-          <p:cNvSpPr txBox="1"/>
-          <p:nvPr/>
-        </p:nvSpPr>
-        <p:spPr>
-          <a:xfrm>
-            <a:off x="469556" y="2491518"/>
-            <a:ext cx="4394887" cy="1107996"/>
-          </a:xfrm>
-          <a:prstGeom prst="rect">
-            <a:avLst/>
-          </a:prstGeom>
-          <a:noFill/>
-        </p:spPr>
-        <p:txBody>
-          <a:bodyPr wrap="square" rtlCol="0">
-            <a:spAutoFit/>
-          </a:bodyPr>
-          <a:lstStyle/>
-          <a:p>
-            <a:r>
-              <a:rPr lang="en-US" sz="2200" noProof="1">
-                <a:solidFill>
-                  <a:srgbClr val="002060"/>
-                </a:solidFill>
-              </a:rPr>
-              <a:t>let rec gcd (a: int) (b:int) : int =</a:t>
-            </a:r>
-          </a:p>
-          <a:p>
-            <a:r>
-              <a:rPr lang="en-US" sz="2200" noProof="1">
-                <a:solidFill>
-                  <a:srgbClr val="002060"/>
-                </a:solidFill>
-              </a:rPr>
-              <a:t>   if b = 0 then a</a:t>
-            </a:r>
-          </a:p>
-          <a:p>
-            <a:r>
-              <a:rPr lang="en-US" sz="2200" noProof="1">
-                <a:solidFill>
-                  <a:srgbClr val="002060"/>
-                </a:solidFill>
-              </a:rPr>
-              <a:t>   else gcd b (mod a b)</a:t>
-            </a:r>
-          </a:p>
-        </p:txBody>
-      </p:sp>
-      <p:sp>
-        <p:nvSpPr>
-          <p:cNvPr id="5" name="TextBox 4">
-            <a:extLst>
-              <a:ext uri="{FF2B5EF4-FFF2-40B4-BE49-F238E27FC236}">
-                <a16:creationId xmlns:a16="http://schemas.microsoft.com/office/drawing/2014/main" id="{1ECEEEF9-24CA-62A0-4225-AB0A6AC0D0E4}"/>
-              </a:ext>
-            </a:extLst>
-          </p:cNvPr>
-          <p:cNvSpPr txBox="1"/>
-          <p:nvPr/>
-        </p:nvSpPr>
-        <p:spPr>
-          <a:xfrm>
-            <a:off x="4572000" y="1900043"/>
-            <a:ext cx="4394887" cy="3139321"/>
-          </a:xfrm>
-          <a:prstGeom prst="rect">
-            <a:avLst/>
-          </a:prstGeom>
-          <a:noFill/>
-        </p:spPr>
-        <p:txBody>
-          <a:bodyPr wrap="square" rtlCol="0">
-            <a:spAutoFit/>
-          </a:bodyPr>
-          <a:lstStyle/>
-          <a:p>
-            <a:r>
-              <a:rPr lang="en-US" sz="2200" noProof="1">
-                <a:solidFill>
-                  <a:srgbClr val="002060"/>
-                </a:solidFill>
-              </a:rPr>
-              <a:t>let gcd_iter (a0: int) (b0: int) : int =   </a:t>
-            </a:r>
-          </a:p>
-          <a:p>
-            <a:r>
-              <a:rPr lang="en-US" sz="2200" noProof="1">
-                <a:solidFill>
-                  <a:srgbClr val="002060"/>
-                </a:solidFill>
-              </a:rPr>
-              <a:t>      let b = ref b0 in</a:t>
-            </a:r>
-          </a:p>
-          <a:p>
-            <a:r>
-              <a:rPr lang="en-US" sz="2200" noProof="1">
-                <a:solidFill>
-                  <a:srgbClr val="002060"/>
-                </a:solidFill>
-              </a:rPr>
-              <a:t>      let a = ref a0 in</a:t>
-            </a:r>
-          </a:p>
-          <a:p>
-            <a:r>
-              <a:rPr lang="en-US" sz="2200" noProof="1">
-                <a:solidFill>
-                  <a:srgbClr val="002060"/>
-                </a:solidFill>
-              </a:rPr>
-              <a:t>      while !b &lt;&gt; 0 do</a:t>
-            </a:r>
-          </a:p>
-          <a:p>
-            <a:r>
-              <a:rPr lang="en-US" sz="2200" noProof="1">
-                <a:solidFill>
-                  <a:srgbClr val="002060"/>
-                </a:solidFill>
-              </a:rPr>
-              <a:t>          let tmp = !a in</a:t>
-            </a:r>
-          </a:p>
-          <a:p>
-            <a:r>
-              <a:rPr lang="en-US" sz="2200" noProof="1">
-                <a:solidFill>
-                  <a:srgbClr val="002060"/>
-                </a:solidFill>
-              </a:rPr>
-              <a:t>          a := !b;</a:t>
-            </a:r>
-          </a:p>
-          <a:p>
-            <a:r>
-              <a:rPr lang="en-US" sz="2200" noProof="1">
-                <a:solidFill>
-                  <a:srgbClr val="002060"/>
-                </a:solidFill>
-              </a:rPr>
-              <a:t>          b := tmp mod !b</a:t>
-            </a:r>
-          </a:p>
-          <a:p>
-            <a:r>
-              <a:rPr lang="en-US" sz="2200" noProof="1">
-                <a:solidFill>
-                  <a:srgbClr val="002060"/>
-                </a:solidFill>
-              </a:rPr>
-              <a:t>      done;</a:t>
-            </a:r>
-          </a:p>
-          <a:p>
-            <a:r>
-              <a:rPr lang="en-US" sz="2200" noProof="1">
-                <a:solidFill>
-                  <a:srgbClr val="002060"/>
-                </a:solidFill>
-              </a:rPr>
-              <a:t>      !a</a:t>
-            </a:r>
-          </a:p>
-        </p:txBody>
-      </p:sp>
-      <p:sp>
-        <p:nvSpPr>
-          <p:cNvPr id="6" name="TextBox 5">
-            <a:extLst>
-              <a:ext uri="{FF2B5EF4-FFF2-40B4-BE49-F238E27FC236}">
-                <a16:creationId xmlns:a16="http://schemas.microsoft.com/office/drawing/2014/main" id="{C217E93C-AEE3-2272-5E9C-219FFD409691}"/>
-              </a:ext>
-            </a:extLst>
-          </p:cNvPr>
-          <p:cNvSpPr txBox="1"/>
-          <p:nvPr/>
-        </p:nvSpPr>
-        <p:spPr>
-          <a:xfrm>
-            <a:off x="5576500" y="1211561"/>
-            <a:ext cx="1762899" cy="430887"/>
-          </a:xfrm>
-          <a:prstGeom prst="rect">
-            <a:avLst/>
-          </a:prstGeom>
-          <a:noFill/>
-        </p:spPr>
-        <p:txBody>
-          <a:bodyPr wrap="square" rtlCol="0">
-            <a:spAutoFit/>
-          </a:bodyPr>
-          <a:lstStyle/>
-          <a:p>
-            <a:pPr algn="ctr"/>
-            <a:r>
-              <a:rPr lang="en-US" sz="2200" b="1" noProof="1">
-                <a:solidFill>
-                  <a:srgbClr val="002060"/>
-                </a:solidFill>
-              </a:rPr>
-              <a:t>Imperative</a:t>
-            </a:r>
-          </a:p>
-        </p:txBody>
-      </p:sp>
-      <p:sp>
-        <p:nvSpPr>
-          <p:cNvPr id="7" name="TextBox 6">
-            <a:extLst>
-              <a:ext uri="{FF2B5EF4-FFF2-40B4-BE49-F238E27FC236}">
-                <a16:creationId xmlns:a16="http://schemas.microsoft.com/office/drawing/2014/main" id="{7226EC03-05AA-307E-2F02-421AA59FED2C}"/>
-              </a:ext>
-            </a:extLst>
-          </p:cNvPr>
-          <p:cNvSpPr txBox="1"/>
-          <p:nvPr/>
-        </p:nvSpPr>
-        <p:spPr>
-          <a:xfrm>
-            <a:off x="1297458" y="1881534"/>
-            <a:ext cx="1762899" cy="430887"/>
-          </a:xfrm>
-          <a:prstGeom prst="rect">
-            <a:avLst/>
-          </a:prstGeom>
-          <a:noFill/>
-        </p:spPr>
-        <p:txBody>
-          <a:bodyPr wrap="square" rtlCol="0">
-            <a:spAutoFit/>
-          </a:bodyPr>
-          <a:lstStyle/>
-          <a:p>
-            <a:pPr algn="ctr"/>
-            <a:r>
-              <a:rPr lang="en-US" sz="2200" b="1" noProof="1">
-                <a:solidFill>
-                  <a:srgbClr val="002060"/>
-                </a:solidFill>
-              </a:rPr>
-              <a:t>Functional</a:t>
-            </a:r>
-          </a:p>
-        </p:txBody>
-      </p:sp>
-      <p:sp>
-        <p:nvSpPr>
-          <p:cNvPr id="8" name="Slide Number Placeholder 7">
-            <a:extLst>
-              <a:ext uri="{FF2B5EF4-FFF2-40B4-BE49-F238E27FC236}">
-                <a16:creationId xmlns:a16="http://schemas.microsoft.com/office/drawing/2014/main" id="{1CF94898-EF21-D9A6-C498-CE061B5AD95E}"/>
-              </a:ext>
-            </a:extLst>
-          </p:cNvPr>
-          <p:cNvSpPr>
-            <a:spLocks noGrp="1"/>
-          </p:cNvSpPr>
-          <p:nvPr>
-            <p:ph type="sldNum" sz="quarter" idx="12"/>
-          </p:nvPr>
-        </p:nvSpPr>
-        <p:spPr/>
-        <p:txBody>
-          <a:bodyPr/>
-          <a:lstStyle/>
-          <a:p>
-            <a:fld id="{292A9FD8-515A-4698-9313-0AB17EE9632B}" type="slidenum">
-              <a:rPr lang="en-US" noProof="1" dirty="0" smtClean="0"/>
-              <a:t>38</a:t>
-            </a:fld>
-            <a:endParaRPr lang="en-US" noProof="1"/>
-          </a:p>
-        </p:txBody>
-      </p:sp>
-    </p:spTree>
-    <p:extLst>
-      <p:ext uri="{BB962C8B-B14F-4D97-AF65-F5344CB8AC3E}">
-        <p14:creationId xmlns:p14="http://schemas.microsoft.com/office/powerpoint/2010/main" val="1450241943"/>
-      </p:ext>
-    </p:extLst>
-  </p:cSld>
-  <p:clrMapOvr>
-    <a:masterClrMapping/>
-  </p:clrMapOvr>
-</p:sld>
-</file>
-
-<file path=ppt/slides/slide39.xml><?xml version="1.0" encoding="utf-8"?>
-<p:sld xmlns:a="http://schemas.openxmlformats.org/drawingml/2006/main" xmlns:r="http://schemas.openxmlformats.org/officeDocument/2006/relationships" xmlns:p="http://schemas.openxmlformats.org/presentationml/2006/main" show="0">
-  <p:cSld>
-    <p:spTree>
-      <p:nvGrpSpPr>
-        <p:cNvPr id="1" name="">
-          <a:extLst>
-            <a:ext uri="{FF2B5EF4-FFF2-40B4-BE49-F238E27FC236}">
-              <a16:creationId xmlns:a16="http://schemas.microsoft.com/office/drawing/2014/main" id="{44B3143F-BC20-9451-F3B4-6D9E3EF14C9A}"/>
-            </a:ext>
-          </a:extLst>
-        </p:cNvPr>
-        <p:cNvGrpSpPr/>
-        <p:nvPr/>
-      </p:nvGrpSpPr>
-      <p:grpSpPr>
-        <a:xfrm>
-          <a:off x="0" y="0"/>
-          <a:ext cx="0" cy="0"/>
-          <a:chOff x="0" y="0"/>
-          <a:chExt cx="0" cy="0"/>
-        </a:xfrm>
-      </p:grpSpPr>
-      <p:sp>
-        <p:nvSpPr>
-          <p:cNvPr id="2" name="TextBox 1">
-            <a:extLst>
-              <a:ext uri="{FF2B5EF4-FFF2-40B4-BE49-F238E27FC236}">
-                <a16:creationId xmlns:a16="http://schemas.microsoft.com/office/drawing/2014/main" id="{C4B26212-FCF7-D816-5ADE-1389404BA7F2}"/>
-              </a:ext>
-            </a:extLst>
-          </p:cNvPr>
-          <p:cNvSpPr txBox="1"/>
-          <p:nvPr/>
-        </p:nvSpPr>
-        <p:spPr>
-          <a:xfrm>
-            <a:off x="469556" y="626071"/>
-            <a:ext cx="4572000" cy="523220"/>
-          </a:xfrm>
-          <a:prstGeom prst="rect">
-            <a:avLst/>
-          </a:prstGeom>
-          <a:noFill/>
-        </p:spPr>
-        <p:txBody>
-          <a:bodyPr wrap="square" rtlCol="0">
-            <a:spAutoFit/>
-          </a:bodyPr>
-          <a:lstStyle/>
-          <a:p>
-            <a:r>
-              <a:rPr lang="en-US" sz="2800" noProof="1">
-                <a:solidFill>
-                  <a:srgbClr val="002060"/>
-                </a:solidFill>
-              </a:rPr>
-              <a:t>Why3</a:t>
-            </a:r>
-            <a:endParaRPr lang="en-US" sz="2800" noProof="1"/>
-          </a:p>
-        </p:txBody>
-      </p:sp>
-      <p:sp>
-        <p:nvSpPr>
-          <p:cNvPr id="3" name="Slide Number Placeholder 2">
-            <a:extLst>
-              <a:ext uri="{FF2B5EF4-FFF2-40B4-BE49-F238E27FC236}">
-                <a16:creationId xmlns:a16="http://schemas.microsoft.com/office/drawing/2014/main" id="{3E38234B-8853-1DF1-F048-BFB6D3B4420F}"/>
-              </a:ext>
-            </a:extLst>
-          </p:cNvPr>
-          <p:cNvSpPr>
-            <a:spLocks noGrp="1"/>
-          </p:cNvSpPr>
-          <p:nvPr>
-            <p:ph type="sldNum" sz="quarter" idx="12"/>
-          </p:nvPr>
-        </p:nvSpPr>
-        <p:spPr/>
-        <p:txBody>
-          <a:bodyPr/>
-          <a:lstStyle/>
-          <a:p>
-            <a:fld id="{292A9FD8-515A-4698-9313-0AB17EE9632B}" type="slidenum">
-              <a:rPr lang="en-US" noProof="1" dirty="0" smtClean="0"/>
-              <a:t>39</a:t>
-            </a:fld>
-            <a:endParaRPr lang="en-US" noProof="1"/>
-          </a:p>
-        </p:txBody>
-      </p:sp>
-      <p:sp>
-        <p:nvSpPr>
-          <p:cNvPr id="4" name="TextBox 3">
-            <a:extLst>
-              <a:ext uri="{FF2B5EF4-FFF2-40B4-BE49-F238E27FC236}">
-                <a16:creationId xmlns:a16="http://schemas.microsoft.com/office/drawing/2014/main" id="{C49B67B2-AF0C-816F-9EDC-164D968E96C3}"/>
-              </a:ext>
-            </a:extLst>
-          </p:cNvPr>
-          <p:cNvSpPr txBox="1"/>
-          <p:nvPr/>
-        </p:nvSpPr>
-        <p:spPr>
-          <a:xfrm>
-            <a:off x="469556" y="1857106"/>
-            <a:ext cx="7710617" cy="2646878"/>
-          </a:xfrm>
-          <a:prstGeom prst="rect">
-            <a:avLst/>
-          </a:prstGeom>
-          <a:noFill/>
-        </p:spPr>
-        <p:txBody>
-          <a:bodyPr wrap="square" rtlCol="0">
-            <a:spAutoFit/>
-          </a:bodyPr>
-          <a:lstStyle/>
-          <a:p>
-            <a:pPr marL="342900" indent="-342900">
-              <a:buFont typeface="Arial" panose="020B0604020202020204" pitchFamily="34" charset="0"/>
-              <a:buChar char="•"/>
-            </a:pPr>
-            <a:r>
-              <a:rPr lang="en-US" sz="2400" noProof="1">
-                <a:solidFill>
-                  <a:srgbClr val="002060"/>
-                </a:solidFill>
-              </a:rPr>
-              <a:t>Open source deductive verification platform</a:t>
-            </a:r>
-          </a:p>
-          <a:p>
-            <a:pPr marL="342900" indent="-342900">
-              <a:buFont typeface="Arial" panose="020B0604020202020204" pitchFamily="34" charset="0"/>
-              <a:buChar char="•"/>
-            </a:pPr>
-            <a:r>
-              <a:rPr lang="en-US" sz="2400" noProof="1">
-                <a:solidFill>
-                  <a:srgbClr val="002060"/>
-                </a:solidFill>
-              </a:rPr>
-              <a:t>Establishes the bridge between the programmer and different types of theorem provers:</a:t>
-            </a:r>
-          </a:p>
-          <a:p>
-            <a:pPr marL="800100" lvl="1" indent="-342900">
-              <a:buFont typeface="Wingdings" panose="05000000000000000000" pitchFamily="2" charset="2"/>
-              <a:buChar char="Ø"/>
-            </a:pPr>
-            <a:r>
-              <a:rPr lang="en-US" sz="2400" noProof="1">
-                <a:solidFill>
-                  <a:srgbClr val="002060"/>
-                </a:solidFill>
-              </a:rPr>
-              <a:t>SMT solvers (Z3, cvc5, Alt-Ergo…)</a:t>
-            </a:r>
-          </a:p>
-          <a:p>
-            <a:pPr marL="800100" lvl="1" indent="-342900">
-              <a:buFont typeface="Wingdings" panose="05000000000000000000" pitchFamily="2" charset="2"/>
-              <a:buChar char="Ø"/>
-            </a:pPr>
-            <a:r>
-              <a:rPr lang="en-US" sz="2400" noProof="1">
-                <a:solidFill>
-                  <a:srgbClr val="002060"/>
-                </a:solidFill>
-              </a:rPr>
-              <a:t>Interactive proof assistants (Coq, Isabelle…)</a:t>
-            </a:r>
-          </a:p>
-          <a:p>
-            <a:pPr marL="800100" lvl="1" indent="-342900">
-              <a:buFont typeface="Wingdings" panose="05000000000000000000" pitchFamily="2" charset="2"/>
-              <a:buChar char="Ø"/>
-            </a:pPr>
-            <a:r>
-              <a:rPr lang="en-US" sz="2400" noProof="1">
-                <a:solidFill>
-                  <a:srgbClr val="002060"/>
-                </a:solidFill>
-              </a:rPr>
-              <a:t>TPTP provers (Vampire, E…)</a:t>
-            </a:r>
-          </a:p>
-          <a:p>
-            <a:endParaRPr lang="en-US" sz="2200" noProof="1">
-              <a:solidFill>
-                <a:srgbClr val="002060"/>
-              </a:solidFill>
-            </a:endParaRPr>
-          </a:p>
-        </p:txBody>
-      </p:sp>
-    </p:spTree>
-    <p:extLst>
-      <p:ext uri="{BB962C8B-B14F-4D97-AF65-F5344CB8AC3E}">
-        <p14:creationId xmlns:p14="http://schemas.microsoft.com/office/powerpoint/2010/main" val="3776110183"/>
       </p:ext>
     </p:extLst>
   </p:cSld>
@@ -13802,6 +13505,580 @@
         <p:cNvPr id="1" name="">
           <a:extLst>
             <a:ext uri="{FF2B5EF4-FFF2-40B4-BE49-F238E27FC236}">
+              <a16:creationId xmlns:a16="http://schemas.microsoft.com/office/drawing/2014/main" id="{FCF8EE8F-22A6-F1D4-FBBB-BCC8F7947E63}"/>
+            </a:ext>
+          </a:extLst>
+        </p:cNvPr>
+        <p:cNvGrpSpPr/>
+        <p:nvPr/>
+      </p:nvGrpSpPr>
+      <p:grpSpPr>
+        <a:xfrm>
+          <a:off x="0" y="0"/>
+          <a:ext cx="0" cy="0"/>
+          <a:chOff x="0" y="0"/>
+          <a:chExt cx="0" cy="0"/>
+        </a:xfrm>
+      </p:grpSpPr>
+      <p:sp>
+        <p:nvSpPr>
+          <p:cNvPr id="2" name="TextBox 1">
+            <a:extLst>
+              <a:ext uri="{FF2B5EF4-FFF2-40B4-BE49-F238E27FC236}">
+                <a16:creationId xmlns:a16="http://schemas.microsoft.com/office/drawing/2014/main" id="{7B6E19D4-30CF-86A0-73E1-139F833182D9}"/>
+              </a:ext>
+            </a:extLst>
+          </p:cNvPr>
+          <p:cNvSpPr txBox="1"/>
+          <p:nvPr/>
+        </p:nvSpPr>
+        <p:spPr>
+          <a:xfrm>
+            <a:off x="469556" y="626071"/>
+            <a:ext cx="4572000" cy="523220"/>
+          </a:xfrm>
+          <a:prstGeom prst="rect">
+            <a:avLst/>
+          </a:prstGeom>
+          <a:noFill/>
+        </p:spPr>
+        <p:txBody>
+          <a:bodyPr wrap="square" rtlCol="0">
+            <a:spAutoFit/>
+          </a:bodyPr>
+          <a:lstStyle/>
+          <a:p>
+            <a:r>
+              <a:rPr lang="en-US" sz="2800" noProof="1">
+                <a:solidFill>
+                  <a:srgbClr val="002060"/>
+                </a:solidFill>
+              </a:rPr>
+              <a:t>Ocaml (2/2)</a:t>
+            </a:r>
+            <a:endParaRPr lang="en-US" sz="2800" noProof="1"/>
+          </a:p>
+        </p:txBody>
+      </p:sp>
+      <p:sp>
+        <p:nvSpPr>
+          <p:cNvPr id="4" name="TextBox 3">
+            <a:extLst>
+              <a:ext uri="{FF2B5EF4-FFF2-40B4-BE49-F238E27FC236}">
+                <a16:creationId xmlns:a16="http://schemas.microsoft.com/office/drawing/2014/main" id="{FA91A7A2-7DB7-9936-26EC-F405DD78909E}"/>
+              </a:ext>
+            </a:extLst>
+          </p:cNvPr>
+          <p:cNvSpPr txBox="1"/>
+          <p:nvPr/>
+        </p:nvSpPr>
+        <p:spPr>
+          <a:xfrm>
+            <a:off x="469556" y="2491518"/>
+            <a:ext cx="4394887" cy="1107996"/>
+          </a:xfrm>
+          <a:prstGeom prst="rect">
+            <a:avLst/>
+          </a:prstGeom>
+          <a:noFill/>
+        </p:spPr>
+        <p:txBody>
+          <a:bodyPr wrap="square" rtlCol="0">
+            <a:spAutoFit/>
+          </a:bodyPr>
+          <a:lstStyle/>
+          <a:p>
+            <a:r>
+              <a:rPr lang="en-US" sz="2200" noProof="1">
+                <a:solidFill>
+                  <a:srgbClr val="002060"/>
+                </a:solidFill>
+              </a:rPr>
+              <a:t>let rec gcd (a: int) (b:int) : int =</a:t>
+            </a:r>
+          </a:p>
+          <a:p>
+            <a:r>
+              <a:rPr lang="en-US" sz="2200" noProof="1">
+                <a:solidFill>
+                  <a:srgbClr val="002060"/>
+                </a:solidFill>
+              </a:rPr>
+              <a:t>   if b = 0 then a</a:t>
+            </a:r>
+          </a:p>
+          <a:p>
+            <a:r>
+              <a:rPr lang="en-US" sz="2200" noProof="1">
+                <a:solidFill>
+                  <a:srgbClr val="002060"/>
+                </a:solidFill>
+              </a:rPr>
+              <a:t>   else gcd b (mod a b)</a:t>
+            </a:r>
+          </a:p>
+        </p:txBody>
+      </p:sp>
+      <p:sp>
+        <p:nvSpPr>
+          <p:cNvPr id="5" name="TextBox 4">
+            <a:extLst>
+              <a:ext uri="{FF2B5EF4-FFF2-40B4-BE49-F238E27FC236}">
+                <a16:creationId xmlns:a16="http://schemas.microsoft.com/office/drawing/2014/main" id="{1ECEEEF9-24CA-62A0-4225-AB0A6AC0D0E4}"/>
+              </a:ext>
+            </a:extLst>
+          </p:cNvPr>
+          <p:cNvSpPr txBox="1"/>
+          <p:nvPr/>
+        </p:nvSpPr>
+        <p:spPr>
+          <a:xfrm>
+            <a:off x="4572000" y="1900043"/>
+            <a:ext cx="4394887" cy="3139321"/>
+          </a:xfrm>
+          <a:prstGeom prst="rect">
+            <a:avLst/>
+          </a:prstGeom>
+          <a:noFill/>
+        </p:spPr>
+        <p:txBody>
+          <a:bodyPr wrap="square" rtlCol="0">
+            <a:spAutoFit/>
+          </a:bodyPr>
+          <a:lstStyle/>
+          <a:p>
+            <a:r>
+              <a:rPr lang="en-US" sz="2200" noProof="1">
+                <a:solidFill>
+                  <a:srgbClr val="002060"/>
+                </a:solidFill>
+              </a:rPr>
+              <a:t>let gcd_iter (a0: int) (b0: int) : int =   </a:t>
+            </a:r>
+          </a:p>
+          <a:p>
+            <a:r>
+              <a:rPr lang="en-US" sz="2200" noProof="1">
+                <a:solidFill>
+                  <a:srgbClr val="002060"/>
+                </a:solidFill>
+              </a:rPr>
+              <a:t>      let b = ref b0 in</a:t>
+            </a:r>
+          </a:p>
+          <a:p>
+            <a:r>
+              <a:rPr lang="en-US" sz="2200" noProof="1">
+                <a:solidFill>
+                  <a:srgbClr val="002060"/>
+                </a:solidFill>
+              </a:rPr>
+              <a:t>      let a = ref a0 in</a:t>
+            </a:r>
+          </a:p>
+          <a:p>
+            <a:r>
+              <a:rPr lang="en-US" sz="2200" noProof="1">
+                <a:solidFill>
+                  <a:srgbClr val="002060"/>
+                </a:solidFill>
+              </a:rPr>
+              <a:t>      while !b &lt;&gt; 0 do</a:t>
+            </a:r>
+          </a:p>
+          <a:p>
+            <a:r>
+              <a:rPr lang="en-US" sz="2200" noProof="1">
+                <a:solidFill>
+                  <a:srgbClr val="002060"/>
+                </a:solidFill>
+              </a:rPr>
+              <a:t>          let tmp = !a in</a:t>
+            </a:r>
+          </a:p>
+          <a:p>
+            <a:r>
+              <a:rPr lang="en-US" sz="2200" noProof="1">
+                <a:solidFill>
+                  <a:srgbClr val="002060"/>
+                </a:solidFill>
+              </a:rPr>
+              <a:t>          a := !b;</a:t>
+            </a:r>
+          </a:p>
+          <a:p>
+            <a:r>
+              <a:rPr lang="en-US" sz="2200" noProof="1">
+                <a:solidFill>
+                  <a:srgbClr val="002060"/>
+                </a:solidFill>
+              </a:rPr>
+              <a:t>          b := tmp mod !b</a:t>
+            </a:r>
+          </a:p>
+          <a:p>
+            <a:r>
+              <a:rPr lang="en-US" sz="2200" noProof="1">
+                <a:solidFill>
+                  <a:srgbClr val="002060"/>
+                </a:solidFill>
+              </a:rPr>
+              <a:t>      done;</a:t>
+            </a:r>
+          </a:p>
+          <a:p>
+            <a:r>
+              <a:rPr lang="en-US" sz="2200" noProof="1">
+                <a:solidFill>
+                  <a:srgbClr val="002060"/>
+                </a:solidFill>
+              </a:rPr>
+              <a:t>      !a</a:t>
+            </a:r>
+          </a:p>
+        </p:txBody>
+      </p:sp>
+      <p:sp>
+        <p:nvSpPr>
+          <p:cNvPr id="6" name="TextBox 5">
+            <a:extLst>
+              <a:ext uri="{FF2B5EF4-FFF2-40B4-BE49-F238E27FC236}">
+                <a16:creationId xmlns:a16="http://schemas.microsoft.com/office/drawing/2014/main" id="{C217E93C-AEE3-2272-5E9C-219FFD409691}"/>
+              </a:ext>
+            </a:extLst>
+          </p:cNvPr>
+          <p:cNvSpPr txBox="1"/>
+          <p:nvPr/>
+        </p:nvSpPr>
+        <p:spPr>
+          <a:xfrm>
+            <a:off x="5576500" y="1211561"/>
+            <a:ext cx="1762899" cy="430887"/>
+          </a:xfrm>
+          <a:prstGeom prst="rect">
+            <a:avLst/>
+          </a:prstGeom>
+          <a:noFill/>
+        </p:spPr>
+        <p:txBody>
+          <a:bodyPr wrap="square" rtlCol="0">
+            <a:spAutoFit/>
+          </a:bodyPr>
+          <a:lstStyle/>
+          <a:p>
+            <a:pPr algn="ctr"/>
+            <a:r>
+              <a:rPr lang="en-US" sz="2200" b="1" noProof="1">
+                <a:solidFill>
+                  <a:srgbClr val="002060"/>
+                </a:solidFill>
+              </a:rPr>
+              <a:t>Imperative</a:t>
+            </a:r>
+          </a:p>
+        </p:txBody>
+      </p:sp>
+      <p:sp>
+        <p:nvSpPr>
+          <p:cNvPr id="7" name="TextBox 6">
+            <a:extLst>
+              <a:ext uri="{FF2B5EF4-FFF2-40B4-BE49-F238E27FC236}">
+                <a16:creationId xmlns:a16="http://schemas.microsoft.com/office/drawing/2014/main" id="{7226EC03-05AA-307E-2F02-421AA59FED2C}"/>
+              </a:ext>
+            </a:extLst>
+          </p:cNvPr>
+          <p:cNvSpPr txBox="1"/>
+          <p:nvPr/>
+        </p:nvSpPr>
+        <p:spPr>
+          <a:xfrm>
+            <a:off x="1297458" y="1881534"/>
+            <a:ext cx="1762899" cy="430887"/>
+          </a:xfrm>
+          <a:prstGeom prst="rect">
+            <a:avLst/>
+          </a:prstGeom>
+          <a:noFill/>
+        </p:spPr>
+        <p:txBody>
+          <a:bodyPr wrap="square" rtlCol="0">
+            <a:spAutoFit/>
+          </a:bodyPr>
+          <a:lstStyle/>
+          <a:p>
+            <a:pPr algn="ctr"/>
+            <a:r>
+              <a:rPr lang="en-US" sz="2200" b="1" noProof="1">
+                <a:solidFill>
+                  <a:srgbClr val="002060"/>
+                </a:solidFill>
+              </a:rPr>
+              <a:t>Functional</a:t>
+            </a:r>
+          </a:p>
+        </p:txBody>
+      </p:sp>
+      <p:sp>
+        <p:nvSpPr>
+          <p:cNvPr id="8" name="Slide Number Placeholder 7">
+            <a:extLst>
+              <a:ext uri="{FF2B5EF4-FFF2-40B4-BE49-F238E27FC236}">
+                <a16:creationId xmlns:a16="http://schemas.microsoft.com/office/drawing/2014/main" id="{1CF94898-EF21-D9A6-C498-CE061B5AD95E}"/>
+              </a:ext>
+            </a:extLst>
+          </p:cNvPr>
+          <p:cNvSpPr>
+            <a:spLocks noGrp="1"/>
+          </p:cNvSpPr>
+          <p:nvPr>
+            <p:ph type="sldNum" sz="quarter" idx="12"/>
+          </p:nvPr>
+        </p:nvSpPr>
+        <p:spPr/>
+        <p:txBody>
+          <a:bodyPr/>
+          <a:lstStyle/>
+          <a:p>
+            <a:fld id="{292A9FD8-515A-4698-9313-0AB17EE9632B}" type="slidenum">
+              <a:rPr lang="en-US" noProof="1" dirty="0" smtClean="0"/>
+              <a:t>40</a:t>
+            </a:fld>
+            <a:endParaRPr lang="en-US" noProof="1"/>
+          </a:p>
+        </p:txBody>
+      </p:sp>
+    </p:spTree>
+    <p:extLst>
+      <p:ext uri="{BB962C8B-B14F-4D97-AF65-F5344CB8AC3E}">
+        <p14:creationId xmlns:p14="http://schemas.microsoft.com/office/powerpoint/2010/main" val="1450241943"/>
+      </p:ext>
+    </p:extLst>
+  </p:cSld>
+  <p:clrMapOvr>
+    <a:masterClrMapping/>
+  </p:clrMapOvr>
+</p:sld>
+</file>
+
+<file path=ppt/slides/slide41.xml><?xml version="1.0" encoding="utf-8"?>
+<p:sld xmlns:a="http://schemas.openxmlformats.org/drawingml/2006/main" xmlns:r="http://schemas.openxmlformats.org/officeDocument/2006/relationships" xmlns:p="http://schemas.openxmlformats.org/presentationml/2006/main" show="0">
+  <p:cSld>
+    <p:spTree>
+      <p:nvGrpSpPr>
+        <p:cNvPr id="1" name="">
+          <a:extLst>
+            <a:ext uri="{FF2B5EF4-FFF2-40B4-BE49-F238E27FC236}">
+              <a16:creationId xmlns:a16="http://schemas.microsoft.com/office/drawing/2014/main" id="{44B3143F-BC20-9451-F3B4-6D9E3EF14C9A}"/>
+            </a:ext>
+          </a:extLst>
+        </p:cNvPr>
+        <p:cNvGrpSpPr/>
+        <p:nvPr/>
+      </p:nvGrpSpPr>
+      <p:grpSpPr>
+        <a:xfrm>
+          <a:off x="0" y="0"/>
+          <a:ext cx="0" cy="0"/>
+          <a:chOff x="0" y="0"/>
+          <a:chExt cx="0" cy="0"/>
+        </a:xfrm>
+      </p:grpSpPr>
+      <p:sp>
+        <p:nvSpPr>
+          <p:cNvPr id="2" name="TextBox 1">
+            <a:extLst>
+              <a:ext uri="{FF2B5EF4-FFF2-40B4-BE49-F238E27FC236}">
+                <a16:creationId xmlns:a16="http://schemas.microsoft.com/office/drawing/2014/main" id="{C4B26212-FCF7-D816-5ADE-1389404BA7F2}"/>
+              </a:ext>
+            </a:extLst>
+          </p:cNvPr>
+          <p:cNvSpPr txBox="1"/>
+          <p:nvPr/>
+        </p:nvSpPr>
+        <p:spPr>
+          <a:xfrm>
+            <a:off x="469556" y="626071"/>
+            <a:ext cx="4572000" cy="523220"/>
+          </a:xfrm>
+          <a:prstGeom prst="rect">
+            <a:avLst/>
+          </a:prstGeom>
+          <a:noFill/>
+        </p:spPr>
+        <p:txBody>
+          <a:bodyPr wrap="square" rtlCol="0">
+            <a:spAutoFit/>
+          </a:bodyPr>
+          <a:lstStyle/>
+          <a:p>
+            <a:r>
+              <a:rPr lang="en-US" sz="2800" noProof="1">
+                <a:solidFill>
+                  <a:srgbClr val="002060"/>
+                </a:solidFill>
+              </a:rPr>
+              <a:t>Why3</a:t>
+            </a:r>
+            <a:endParaRPr lang="en-US" sz="2800" noProof="1"/>
+          </a:p>
+        </p:txBody>
+      </p:sp>
+      <p:sp>
+        <p:nvSpPr>
+          <p:cNvPr id="3" name="Slide Number Placeholder 2">
+            <a:extLst>
+              <a:ext uri="{FF2B5EF4-FFF2-40B4-BE49-F238E27FC236}">
+                <a16:creationId xmlns:a16="http://schemas.microsoft.com/office/drawing/2014/main" id="{3E38234B-8853-1DF1-F048-BFB6D3B4420F}"/>
+              </a:ext>
+            </a:extLst>
+          </p:cNvPr>
+          <p:cNvSpPr>
+            <a:spLocks noGrp="1"/>
+          </p:cNvSpPr>
+          <p:nvPr>
+            <p:ph type="sldNum" sz="quarter" idx="12"/>
+          </p:nvPr>
+        </p:nvSpPr>
+        <p:spPr/>
+        <p:txBody>
+          <a:bodyPr/>
+          <a:lstStyle/>
+          <a:p>
+            <a:fld id="{292A9FD8-515A-4698-9313-0AB17EE9632B}" type="slidenum">
+              <a:rPr lang="en-US" noProof="1" dirty="0" smtClean="0"/>
+              <a:t>41</a:t>
+            </a:fld>
+            <a:endParaRPr lang="en-US" noProof="1"/>
+          </a:p>
+        </p:txBody>
+      </p:sp>
+      <p:sp>
+        <p:nvSpPr>
+          <p:cNvPr id="4" name="TextBox 3">
+            <a:extLst>
+              <a:ext uri="{FF2B5EF4-FFF2-40B4-BE49-F238E27FC236}">
+                <a16:creationId xmlns:a16="http://schemas.microsoft.com/office/drawing/2014/main" id="{C49B67B2-AF0C-816F-9EDC-164D968E96C3}"/>
+              </a:ext>
+            </a:extLst>
+          </p:cNvPr>
+          <p:cNvSpPr txBox="1"/>
+          <p:nvPr/>
+        </p:nvSpPr>
+        <p:spPr>
+          <a:xfrm>
+            <a:off x="469556" y="1857106"/>
+            <a:ext cx="7710617" cy="2646878"/>
+          </a:xfrm>
+          <a:prstGeom prst="rect">
+            <a:avLst/>
+          </a:prstGeom>
+          <a:noFill/>
+        </p:spPr>
+        <p:txBody>
+          <a:bodyPr wrap="square" rtlCol="0">
+            <a:spAutoFit/>
+          </a:bodyPr>
+          <a:lstStyle/>
+          <a:p>
+            <a:pPr marL="342900" indent="-342900">
+              <a:buFont typeface="Arial" panose="020B0604020202020204" pitchFamily="34" charset="0"/>
+              <a:buChar char="•"/>
+            </a:pPr>
+            <a:r>
+              <a:rPr lang="en-US" sz="2400" noProof="1">
+                <a:solidFill>
+                  <a:srgbClr val="002060"/>
+                </a:solidFill>
+              </a:rPr>
+              <a:t>Open source deductive verification platform</a:t>
+            </a:r>
+          </a:p>
+          <a:p>
+            <a:pPr marL="342900" indent="-342900">
+              <a:buFont typeface="Arial" panose="020B0604020202020204" pitchFamily="34" charset="0"/>
+              <a:buChar char="•"/>
+            </a:pPr>
+            <a:r>
+              <a:rPr lang="en-US" sz="2400" noProof="1">
+                <a:solidFill>
+                  <a:srgbClr val="002060"/>
+                </a:solidFill>
+              </a:rPr>
+              <a:t>Establishes the bridge between the programmer and different types of theorem provers:</a:t>
+            </a:r>
+          </a:p>
+          <a:p>
+            <a:pPr marL="800100" lvl="1" indent="-342900">
+              <a:buFont typeface="Wingdings" panose="05000000000000000000" pitchFamily="2" charset="2"/>
+              <a:buChar char="Ø"/>
+            </a:pPr>
+            <a:r>
+              <a:rPr lang="en-US" sz="2400" noProof="1">
+                <a:solidFill>
+                  <a:srgbClr val="002060"/>
+                </a:solidFill>
+              </a:rPr>
+              <a:t>SMT solvers (Z3, cvc5, Alt-Ergo…)</a:t>
+            </a:r>
+          </a:p>
+          <a:p>
+            <a:pPr marL="800100" lvl="1" indent="-342900">
+              <a:buFont typeface="Wingdings" panose="05000000000000000000" pitchFamily="2" charset="2"/>
+              <a:buChar char="Ø"/>
+            </a:pPr>
+            <a:r>
+              <a:rPr lang="en-US" sz="2400" noProof="1">
+                <a:solidFill>
+                  <a:srgbClr val="002060"/>
+                </a:solidFill>
+              </a:rPr>
+              <a:t>Interactive proof assistants (Coq, Isabelle…)</a:t>
+            </a:r>
+          </a:p>
+          <a:p>
+            <a:pPr marL="800100" lvl="1" indent="-342900">
+              <a:buFont typeface="Wingdings" panose="05000000000000000000" pitchFamily="2" charset="2"/>
+              <a:buChar char="Ø"/>
+            </a:pPr>
+            <a:r>
+              <a:rPr lang="en-US" sz="2400" noProof="1">
+                <a:solidFill>
+                  <a:srgbClr val="002060"/>
+                </a:solidFill>
+              </a:rPr>
+              <a:t>TPTP provers (Vampire, E…)</a:t>
+            </a:r>
+          </a:p>
+          <a:p>
+            <a:endParaRPr lang="en-US" sz="2200" noProof="1">
+              <a:solidFill>
+                <a:srgbClr val="002060"/>
+              </a:solidFill>
+            </a:endParaRPr>
+          </a:p>
+        </p:txBody>
+      </p:sp>
+    </p:spTree>
+    <p:extLst>
+      <p:ext uri="{BB962C8B-B14F-4D97-AF65-F5344CB8AC3E}">
+        <p14:creationId xmlns:p14="http://schemas.microsoft.com/office/powerpoint/2010/main" val="3776110183"/>
+      </p:ext>
+    </p:extLst>
+  </p:cSld>
+  <p:clrMapOvr>
+    <a:masterClrMapping/>
+  </p:clrMapOvr>
+</p:sld>
+</file>
+
+<file path=ppt/slides/slide42.xml><?xml version="1.0" encoding="utf-8"?>
+<p:sld xmlns:a="http://schemas.openxmlformats.org/drawingml/2006/main" xmlns:r="http://schemas.openxmlformats.org/officeDocument/2006/relationships" xmlns:p="http://schemas.openxmlformats.org/presentationml/2006/main" show="0">
+  <p:cSld>
+    <p:spTree>
+      <p:nvGrpSpPr>
+        <p:cNvPr id="1" name="">
+          <a:extLst>
+            <a:ext uri="{FF2B5EF4-FFF2-40B4-BE49-F238E27FC236}">
               <a16:creationId xmlns:a16="http://schemas.microsoft.com/office/drawing/2014/main" id="{8127E46C-B7E3-BC72-C1D0-B12AEC6C989E}"/>
             </a:ext>
           </a:extLst>
@@ -13880,7 +14157,7 @@
           <a:p>
             <a:fld id="{292A9FD8-515A-4698-9313-0AB17EE9632B}" type="slidenum">
               <a:rPr lang="en-US" noProof="1" dirty="0" smtClean="0"/>
-              <a:t>40</a:t>
+              <a:t>42</a:t>
             </a:fld>
             <a:endParaRPr lang="en-US" noProof="1"/>
           </a:p>
@@ -13984,7 +14261,7 @@
 </p:sld>
 </file>
 
-<file path=ppt/slides/slide41.xml><?xml version="1.0" encoding="utf-8"?>
+<file path=ppt/slides/slide43.xml><?xml version="1.0" encoding="utf-8"?>
 <p:sld xmlns:a="http://schemas.openxmlformats.org/drawingml/2006/main" xmlns:r="http://schemas.openxmlformats.org/officeDocument/2006/relationships" xmlns:p="http://schemas.openxmlformats.org/presentationml/2006/main" show="0">
   <p:cSld>
     <p:spTree>
@@ -14070,7 +14347,7 @@
           <a:p>
             <a:fld id="{292A9FD8-515A-4698-9313-0AB17EE9632B}" type="slidenum">
               <a:rPr lang="en-US" noProof="1" dirty="0" smtClean="0"/>
-              <a:t>41</a:t>
+              <a:t>43</a:t>
             </a:fld>
             <a:endParaRPr lang="en-US" noProof="1"/>
           </a:p>
@@ -14160,7 +14437,7 @@
 </p:sld>
 </file>
 
-<file path=ppt/slides/slide42.xml><?xml version="1.0" encoding="utf-8"?>
+<file path=ppt/slides/slide44.xml><?xml version="1.0" encoding="utf-8"?>
 <p:sld xmlns:a="http://schemas.openxmlformats.org/drawingml/2006/main" xmlns:r="http://schemas.openxmlformats.org/officeDocument/2006/relationships" xmlns:p="http://schemas.openxmlformats.org/presentationml/2006/main" show="0">
   <p:cSld>
     <p:spTree>
@@ -14247,7 +14524,7 @@
           <a:p>
             <a:fld id="{292A9FD8-515A-4698-9313-0AB17EE9632B}" type="slidenum">
               <a:rPr lang="en-US" noProof="1" dirty="0" smtClean="0"/>
-              <a:t>42</a:t>
+              <a:t>44</a:t>
             </a:fld>
             <a:endParaRPr lang="en-US" noProof="1"/>
           </a:p>
@@ -14266,7 +14543,7 @@
 </p:sld>
 </file>
 
-<file path=ppt/slides/slide43.xml><?xml version="1.0" encoding="utf-8"?>
+<file path=ppt/slides/slide45.xml><?xml version="1.0" encoding="utf-8"?>
 <p:sld xmlns:a="http://schemas.openxmlformats.org/drawingml/2006/main" xmlns:r="http://schemas.openxmlformats.org/officeDocument/2006/relationships" xmlns:p="http://schemas.openxmlformats.org/presentationml/2006/main" show="0">
   <p:cSld>
     <p:spTree>
@@ -14352,7 +14629,7 @@
           <a:p>
             <a:fld id="{292A9FD8-515A-4698-9313-0AB17EE9632B}" type="slidenum">
               <a:rPr lang="en-US" noProof="1" dirty="0" smtClean="0"/>
-              <a:t>43</a:t>
+              <a:t>45</a:t>
             </a:fld>
             <a:endParaRPr lang="en-US" noProof="1"/>
           </a:p>
@@ -14442,7 +14719,7 @@
 </p:sld>
 </file>
 
-<file path=ppt/slides/slide44.xml><?xml version="1.0" encoding="utf-8"?>
+<file path=ppt/slides/slide46.xml><?xml version="1.0" encoding="utf-8"?>
 <p:sld xmlns:a="http://schemas.openxmlformats.org/drawingml/2006/main" xmlns:r="http://schemas.openxmlformats.org/officeDocument/2006/relationships" xmlns:p="http://schemas.openxmlformats.org/presentationml/2006/main" show="0">
   <p:cSld>
     <p:spTree>
@@ -14528,7 +14805,7 @@
           <a:p>
             <a:fld id="{292A9FD8-515A-4698-9313-0AB17EE9632B}" type="slidenum">
               <a:rPr lang="en-US" noProof="1" dirty="0" smtClean="0"/>
-              <a:t>44</a:t>
+              <a:t>46</a:t>
             </a:fld>
             <a:endParaRPr lang="en-US" noProof="1"/>
           </a:p>
@@ -14618,7 +14895,7 @@
 </p:sld>
 </file>
 
-<file path=ppt/slides/slide45.xml><?xml version="1.0" encoding="utf-8"?>
+<file path=ppt/slides/slide47.xml><?xml version="1.0" encoding="utf-8"?>
 <p:sld xmlns:a="http://schemas.openxmlformats.org/drawingml/2006/main" xmlns:r="http://schemas.openxmlformats.org/officeDocument/2006/relationships" xmlns:p="http://schemas.openxmlformats.org/presentationml/2006/main" show="0">
   <p:cSld>
     <p:spTree>
@@ -14704,7 +14981,7 @@
           <a:p>
             <a:fld id="{292A9FD8-515A-4698-9313-0AB17EE9632B}" type="slidenum">
               <a:rPr lang="en-US" noProof="1" dirty="0" smtClean="0"/>
-              <a:t>45</a:t>
+              <a:t>47</a:t>
             </a:fld>
             <a:endParaRPr lang="en-US" noProof="1"/>
           </a:p>
@@ -14844,7 +15121,7 @@
 </p:sld>
 </file>
 
-<file path=ppt/slides/slide46.xml><?xml version="1.0" encoding="utf-8"?>
+<file path=ppt/slides/slide48.xml><?xml version="1.0" encoding="utf-8"?>
 <p:sld xmlns:a="http://schemas.openxmlformats.org/drawingml/2006/main" xmlns:r="http://schemas.openxmlformats.org/officeDocument/2006/relationships" xmlns:p="http://schemas.openxmlformats.org/presentationml/2006/main" show="0">
   <p:cSld>
     <p:spTree>
@@ -14942,7 +15219,7 @@
           <a:p>
             <a:fld id="{292A9FD8-515A-4698-9313-0AB17EE9632B}" type="slidenum">
               <a:rPr lang="en-US" noProof="1" dirty="0" smtClean="0"/>
-              <a:t>46</a:t>
+              <a:t>48</a:t>
             </a:fld>
             <a:endParaRPr lang="en-US" noProof="1"/>
           </a:p>
@@ -15299,7 +15576,7 @@
 </p:sld>
 </file>
 
-<file path=ppt/slides/slide47.xml><?xml version="1.0" encoding="utf-8"?>
+<file path=ppt/slides/slide49.xml><?xml version="1.0" encoding="utf-8"?>
 <p:sld xmlns:a="http://schemas.openxmlformats.org/drawingml/2006/main" xmlns:r="http://schemas.openxmlformats.org/officeDocument/2006/relationships" xmlns:p="http://schemas.openxmlformats.org/presentationml/2006/main" show="0">
   <p:cSld>
     <p:spTree>
@@ -15385,7 +15662,7 @@
           <a:p>
             <a:fld id="{292A9FD8-515A-4698-9313-0AB17EE9632B}" type="slidenum">
               <a:rPr lang="en-US" noProof="1" dirty="0" smtClean="0"/>
-              <a:t>47</a:t>
+              <a:t>49</a:t>
             </a:fld>
             <a:endParaRPr lang="en-US" noProof="1"/>
           </a:p>
@@ -15653,539 +15930,6 @@
     <p:extLst>
       <p:ext uri="{BB962C8B-B14F-4D97-AF65-F5344CB8AC3E}">
         <p14:creationId xmlns:p14="http://schemas.microsoft.com/office/powerpoint/2010/main" val="1264839467"/>
-      </p:ext>
-    </p:extLst>
-  </p:cSld>
-  <p:clrMapOvr>
-    <a:masterClrMapping/>
-  </p:clrMapOvr>
-</p:sld>
-</file>
-
-<file path=ppt/slides/slide48.xml><?xml version="1.0" encoding="utf-8"?>
-<p:sld xmlns:a="http://schemas.openxmlformats.org/drawingml/2006/main" xmlns:r="http://schemas.openxmlformats.org/officeDocument/2006/relationships" xmlns:p="http://schemas.openxmlformats.org/presentationml/2006/main" show="0">
-  <p:cSld>
-    <p:spTree>
-      <p:nvGrpSpPr>
-        <p:cNvPr id="1" name="">
-          <a:extLst>
-            <a:ext uri="{FF2B5EF4-FFF2-40B4-BE49-F238E27FC236}">
-              <a16:creationId xmlns:a16="http://schemas.microsoft.com/office/drawing/2014/main" id="{34BB6573-AE68-E606-5028-F477F5DCABAB}"/>
-            </a:ext>
-          </a:extLst>
-        </p:cNvPr>
-        <p:cNvGrpSpPr/>
-        <p:nvPr/>
-      </p:nvGrpSpPr>
-      <p:grpSpPr>
-        <a:xfrm>
-          <a:off x="0" y="0"/>
-          <a:ext cx="0" cy="0"/>
-          <a:chOff x="0" y="0"/>
-          <a:chExt cx="0" cy="0"/>
-        </a:xfrm>
-      </p:grpSpPr>
-      <p:sp>
-        <p:nvSpPr>
-          <p:cNvPr id="2" name="TextBox 1">
-            <a:extLst>
-              <a:ext uri="{FF2B5EF4-FFF2-40B4-BE49-F238E27FC236}">
-                <a16:creationId xmlns:a16="http://schemas.microsoft.com/office/drawing/2014/main" id="{BAD11615-3F81-E543-EE9B-3433E85F0FD7}"/>
-              </a:ext>
-            </a:extLst>
-          </p:cNvPr>
-          <p:cNvSpPr txBox="1"/>
-          <p:nvPr/>
-        </p:nvSpPr>
-        <p:spPr>
-          <a:xfrm>
-            <a:off x="1190368" y="2026503"/>
-            <a:ext cx="6763264" cy="830997"/>
-          </a:xfrm>
-          <a:prstGeom prst="rect">
-            <a:avLst/>
-          </a:prstGeom>
-          <a:noFill/>
-        </p:spPr>
-        <p:txBody>
-          <a:bodyPr wrap="square" rtlCol="0">
-            <a:spAutoFit/>
-          </a:bodyPr>
-          <a:lstStyle/>
-          <a:p>
-            <a:pPr algn="ctr"/>
-            <a:r>
-              <a:rPr lang="en-US" sz="4800" noProof="1">
-                <a:solidFill>
-                  <a:srgbClr val="002060"/>
-                </a:solidFill>
-              </a:rPr>
-              <a:t>Preliminary Results</a:t>
-            </a:r>
-            <a:endParaRPr lang="en-US" sz="4800" noProof="1"/>
-          </a:p>
-        </p:txBody>
-      </p:sp>
-      <p:sp>
-        <p:nvSpPr>
-          <p:cNvPr id="3" name="Slide Number Placeholder 2">
-            <a:extLst>
-              <a:ext uri="{FF2B5EF4-FFF2-40B4-BE49-F238E27FC236}">
-                <a16:creationId xmlns:a16="http://schemas.microsoft.com/office/drawing/2014/main" id="{CCC4028F-0FBD-78C7-E826-C6832D4221AB}"/>
-              </a:ext>
-            </a:extLst>
-          </p:cNvPr>
-          <p:cNvSpPr>
-            <a:spLocks noGrp="1"/>
-          </p:cNvSpPr>
-          <p:nvPr>
-            <p:ph type="sldNum" sz="quarter" idx="12"/>
-          </p:nvPr>
-        </p:nvSpPr>
-        <p:spPr/>
-        <p:txBody>
-          <a:bodyPr/>
-          <a:lstStyle/>
-          <a:p>
-            <a:fld id="{292A9FD8-515A-4698-9313-0AB17EE9632B}" type="slidenum">
-              <a:rPr lang="en-US" noProof="1" dirty="0" smtClean="0"/>
-              <a:t>48</a:t>
-            </a:fld>
-            <a:endParaRPr lang="en-US" noProof="1"/>
-          </a:p>
-        </p:txBody>
-      </p:sp>
-    </p:spTree>
-    <p:extLst>
-      <p:ext uri="{BB962C8B-B14F-4D97-AF65-F5344CB8AC3E}">
-        <p14:creationId xmlns:p14="http://schemas.microsoft.com/office/powerpoint/2010/main" val="3181731804"/>
-      </p:ext>
-    </p:extLst>
-  </p:cSld>
-  <p:clrMapOvr>
-    <a:masterClrMapping/>
-  </p:clrMapOvr>
-</p:sld>
-</file>
-
-<file path=ppt/slides/slide49.xml><?xml version="1.0" encoding="utf-8"?>
-<p:sld xmlns:a="http://schemas.openxmlformats.org/drawingml/2006/main" xmlns:r="http://schemas.openxmlformats.org/officeDocument/2006/relationships" xmlns:p="http://schemas.openxmlformats.org/presentationml/2006/main" show="0">
-  <p:cSld>
-    <p:spTree>
-      <p:nvGrpSpPr>
-        <p:cNvPr id="1" name="">
-          <a:extLst>
-            <a:ext uri="{FF2B5EF4-FFF2-40B4-BE49-F238E27FC236}">
-              <a16:creationId xmlns:a16="http://schemas.microsoft.com/office/drawing/2014/main" id="{4E036967-5B1E-B1FA-22A4-1F2F6B8253DD}"/>
-            </a:ext>
-          </a:extLst>
-        </p:cNvPr>
-        <p:cNvGrpSpPr/>
-        <p:nvPr/>
-      </p:nvGrpSpPr>
-      <p:grpSpPr>
-        <a:xfrm>
-          <a:off x="0" y="0"/>
-          <a:ext cx="0" cy="0"/>
-          <a:chOff x="0" y="0"/>
-          <a:chExt cx="0" cy="0"/>
-        </a:xfrm>
-      </p:grpSpPr>
-      <p:sp>
-        <p:nvSpPr>
-          <p:cNvPr id="2" name="TextBox 1">
-            <a:extLst>
-              <a:ext uri="{FF2B5EF4-FFF2-40B4-BE49-F238E27FC236}">
-                <a16:creationId xmlns:a16="http://schemas.microsoft.com/office/drawing/2014/main" id="{7AB0DC70-D3C9-886F-1388-347F7D1795C4}"/>
-              </a:ext>
-            </a:extLst>
-          </p:cNvPr>
-          <p:cNvSpPr txBox="1"/>
-          <p:nvPr/>
-        </p:nvSpPr>
-        <p:spPr>
-          <a:xfrm>
-            <a:off x="469555" y="626071"/>
-            <a:ext cx="5791201" cy="523220"/>
-          </a:xfrm>
-          <a:prstGeom prst="rect">
-            <a:avLst/>
-          </a:prstGeom>
-          <a:noFill/>
-        </p:spPr>
-        <p:txBody>
-          <a:bodyPr wrap="square" rtlCol="0">
-            <a:spAutoFit/>
-          </a:bodyPr>
-          <a:lstStyle/>
-          <a:p>
-            <a:r>
-              <a:rPr lang="en-US" sz="2800" noProof="1">
-                <a:solidFill>
-                  <a:srgbClr val="002060"/>
-                </a:solidFill>
-              </a:rPr>
-              <a:t>Simple Equivalence Proof - Factorial</a:t>
-            </a:r>
-            <a:endParaRPr lang="en-US" sz="2800" noProof="1"/>
-          </a:p>
-        </p:txBody>
-      </p:sp>
-      <p:sp>
-        <p:nvSpPr>
-          <p:cNvPr id="3" name="Slide Number Placeholder 2">
-            <a:extLst>
-              <a:ext uri="{FF2B5EF4-FFF2-40B4-BE49-F238E27FC236}">
-                <a16:creationId xmlns:a16="http://schemas.microsoft.com/office/drawing/2014/main" id="{032D9266-7A53-3653-0A3D-9BF387ACFD88}"/>
-              </a:ext>
-            </a:extLst>
-          </p:cNvPr>
-          <p:cNvSpPr>
-            <a:spLocks noGrp="1"/>
-          </p:cNvSpPr>
-          <p:nvPr>
-            <p:ph type="sldNum" sz="quarter" idx="12"/>
-          </p:nvPr>
-        </p:nvSpPr>
-        <p:spPr/>
-        <p:txBody>
-          <a:bodyPr/>
-          <a:lstStyle/>
-          <a:p>
-            <a:fld id="{292A9FD8-515A-4698-9313-0AB17EE9632B}" type="slidenum">
-              <a:rPr lang="en-US" noProof="1" dirty="0" smtClean="0"/>
-              <a:t>49</a:t>
-            </a:fld>
-            <a:endParaRPr lang="en-US" noProof="1"/>
-          </a:p>
-        </p:txBody>
-      </p:sp>
-      <p:sp>
-        <p:nvSpPr>
-          <p:cNvPr id="5" name="TextBox 4">
-            <a:extLst>
-              <a:ext uri="{FF2B5EF4-FFF2-40B4-BE49-F238E27FC236}">
-                <a16:creationId xmlns:a16="http://schemas.microsoft.com/office/drawing/2014/main" id="{8275FE50-C5C1-4BBA-BE15-47E90825F906}"/>
-              </a:ext>
-            </a:extLst>
-          </p:cNvPr>
-          <p:cNvSpPr txBox="1"/>
-          <p:nvPr/>
-        </p:nvSpPr>
-        <p:spPr>
-          <a:xfrm>
-            <a:off x="734969" y="2507100"/>
-            <a:ext cx="2825580" cy="2215991"/>
-          </a:xfrm>
-          <a:prstGeom prst="rect">
-            <a:avLst/>
-          </a:prstGeom>
-          <a:noFill/>
-        </p:spPr>
-        <p:txBody>
-          <a:bodyPr wrap="square" rtlCol="0">
-            <a:spAutoFit/>
-          </a:bodyPr>
-          <a:lstStyle/>
-          <a:p>
-            <a:r>
-              <a:rPr lang="en-US" sz="2000" noProof="1">
-                <a:solidFill>
-                  <a:srgbClr val="002060"/>
-                </a:solidFill>
-              </a:rPr>
-              <a:t>(*@ function rec fact </a:t>
-            </a:r>
-          </a:p>
-          <a:p>
-            <a:r>
-              <a:rPr lang="en-US" sz="2000" noProof="1">
-                <a:solidFill>
-                  <a:srgbClr val="002060"/>
-                </a:solidFill>
-              </a:rPr>
-              <a:t>(n: integer) : integer =</a:t>
-            </a:r>
-          </a:p>
-          <a:p>
-            <a:r>
-              <a:rPr lang="en-US" sz="2000" noProof="1">
-                <a:solidFill>
-                  <a:srgbClr val="002060"/>
-                </a:solidFill>
-              </a:rPr>
-              <a:t>   if n = 0 then 1</a:t>
-            </a:r>
-          </a:p>
-          <a:p>
-            <a:r>
-              <a:rPr lang="en-US" sz="2000" noProof="1">
-                <a:solidFill>
-                  <a:srgbClr val="002060"/>
-                </a:solidFill>
-              </a:rPr>
-              <a:t>   else n * fact (n-1) *)</a:t>
-            </a:r>
-          </a:p>
-          <a:p>
-            <a:r>
-              <a:rPr lang="en-US" sz="2000" noProof="1">
-                <a:solidFill>
-                  <a:srgbClr val="002060"/>
-                </a:solidFill>
-              </a:rPr>
-              <a:t>(*@ requires n &gt;= 0 </a:t>
-            </a:r>
-          </a:p>
-          <a:p>
-            <a:r>
-              <a:rPr lang="en-US" sz="2000" noProof="1">
-                <a:solidFill>
-                  <a:srgbClr val="002060"/>
-                </a:solidFill>
-              </a:rPr>
-              <a:t>         variant n *)</a:t>
-            </a:r>
-          </a:p>
-          <a:p>
-            <a:endParaRPr lang="en-US" noProof="1"/>
-          </a:p>
-        </p:txBody>
-      </p:sp>
-      <p:sp>
-        <p:nvSpPr>
-          <p:cNvPr id="6" name="TextBox 5">
-            <a:extLst>
-              <a:ext uri="{FF2B5EF4-FFF2-40B4-BE49-F238E27FC236}">
-                <a16:creationId xmlns:a16="http://schemas.microsoft.com/office/drawing/2014/main" id="{19D423E8-4811-F466-CDE5-58EFB6506D4D}"/>
-              </a:ext>
-            </a:extLst>
-          </p:cNvPr>
-          <p:cNvSpPr txBox="1"/>
-          <p:nvPr/>
-        </p:nvSpPr>
-        <p:spPr>
-          <a:xfrm>
-            <a:off x="1056175" y="1932168"/>
-            <a:ext cx="1762899" cy="430887"/>
-          </a:xfrm>
-          <a:prstGeom prst="rect">
-            <a:avLst/>
-          </a:prstGeom>
-          <a:noFill/>
-        </p:spPr>
-        <p:txBody>
-          <a:bodyPr wrap="square" rtlCol="0">
-            <a:spAutoFit/>
-          </a:bodyPr>
-          <a:lstStyle/>
-          <a:p>
-            <a:pPr algn="ctr"/>
-            <a:r>
-              <a:rPr lang="en-US" sz="2200" b="1" noProof="1">
-                <a:solidFill>
-                  <a:srgbClr val="002060"/>
-                </a:solidFill>
-              </a:rPr>
-              <a:t>Functional</a:t>
-            </a:r>
-          </a:p>
-        </p:txBody>
-      </p:sp>
-      <p:sp>
-        <p:nvSpPr>
-          <p:cNvPr id="7" name="TextBox 6">
-            <a:extLst>
-              <a:ext uri="{FF2B5EF4-FFF2-40B4-BE49-F238E27FC236}">
-                <a16:creationId xmlns:a16="http://schemas.microsoft.com/office/drawing/2014/main" id="{0A7CBF11-B5F6-F95A-E926-7A3107FA9818}"/>
-              </a:ext>
-            </a:extLst>
-          </p:cNvPr>
-          <p:cNvSpPr txBox="1"/>
-          <p:nvPr/>
-        </p:nvSpPr>
-        <p:spPr>
-          <a:xfrm>
-            <a:off x="4112480" y="1597539"/>
-            <a:ext cx="4296551" cy="3785652"/>
-          </a:xfrm>
-          <a:prstGeom prst="rect">
-            <a:avLst/>
-          </a:prstGeom>
-          <a:noFill/>
-        </p:spPr>
-        <p:txBody>
-          <a:bodyPr wrap="square" rtlCol="0">
-            <a:spAutoFit/>
-          </a:bodyPr>
-          <a:lstStyle/>
-          <a:p>
-            <a:r>
-              <a:rPr lang="en-US" sz="2000" noProof="1">
-                <a:solidFill>
-                  <a:srgbClr val="002060"/>
-                </a:solidFill>
-              </a:rPr>
-              <a:t>let fact_iter (n: int) : int =</a:t>
-            </a:r>
-          </a:p>
-          <a:p>
-            <a:r>
-              <a:rPr lang="en-US" sz="2000" noProof="1">
-                <a:solidFill>
-                  <a:srgbClr val="002060"/>
-                </a:solidFill>
-              </a:rPr>
-              <a:t>    if n &lt;= 1 then 1</a:t>
-            </a:r>
-          </a:p>
-          <a:p>
-            <a:r>
-              <a:rPr lang="en-US" sz="2000" noProof="1">
-                <a:solidFill>
-                  <a:srgbClr val="002060"/>
-                </a:solidFill>
-              </a:rPr>
-              <a:t>    else begin </a:t>
-            </a:r>
-          </a:p>
-          <a:p>
-            <a:r>
-              <a:rPr lang="en-US" sz="2000" noProof="1">
-                <a:solidFill>
-                  <a:srgbClr val="002060"/>
-                </a:solidFill>
-              </a:rPr>
-              <a:t>        let res = ref 1 in</a:t>
-            </a:r>
-          </a:p>
-          <a:p>
-            <a:r>
-              <a:rPr lang="en-US" sz="2000" noProof="1">
-                <a:solidFill>
-                  <a:srgbClr val="002060"/>
-                </a:solidFill>
-              </a:rPr>
-              <a:t>        for i = 2 to n do</a:t>
-            </a:r>
-          </a:p>
-          <a:p>
-            <a:r>
-              <a:rPr lang="en-US" sz="2000" noProof="1">
-                <a:solidFill>
-                  <a:srgbClr val="002060"/>
-                </a:solidFill>
-              </a:rPr>
-              <a:t>          (*@ invariant !res = fact (i-1) *)</a:t>
-            </a:r>
-          </a:p>
-          <a:p>
-            <a:r>
-              <a:rPr lang="en-US" sz="2000" noProof="1">
-                <a:solidFill>
-                  <a:srgbClr val="002060"/>
-                </a:solidFill>
-              </a:rPr>
-              <a:t>          res := !res * i</a:t>
-            </a:r>
-          </a:p>
-          <a:p>
-            <a:r>
-              <a:rPr lang="en-US" sz="2000" noProof="1">
-                <a:solidFill>
-                  <a:srgbClr val="002060"/>
-                </a:solidFill>
-              </a:rPr>
-              <a:t>        done;</a:t>
-            </a:r>
-          </a:p>
-          <a:p>
-            <a:r>
-              <a:rPr lang="en-US" sz="2000" noProof="1">
-                <a:solidFill>
-                  <a:srgbClr val="002060"/>
-                </a:solidFill>
-              </a:rPr>
-              <a:t>        !res end</a:t>
-            </a:r>
-          </a:p>
-          <a:p>
-            <a:r>
-              <a:rPr lang="en-US" sz="2000" noProof="1">
-                <a:solidFill>
-                  <a:srgbClr val="002060"/>
-                </a:solidFill>
-              </a:rPr>
-              <a:t>  (*@ result = fact_iter n</a:t>
-            </a:r>
-          </a:p>
-          <a:p>
-            <a:r>
-              <a:rPr lang="en-US" sz="2000" noProof="1">
-                <a:solidFill>
-                  <a:srgbClr val="002060"/>
-                </a:solidFill>
-              </a:rPr>
-              <a:t>    requires n &gt;= 0 </a:t>
-            </a:r>
-          </a:p>
-          <a:p>
-            <a:r>
-              <a:rPr lang="en-US" sz="2000" noProof="1">
-                <a:solidFill>
-                  <a:srgbClr val="002060"/>
-                </a:solidFill>
-              </a:rPr>
-              <a:t>    ensures result = fact n *)</a:t>
-            </a:r>
-            <a:endParaRPr lang="en-US" sz="2000" noProof="1"/>
-          </a:p>
-        </p:txBody>
-      </p:sp>
-      <p:sp>
-        <p:nvSpPr>
-          <p:cNvPr id="8" name="TextBox 7">
-            <a:extLst>
-              <a:ext uri="{FF2B5EF4-FFF2-40B4-BE49-F238E27FC236}">
-                <a16:creationId xmlns:a16="http://schemas.microsoft.com/office/drawing/2014/main" id="{9D01534C-AA84-24D3-3A83-A31FBA2EE35A}"/>
-              </a:ext>
-            </a:extLst>
-          </p:cNvPr>
-          <p:cNvSpPr txBox="1"/>
-          <p:nvPr/>
-        </p:nvSpPr>
-        <p:spPr>
-          <a:xfrm>
-            <a:off x="6699291" y="2248330"/>
-            <a:ext cx="1762899" cy="430887"/>
-          </a:xfrm>
-          <a:prstGeom prst="rect">
-            <a:avLst/>
-          </a:prstGeom>
-          <a:noFill/>
-        </p:spPr>
-        <p:txBody>
-          <a:bodyPr wrap="square" rtlCol="0">
-            <a:spAutoFit/>
-          </a:bodyPr>
-          <a:lstStyle/>
-          <a:p>
-            <a:pPr algn="ctr"/>
-            <a:r>
-              <a:rPr lang="en-US" sz="2200" b="1" noProof="1">
-                <a:solidFill>
-                  <a:srgbClr val="002060"/>
-                </a:solidFill>
-              </a:rPr>
-              <a:t>Imperative</a:t>
-            </a:r>
-          </a:p>
-        </p:txBody>
-      </p:sp>
-    </p:spTree>
-    <p:extLst>
-      <p:ext uri="{BB962C8B-B14F-4D97-AF65-F5344CB8AC3E}">
-        <p14:creationId xmlns:p14="http://schemas.microsoft.com/office/powerpoint/2010/main" val="1923614958"/>
       </p:ext>
     </p:extLst>
   </p:cSld>
@@ -16309,6 +16053,539 @@
         <p:cNvPr id="1" name="">
           <a:extLst>
             <a:ext uri="{FF2B5EF4-FFF2-40B4-BE49-F238E27FC236}">
+              <a16:creationId xmlns:a16="http://schemas.microsoft.com/office/drawing/2014/main" id="{34BB6573-AE68-E606-5028-F477F5DCABAB}"/>
+            </a:ext>
+          </a:extLst>
+        </p:cNvPr>
+        <p:cNvGrpSpPr/>
+        <p:nvPr/>
+      </p:nvGrpSpPr>
+      <p:grpSpPr>
+        <a:xfrm>
+          <a:off x="0" y="0"/>
+          <a:ext cx="0" cy="0"/>
+          <a:chOff x="0" y="0"/>
+          <a:chExt cx="0" cy="0"/>
+        </a:xfrm>
+      </p:grpSpPr>
+      <p:sp>
+        <p:nvSpPr>
+          <p:cNvPr id="2" name="TextBox 1">
+            <a:extLst>
+              <a:ext uri="{FF2B5EF4-FFF2-40B4-BE49-F238E27FC236}">
+                <a16:creationId xmlns:a16="http://schemas.microsoft.com/office/drawing/2014/main" id="{BAD11615-3F81-E543-EE9B-3433E85F0FD7}"/>
+              </a:ext>
+            </a:extLst>
+          </p:cNvPr>
+          <p:cNvSpPr txBox="1"/>
+          <p:nvPr/>
+        </p:nvSpPr>
+        <p:spPr>
+          <a:xfrm>
+            <a:off x="1190368" y="2026503"/>
+            <a:ext cx="6763264" cy="830997"/>
+          </a:xfrm>
+          <a:prstGeom prst="rect">
+            <a:avLst/>
+          </a:prstGeom>
+          <a:noFill/>
+        </p:spPr>
+        <p:txBody>
+          <a:bodyPr wrap="square" rtlCol="0">
+            <a:spAutoFit/>
+          </a:bodyPr>
+          <a:lstStyle/>
+          <a:p>
+            <a:pPr algn="ctr"/>
+            <a:r>
+              <a:rPr lang="en-US" sz="4800" noProof="1">
+                <a:solidFill>
+                  <a:srgbClr val="002060"/>
+                </a:solidFill>
+              </a:rPr>
+              <a:t>Preliminary Results</a:t>
+            </a:r>
+            <a:endParaRPr lang="en-US" sz="4800" noProof="1"/>
+          </a:p>
+        </p:txBody>
+      </p:sp>
+      <p:sp>
+        <p:nvSpPr>
+          <p:cNvPr id="3" name="Slide Number Placeholder 2">
+            <a:extLst>
+              <a:ext uri="{FF2B5EF4-FFF2-40B4-BE49-F238E27FC236}">
+                <a16:creationId xmlns:a16="http://schemas.microsoft.com/office/drawing/2014/main" id="{CCC4028F-0FBD-78C7-E826-C6832D4221AB}"/>
+              </a:ext>
+            </a:extLst>
+          </p:cNvPr>
+          <p:cNvSpPr>
+            <a:spLocks noGrp="1"/>
+          </p:cNvSpPr>
+          <p:nvPr>
+            <p:ph type="sldNum" sz="quarter" idx="12"/>
+          </p:nvPr>
+        </p:nvSpPr>
+        <p:spPr/>
+        <p:txBody>
+          <a:bodyPr/>
+          <a:lstStyle/>
+          <a:p>
+            <a:fld id="{292A9FD8-515A-4698-9313-0AB17EE9632B}" type="slidenum">
+              <a:rPr lang="en-US" noProof="1" dirty="0" smtClean="0"/>
+              <a:t>50</a:t>
+            </a:fld>
+            <a:endParaRPr lang="en-US" noProof="1"/>
+          </a:p>
+        </p:txBody>
+      </p:sp>
+    </p:spTree>
+    <p:extLst>
+      <p:ext uri="{BB962C8B-B14F-4D97-AF65-F5344CB8AC3E}">
+        <p14:creationId xmlns:p14="http://schemas.microsoft.com/office/powerpoint/2010/main" val="3181731804"/>
+      </p:ext>
+    </p:extLst>
+  </p:cSld>
+  <p:clrMapOvr>
+    <a:masterClrMapping/>
+  </p:clrMapOvr>
+</p:sld>
+</file>
+
+<file path=ppt/slides/slide51.xml><?xml version="1.0" encoding="utf-8"?>
+<p:sld xmlns:a="http://schemas.openxmlformats.org/drawingml/2006/main" xmlns:r="http://schemas.openxmlformats.org/officeDocument/2006/relationships" xmlns:p="http://schemas.openxmlformats.org/presentationml/2006/main" show="0">
+  <p:cSld>
+    <p:spTree>
+      <p:nvGrpSpPr>
+        <p:cNvPr id="1" name="">
+          <a:extLst>
+            <a:ext uri="{FF2B5EF4-FFF2-40B4-BE49-F238E27FC236}">
+              <a16:creationId xmlns:a16="http://schemas.microsoft.com/office/drawing/2014/main" id="{4E036967-5B1E-B1FA-22A4-1F2F6B8253DD}"/>
+            </a:ext>
+          </a:extLst>
+        </p:cNvPr>
+        <p:cNvGrpSpPr/>
+        <p:nvPr/>
+      </p:nvGrpSpPr>
+      <p:grpSpPr>
+        <a:xfrm>
+          <a:off x="0" y="0"/>
+          <a:ext cx="0" cy="0"/>
+          <a:chOff x="0" y="0"/>
+          <a:chExt cx="0" cy="0"/>
+        </a:xfrm>
+      </p:grpSpPr>
+      <p:sp>
+        <p:nvSpPr>
+          <p:cNvPr id="2" name="TextBox 1">
+            <a:extLst>
+              <a:ext uri="{FF2B5EF4-FFF2-40B4-BE49-F238E27FC236}">
+                <a16:creationId xmlns:a16="http://schemas.microsoft.com/office/drawing/2014/main" id="{7AB0DC70-D3C9-886F-1388-347F7D1795C4}"/>
+              </a:ext>
+            </a:extLst>
+          </p:cNvPr>
+          <p:cNvSpPr txBox="1"/>
+          <p:nvPr/>
+        </p:nvSpPr>
+        <p:spPr>
+          <a:xfrm>
+            <a:off x="469555" y="626071"/>
+            <a:ext cx="5791201" cy="523220"/>
+          </a:xfrm>
+          <a:prstGeom prst="rect">
+            <a:avLst/>
+          </a:prstGeom>
+          <a:noFill/>
+        </p:spPr>
+        <p:txBody>
+          <a:bodyPr wrap="square" rtlCol="0">
+            <a:spAutoFit/>
+          </a:bodyPr>
+          <a:lstStyle/>
+          <a:p>
+            <a:r>
+              <a:rPr lang="en-US" sz="2800" noProof="1">
+                <a:solidFill>
+                  <a:srgbClr val="002060"/>
+                </a:solidFill>
+              </a:rPr>
+              <a:t>Simple Equivalence Proof - Factorial</a:t>
+            </a:r>
+            <a:endParaRPr lang="en-US" sz="2800" noProof="1"/>
+          </a:p>
+        </p:txBody>
+      </p:sp>
+      <p:sp>
+        <p:nvSpPr>
+          <p:cNvPr id="3" name="Slide Number Placeholder 2">
+            <a:extLst>
+              <a:ext uri="{FF2B5EF4-FFF2-40B4-BE49-F238E27FC236}">
+                <a16:creationId xmlns:a16="http://schemas.microsoft.com/office/drawing/2014/main" id="{032D9266-7A53-3653-0A3D-9BF387ACFD88}"/>
+              </a:ext>
+            </a:extLst>
+          </p:cNvPr>
+          <p:cNvSpPr>
+            <a:spLocks noGrp="1"/>
+          </p:cNvSpPr>
+          <p:nvPr>
+            <p:ph type="sldNum" sz="quarter" idx="12"/>
+          </p:nvPr>
+        </p:nvSpPr>
+        <p:spPr/>
+        <p:txBody>
+          <a:bodyPr/>
+          <a:lstStyle/>
+          <a:p>
+            <a:fld id="{292A9FD8-515A-4698-9313-0AB17EE9632B}" type="slidenum">
+              <a:rPr lang="en-US" noProof="1" dirty="0" smtClean="0"/>
+              <a:t>51</a:t>
+            </a:fld>
+            <a:endParaRPr lang="en-US" noProof="1"/>
+          </a:p>
+        </p:txBody>
+      </p:sp>
+      <p:sp>
+        <p:nvSpPr>
+          <p:cNvPr id="5" name="TextBox 4">
+            <a:extLst>
+              <a:ext uri="{FF2B5EF4-FFF2-40B4-BE49-F238E27FC236}">
+                <a16:creationId xmlns:a16="http://schemas.microsoft.com/office/drawing/2014/main" id="{8275FE50-C5C1-4BBA-BE15-47E90825F906}"/>
+              </a:ext>
+            </a:extLst>
+          </p:cNvPr>
+          <p:cNvSpPr txBox="1"/>
+          <p:nvPr/>
+        </p:nvSpPr>
+        <p:spPr>
+          <a:xfrm>
+            <a:off x="734969" y="2507100"/>
+            <a:ext cx="2825580" cy="2215991"/>
+          </a:xfrm>
+          <a:prstGeom prst="rect">
+            <a:avLst/>
+          </a:prstGeom>
+          <a:noFill/>
+        </p:spPr>
+        <p:txBody>
+          <a:bodyPr wrap="square" rtlCol="0">
+            <a:spAutoFit/>
+          </a:bodyPr>
+          <a:lstStyle/>
+          <a:p>
+            <a:r>
+              <a:rPr lang="en-US" sz="2000" noProof="1">
+                <a:solidFill>
+                  <a:srgbClr val="002060"/>
+                </a:solidFill>
+              </a:rPr>
+              <a:t>(*@ function rec fact </a:t>
+            </a:r>
+          </a:p>
+          <a:p>
+            <a:r>
+              <a:rPr lang="en-US" sz="2000" noProof="1">
+                <a:solidFill>
+                  <a:srgbClr val="002060"/>
+                </a:solidFill>
+              </a:rPr>
+              <a:t>(n: integer) : integer =</a:t>
+            </a:r>
+          </a:p>
+          <a:p>
+            <a:r>
+              <a:rPr lang="en-US" sz="2000" noProof="1">
+                <a:solidFill>
+                  <a:srgbClr val="002060"/>
+                </a:solidFill>
+              </a:rPr>
+              <a:t>   if n = 0 then 1</a:t>
+            </a:r>
+          </a:p>
+          <a:p>
+            <a:r>
+              <a:rPr lang="en-US" sz="2000" noProof="1">
+                <a:solidFill>
+                  <a:srgbClr val="002060"/>
+                </a:solidFill>
+              </a:rPr>
+              <a:t>   else n * fact (n-1) *)</a:t>
+            </a:r>
+          </a:p>
+          <a:p>
+            <a:r>
+              <a:rPr lang="en-US" sz="2000" noProof="1">
+                <a:solidFill>
+                  <a:srgbClr val="002060"/>
+                </a:solidFill>
+              </a:rPr>
+              <a:t>(*@ requires n &gt;= 0 </a:t>
+            </a:r>
+          </a:p>
+          <a:p>
+            <a:r>
+              <a:rPr lang="en-US" sz="2000" noProof="1">
+                <a:solidFill>
+                  <a:srgbClr val="002060"/>
+                </a:solidFill>
+              </a:rPr>
+              <a:t>         variant n *)</a:t>
+            </a:r>
+          </a:p>
+          <a:p>
+            <a:endParaRPr lang="en-US" noProof="1"/>
+          </a:p>
+        </p:txBody>
+      </p:sp>
+      <p:sp>
+        <p:nvSpPr>
+          <p:cNvPr id="6" name="TextBox 5">
+            <a:extLst>
+              <a:ext uri="{FF2B5EF4-FFF2-40B4-BE49-F238E27FC236}">
+                <a16:creationId xmlns:a16="http://schemas.microsoft.com/office/drawing/2014/main" id="{19D423E8-4811-F466-CDE5-58EFB6506D4D}"/>
+              </a:ext>
+            </a:extLst>
+          </p:cNvPr>
+          <p:cNvSpPr txBox="1"/>
+          <p:nvPr/>
+        </p:nvSpPr>
+        <p:spPr>
+          <a:xfrm>
+            <a:off x="1056175" y="1932168"/>
+            <a:ext cx="1762899" cy="430887"/>
+          </a:xfrm>
+          <a:prstGeom prst="rect">
+            <a:avLst/>
+          </a:prstGeom>
+          <a:noFill/>
+        </p:spPr>
+        <p:txBody>
+          <a:bodyPr wrap="square" rtlCol="0">
+            <a:spAutoFit/>
+          </a:bodyPr>
+          <a:lstStyle/>
+          <a:p>
+            <a:pPr algn="ctr"/>
+            <a:r>
+              <a:rPr lang="en-US" sz="2200" b="1" noProof="1">
+                <a:solidFill>
+                  <a:srgbClr val="002060"/>
+                </a:solidFill>
+              </a:rPr>
+              <a:t>Functional</a:t>
+            </a:r>
+          </a:p>
+        </p:txBody>
+      </p:sp>
+      <p:sp>
+        <p:nvSpPr>
+          <p:cNvPr id="7" name="TextBox 6">
+            <a:extLst>
+              <a:ext uri="{FF2B5EF4-FFF2-40B4-BE49-F238E27FC236}">
+                <a16:creationId xmlns:a16="http://schemas.microsoft.com/office/drawing/2014/main" id="{0A7CBF11-B5F6-F95A-E926-7A3107FA9818}"/>
+              </a:ext>
+            </a:extLst>
+          </p:cNvPr>
+          <p:cNvSpPr txBox="1"/>
+          <p:nvPr/>
+        </p:nvSpPr>
+        <p:spPr>
+          <a:xfrm>
+            <a:off x="4112480" y="1597539"/>
+            <a:ext cx="4296551" cy="3785652"/>
+          </a:xfrm>
+          <a:prstGeom prst="rect">
+            <a:avLst/>
+          </a:prstGeom>
+          <a:noFill/>
+        </p:spPr>
+        <p:txBody>
+          <a:bodyPr wrap="square" rtlCol="0">
+            <a:spAutoFit/>
+          </a:bodyPr>
+          <a:lstStyle/>
+          <a:p>
+            <a:r>
+              <a:rPr lang="en-US" sz="2000" noProof="1">
+                <a:solidFill>
+                  <a:srgbClr val="002060"/>
+                </a:solidFill>
+              </a:rPr>
+              <a:t>let fact_iter (n: int) : int =</a:t>
+            </a:r>
+          </a:p>
+          <a:p>
+            <a:r>
+              <a:rPr lang="en-US" sz="2000" noProof="1">
+                <a:solidFill>
+                  <a:srgbClr val="002060"/>
+                </a:solidFill>
+              </a:rPr>
+              <a:t>    if n &lt;= 1 then 1</a:t>
+            </a:r>
+          </a:p>
+          <a:p>
+            <a:r>
+              <a:rPr lang="en-US" sz="2000" noProof="1">
+                <a:solidFill>
+                  <a:srgbClr val="002060"/>
+                </a:solidFill>
+              </a:rPr>
+              <a:t>    else begin </a:t>
+            </a:r>
+          </a:p>
+          <a:p>
+            <a:r>
+              <a:rPr lang="en-US" sz="2000" noProof="1">
+                <a:solidFill>
+                  <a:srgbClr val="002060"/>
+                </a:solidFill>
+              </a:rPr>
+              <a:t>        let res = ref 1 in</a:t>
+            </a:r>
+          </a:p>
+          <a:p>
+            <a:r>
+              <a:rPr lang="en-US" sz="2000" noProof="1">
+                <a:solidFill>
+                  <a:srgbClr val="002060"/>
+                </a:solidFill>
+              </a:rPr>
+              <a:t>        for i = 2 to n do</a:t>
+            </a:r>
+          </a:p>
+          <a:p>
+            <a:r>
+              <a:rPr lang="en-US" sz="2000" noProof="1">
+                <a:solidFill>
+                  <a:srgbClr val="002060"/>
+                </a:solidFill>
+              </a:rPr>
+              <a:t>          (*@ invariant !res = fact (i-1) *)</a:t>
+            </a:r>
+          </a:p>
+          <a:p>
+            <a:r>
+              <a:rPr lang="en-US" sz="2000" noProof="1">
+                <a:solidFill>
+                  <a:srgbClr val="002060"/>
+                </a:solidFill>
+              </a:rPr>
+              <a:t>          res := !res * i</a:t>
+            </a:r>
+          </a:p>
+          <a:p>
+            <a:r>
+              <a:rPr lang="en-US" sz="2000" noProof="1">
+                <a:solidFill>
+                  <a:srgbClr val="002060"/>
+                </a:solidFill>
+              </a:rPr>
+              <a:t>        done;</a:t>
+            </a:r>
+          </a:p>
+          <a:p>
+            <a:r>
+              <a:rPr lang="en-US" sz="2000" noProof="1">
+                <a:solidFill>
+                  <a:srgbClr val="002060"/>
+                </a:solidFill>
+              </a:rPr>
+              <a:t>        !res end</a:t>
+            </a:r>
+          </a:p>
+          <a:p>
+            <a:r>
+              <a:rPr lang="en-US" sz="2000" noProof="1">
+                <a:solidFill>
+                  <a:srgbClr val="002060"/>
+                </a:solidFill>
+              </a:rPr>
+              <a:t>  (*@ result = fact_iter n</a:t>
+            </a:r>
+          </a:p>
+          <a:p>
+            <a:r>
+              <a:rPr lang="en-US" sz="2000" noProof="1">
+                <a:solidFill>
+                  <a:srgbClr val="002060"/>
+                </a:solidFill>
+              </a:rPr>
+              <a:t>    requires n &gt;= 0 </a:t>
+            </a:r>
+          </a:p>
+          <a:p>
+            <a:r>
+              <a:rPr lang="en-US" sz="2000" noProof="1">
+                <a:solidFill>
+                  <a:srgbClr val="002060"/>
+                </a:solidFill>
+              </a:rPr>
+              <a:t>    ensures result = fact n *)</a:t>
+            </a:r>
+            <a:endParaRPr lang="en-US" sz="2000" noProof="1"/>
+          </a:p>
+        </p:txBody>
+      </p:sp>
+      <p:sp>
+        <p:nvSpPr>
+          <p:cNvPr id="8" name="TextBox 7">
+            <a:extLst>
+              <a:ext uri="{FF2B5EF4-FFF2-40B4-BE49-F238E27FC236}">
+                <a16:creationId xmlns:a16="http://schemas.microsoft.com/office/drawing/2014/main" id="{9D01534C-AA84-24D3-3A83-A31FBA2EE35A}"/>
+              </a:ext>
+            </a:extLst>
+          </p:cNvPr>
+          <p:cNvSpPr txBox="1"/>
+          <p:nvPr/>
+        </p:nvSpPr>
+        <p:spPr>
+          <a:xfrm>
+            <a:off x="6699291" y="2248330"/>
+            <a:ext cx="1762899" cy="430887"/>
+          </a:xfrm>
+          <a:prstGeom prst="rect">
+            <a:avLst/>
+          </a:prstGeom>
+          <a:noFill/>
+        </p:spPr>
+        <p:txBody>
+          <a:bodyPr wrap="square" rtlCol="0">
+            <a:spAutoFit/>
+          </a:bodyPr>
+          <a:lstStyle/>
+          <a:p>
+            <a:pPr algn="ctr"/>
+            <a:r>
+              <a:rPr lang="en-US" sz="2200" b="1" noProof="1">
+                <a:solidFill>
+                  <a:srgbClr val="002060"/>
+                </a:solidFill>
+              </a:rPr>
+              <a:t>Imperative</a:t>
+            </a:r>
+          </a:p>
+        </p:txBody>
+      </p:sp>
+    </p:spTree>
+    <p:extLst>
+      <p:ext uri="{BB962C8B-B14F-4D97-AF65-F5344CB8AC3E}">
+        <p14:creationId xmlns:p14="http://schemas.microsoft.com/office/powerpoint/2010/main" val="1923614958"/>
+      </p:ext>
+    </p:extLst>
+  </p:cSld>
+  <p:clrMapOvr>
+    <a:masterClrMapping/>
+  </p:clrMapOvr>
+</p:sld>
+</file>
+
+<file path=ppt/slides/slide52.xml><?xml version="1.0" encoding="utf-8"?>
+<p:sld xmlns:a="http://schemas.openxmlformats.org/drawingml/2006/main" xmlns:r="http://schemas.openxmlformats.org/officeDocument/2006/relationships" xmlns:p="http://schemas.openxmlformats.org/presentationml/2006/main" show="0">
+  <p:cSld>
+    <p:spTree>
+      <p:nvGrpSpPr>
+        <p:cNvPr id="1" name="">
+          <a:extLst>
+            <a:ext uri="{FF2B5EF4-FFF2-40B4-BE49-F238E27FC236}">
               <a16:creationId xmlns:a16="http://schemas.microsoft.com/office/drawing/2014/main" id="{9AC8D082-1553-7A18-544C-877009A95BAC}"/>
             </a:ext>
           </a:extLst>
@@ -16387,7 +16664,7 @@
           <a:p>
             <a:fld id="{292A9FD8-515A-4698-9313-0AB17EE9632B}" type="slidenum">
               <a:rPr lang="en-US" noProof="1" dirty="0" smtClean="0"/>
-              <a:t>50</a:t>
+              <a:t>52</a:t>
             </a:fld>
             <a:endParaRPr lang="en-US" noProof="1"/>
           </a:p>
@@ -16860,7 +17137,7 @@
 </p:sld>
 </file>
 
-<file path=ppt/slides/slide51.xml><?xml version="1.0" encoding="utf-8"?>
+<file path=ppt/slides/slide53.xml><?xml version="1.0" encoding="utf-8"?>
 <p:sld xmlns:a="http://schemas.openxmlformats.org/drawingml/2006/main" xmlns:r="http://schemas.openxmlformats.org/officeDocument/2006/relationships" xmlns:p="http://schemas.openxmlformats.org/presentationml/2006/main" show="0">
   <p:cSld>
     <p:spTree>
@@ -16946,7 +17223,7 @@
           <a:p>
             <a:fld id="{292A9FD8-515A-4698-9313-0AB17EE9632B}" type="slidenum">
               <a:rPr lang="en-US" noProof="1" dirty="0" smtClean="0"/>
-              <a:t>51</a:t>
+              <a:t>53</a:t>
             </a:fld>
             <a:endParaRPr lang="en-US" noProof="1"/>
           </a:p>
@@ -17303,7 +17580,7 @@
 </p:sld>
 </file>
 
-<file path=ppt/slides/slide52.xml><?xml version="1.0" encoding="utf-8"?>
+<file path=ppt/slides/slide54.xml><?xml version="1.0" encoding="utf-8"?>
 <p:sld xmlns:a="http://schemas.openxmlformats.org/drawingml/2006/main" xmlns:r="http://schemas.openxmlformats.org/officeDocument/2006/relationships" xmlns:p="http://schemas.openxmlformats.org/presentationml/2006/main" show="0">
   <p:cSld>
     <p:spTree>
@@ -17389,7 +17666,7 @@
           <a:p>
             <a:fld id="{292A9FD8-515A-4698-9313-0AB17EE9632B}" type="slidenum">
               <a:rPr lang="en-US" noProof="1" dirty="0" smtClean="0"/>
-              <a:t>52</a:t>
+              <a:t>54</a:t>
             </a:fld>
             <a:endParaRPr lang="en-US" noProof="1"/>
           </a:p>
@@ -17716,7 +17993,7 @@
 </p:sld>
 </file>
 
-<file path=ppt/slides/slide53.xml><?xml version="1.0" encoding="utf-8"?>
+<file path=ppt/slides/slide55.xml><?xml version="1.0" encoding="utf-8"?>
 <p:sld xmlns:a="http://schemas.openxmlformats.org/drawingml/2006/main" xmlns:r="http://schemas.openxmlformats.org/officeDocument/2006/relationships" xmlns:p="http://schemas.openxmlformats.org/presentationml/2006/main" show="0">
   <p:cSld>
     <p:spTree>
@@ -17803,7 +18080,7 @@
           <a:p>
             <a:fld id="{292A9FD8-515A-4698-9313-0AB17EE9632B}" type="slidenum">
               <a:rPr lang="en-US" noProof="1" dirty="0" smtClean="0"/>
-              <a:t>53</a:t>
+              <a:t>55</a:t>
             </a:fld>
             <a:endParaRPr lang="en-US" noProof="1"/>
           </a:p>
@@ -17822,7 +18099,7 @@
 </p:sld>
 </file>
 
-<file path=ppt/slides/slide54.xml><?xml version="1.0" encoding="utf-8"?>
+<file path=ppt/slides/slide56.xml><?xml version="1.0" encoding="utf-8"?>
 <p:sld xmlns:a="http://schemas.openxmlformats.org/drawingml/2006/main" xmlns:r="http://schemas.openxmlformats.org/officeDocument/2006/relationships" xmlns:p="http://schemas.openxmlformats.org/presentationml/2006/main" show="0">
   <p:cSld>
     <p:spTree>
@@ -18057,7 +18334,7 @@
           <a:p>
             <a:fld id="{292A9FD8-515A-4698-9313-0AB17EE9632B}" type="slidenum">
               <a:rPr lang="en-US" noProof="1" dirty="0" smtClean="0"/>
-              <a:t>54</a:t>
+              <a:t>56</a:t>
             </a:fld>
             <a:endParaRPr lang="en-US" noProof="1"/>
           </a:p>

--- a/tese/presentation/Ap Tese.pptx
+++ b/tese/presentation/Ap Tese.pptx
@@ -224,7 +224,7 @@
           <a:p>
             <a:fld id="{374D7271-F55A-4686-93D9-9528AEDA1906}" type="datetimeFigureOut">
               <a:rPr lang="en-US" smtClean="0"/>
-              <a:t>12/11/2025</a:t>
+              <a:t>12/12/2025</a:t>
             </a:fld>
             <a:endParaRPr lang="en-US"/>
           </a:p>
@@ -535,6 +535,197 @@
           <a:bodyPr/>
           <a:lstStyle/>
           <a:p>
+            <a:r>
+              <a:rPr lang="en-US" dirty="0"/>
+              <a:t>Quando </a:t>
+            </a:r>
+            <a:r>
+              <a:rPr lang="en-US" dirty="0" err="1"/>
+              <a:t>falamos</a:t>
+            </a:r>
+            <a:r>
+              <a:rPr lang="en-US" dirty="0"/>
+              <a:t> </a:t>
+            </a:r>
+            <a:r>
+              <a:rPr lang="en-US" dirty="0" err="1"/>
+              <a:t>em</a:t>
+            </a:r>
+            <a:r>
+              <a:rPr lang="en-US" dirty="0"/>
+              <a:t> </a:t>
+            </a:r>
+            <a:r>
+              <a:rPr lang="en-US" dirty="0" err="1"/>
+              <a:t>prova</a:t>
+            </a:r>
+            <a:r>
+              <a:rPr lang="en-US" dirty="0"/>
+              <a:t> </a:t>
+            </a:r>
+            <a:r>
+              <a:rPr lang="en-US" dirty="0" err="1"/>
+              <a:t>automática</a:t>
+            </a:r>
+            <a:r>
+              <a:rPr lang="en-US" dirty="0"/>
+              <a:t> de </a:t>
+            </a:r>
+            <a:r>
+              <a:rPr lang="en-US" dirty="0" err="1"/>
+              <a:t>equivalência</a:t>
+            </a:r>
+            <a:r>
+              <a:rPr lang="en-US" dirty="0"/>
+              <a:t>, </a:t>
+            </a:r>
+            <a:r>
+              <a:rPr lang="en-US" dirty="0" err="1"/>
+              <a:t>queremos</a:t>
+            </a:r>
+            <a:r>
+              <a:rPr lang="en-US" dirty="0"/>
+              <a:t> </a:t>
+            </a:r>
+            <a:r>
+              <a:rPr lang="en-US" dirty="0" err="1"/>
+              <a:t>dizer</a:t>
+            </a:r>
+            <a:r>
+              <a:rPr lang="en-US" dirty="0"/>
+              <a:t> </a:t>
+            </a:r>
+            <a:r>
+              <a:rPr lang="en-US" dirty="0" err="1"/>
+              <a:t>sem</a:t>
+            </a:r>
+            <a:r>
+              <a:rPr lang="en-US" dirty="0"/>
+              <a:t> </a:t>
+            </a:r>
+            <a:r>
+              <a:rPr lang="en-US" dirty="0" err="1"/>
+              <a:t>interação</a:t>
+            </a:r>
+            <a:r>
+              <a:rPr lang="en-US" dirty="0"/>
+              <a:t> do </a:t>
+            </a:r>
+            <a:r>
+              <a:rPr lang="en-US" dirty="0" err="1"/>
+              <a:t>utilizador</a:t>
+            </a:r>
+            <a:r>
+              <a:rPr lang="en-US" dirty="0"/>
+              <a:t> </a:t>
+            </a:r>
+            <a:r>
+              <a:rPr lang="en-US" dirty="0" err="1"/>
+              <a:t>depois</a:t>
+            </a:r>
+            <a:r>
+              <a:rPr lang="en-US" dirty="0"/>
+              <a:t> da </a:t>
+            </a:r>
+            <a:r>
+              <a:rPr lang="en-US" dirty="0" err="1"/>
+              <a:t>escrita</a:t>
+            </a:r>
+            <a:r>
+              <a:rPr lang="en-US" dirty="0"/>
+              <a:t> da </a:t>
+            </a:r>
+            <a:r>
+              <a:rPr lang="en-US" dirty="0" err="1"/>
+              <a:t>especificação</a:t>
+            </a:r>
+            <a:r>
+              <a:rPr lang="en-US" dirty="0"/>
+              <a:t>.</a:t>
+            </a:r>
+          </a:p>
+        </p:txBody>
+      </p:sp>
+      <p:sp>
+        <p:nvSpPr>
+          <p:cNvPr id="4" name="Slide Number Placeholder 3"/>
+          <p:cNvSpPr>
+            <a:spLocks noGrp="1"/>
+          </p:cNvSpPr>
+          <p:nvPr>
+            <p:ph type="sldNum" sz="quarter" idx="5"/>
+          </p:nvPr>
+        </p:nvSpPr>
+        <p:spPr/>
+        <p:txBody>
+          <a:bodyPr/>
+          <a:lstStyle/>
+          <a:p>
+            <a:fld id="{0B3F2602-38FE-4418-A7EF-ADB22DAE42F9}" type="slidenum">
+              <a:rPr lang="en-US" smtClean="0"/>
+              <a:t>4</a:t>
+            </a:fld>
+            <a:endParaRPr lang="en-US"/>
+          </a:p>
+        </p:txBody>
+      </p:sp>
+    </p:spTree>
+    <p:extLst>
+      <p:ext uri="{BB962C8B-B14F-4D97-AF65-F5344CB8AC3E}">
+        <p14:creationId xmlns:p14="http://schemas.microsoft.com/office/powerpoint/2010/main" val="274053569"/>
+      </p:ext>
+    </p:extLst>
+  </p:cSld>
+  <p:clrMapOvr>
+    <a:masterClrMapping/>
+  </p:clrMapOvr>
+</p:notes>
+</file>
+
+<file path=ppt/notesSlides/notesSlide2.xml><?xml version="1.0" encoding="utf-8"?>
+<p:notes xmlns:a="http://schemas.openxmlformats.org/drawingml/2006/main" xmlns:r="http://schemas.openxmlformats.org/officeDocument/2006/relationships" xmlns:p="http://schemas.openxmlformats.org/presentationml/2006/main">
+  <p:cSld>
+    <p:spTree>
+      <p:nvGrpSpPr>
+        <p:cNvPr id="1" name=""/>
+        <p:cNvGrpSpPr/>
+        <p:nvPr/>
+      </p:nvGrpSpPr>
+      <p:grpSpPr>
+        <a:xfrm>
+          <a:off x="0" y="0"/>
+          <a:ext cx="0" cy="0"/>
+          <a:chOff x="0" y="0"/>
+          <a:chExt cx="0" cy="0"/>
+        </a:xfrm>
+      </p:grpSpPr>
+      <p:sp>
+        <p:nvSpPr>
+          <p:cNvPr id="2" name="Slide Image Placeholder 1"/>
+          <p:cNvSpPr>
+            <a:spLocks noGrp="1" noRot="1" noChangeAspect="1"/>
+          </p:cNvSpPr>
+          <p:nvPr>
+            <p:ph type="sldImg"/>
+          </p:nvPr>
+        </p:nvSpPr>
+        <p:spPr/>
+      </p:sp>
+      <p:sp>
+        <p:nvSpPr>
+          <p:cNvPr id="3" name="Notes Placeholder 2"/>
+          <p:cNvSpPr>
+            <a:spLocks noGrp="1"/>
+          </p:cNvSpPr>
+          <p:nvPr>
+            <p:ph type="body" idx="1"/>
+          </p:nvPr>
+        </p:nvSpPr>
+        <p:spPr/>
+        <p:txBody>
+          <a:bodyPr/>
+          <a:lstStyle/>
+          <a:p>
             <a:endParaRPr lang="en-US" dirty="0"/>
           </a:p>
         </p:txBody>
@@ -575,7 +766,7 @@
 </p:notes>
 </file>
 
-<file path=ppt/notesSlides/notesSlide2.xml><?xml version="1.0" encoding="utf-8"?>
+<file path=ppt/notesSlides/notesSlide3.xml><?xml version="1.0" encoding="utf-8"?>
 <p:notes xmlns:a="http://schemas.openxmlformats.org/drawingml/2006/main" xmlns:r="http://schemas.openxmlformats.org/officeDocument/2006/relationships" xmlns:p="http://schemas.openxmlformats.org/presentationml/2006/main">
   <p:cSld>
     <p:spTree>
@@ -683,7 +874,7 @@
 </p:notes>
 </file>
 
-<file path=ppt/notesSlides/notesSlide3.xml><?xml version="1.0" encoding="utf-8"?>
+<file path=ppt/notesSlides/notesSlide4.xml><?xml version="1.0" encoding="utf-8"?>
 <p:notes xmlns:a="http://schemas.openxmlformats.org/drawingml/2006/main" xmlns:r="http://schemas.openxmlformats.org/officeDocument/2006/relationships" xmlns:p="http://schemas.openxmlformats.org/presentationml/2006/main">
   <p:cSld>
     <p:spTree>
@@ -922,7 +1113,7 @@
           <a:p>
             <a:fld id="{1E5BF2F9-84AD-46CB-8486-EB732804F762}" type="datetime1">
               <a:rPr lang="en-US" smtClean="0"/>
-              <a:t>12/11/2025</a:t>
+              <a:t>12/12/2025</a:t>
             </a:fld>
             <a:endParaRPr lang="en-US"/>
           </a:p>
@@ -1101,7 +1292,7 @@
           <a:p>
             <a:fld id="{23618752-90E6-4B57-86C0-C43DD2320A2D}" type="datetime1">
               <a:rPr lang="en-US" smtClean="0"/>
-              <a:t>12/11/2025</a:t>
+              <a:t>12/12/2025</a:t>
             </a:fld>
             <a:endParaRPr lang="en-US"/>
           </a:p>
@@ -1281,7 +1472,7 @@
           <a:p>
             <a:fld id="{85BE5269-252E-4ABC-B047-AD967E98EA5E}" type="datetime1">
               <a:rPr lang="en-US" smtClean="0"/>
-              <a:t>12/11/2025</a:t>
+              <a:t>12/12/2025</a:t>
             </a:fld>
             <a:endParaRPr lang="en-US"/>
           </a:p>
@@ -1451,7 +1642,7 @@
           <a:p>
             <a:fld id="{C4D54784-9B75-4DBC-ACA0-9F51227CD78F}" type="datetime1">
               <a:rPr lang="en-US" smtClean="0"/>
-              <a:t>12/11/2025</a:t>
+              <a:t>12/12/2025</a:t>
             </a:fld>
             <a:endParaRPr lang="en-US"/>
           </a:p>
@@ -1697,7 +1888,7 @@
           <a:p>
             <a:fld id="{3D9E4D52-32DE-4F35-8CB6-5A44573D3FC9}" type="datetime1">
               <a:rPr lang="en-US" smtClean="0"/>
-              <a:t>12/11/2025</a:t>
+              <a:t>12/12/2025</a:t>
             </a:fld>
             <a:endParaRPr lang="en-US"/>
           </a:p>
@@ -1929,7 +2120,7 @@
           <a:p>
             <a:fld id="{D0FFB22E-8A21-4AF6-BDE0-993A2F9B14BB}" type="datetime1">
               <a:rPr lang="en-US" smtClean="0"/>
-              <a:t>12/11/2025</a:t>
+              <a:t>12/12/2025</a:t>
             </a:fld>
             <a:endParaRPr lang="en-US"/>
           </a:p>
@@ -2296,7 +2487,7 @@
           <a:p>
             <a:fld id="{AC41D9E4-527D-47F1-B47F-963D62CCBC76}" type="datetime1">
               <a:rPr lang="en-US" smtClean="0"/>
-              <a:t>12/11/2025</a:t>
+              <a:t>12/12/2025</a:t>
             </a:fld>
             <a:endParaRPr lang="en-US"/>
           </a:p>
@@ -2414,7 +2605,7 @@
           <a:p>
             <a:fld id="{9906A608-925A-4874-BCA4-36BA40FADF76}" type="datetime1">
               <a:rPr lang="en-US" smtClean="0"/>
-              <a:t>12/11/2025</a:t>
+              <a:t>12/12/2025</a:t>
             </a:fld>
             <a:endParaRPr lang="en-US"/>
           </a:p>
@@ -2509,7 +2700,7 @@
           <a:p>
             <a:fld id="{45CCB426-3683-4E7C-B869-5155B20F8BC6}" type="datetime1">
               <a:rPr lang="en-US" smtClean="0"/>
-              <a:t>12/11/2025</a:t>
+              <a:t>12/12/2025</a:t>
             </a:fld>
             <a:endParaRPr lang="en-US"/>
           </a:p>
@@ -2786,7 +2977,7 @@
           <a:p>
             <a:fld id="{3351EA60-24F6-40E8-A0D7-2067F6ECA6B2}" type="datetime1">
               <a:rPr lang="en-US" smtClean="0"/>
-              <a:t>12/11/2025</a:t>
+              <a:t>12/12/2025</a:t>
             </a:fld>
             <a:endParaRPr lang="en-US"/>
           </a:p>
@@ -3043,7 +3234,7 @@
           <a:p>
             <a:fld id="{C6106440-8C5F-4111-9AD5-D0C1FDF01CE9}" type="datetime1">
               <a:rPr lang="en-US" smtClean="0"/>
-              <a:t>12/11/2025</a:t>
+              <a:t>12/12/2025</a:t>
             </a:fld>
             <a:endParaRPr lang="en-US"/>
           </a:p>
@@ -3259,7 +3450,7 @@
           <a:p>
             <a:fld id="{2A16FEB8-5B01-4F5E-B573-CC516A2AD5E4}" type="datetime1">
               <a:rPr lang="en-US" smtClean="0"/>
-              <a:t>12/11/2025</a:t>
+              <a:t>12/12/2025</a:t>
             </a:fld>
             <a:endParaRPr lang="en-US"/>
           </a:p>
@@ -11225,8 +11416,8 @@
         </p:nvSpPr>
         <p:spPr>
           <a:xfrm>
-            <a:off x="469556" y="1426522"/>
-            <a:ext cx="7488195" cy="4093428"/>
+            <a:off x="469556" y="1418284"/>
+            <a:ext cx="7817709" cy="3970318"/>
           </a:xfrm>
           <a:prstGeom prst="rect">
             <a:avLst/>
@@ -11244,36 +11435,20 @@
               <a:buChar char="•"/>
             </a:pPr>
             <a:r>
-              <a:rPr lang="pt-PT" sz="2000" noProof="1">
+              <a:rPr lang="pt-PT" noProof="1">
                 <a:solidFill>
                   <a:srgbClr val="002060"/>
                 </a:solidFill>
               </a:rPr>
-              <a:t>Consider two versions of the same program:</a:t>
-            </a:r>
-          </a:p>
-          <a:p>
-            <a:r>
-              <a:rPr lang="pt-PT" sz="2000" noProof="1">
-                <a:solidFill>
-                  <a:srgbClr val="002060"/>
-                </a:solidFill>
-              </a:rPr>
-              <a:t>		- One simple but slow (P1)</a:t>
-            </a:r>
-          </a:p>
-          <a:p>
-            <a:r>
-              <a:rPr lang="pt-PT" sz="2000" noProof="1">
-                <a:solidFill>
-                  <a:srgbClr val="002060"/>
-                </a:solidFill>
-              </a:rPr>
-              <a:t>		- Another complex but efficient (P2)</a:t>
-            </a:r>
-          </a:p>
-          <a:p>
-            <a:endParaRPr lang="pt-PT" sz="2000" noProof="1">
+              <a:t>Deductive verification’s most common way: just write and validate the proof of the program</a:t>
+            </a:r>
+          </a:p>
+          <a:p>
+            <a:pPr marL="342900" indent="-342900">
+              <a:buFont typeface="Arial" panose="020B0604020202020204" pitchFamily="34" charset="0"/>
+              <a:buChar char="•"/>
+            </a:pPr>
+            <a:endParaRPr lang="pt-PT" noProof="1">
               <a:solidFill>
                 <a:srgbClr val="002060"/>
               </a:solidFill>
@@ -11285,36 +11460,16 @@
               <a:buChar char="•"/>
             </a:pPr>
             <a:r>
-              <a:rPr lang="pt-PT" sz="2000" noProof="1">
+              <a:rPr lang="pt-PT" noProof="1">
                 <a:solidFill>
                   <a:srgbClr val="002060"/>
                 </a:solidFill>
               </a:rPr>
-              <a:t>How to prove correctness of P2?</a:t>
-            </a:r>
-          </a:p>
-          <a:p>
-            <a:r>
-              <a:rPr lang="pt-PT" sz="2000" noProof="1">
-                <a:solidFill>
-                  <a:srgbClr val="002060"/>
-                </a:solidFill>
-              </a:rPr>
-              <a:t>		- Common way: just write and validate the proof of P2</a:t>
-            </a:r>
-          </a:p>
-          <a:p>
-            <a:r>
-              <a:rPr lang="pt-PT" sz="2000" noProof="1">
-                <a:solidFill>
-                  <a:srgbClr val="002060"/>
-                </a:solidFill>
-              </a:rPr>
-              <a:t>		- Our approach: prove that P1 is correct and 					then establish that P1 and P2 are equivalente</a:t>
-            </a:r>
-          </a:p>
-          <a:p>
-            <a:endParaRPr lang="pt-PT" sz="2000" noProof="1">
+              <a:t>Consider a specific case where we have two versions of the same program: one simple but slow (P1) and another complex but efficient (P2)</a:t>
+            </a:r>
+          </a:p>
+          <a:p>
+            <a:endParaRPr lang="pt-PT" noProof="1">
               <a:solidFill>
                 <a:srgbClr val="002060"/>
               </a:solidFill>
@@ -11326,31 +11481,62 @@
               <a:buChar char="•"/>
             </a:pPr>
             <a:r>
-              <a:rPr lang="pt-PT" sz="2000" noProof="1">
+              <a:rPr lang="pt-PT" noProof="1">
                 <a:solidFill>
                   <a:srgbClr val="002060"/>
                 </a:solidFill>
               </a:rPr>
-              <a:t>Why? </a:t>
-            </a:r>
-          </a:p>
-          <a:p>
-            <a:pPr lvl="1"/>
-            <a:r>
-              <a:rPr lang="pt-PT" sz="2000" noProof="1">
+              <a:t>How to prove correctness of P2?</a:t>
+            </a:r>
+          </a:p>
+          <a:p>
+            <a:r>
+              <a:rPr lang="pt-PT" noProof="1">
                 <a:solidFill>
                   <a:srgbClr val="002060"/>
                 </a:solidFill>
               </a:rPr>
-              <a:t>	- Proving equivalence is often simpler than proving 	correctness of complex programs </a:t>
-            </a:r>
+              <a:t>		- Our approach: prove that P1 is correct and 							then establish that P1 and P2 are equivalent</a:t>
+            </a:r>
+          </a:p>
+          <a:p>
+            <a:endParaRPr lang="pt-PT" noProof="1">
+              <a:solidFill>
+                <a:srgbClr val="002060"/>
+              </a:solidFill>
+            </a:endParaRPr>
           </a:p>
           <a:p>
             <a:pPr marL="342900" indent="-342900">
               <a:buFont typeface="Arial" panose="020B0604020202020204" pitchFamily="34" charset="0"/>
               <a:buChar char="•"/>
             </a:pPr>
-            <a:endParaRPr lang="en-US" sz="2000" noProof="1">
+            <a:r>
+              <a:rPr lang="pt-PT" noProof="1">
+                <a:solidFill>
+                  <a:srgbClr val="002060"/>
+                </a:solidFill>
+              </a:rPr>
+              <a:t>Why? </a:t>
+            </a:r>
+          </a:p>
+          <a:p>
+            <a:pPr lvl="1"/>
+            <a:r>
+              <a:rPr lang="pt-PT" noProof="1">
+                <a:solidFill>
+                  <a:srgbClr val="002060"/>
+                </a:solidFill>
+              </a:rPr>
+              <a:t>	- Proving equivalence is often simpler than proving correctness of 	complex programs </a:t>
+            </a:r>
+          </a:p>
+          <a:p>
+            <a:pPr marL="342900" indent="-342900">
+              <a:buFont typeface="Arial" panose="020B0604020202020204" pitchFamily="34" charset="0"/>
+              <a:buChar char="•"/>
+            </a:pPr>
+            <a:endParaRPr lang="en-US" noProof="1">
               <a:solidFill>
                 <a:srgbClr val="002060"/>
               </a:solidFill>

--- a/tese/presentation/Ap Tese.pptx
+++ b/tese/presentation/Ap Tese.pptx
@@ -5076,6 +5076,71 @@
           </a:p>
         </p:txBody>
       </p:sp>
+      <p:sp>
+        <p:nvSpPr>
+          <p:cNvPr id="3" name="TextBox 2">
+            <a:extLst>
+              <a:ext uri="{FF2B5EF4-FFF2-40B4-BE49-F238E27FC236}">
+                <a16:creationId xmlns:a16="http://schemas.microsoft.com/office/drawing/2014/main" id="{C597DA71-1273-3210-1C7F-FE0FBEECE553}"/>
+              </a:ext>
+            </a:extLst>
+          </p:cNvPr>
+          <p:cNvSpPr txBox="1"/>
+          <p:nvPr/>
+        </p:nvSpPr>
+        <p:spPr>
+          <a:xfrm>
+            <a:off x="7526361" y="1671484"/>
+            <a:ext cx="988989" cy="369332"/>
+          </a:xfrm>
+          <a:prstGeom prst="rect">
+            <a:avLst/>
+          </a:prstGeom>
+          <a:solidFill>
+            <a:schemeClr val="accent2">
+              <a:alpha val="50000"/>
+            </a:schemeClr>
+          </a:solidFill>
+          <a:ln>
+            <a:noFill/>
+          </a:ln>
+        </p:spPr>
+        <p:style>
+          <a:lnRef idx="0">
+            <a:scrgbClr r="0" g="0" b="0"/>
+          </a:lnRef>
+          <a:fillRef idx="0">
+            <a:scrgbClr r="0" g="0" b="0"/>
+          </a:fillRef>
+          <a:effectRef idx="0">
+            <a:scrgbClr r="0" g="0" b="0"/>
+          </a:effectRef>
+          <a:fontRef idx="minor">
+            <a:schemeClr val="lt1"/>
+          </a:fontRef>
+        </p:style>
+        <p:txBody>
+          <a:bodyPr wrap="none" rtlCol="0">
+            <a:spAutoFit/>
+          </a:bodyPr>
+          <a:lstStyle/>
+          <a:p>
+            <a:r>
+              <a:rPr lang="pt-PT" i="1" dirty="0" err="1">
+                <a:solidFill>
+                  <a:srgbClr val="002060"/>
+                </a:solidFill>
+              </a:rPr>
+              <a:t>BipLang</a:t>
+            </a:r>
+            <a:endParaRPr lang="en-US" sz="2000" i="1" dirty="0">
+              <a:solidFill>
+                <a:srgbClr val="002060"/>
+              </a:solidFill>
+            </a:endParaRPr>
+          </a:p>
+        </p:txBody>
+      </p:sp>
     </p:spTree>
     <p:extLst>
       <p:ext uri="{BB962C8B-B14F-4D97-AF65-F5344CB8AC3E}">
@@ -5677,6 +5742,71 @@
           </a:p>
         </p:txBody>
       </p:sp>
+      <p:sp>
+        <p:nvSpPr>
+          <p:cNvPr id="8" name="TextBox 7">
+            <a:extLst>
+              <a:ext uri="{FF2B5EF4-FFF2-40B4-BE49-F238E27FC236}">
+                <a16:creationId xmlns:a16="http://schemas.microsoft.com/office/drawing/2014/main" id="{D2A91A72-6BB0-119F-C9A9-00CA1375CDD9}"/>
+              </a:ext>
+            </a:extLst>
+          </p:cNvPr>
+          <p:cNvSpPr txBox="1"/>
+          <p:nvPr/>
+        </p:nvSpPr>
+        <p:spPr>
+          <a:xfrm>
+            <a:off x="7622157" y="1655982"/>
+            <a:ext cx="893193" cy="369332"/>
+          </a:xfrm>
+          <a:prstGeom prst="rect">
+            <a:avLst/>
+          </a:prstGeom>
+          <a:solidFill>
+            <a:schemeClr val="accent2">
+              <a:alpha val="50000"/>
+            </a:schemeClr>
+          </a:solidFill>
+          <a:ln>
+            <a:noFill/>
+          </a:ln>
+        </p:spPr>
+        <p:style>
+          <a:lnRef idx="0">
+            <a:scrgbClr r="0" g="0" b="0"/>
+          </a:lnRef>
+          <a:fillRef idx="0">
+            <a:scrgbClr r="0" g="0" b="0"/>
+          </a:fillRef>
+          <a:effectRef idx="0">
+            <a:scrgbClr r="0" g="0" b="0"/>
+          </a:effectRef>
+          <a:fontRef idx="minor">
+            <a:schemeClr val="lt1"/>
+          </a:fontRef>
+        </p:style>
+        <p:txBody>
+          <a:bodyPr wrap="none" rtlCol="0">
+            <a:spAutoFit/>
+          </a:bodyPr>
+          <a:lstStyle/>
+          <a:p>
+            <a:r>
+              <a:rPr lang="pt-PT" i="1" dirty="0" err="1">
+                <a:solidFill>
+                  <a:srgbClr val="002060"/>
+                </a:solidFill>
+              </a:rPr>
+              <a:t>OCaml</a:t>
+            </a:r>
+            <a:endParaRPr lang="en-US" sz="2000" i="1" dirty="0">
+              <a:solidFill>
+                <a:srgbClr val="002060"/>
+              </a:solidFill>
+            </a:endParaRPr>
+          </a:p>
+        </p:txBody>
+      </p:sp>
     </p:spTree>
     <p:extLst>
       <p:ext uri="{BB962C8B-B14F-4D97-AF65-F5344CB8AC3E}">
@@ -6465,6 +6595,71 @@
           </a:p>
         </p:txBody>
       </p:sp>
+      <p:sp>
+        <p:nvSpPr>
+          <p:cNvPr id="6" name="TextBox 5">
+            <a:extLst>
+              <a:ext uri="{FF2B5EF4-FFF2-40B4-BE49-F238E27FC236}">
+                <a16:creationId xmlns:a16="http://schemas.microsoft.com/office/drawing/2014/main" id="{472D775F-0CDD-6342-FD8A-53E4ACA2EF82}"/>
+              </a:ext>
+            </a:extLst>
+          </p:cNvPr>
+          <p:cNvSpPr txBox="1"/>
+          <p:nvPr/>
+        </p:nvSpPr>
+        <p:spPr>
+          <a:xfrm>
+            <a:off x="5675340" y="4769081"/>
+            <a:ext cx="988989" cy="369332"/>
+          </a:xfrm>
+          <a:prstGeom prst="rect">
+            <a:avLst/>
+          </a:prstGeom>
+          <a:solidFill>
+            <a:schemeClr val="accent2">
+              <a:alpha val="50000"/>
+            </a:schemeClr>
+          </a:solidFill>
+          <a:ln>
+            <a:noFill/>
+          </a:ln>
+        </p:spPr>
+        <p:style>
+          <a:lnRef idx="0">
+            <a:scrgbClr r="0" g="0" b="0"/>
+          </a:lnRef>
+          <a:fillRef idx="0">
+            <a:scrgbClr r="0" g="0" b="0"/>
+          </a:fillRef>
+          <a:effectRef idx="0">
+            <a:scrgbClr r="0" g="0" b="0"/>
+          </a:effectRef>
+          <a:fontRef idx="minor">
+            <a:schemeClr val="lt1"/>
+          </a:fontRef>
+        </p:style>
+        <p:txBody>
+          <a:bodyPr wrap="none" rtlCol="0">
+            <a:spAutoFit/>
+          </a:bodyPr>
+          <a:lstStyle/>
+          <a:p>
+            <a:r>
+              <a:rPr lang="pt-PT" i="1" dirty="0" err="1">
+                <a:solidFill>
+                  <a:srgbClr val="002060"/>
+                </a:solidFill>
+              </a:rPr>
+              <a:t>BipLang</a:t>
+            </a:r>
+            <a:endParaRPr lang="en-US" sz="2000" i="1" dirty="0">
+              <a:solidFill>
+                <a:srgbClr val="002060"/>
+              </a:solidFill>
+            </a:endParaRPr>
+          </a:p>
+        </p:txBody>
+      </p:sp>
     </p:spTree>
     <p:extLst>
       <p:ext uri="{BB962C8B-B14F-4D97-AF65-F5344CB8AC3E}">
@@ -6869,6 +7064,71 @@
           <a:p>
             <a:pPr lvl="1"/>
             <a:endParaRPr lang="en-US" sz="1600" dirty="0"/>
+          </a:p>
+        </p:txBody>
+      </p:sp>
+      <p:sp>
+        <p:nvSpPr>
+          <p:cNvPr id="6" name="TextBox 5">
+            <a:extLst>
+              <a:ext uri="{FF2B5EF4-FFF2-40B4-BE49-F238E27FC236}">
+                <a16:creationId xmlns:a16="http://schemas.microsoft.com/office/drawing/2014/main" id="{3C3BBAB1-9BB1-87AE-7136-C7FFB1C9E165}"/>
+              </a:ext>
+            </a:extLst>
+          </p:cNvPr>
+          <p:cNvSpPr txBox="1"/>
+          <p:nvPr/>
+        </p:nvSpPr>
+        <p:spPr>
+          <a:xfrm>
+            <a:off x="5848592" y="4766089"/>
+            <a:ext cx="988989" cy="369332"/>
+          </a:xfrm>
+          <a:prstGeom prst="rect">
+            <a:avLst/>
+          </a:prstGeom>
+          <a:solidFill>
+            <a:schemeClr val="accent2">
+              <a:alpha val="50000"/>
+            </a:schemeClr>
+          </a:solidFill>
+          <a:ln>
+            <a:noFill/>
+          </a:ln>
+        </p:spPr>
+        <p:style>
+          <a:lnRef idx="0">
+            <a:scrgbClr r="0" g="0" b="0"/>
+          </a:lnRef>
+          <a:fillRef idx="0">
+            <a:scrgbClr r="0" g="0" b="0"/>
+          </a:fillRef>
+          <a:effectRef idx="0">
+            <a:scrgbClr r="0" g="0" b="0"/>
+          </a:effectRef>
+          <a:fontRef idx="minor">
+            <a:schemeClr val="lt1"/>
+          </a:fontRef>
+        </p:style>
+        <p:txBody>
+          <a:bodyPr wrap="none" rtlCol="0">
+            <a:spAutoFit/>
+          </a:bodyPr>
+          <a:lstStyle/>
+          <a:p>
+            <a:r>
+              <a:rPr lang="pt-PT" i="1" dirty="0" err="1">
+                <a:solidFill>
+                  <a:srgbClr val="002060"/>
+                </a:solidFill>
+              </a:rPr>
+              <a:t>BipLang</a:t>
+            </a:r>
+            <a:endParaRPr lang="en-US" sz="2000" i="1" dirty="0">
+              <a:solidFill>
+                <a:srgbClr val="002060"/>
+              </a:solidFill>
+            </a:endParaRPr>
           </a:p>
         </p:txBody>
       </p:sp>
@@ -7939,6 +8199,71 @@
               <a:t> *)</a:t>
             </a:r>
             <a:endParaRPr lang="en-US" sz="1600" dirty="0"/>
+          </a:p>
+        </p:txBody>
+      </p:sp>
+      <p:sp>
+        <p:nvSpPr>
+          <p:cNvPr id="6" name="TextBox 5">
+            <a:extLst>
+              <a:ext uri="{FF2B5EF4-FFF2-40B4-BE49-F238E27FC236}">
+                <a16:creationId xmlns:a16="http://schemas.microsoft.com/office/drawing/2014/main" id="{838FCAC9-C901-F459-CCA7-1F7718B712A7}"/>
+              </a:ext>
+            </a:extLst>
+          </p:cNvPr>
+          <p:cNvSpPr txBox="1"/>
+          <p:nvPr/>
+        </p:nvSpPr>
+        <p:spPr>
+          <a:xfrm>
+            <a:off x="7081879" y="4479437"/>
+            <a:ext cx="988989" cy="369332"/>
+          </a:xfrm>
+          <a:prstGeom prst="rect">
+            <a:avLst/>
+          </a:prstGeom>
+          <a:solidFill>
+            <a:schemeClr val="accent2">
+              <a:alpha val="50000"/>
+            </a:schemeClr>
+          </a:solidFill>
+          <a:ln>
+            <a:noFill/>
+          </a:ln>
+        </p:spPr>
+        <p:style>
+          <a:lnRef idx="0">
+            <a:scrgbClr r="0" g="0" b="0"/>
+          </a:lnRef>
+          <a:fillRef idx="0">
+            <a:scrgbClr r="0" g="0" b="0"/>
+          </a:fillRef>
+          <a:effectRef idx="0">
+            <a:scrgbClr r="0" g="0" b="0"/>
+          </a:effectRef>
+          <a:fontRef idx="minor">
+            <a:schemeClr val="lt1"/>
+          </a:fontRef>
+        </p:style>
+        <p:txBody>
+          <a:bodyPr wrap="none" rtlCol="0">
+            <a:spAutoFit/>
+          </a:bodyPr>
+          <a:lstStyle/>
+          <a:p>
+            <a:r>
+              <a:rPr lang="pt-PT" i="1" dirty="0" err="1">
+                <a:solidFill>
+                  <a:srgbClr val="002060"/>
+                </a:solidFill>
+              </a:rPr>
+              <a:t>BipLang</a:t>
+            </a:r>
+            <a:endParaRPr lang="en-US" sz="2000" i="1" dirty="0">
+              <a:solidFill>
+                <a:srgbClr val="002060"/>
+              </a:solidFill>
+            </a:endParaRPr>
           </a:p>
         </p:txBody>
       </p:sp>
@@ -9173,6 +9498,71 @@
           </a:p>
         </p:txBody>
       </p:sp>
+      <p:sp>
+        <p:nvSpPr>
+          <p:cNvPr id="7" name="TextBox 6">
+            <a:extLst>
+              <a:ext uri="{FF2B5EF4-FFF2-40B4-BE49-F238E27FC236}">
+                <a16:creationId xmlns:a16="http://schemas.microsoft.com/office/drawing/2014/main" id="{47FC79D1-0BBA-9A75-2C5C-88391008E030}"/>
+              </a:ext>
+            </a:extLst>
+          </p:cNvPr>
+          <p:cNvSpPr txBox="1"/>
+          <p:nvPr/>
+        </p:nvSpPr>
+        <p:spPr>
+          <a:xfrm>
+            <a:off x="7421762" y="4321877"/>
+            <a:ext cx="893193" cy="369332"/>
+          </a:xfrm>
+          <a:prstGeom prst="rect">
+            <a:avLst/>
+          </a:prstGeom>
+          <a:solidFill>
+            <a:schemeClr val="accent2">
+              <a:alpha val="50000"/>
+            </a:schemeClr>
+          </a:solidFill>
+          <a:ln>
+            <a:noFill/>
+          </a:ln>
+        </p:spPr>
+        <p:style>
+          <a:lnRef idx="0">
+            <a:scrgbClr r="0" g="0" b="0"/>
+          </a:lnRef>
+          <a:fillRef idx="0">
+            <a:scrgbClr r="0" g="0" b="0"/>
+          </a:fillRef>
+          <a:effectRef idx="0">
+            <a:scrgbClr r="0" g="0" b="0"/>
+          </a:effectRef>
+          <a:fontRef idx="minor">
+            <a:schemeClr val="lt1"/>
+          </a:fontRef>
+        </p:style>
+        <p:txBody>
+          <a:bodyPr wrap="none" rtlCol="0">
+            <a:spAutoFit/>
+          </a:bodyPr>
+          <a:lstStyle/>
+          <a:p>
+            <a:r>
+              <a:rPr lang="pt-PT" i="1" dirty="0" err="1">
+                <a:solidFill>
+                  <a:srgbClr val="002060"/>
+                </a:solidFill>
+              </a:rPr>
+              <a:t>OCaml</a:t>
+            </a:r>
+            <a:endParaRPr lang="en-US" sz="2000" i="1" dirty="0">
+              <a:solidFill>
+                <a:srgbClr val="002060"/>
+              </a:solidFill>
+            </a:endParaRPr>
+          </a:p>
+        </p:txBody>
+      </p:sp>
     </p:spTree>
     <p:extLst>
       <p:ext uri="{BB962C8B-B14F-4D97-AF65-F5344CB8AC3E}">
@@ -9887,6 +10277,71 @@
               <a:t> *)</a:t>
             </a:r>
             <a:endParaRPr lang="en-US" sz="1600" dirty="0"/>
+          </a:p>
+        </p:txBody>
+      </p:sp>
+      <p:sp>
+        <p:nvSpPr>
+          <p:cNvPr id="7" name="TextBox 6">
+            <a:extLst>
+              <a:ext uri="{FF2B5EF4-FFF2-40B4-BE49-F238E27FC236}">
+                <a16:creationId xmlns:a16="http://schemas.microsoft.com/office/drawing/2014/main" id="{ABA848BC-854F-4F5E-1390-34D1893D54A5}"/>
+              </a:ext>
+            </a:extLst>
+          </p:cNvPr>
+          <p:cNvSpPr txBox="1"/>
+          <p:nvPr/>
+        </p:nvSpPr>
+        <p:spPr>
+          <a:xfrm>
+            <a:off x="7486650" y="1936811"/>
+            <a:ext cx="893193" cy="369332"/>
+          </a:xfrm>
+          <a:prstGeom prst="rect">
+            <a:avLst/>
+          </a:prstGeom>
+          <a:solidFill>
+            <a:schemeClr val="accent2">
+              <a:alpha val="50000"/>
+            </a:schemeClr>
+          </a:solidFill>
+          <a:ln>
+            <a:noFill/>
+          </a:ln>
+        </p:spPr>
+        <p:style>
+          <a:lnRef idx="0">
+            <a:scrgbClr r="0" g="0" b="0"/>
+          </a:lnRef>
+          <a:fillRef idx="0">
+            <a:scrgbClr r="0" g="0" b="0"/>
+          </a:fillRef>
+          <a:effectRef idx="0">
+            <a:scrgbClr r="0" g="0" b="0"/>
+          </a:effectRef>
+          <a:fontRef idx="minor">
+            <a:schemeClr val="lt1"/>
+          </a:fontRef>
+        </p:style>
+        <p:txBody>
+          <a:bodyPr wrap="none" rtlCol="0">
+            <a:spAutoFit/>
+          </a:bodyPr>
+          <a:lstStyle/>
+          <a:p>
+            <a:r>
+              <a:rPr lang="pt-PT" i="1" dirty="0" err="1">
+                <a:solidFill>
+                  <a:srgbClr val="002060"/>
+                </a:solidFill>
+              </a:rPr>
+              <a:t>OCaml</a:t>
+            </a:r>
+            <a:endParaRPr lang="en-US" sz="2000" i="1" dirty="0">
+              <a:solidFill>
+                <a:srgbClr val="002060"/>
+              </a:solidFill>
+            </a:endParaRPr>
           </a:p>
         </p:txBody>
       </p:sp>

--- a/tese/presentation/Ap Tese.pptx
+++ b/tese/presentation/Ap Tese.pptx
@@ -224,7 +224,7 @@
           <a:p>
             <a:fld id="{374D7271-F55A-4686-93D9-9528AEDA1906}" type="datetimeFigureOut">
               <a:rPr lang="en-US" smtClean="0"/>
-              <a:t>12/12/2025</a:t>
+              <a:t>12/13/2025</a:t>
             </a:fld>
             <a:endParaRPr lang="en-US"/>
           </a:p>
@@ -536,113 +536,29 @@
           <a:lstStyle/>
           <a:p>
             <a:r>
-              <a:rPr lang="en-US" dirty="0"/>
-              <a:t>Quando </a:t>
-            </a:r>
-            <a:r>
-              <a:rPr lang="en-US" dirty="0" err="1"/>
-              <a:t>falamos</a:t>
-            </a:r>
-            <a:r>
-              <a:rPr lang="en-US" dirty="0"/>
-              <a:t> </a:t>
-            </a:r>
-            <a:r>
-              <a:rPr lang="en-US" dirty="0" err="1"/>
-              <a:t>em</a:t>
-            </a:r>
-            <a:r>
-              <a:rPr lang="en-US" dirty="0"/>
-              <a:t> </a:t>
-            </a:r>
-            <a:r>
-              <a:rPr lang="en-US" dirty="0" err="1"/>
-              <a:t>prova</a:t>
-            </a:r>
-            <a:r>
-              <a:rPr lang="en-US" dirty="0"/>
-              <a:t> </a:t>
-            </a:r>
-            <a:r>
-              <a:rPr lang="en-US" dirty="0" err="1"/>
-              <a:t>automática</a:t>
-            </a:r>
-            <a:r>
-              <a:rPr lang="en-US" dirty="0"/>
-              <a:t> de </a:t>
-            </a:r>
-            <a:r>
-              <a:rPr lang="en-US" dirty="0" err="1"/>
-              <a:t>equivalência</a:t>
-            </a:r>
-            <a:r>
-              <a:rPr lang="en-US" dirty="0"/>
-              <a:t>, </a:t>
-            </a:r>
-            <a:r>
-              <a:rPr lang="en-US" dirty="0" err="1"/>
-              <a:t>queremos</a:t>
-            </a:r>
-            <a:r>
-              <a:rPr lang="en-US" dirty="0"/>
-              <a:t> </a:t>
-            </a:r>
-            <a:r>
-              <a:rPr lang="en-US" dirty="0" err="1"/>
-              <a:t>dizer</a:t>
-            </a:r>
-            <a:r>
-              <a:rPr lang="en-US" dirty="0"/>
-              <a:t> </a:t>
-            </a:r>
-            <a:r>
-              <a:rPr lang="en-US" dirty="0" err="1"/>
-              <a:t>sem</a:t>
-            </a:r>
-            <a:r>
-              <a:rPr lang="en-US" dirty="0"/>
-              <a:t> </a:t>
-            </a:r>
-            <a:r>
-              <a:rPr lang="en-US" dirty="0" err="1"/>
-              <a:t>interação</a:t>
-            </a:r>
-            <a:r>
-              <a:rPr lang="en-US" dirty="0"/>
-              <a:t> do </a:t>
-            </a:r>
-            <a:r>
-              <a:rPr lang="en-US" dirty="0" err="1"/>
-              <a:t>utilizador</a:t>
-            </a:r>
-            <a:r>
-              <a:rPr lang="en-US" dirty="0"/>
-              <a:t> </a:t>
-            </a:r>
-            <a:r>
-              <a:rPr lang="en-US" dirty="0" err="1"/>
-              <a:t>depois</a:t>
-            </a:r>
-            <a:r>
-              <a:rPr lang="en-US" dirty="0"/>
-              <a:t> da </a:t>
-            </a:r>
-            <a:r>
-              <a:rPr lang="en-US" dirty="0" err="1"/>
-              <a:t>escrita</a:t>
-            </a:r>
-            <a:r>
-              <a:rPr lang="en-US" dirty="0"/>
-              <a:t> da </a:t>
-            </a:r>
-            <a:r>
-              <a:rPr lang="en-US" dirty="0" err="1"/>
-              <a:t>especificação</a:t>
-            </a:r>
-            <a:r>
-              <a:rPr lang="en-US" dirty="0"/>
-              <a:t>.</a:t>
-            </a:r>
+              <a:rPr lang="pt-PT" dirty="0"/>
+              <a:t>Todos nós já passámos por situações em que percebemos um erro nalgum tipo de software, seja um site, aplicação ou jogo.</a:t>
+            </a:r>
+          </a:p>
+          <a:p>
+            <a:r>
+              <a:rPr lang="pt-PT" dirty="0"/>
+              <a:t>Alguns destes casos incluem, por exemplo, bugs irritantes num jogo que nos fazem perder uma partida ou problemas em aplicações de entrega de comida ao domicílio que nos fazem ficar sem almoço ou que, pelo menos, este demore mais tempo a chegar.</a:t>
+            </a:r>
+          </a:p>
+          <a:p>
+            <a:r>
+              <a:rPr lang="pt-PT" dirty="0"/>
+              <a:t>No entanto, nenhuma destas situações é comparável a casos em que erros de software levam a perda de vidas humanas ou </a:t>
+            </a:r>
+            <a:r>
+              <a:rPr lang="pt-PT"/>
+              <a:t>expressivos danos económicos.</a:t>
+            </a:r>
+            <a:endParaRPr lang="pt-PT" dirty="0"/>
+          </a:p>
+          <a:p>
+            <a:endParaRPr lang="en-US" dirty="0"/>
           </a:p>
         </p:txBody>
       </p:sp>
@@ -663,7 +579,7 @@
           <a:p>
             <a:fld id="{0B3F2602-38FE-4418-A7EF-ADB22DAE42F9}" type="slidenum">
               <a:rPr lang="en-US" smtClean="0"/>
-              <a:t>4</a:t>
+              <a:t>2</a:t>
             </a:fld>
             <a:endParaRPr lang="en-US"/>
           </a:p>
@@ -672,7 +588,7 @@
     </p:spTree>
     <p:extLst>
       <p:ext uri="{BB962C8B-B14F-4D97-AF65-F5344CB8AC3E}">
-        <p14:creationId xmlns:p14="http://schemas.microsoft.com/office/powerpoint/2010/main" val="274053569"/>
+        <p14:creationId xmlns:p14="http://schemas.microsoft.com/office/powerpoint/2010/main" val="938671169"/>
       </p:ext>
     </p:extLst>
   </p:cSld>
@@ -726,6 +642,197 @@
           <a:bodyPr/>
           <a:lstStyle/>
           <a:p>
+            <a:r>
+              <a:rPr lang="en-US" dirty="0"/>
+              <a:t>Quando </a:t>
+            </a:r>
+            <a:r>
+              <a:rPr lang="en-US" dirty="0" err="1"/>
+              <a:t>falamos</a:t>
+            </a:r>
+            <a:r>
+              <a:rPr lang="en-US" dirty="0"/>
+              <a:t> </a:t>
+            </a:r>
+            <a:r>
+              <a:rPr lang="en-US" dirty="0" err="1"/>
+              <a:t>em</a:t>
+            </a:r>
+            <a:r>
+              <a:rPr lang="en-US" dirty="0"/>
+              <a:t> </a:t>
+            </a:r>
+            <a:r>
+              <a:rPr lang="en-US" dirty="0" err="1"/>
+              <a:t>prova</a:t>
+            </a:r>
+            <a:r>
+              <a:rPr lang="en-US" dirty="0"/>
+              <a:t> </a:t>
+            </a:r>
+            <a:r>
+              <a:rPr lang="en-US" dirty="0" err="1"/>
+              <a:t>automática</a:t>
+            </a:r>
+            <a:r>
+              <a:rPr lang="en-US" dirty="0"/>
+              <a:t> de </a:t>
+            </a:r>
+            <a:r>
+              <a:rPr lang="en-US" dirty="0" err="1"/>
+              <a:t>equivalência</a:t>
+            </a:r>
+            <a:r>
+              <a:rPr lang="en-US" dirty="0"/>
+              <a:t>, </a:t>
+            </a:r>
+            <a:r>
+              <a:rPr lang="en-US" dirty="0" err="1"/>
+              <a:t>queremos</a:t>
+            </a:r>
+            <a:r>
+              <a:rPr lang="en-US" dirty="0"/>
+              <a:t> </a:t>
+            </a:r>
+            <a:r>
+              <a:rPr lang="en-US" dirty="0" err="1"/>
+              <a:t>dizer</a:t>
+            </a:r>
+            <a:r>
+              <a:rPr lang="en-US" dirty="0"/>
+              <a:t> </a:t>
+            </a:r>
+            <a:r>
+              <a:rPr lang="en-US" dirty="0" err="1"/>
+              <a:t>sem</a:t>
+            </a:r>
+            <a:r>
+              <a:rPr lang="en-US" dirty="0"/>
+              <a:t> </a:t>
+            </a:r>
+            <a:r>
+              <a:rPr lang="en-US" dirty="0" err="1"/>
+              <a:t>interação</a:t>
+            </a:r>
+            <a:r>
+              <a:rPr lang="en-US" dirty="0"/>
+              <a:t> do </a:t>
+            </a:r>
+            <a:r>
+              <a:rPr lang="en-US" dirty="0" err="1"/>
+              <a:t>utilizador</a:t>
+            </a:r>
+            <a:r>
+              <a:rPr lang="en-US" dirty="0"/>
+              <a:t> </a:t>
+            </a:r>
+            <a:r>
+              <a:rPr lang="en-US" dirty="0" err="1"/>
+              <a:t>depois</a:t>
+            </a:r>
+            <a:r>
+              <a:rPr lang="en-US" dirty="0"/>
+              <a:t> da </a:t>
+            </a:r>
+            <a:r>
+              <a:rPr lang="en-US" dirty="0" err="1"/>
+              <a:t>escrita</a:t>
+            </a:r>
+            <a:r>
+              <a:rPr lang="en-US" dirty="0"/>
+              <a:t> da </a:t>
+            </a:r>
+            <a:r>
+              <a:rPr lang="en-US" dirty="0" err="1"/>
+              <a:t>especificação</a:t>
+            </a:r>
+            <a:r>
+              <a:rPr lang="en-US" dirty="0"/>
+              <a:t>.</a:t>
+            </a:r>
+          </a:p>
+        </p:txBody>
+      </p:sp>
+      <p:sp>
+        <p:nvSpPr>
+          <p:cNvPr id="4" name="Slide Number Placeholder 3"/>
+          <p:cNvSpPr>
+            <a:spLocks noGrp="1"/>
+          </p:cNvSpPr>
+          <p:nvPr>
+            <p:ph type="sldNum" sz="quarter" idx="5"/>
+          </p:nvPr>
+        </p:nvSpPr>
+        <p:spPr/>
+        <p:txBody>
+          <a:bodyPr/>
+          <a:lstStyle/>
+          <a:p>
+            <a:fld id="{0B3F2602-38FE-4418-A7EF-ADB22DAE42F9}" type="slidenum">
+              <a:rPr lang="en-US" smtClean="0"/>
+              <a:t>4</a:t>
+            </a:fld>
+            <a:endParaRPr lang="en-US"/>
+          </a:p>
+        </p:txBody>
+      </p:sp>
+    </p:spTree>
+    <p:extLst>
+      <p:ext uri="{BB962C8B-B14F-4D97-AF65-F5344CB8AC3E}">
+        <p14:creationId xmlns:p14="http://schemas.microsoft.com/office/powerpoint/2010/main" val="274053569"/>
+      </p:ext>
+    </p:extLst>
+  </p:cSld>
+  <p:clrMapOvr>
+    <a:masterClrMapping/>
+  </p:clrMapOvr>
+</p:notes>
+</file>
+
+<file path=ppt/notesSlides/notesSlide3.xml><?xml version="1.0" encoding="utf-8"?>
+<p:notes xmlns:a="http://schemas.openxmlformats.org/drawingml/2006/main" xmlns:r="http://schemas.openxmlformats.org/officeDocument/2006/relationships" xmlns:p="http://schemas.openxmlformats.org/presentationml/2006/main">
+  <p:cSld>
+    <p:spTree>
+      <p:nvGrpSpPr>
+        <p:cNvPr id="1" name=""/>
+        <p:cNvGrpSpPr/>
+        <p:nvPr/>
+      </p:nvGrpSpPr>
+      <p:grpSpPr>
+        <a:xfrm>
+          <a:off x="0" y="0"/>
+          <a:ext cx="0" cy="0"/>
+          <a:chOff x="0" y="0"/>
+          <a:chExt cx="0" cy="0"/>
+        </a:xfrm>
+      </p:grpSpPr>
+      <p:sp>
+        <p:nvSpPr>
+          <p:cNvPr id="2" name="Slide Image Placeholder 1"/>
+          <p:cNvSpPr>
+            <a:spLocks noGrp="1" noRot="1" noChangeAspect="1"/>
+          </p:cNvSpPr>
+          <p:nvPr>
+            <p:ph type="sldImg"/>
+          </p:nvPr>
+        </p:nvSpPr>
+        <p:spPr/>
+      </p:sp>
+      <p:sp>
+        <p:nvSpPr>
+          <p:cNvPr id="3" name="Notes Placeholder 2"/>
+          <p:cNvSpPr>
+            <a:spLocks noGrp="1"/>
+          </p:cNvSpPr>
+          <p:nvPr>
+            <p:ph type="body" idx="1"/>
+          </p:nvPr>
+        </p:nvSpPr>
+        <p:spPr/>
+        <p:txBody>
+          <a:bodyPr/>
+          <a:lstStyle/>
+          <a:p>
             <a:endParaRPr lang="en-US" dirty="0"/>
           </a:p>
         </p:txBody>
@@ -766,7 +873,7 @@
 </p:notes>
 </file>
 
-<file path=ppt/notesSlides/notesSlide3.xml><?xml version="1.0" encoding="utf-8"?>
+<file path=ppt/notesSlides/notesSlide4.xml><?xml version="1.0" encoding="utf-8"?>
 <p:notes xmlns:a="http://schemas.openxmlformats.org/drawingml/2006/main" xmlns:r="http://schemas.openxmlformats.org/officeDocument/2006/relationships" xmlns:p="http://schemas.openxmlformats.org/presentationml/2006/main">
   <p:cSld>
     <p:spTree>
@@ -874,7 +981,7 @@
 </p:notes>
 </file>
 
-<file path=ppt/notesSlides/notesSlide4.xml><?xml version="1.0" encoding="utf-8"?>
+<file path=ppt/notesSlides/notesSlide5.xml><?xml version="1.0" encoding="utf-8"?>
 <p:notes xmlns:a="http://schemas.openxmlformats.org/drawingml/2006/main" xmlns:r="http://schemas.openxmlformats.org/officeDocument/2006/relationships" xmlns:p="http://schemas.openxmlformats.org/presentationml/2006/main">
   <p:cSld>
     <p:spTree>
@@ -1113,7 +1220,7 @@
           <a:p>
             <a:fld id="{1E5BF2F9-84AD-46CB-8486-EB732804F762}" type="datetime1">
               <a:rPr lang="en-US" smtClean="0"/>
-              <a:t>12/12/2025</a:t>
+              <a:t>12/13/2025</a:t>
             </a:fld>
             <a:endParaRPr lang="en-US"/>
           </a:p>
@@ -1292,7 +1399,7 @@
           <a:p>
             <a:fld id="{23618752-90E6-4B57-86C0-C43DD2320A2D}" type="datetime1">
               <a:rPr lang="en-US" smtClean="0"/>
-              <a:t>12/12/2025</a:t>
+              <a:t>12/13/2025</a:t>
             </a:fld>
             <a:endParaRPr lang="en-US"/>
           </a:p>
@@ -1472,7 +1579,7 @@
           <a:p>
             <a:fld id="{85BE5269-252E-4ABC-B047-AD967E98EA5E}" type="datetime1">
               <a:rPr lang="en-US" smtClean="0"/>
-              <a:t>12/12/2025</a:t>
+              <a:t>12/13/2025</a:t>
             </a:fld>
             <a:endParaRPr lang="en-US"/>
           </a:p>
@@ -1642,7 +1749,7 @@
           <a:p>
             <a:fld id="{C4D54784-9B75-4DBC-ACA0-9F51227CD78F}" type="datetime1">
               <a:rPr lang="en-US" smtClean="0"/>
-              <a:t>12/12/2025</a:t>
+              <a:t>12/13/2025</a:t>
             </a:fld>
             <a:endParaRPr lang="en-US"/>
           </a:p>
@@ -1888,7 +1995,7 @@
           <a:p>
             <a:fld id="{3D9E4D52-32DE-4F35-8CB6-5A44573D3FC9}" type="datetime1">
               <a:rPr lang="en-US" smtClean="0"/>
-              <a:t>12/12/2025</a:t>
+              <a:t>12/13/2025</a:t>
             </a:fld>
             <a:endParaRPr lang="en-US"/>
           </a:p>
@@ -2120,7 +2227,7 @@
           <a:p>
             <a:fld id="{D0FFB22E-8A21-4AF6-BDE0-993A2F9B14BB}" type="datetime1">
               <a:rPr lang="en-US" smtClean="0"/>
-              <a:t>12/12/2025</a:t>
+              <a:t>12/13/2025</a:t>
             </a:fld>
             <a:endParaRPr lang="en-US"/>
           </a:p>
@@ -2487,7 +2594,7 @@
           <a:p>
             <a:fld id="{AC41D9E4-527D-47F1-B47F-963D62CCBC76}" type="datetime1">
               <a:rPr lang="en-US" smtClean="0"/>
-              <a:t>12/12/2025</a:t>
+              <a:t>12/13/2025</a:t>
             </a:fld>
             <a:endParaRPr lang="en-US"/>
           </a:p>
@@ -2605,7 +2712,7 @@
           <a:p>
             <a:fld id="{9906A608-925A-4874-BCA4-36BA40FADF76}" type="datetime1">
               <a:rPr lang="en-US" smtClean="0"/>
-              <a:t>12/12/2025</a:t>
+              <a:t>12/13/2025</a:t>
             </a:fld>
             <a:endParaRPr lang="en-US"/>
           </a:p>
@@ -2700,7 +2807,7 @@
           <a:p>
             <a:fld id="{45CCB426-3683-4E7C-B869-5155B20F8BC6}" type="datetime1">
               <a:rPr lang="en-US" smtClean="0"/>
-              <a:t>12/12/2025</a:t>
+              <a:t>12/13/2025</a:t>
             </a:fld>
             <a:endParaRPr lang="en-US"/>
           </a:p>
@@ -2977,7 +3084,7 @@
           <a:p>
             <a:fld id="{3351EA60-24F6-40E8-A0D7-2067F6ECA6B2}" type="datetime1">
               <a:rPr lang="en-US" smtClean="0"/>
-              <a:t>12/12/2025</a:t>
+              <a:t>12/13/2025</a:t>
             </a:fld>
             <a:endParaRPr lang="en-US"/>
           </a:p>
@@ -3234,7 +3341,7 @@
           <a:p>
             <a:fld id="{C6106440-8C5F-4111-9AD5-D0C1FDF01CE9}" type="datetime1">
               <a:rPr lang="en-US" smtClean="0"/>
-              <a:t>12/12/2025</a:t>
+              <a:t>12/13/2025</a:t>
             </a:fld>
             <a:endParaRPr lang="en-US"/>
           </a:p>
@@ -3450,7 +3557,7 @@
           <a:p>
             <a:fld id="{2A16FEB8-5B01-4F5E-B573-CC516A2AD5E4}" type="datetime1">
               <a:rPr lang="en-US" smtClean="0"/>
-              <a:t>12/12/2025</a:t>
+              <a:t>12/13/2025</a:t>
             </a:fld>
             <a:endParaRPr lang="en-US"/>
           </a:p>
@@ -4965,7 +5072,39 @@
                   <a:srgbClr val="002060"/>
                 </a:solidFill>
               </a:rPr>
-              <a:t> example (|_ x : int _|) : |_ int _| = </a:t>
+              <a:t> example (|_ x : </a:t>
+            </a:r>
+            <a:r>
+              <a:rPr lang="en-US" sz="2000" noProof="1">
+                <a:solidFill>
+                  <a:srgbClr val="F3530B"/>
+                </a:solidFill>
+              </a:rPr>
+              <a:t>int</a:t>
+            </a:r>
+            <a:r>
+              <a:rPr lang="en-US" sz="2000" noProof="1">
+                <a:solidFill>
+                  <a:srgbClr val="002060"/>
+                </a:solidFill>
+              </a:rPr>
+              <a:t> _|) : |_ </a:t>
+            </a:r>
+            <a:r>
+              <a:rPr lang="en-US" sz="2000" noProof="1">
+                <a:solidFill>
+                  <a:srgbClr val="F3530B"/>
+                </a:solidFill>
+              </a:rPr>
+              <a:t>int</a:t>
+            </a:r>
+            <a:r>
+              <a:rPr lang="en-US" sz="2000" noProof="1">
+                <a:solidFill>
+                  <a:srgbClr val="002060"/>
+                </a:solidFill>
+              </a:rPr>
+              <a:t> _| = </a:t>
             </a:r>
             <a:r>
               <a:rPr lang="en-US" sz="2000" noProof="1">
@@ -5288,7 +5427,71 @@
                   <a:srgbClr val="002060"/>
                 </a:solidFill>
               </a:rPr>
-              <a:t> example (x_l : int) (x_r : int) : int * int =</a:t>
+              <a:t> example (x_l : </a:t>
+            </a:r>
+            <a:r>
+              <a:rPr lang="en-US" sz="2000" noProof="1">
+                <a:solidFill>
+                  <a:srgbClr val="F3530B"/>
+                </a:solidFill>
+              </a:rPr>
+              <a:t>int</a:t>
+            </a:r>
+            <a:r>
+              <a:rPr lang="en-US" sz="2000" noProof="1">
+                <a:solidFill>
+                  <a:srgbClr val="002060"/>
+                </a:solidFill>
+              </a:rPr>
+              <a:t>) (x_r : </a:t>
+            </a:r>
+            <a:r>
+              <a:rPr lang="en-US" sz="2000" noProof="1">
+                <a:solidFill>
+                  <a:srgbClr val="F3530B"/>
+                </a:solidFill>
+              </a:rPr>
+              <a:t>int</a:t>
+            </a:r>
+            <a:r>
+              <a:rPr lang="en-US" sz="2000" noProof="1">
+                <a:solidFill>
+                  <a:srgbClr val="002060"/>
+                </a:solidFill>
+              </a:rPr>
+              <a:t>) : </a:t>
+            </a:r>
+            <a:r>
+              <a:rPr lang="en-US" sz="2000" noProof="1">
+                <a:solidFill>
+                  <a:srgbClr val="F3530B"/>
+                </a:solidFill>
+              </a:rPr>
+              <a:t>int</a:t>
+            </a:r>
+            <a:r>
+              <a:rPr lang="en-US" sz="2000" noProof="1">
+                <a:solidFill>
+                  <a:srgbClr val="002060"/>
+                </a:solidFill>
+              </a:rPr>
+              <a:t> * </a:t>
+            </a:r>
+            <a:r>
+              <a:rPr lang="en-US" sz="2000" noProof="1">
+                <a:solidFill>
+                  <a:srgbClr val="F3530B"/>
+                </a:solidFill>
+              </a:rPr>
+              <a:t>int</a:t>
+            </a:r>
+            <a:r>
+              <a:rPr lang="en-US" sz="2000" noProof="1">
+                <a:solidFill>
+                  <a:srgbClr val="002060"/>
+                </a:solidFill>
+              </a:rPr>
+              <a:t> =</a:t>
             </a:r>
           </a:p>
           <a:p>
@@ -6026,8 +6229,8 @@
         </p:nvSpPr>
         <p:spPr>
           <a:xfrm>
-            <a:off x="1198606" y="2145439"/>
-            <a:ext cx="6746788" cy="830997"/>
+            <a:off x="861240" y="2145439"/>
+            <a:ext cx="7421519" cy="830997"/>
           </a:xfrm>
           <a:prstGeom prst="rect">
             <a:avLst/>
@@ -6040,7 +6243,10 @@
           </a:bodyPr>
           <a:lstStyle/>
           <a:p>
-            <a:pPr algn="ctr"/>
+            <a:pPr marL="685800" indent="-685800" algn="ctr">
+              <a:buFont typeface="Wingdings" panose="05000000000000000000" pitchFamily="2" charset="2"/>
+              <a:buChar char="Ø"/>
+            </a:pPr>
             <a:r>
               <a:rPr lang="en-US" sz="4800" noProof="1">
                 <a:solidFill>

--- a/tese/presentation/Ap Tese.pptx
+++ b/tese/presentation/Ap Tese.pptx
@@ -224,7 +224,7 @@
           <a:p>
             <a:fld id="{374D7271-F55A-4686-93D9-9528AEDA1906}" type="datetimeFigureOut">
               <a:rPr lang="en-US" smtClean="0"/>
-              <a:t>12/13/2025</a:t>
+              <a:t>12/15/2025</a:t>
             </a:fld>
             <a:endParaRPr lang="en-US"/>
           </a:p>
@@ -535,29 +535,6 @@
           <a:bodyPr/>
           <a:lstStyle/>
           <a:p>
-            <a:r>
-              <a:rPr lang="pt-PT" dirty="0"/>
-              <a:t>Todos nós já passámos por situações em que percebemos um erro nalgum tipo de software, seja um site, aplicação ou jogo.</a:t>
-            </a:r>
-          </a:p>
-          <a:p>
-            <a:r>
-              <a:rPr lang="pt-PT" dirty="0"/>
-              <a:t>Alguns destes casos incluem, por exemplo, bugs irritantes num jogo que nos fazem perder uma partida ou problemas em aplicações de entrega de comida ao domicílio que nos fazem ficar sem almoço ou que, pelo menos, este demore mais tempo a chegar.</a:t>
-            </a:r>
-          </a:p>
-          <a:p>
-            <a:r>
-              <a:rPr lang="pt-PT" dirty="0"/>
-              <a:t>No entanto, nenhuma destas situações é comparável a casos em que erros de software levam a perda de vidas humanas ou </a:t>
-            </a:r>
-            <a:r>
-              <a:rPr lang="pt-PT"/>
-              <a:t>expressivos danos económicos.</a:t>
-            </a:r>
-            <a:endParaRPr lang="pt-PT" dirty="0"/>
-          </a:p>
-          <a:p>
             <a:endParaRPr lang="en-US" dirty="0"/>
           </a:p>
         </p:txBody>
@@ -579,7 +556,7 @@
           <a:p>
             <a:fld id="{0B3F2602-38FE-4418-A7EF-ADB22DAE42F9}" type="slidenum">
               <a:rPr lang="en-US" smtClean="0"/>
-              <a:t>2</a:t>
+              <a:t>1</a:t>
             </a:fld>
             <a:endParaRPr lang="en-US"/>
           </a:p>
@@ -588,7 +565,7 @@
     </p:spTree>
     <p:extLst>
       <p:ext uri="{BB962C8B-B14F-4D97-AF65-F5344CB8AC3E}">
-        <p14:creationId xmlns:p14="http://schemas.microsoft.com/office/powerpoint/2010/main" val="938671169"/>
+        <p14:creationId xmlns:p14="http://schemas.microsoft.com/office/powerpoint/2010/main" val="662206208"/>
       </p:ext>
     </p:extLst>
   </p:cSld>
@@ -643,113 +620,29 @@
           <a:lstStyle/>
           <a:p>
             <a:r>
-              <a:rPr lang="en-US" dirty="0"/>
-              <a:t>Quando </a:t>
-            </a:r>
-            <a:r>
-              <a:rPr lang="en-US" dirty="0" err="1"/>
-              <a:t>falamos</a:t>
-            </a:r>
-            <a:r>
-              <a:rPr lang="en-US" dirty="0"/>
-              <a:t> </a:t>
-            </a:r>
-            <a:r>
-              <a:rPr lang="en-US" dirty="0" err="1"/>
-              <a:t>em</a:t>
-            </a:r>
-            <a:r>
-              <a:rPr lang="en-US" dirty="0"/>
-              <a:t> </a:t>
-            </a:r>
-            <a:r>
-              <a:rPr lang="en-US" dirty="0" err="1"/>
-              <a:t>prova</a:t>
-            </a:r>
-            <a:r>
-              <a:rPr lang="en-US" dirty="0"/>
-              <a:t> </a:t>
-            </a:r>
-            <a:r>
-              <a:rPr lang="en-US" dirty="0" err="1"/>
-              <a:t>automática</a:t>
-            </a:r>
-            <a:r>
-              <a:rPr lang="en-US" dirty="0"/>
-              <a:t> de </a:t>
-            </a:r>
-            <a:r>
-              <a:rPr lang="en-US" dirty="0" err="1"/>
-              <a:t>equivalência</a:t>
-            </a:r>
-            <a:r>
-              <a:rPr lang="en-US" dirty="0"/>
-              <a:t>, </a:t>
-            </a:r>
-            <a:r>
-              <a:rPr lang="en-US" dirty="0" err="1"/>
-              <a:t>queremos</a:t>
-            </a:r>
-            <a:r>
-              <a:rPr lang="en-US" dirty="0"/>
-              <a:t> </a:t>
-            </a:r>
-            <a:r>
-              <a:rPr lang="en-US" dirty="0" err="1"/>
-              <a:t>dizer</a:t>
-            </a:r>
-            <a:r>
-              <a:rPr lang="en-US" dirty="0"/>
-              <a:t> </a:t>
-            </a:r>
-            <a:r>
-              <a:rPr lang="en-US" dirty="0" err="1"/>
-              <a:t>sem</a:t>
-            </a:r>
-            <a:r>
-              <a:rPr lang="en-US" dirty="0"/>
-              <a:t> </a:t>
-            </a:r>
-            <a:r>
-              <a:rPr lang="en-US" dirty="0" err="1"/>
-              <a:t>interação</a:t>
-            </a:r>
-            <a:r>
-              <a:rPr lang="en-US" dirty="0"/>
-              <a:t> do </a:t>
-            </a:r>
-            <a:r>
-              <a:rPr lang="en-US" dirty="0" err="1"/>
-              <a:t>utilizador</a:t>
-            </a:r>
-            <a:r>
-              <a:rPr lang="en-US" dirty="0"/>
-              <a:t> </a:t>
-            </a:r>
-            <a:r>
-              <a:rPr lang="en-US" dirty="0" err="1"/>
-              <a:t>depois</a:t>
-            </a:r>
-            <a:r>
-              <a:rPr lang="en-US" dirty="0"/>
-              <a:t> da </a:t>
-            </a:r>
-            <a:r>
-              <a:rPr lang="en-US" dirty="0" err="1"/>
-              <a:t>escrita</a:t>
-            </a:r>
-            <a:r>
-              <a:rPr lang="en-US" dirty="0"/>
-              <a:t> da </a:t>
-            </a:r>
-            <a:r>
-              <a:rPr lang="en-US" dirty="0" err="1"/>
-              <a:t>especificação</a:t>
-            </a:r>
-            <a:r>
-              <a:rPr lang="en-US" dirty="0"/>
-              <a:t>.</a:t>
-            </a:r>
+              <a:rPr lang="pt-PT" dirty="0"/>
+              <a:t>Todos nós já passámos por situações em que percebemos um erro nalgum tipo de software, seja um site, aplicação ou jogo.</a:t>
+            </a:r>
+          </a:p>
+          <a:p>
+            <a:r>
+              <a:rPr lang="pt-PT" dirty="0"/>
+              <a:t>Alguns destes casos incluem, por exemplo, bugs irritantes num jogo que nos fazem perder uma partida ou problemas em aplicações de entrega de comida ao domicílio que nos fazem ficar sem almoço ou que, pelo menos, este demore mais tempo a chegar.</a:t>
+            </a:r>
+          </a:p>
+          <a:p>
+            <a:r>
+              <a:rPr lang="pt-PT" dirty="0"/>
+              <a:t>No entanto, nenhuma destas situações é comparável a casos em que erros de software levam a perda de vidas humanas ou </a:t>
+            </a:r>
+            <a:r>
+              <a:rPr lang="pt-PT"/>
+              <a:t>expressivos danos económicos.</a:t>
+            </a:r>
+            <a:endParaRPr lang="pt-PT" dirty="0"/>
+          </a:p>
+          <a:p>
+            <a:endParaRPr lang="en-US" dirty="0"/>
           </a:p>
         </p:txBody>
       </p:sp>
@@ -770,7 +663,7 @@
           <a:p>
             <a:fld id="{0B3F2602-38FE-4418-A7EF-ADB22DAE42F9}" type="slidenum">
               <a:rPr lang="en-US" smtClean="0"/>
-              <a:t>4</a:t>
+              <a:t>2</a:t>
             </a:fld>
             <a:endParaRPr lang="en-US"/>
           </a:p>
@@ -779,7 +672,7 @@
     </p:spTree>
     <p:extLst>
       <p:ext uri="{BB962C8B-B14F-4D97-AF65-F5344CB8AC3E}">
-        <p14:creationId xmlns:p14="http://schemas.microsoft.com/office/powerpoint/2010/main" val="274053569"/>
+        <p14:creationId xmlns:p14="http://schemas.microsoft.com/office/powerpoint/2010/main" val="938671169"/>
       </p:ext>
     </p:extLst>
   </p:cSld>
@@ -833,6 +726,358 @@
           <a:bodyPr/>
           <a:lstStyle/>
           <a:p>
+            <a:r>
+              <a:rPr lang="en-US" dirty="0"/>
+              <a:t>Quando </a:t>
+            </a:r>
+            <a:r>
+              <a:rPr lang="en-US" dirty="0" err="1"/>
+              <a:t>falamos</a:t>
+            </a:r>
+            <a:r>
+              <a:rPr lang="en-US" dirty="0"/>
+              <a:t> </a:t>
+            </a:r>
+            <a:r>
+              <a:rPr lang="en-US" dirty="0" err="1"/>
+              <a:t>em</a:t>
+            </a:r>
+            <a:r>
+              <a:rPr lang="en-US" dirty="0"/>
+              <a:t> </a:t>
+            </a:r>
+            <a:r>
+              <a:rPr lang="en-US" dirty="0" err="1"/>
+              <a:t>prova</a:t>
+            </a:r>
+            <a:r>
+              <a:rPr lang="en-US" dirty="0"/>
+              <a:t> </a:t>
+            </a:r>
+            <a:r>
+              <a:rPr lang="en-US" dirty="0" err="1"/>
+              <a:t>automática</a:t>
+            </a:r>
+            <a:r>
+              <a:rPr lang="en-US" dirty="0"/>
+              <a:t> de </a:t>
+            </a:r>
+            <a:r>
+              <a:rPr lang="en-US" dirty="0" err="1"/>
+              <a:t>equivalência</a:t>
+            </a:r>
+            <a:r>
+              <a:rPr lang="en-US" dirty="0"/>
+              <a:t>, </a:t>
+            </a:r>
+            <a:r>
+              <a:rPr lang="en-US" dirty="0" err="1"/>
+              <a:t>queremos</a:t>
+            </a:r>
+            <a:r>
+              <a:rPr lang="en-US" dirty="0"/>
+              <a:t> </a:t>
+            </a:r>
+            <a:r>
+              <a:rPr lang="en-US" dirty="0" err="1"/>
+              <a:t>dizer</a:t>
+            </a:r>
+            <a:r>
+              <a:rPr lang="en-US" dirty="0"/>
+              <a:t> </a:t>
+            </a:r>
+            <a:r>
+              <a:rPr lang="en-US" dirty="0" err="1"/>
+              <a:t>sem</a:t>
+            </a:r>
+            <a:r>
+              <a:rPr lang="en-US" dirty="0"/>
+              <a:t> </a:t>
+            </a:r>
+            <a:r>
+              <a:rPr lang="en-US" dirty="0" err="1"/>
+              <a:t>interação</a:t>
+            </a:r>
+            <a:r>
+              <a:rPr lang="en-US" dirty="0"/>
+              <a:t> do </a:t>
+            </a:r>
+            <a:r>
+              <a:rPr lang="en-US" dirty="0" err="1"/>
+              <a:t>utilizador</a:t>
+            </a:r>
+            <a:r>
+              <a:rPr lang="en-US" dirty="0"/>
+              <a:t> </a:t>
+            </a:r>
+            <a:r>
+              <a:rPr lang="en-US" dirty="0" err="1"/>
+              <a:t>depois</a:t>
+            </a:r>
+            <a:r>
+              <a:rPr lang="en-US" dirty="0"/>
+              <a:t> da </a:t>
+            </a:r>
+            <a:r>
+              <a:rPr lang="en-US" dirty="0" err="1"/>
+              <a:t>escrita</a:t>
+            </a:r>
+            <a:r>
+              <a:rPr lang="en-US" dirty="0"/>
+              <a:t> da </a:t>
+            </a:r>
+            <a:r>
+              <a:rPr lang="en-US" dirty="0" err="1"/>
+              <a:t>especificação</a:t>
+            </a:r>
+            <a:r>
+              <a:rPr lang="en-US" dirty="0"/>
+              <a:t>.</a:t>
+            </a:r>
+          </a:p>
+        </p:txBody>
+      </p:sp>
+      <p:sp>
+        <p:nvSpPr>
+          <p:cNvPr id="4" name="Slide Number Placeholder 3"/>
+          <p:cNvSpPr>
+            <a:spLocks noGrp="1"/>
+          </p:cNvSpPr>
+          <p:nvPr>
+            <p:ph type="sldNum" sz="quarter" idx="5"/>
+          </p:nvPr>
+        </p:nvSpPr>
+        <p:spPr/>
+        <p:txBody>
+          <a:bodyPr/>
+          <a:lstStyle/>
+          <a:p>
+            <a:fld id="{0B3F2602-38FE-4418-A7EF-ADB22DAE42F9}" type="slidenum">
+              <a:rPr lang="en-US" smtClean="0"/>
+              <a:t>4</a:t>
+            </a:fld>
+            <a:endParaRPr lang="en-US"/>
+          </a:p>
+        </p:txBody>
+      </p:sp>
+    </p:spTree>
+    <p:extLst>
+      <p:ext uri="{BB962C8B-B14F-4D97-AF65-F5344CB8AC3E}">
+        <p14:creationId xmlns:p14="http://schemas.microsoft.com/office/powerpoint/2010/main" val="274053569"/>
+      </p:ext>
+    </p:extLst>
+  </p:cSld>
+  <p:clrMapOvr>
+    <a:masterClrMapping/>
+  </p:clrMapOvr>
+</p:notes>
+</file>
+
+<file path=ppt/notesSlides/notesSlide4.xml><?xml version="1.0" encoding="utf-8"?>
+<p:notes xmlns:a="http://schemas.openxmlformats.org/drawingml/2006/main" xmlns:r="http://schemas.openxmlformats.org/officeDocument/2006/relationships" xmlns:p="http://schemas.openxmlformats.org/presentationml/2006/main">
+  <p:cSld>
+    <p:spTree>
+      <p:nvGrpSpPr>
+        <p:cNvPr id="1" name=""/>
+        <p:cNvGrpSpPr/>
+        <p:nvPr/>
+      </p:nvGrpSpPr>
+      <p:grpSpPr>
+        <a:xfrm>
+          <a:off x="0" y="0"/>
+          <a:ext cx="0" cy="0"/>
+          <a:chOff x="0" y="0"/>
+          <a:chExt cx="0" cy="0"/>
+        </a:xfrm>
+      </p:grpSpPr>
+      <p:sp>
+        <p:nvSpPr>
+          <p:cNvPr id="2" name="Slide Image Placeholder 1"/>
+          <p:cNvSpPr>
+            <a:spLocks noGrp="1" noRot="1" noChangeAspect="1"/>
+          </p:cNvSpPr>
+          <p:nvPr>
+            <p:ph type="sldImg"/>
+          </p:nvPr>
+        </p:nvSpPr>
+        <p:spPr/>
+      </p:sp>
+      <p:sp>
+        <p:nvSpPr>
+          <p:cNvPr id="3" name="Notes Placeholder 2"/>
+          <p:cNvSpPr>
+            <a:spLocks noGrp="1"/>
+          </p:cNvSpPr>
+          <p:nvPr>
+            <p:ph type="body" idx="1"/>
+          </p:nvPr>
+        </p:nvSpPr>
+        <p:spPr/>
+        <p:txBody>
+          <a:bodyPr/>
+          <a:lstStyle/>
+          <a:p>
+            <a:r>
+              <a:rPr lang="pt-PT" dirty="0"/>
+              <a:t>A </a:t>
+            </a:r>
+            <a:r>
+              <a:rPr lang="pt-PT" dirty="0" err="1"/>
+              <a:t>nocao</a:t>
+            </a:r>
+            <a:r>
+              <a:rPr lang="pt-PT" dirty="0"/>
+              <a:t> de equivalência baseia se na ideia de que existem um programa esquerdo e um direito. Existem dois mundos que não se tocam para simularmos dois programas a executar ao mesmo tempo.</a:t>
+            </a:r>
+          </a:p>
+          <a:p>
+            <a:endParaRPr lang="pt-PT" dirty="0"/>
+          </a:p>
+          <a:p>
+            <a:r>
+              <a:rPr lang="pt-PT" dirty="0" err="1"/>
+              <a:t>Floor</a:t>
+            </a:r>
+            <a:r>
+              <a:rPr lang="pt-PT" dirty="0"/>
+              <a:t> divide-se em representações para o lado esquerdo e direito.</a:t>
+            </a:r>
+          </a:p>
+          <a:p>
+            <a:endParaRPr lang="pt-PT" dirty="0"/>
+          </a:p>
+          <a:p>
+            <a:r>
+              <a:rPr lang="pt-PT" dirty="0" err="1"/>
+              <a:t>Pipe</a:t>
+            </a:r>
+            <a:r>
+              <a:rPr lang="pt-PT" dirty="0"/>
+              <a:t>: à esquerda raciocinamos sobre programa esquerdo e à direita sobre programa direito.</a:t>
+            </a:r>
+          </a:p>
+          <a:p>
+            <a:endParaRPr lang="pt-PT" dirty="0"/>
+          </a:p>
+          <a:p>
+            <a:r>
+              <a:rPr lang="pt-PT" dirty="0" err="1"/>
+              <a:t>Parametros</a:t>
+            </a:r>
+            <a:r>
+              <a:rPr lang="pt-PT" dirty="0"/>
+              <a:t>, </a:t>
+            </a:r>
+            <a:r>
+              <a:rPr lang="pt-PT"/>
+              <a:t>tipo de retorno</a:t>
+            </a:r>
+            <a:r>
+              <a:rPr lang="pt-PT" dirty="0"/>
+              <a:t>, </a:t>
+            </a:r>
+            <a:r>
+              <a:rPr lang="pt-PT" dirty="0" err="1"/>
+              <a:t>let</a:t>
+            </a:r>
+            <a:r>
+              <a:rPr lang="pt-PT" dirty="0"/>
+              <a:t> e </a:t>
+            </a:r>
+            <a:r>
+              <a:rPr lang="pt-PT" dirty="0" err="1"/>
+              <a:t>return</a:t>
+            </a:r>
+            <a:r>
+              <a:rPr lang="pt-PT" dirty="0"/>
+              <a:t>.</a:t>
+            </a:r>
+          </a:p>
+          <a:p>
+            <a:endParaRPr lang="en-US" dirty="0"/>
+          </a:p>
+        </p:txBody>
+      </p:sp>
+      <p:sp>
+        <p:nvSpPr>
+          <p:cNvPr id="4" name="Slide Number Placeholder 3"/>
+          <p:cNvSpPr>
+            <a:spLocks noGrp="1"/>
+          </p:cNvSpPr>
+          <p:nvPr>
+            <p:ph type="sldNum" sz="quarter" idx="5"/>
+          </p:nvPr>
+        </p:nvSpPr>
+        <p:spPr/>
+        <p:txBody>
+          <a:bodyPr/>
+          <a:lstStyle/>
+          <a:p>
+            <a:fld id="{0B3F2602-38FE-4418-A7EF-ADB22DAE42F9}" type="slidenum">
+              <a:rPr lang="en-US" smtClean="0"/>
+              <a:t>13</a:t>
+            </a:fld>
+            <a:endParaRPr lang="en-US"/>
+          </a:p>
+        </p:txBody>
+      </p:sp>
+    </p:spTree>
+    <p:extLst>
+      <p:ext uri="{BB962C8B-B14F-4D97-AF65-F5344CB8AC3E}">
+        <p14:creationId xmlns:p14="http://schemas.microsoft.com/office/powerpoint/2010/main" val="2825876661"/>
+      </p:ext>
+    </p:extLst>
+  </p:cSld>
+  <p:clrMapOvr>
+    <a:masterClrMapping/>
+  </p:clrMapOvr>
+</p:notes>
+</file>
+
+<file path=ppt/notesSlides/notesSlide5.xml><?xml version="1.0" encoding="utf-8"?>
+<p:notes xmlns:a="http://schemas.openxmlformats.org/drawingml/2006/main" xmlns:r="http://schemas.openxmlformats.org/officeDocument/2006/relationships" xmlns:p="http://schemas.openxmlformats.org/presentationml/2006/main">
+  <p:cSld>
+    <p:spTree>
+      <p:nvGrpSpPr>
+        <p:cNvPr id="1" name=""/>
+        <p:cNvGrpSpPr/>
+        <p:nvPr/>
+      </p:nvGrpSpPr>
+      <p:grpSpPr>
+        <a:xfrm>
+          <a:off x="0" y="0"/>
+          <a:ext cx="0" cy="0"/>
+          <a:chOff x="0" y="0"/>
+          <a:chExt cx="0" cy="0"/>
+        </a:xfrm>
+      </p:grpSpPr>
+      <p:sp>
+        <p:nvSpPr>
+          <p:cNvPr id="2" name="Slide Image Placeholder 1"/>
+          <p:cNvSpPr>
+            <a:spLocks noGrp="1" noRot="1" noChangeAspect="1"/>
+          </p:cNvSpPr>
+          <p:nvPr>
+            <p:ph type="sldImg"/>
+          </p:nvPr>
+        </p:nvSpPr>
+        <p:spPr/>
+      </p:sp>
+      <p:sp>
+        <p:nvSpPr>
+          <p:cNvPr id="3" name="Notes Placeholder 2"/>
+          <p:cNvSpPr>
+            <a:spLocks noGrp="1"/>
+          </p:cNvSpPr>
+          <p:nvPr>
+            <p:ph type="body" idx="1"/>
+          </p:nvPr>
+        </p:nvSpPr>
+        <p:spPr/>
+        <p:txBody>
+          <a:bodyPr/>
+          <a:lstStyle/>
+          <a:p>
             <a:endParaRPr lang="en-US" dirty="0"/>
           </a:p>
         </p:txBody>
@@ -873,7 +1118,7 @@
 </p:notes>
 </file>
 
-<file path=ppt/notesSlides/notesSlide4.xml><?xml version="1.0" encoding="utf-8"?>
+<file path=ppt/notesSlides/notesSlide6.xml><?xml version="1.0" encoding="utf-8"?>
 <p:notes xmlns:a="http://schemas.openxmlformats.org/drawingml/2006/main" xmlns:r="http://schemas.openxmlformats.org/officeDocument/2006/relationships" xmlns:p="http://schemas.openxmlformats.org/presentationml/2006/main">
   <p:cSld>
     <p:spTree>
@@ -981,7 +1226,7 @@
 </p:notes>
 </file>
 
-<file path=ppt/notesSlides/notesSlide5.xml><?xml version="1.0" encoding="utf-8"?>
+<file path=ppt/notesSlides/notesSlide7.xml><?xml version="1.0" encoding="utf-8"?>
 <p:notes xmlns:a="http://schemas.openxmlformats.org/drawingml/2006/main" xmlns:r="http://schemas.openxmlformats.org/officeDocument/2006/relationships" xmlns:p="http://schemas.openxmlformats.org/presentationml/2006/main">
   <p:cSld>
     <p:spTree>
@@ -1220,7 +1465,7 @@
           <a:p>
             <a:fld id="{1E5BF2F9-84AD-46CB-8486-EB732804F762}" type="datetime1">
               <a:rPr lang="en-US" smtClean="0"/>
-              <a:t>12/13/2025</a:t>
+              <a:t>12/15/2025</a:t>
             </a:fld>
             <a:endParaRPr lang="en-US"/>
           </a:p>
@@ -1399,7 +1644,7 @@
           <a:p>
             <a:fld id="{23618752-90E6-4B57-86C0-C43DD2320A2D}" type="datetime1">
               <a:rPr lang="en-US" smtClean="0"/>
-              <a:t>12/13/2025</a:t>
+              <a:t>12/15/2025</a:t>
             </a:fld>
             <a:endParaRPr lang="en-US"/>
           </a:p>
@@ -1579,7 +1824,7 @@
           <a:p>
             <a:fld id="{85BE5269-252E-4ABC-B047-AD967E98EA5E}" type="datetime1">
               <a:rPr lang="en-US" smtClean="0"/>
-              <a:t>12/13/2025</a:t>
+              <a:t>12/15/2025</a:t>
             </a:fld>
             <a:endParaRPr lang="en-US"/>
           </a:p>
@@ -1749,7 +1994,7 @@
           <a:p>
             <a:fld id="{C4D54784-9B75-4DBC-ACA0-9F51227CD78F}" type="datetime1">
               <a:rPr lang="en-US" smtClean="0"/>
-              <a:t>12/13/2025</a:t>
+              <a:t>12/15/2025</a:t>
             </a:fld>
             <a:endParaRPr lang="en-US"/>
           </a:p>
@@ -1995,7 +2240,7 @@
           <a:p>
             <a:fld id="{3D9E4D52-32DE-4F35-8CB6-5A44573D3FC9}" type="datetime1">
               <a:rPr lang="en-US" smtClean="0"/>
-              <a:t>12/13/2025</a:t>
+              <a:t>12/15/2025</a:t>
             </a:fld>
             <a:endParaRPr lang="en-US"/>
           </a:p>
@@ -2227,7 +2472,7 @@
           <a:p>
             <a:fld id="{D0FFB22E-8A21-4AF6-BDE0-993A2F9B14BB}" type="datetime1">
               <a:rPr lang="en-US" smtClean="0"/>
-              <a:t>12/13/2025</a:t>
+              <a:t>12/15/2025</a:t>
             </a:fld>
             <a:endParaRPr lang="en-US"/>
           </a:p>
@@ -2594,7 +2839,7 @@
           <a:p>
             <a:fld id="{AC41D9E4-527D-47F1-B47F-963D62CCBC76}" type="datetime1">
               <a:rPr lang="en-US" smtClean="0"/>
-              <a:t>12/13/2025</a:t>
+              <a:t>12/15/2025</a:t>
             </a:fld>
             <a:endParaRPr lang="en-US"/>
           </a:p>
@@ -2712,7 +2957,7 @@
           <a:p>
             <a:fld id="{9906A608-925A-4874-BCA4-36BA40FADF76}" type="datetime1">
               <a:rPr lang="en-US" smtClean="0"/>
-              <a:t>12/13/2025</a:t>
+              <a:t>12/15/2025</a:t>
             </a:fld>
             <a:endParaRPr lang="en-US"/>
           </a:p>
@@ -2807,7 +3052,7 @@
           <a:p>
             <a:fld id="{45CCB426-3683-4E7C-B869-5155B20F8BC6}" type="datetime1">
               <a:rPr lang="en-US" smtClean="0"/>
-              <a:t>12/13/2025</a:t>
+              <a:t>12/15/2025</a:t>
             </a:fld>
             <a:endParaRPr lang="en-US"/>
           </a:p>
@@ -3084,7 +3329,7 @@
           <a:p>
             <a:fld id="{3351EA60-24F6-40E8-A0D7-2067F6ECA6B2}" type="datetime1">
               <a:rPr lang="en-US" smtClean="0"/>
-              <a:t>12/13/2025</a:t>
+              <a:t>12/15/2025</a:t>
             </a:fld>
             <a:endParaRPr lang="en-US"/>
           </a:p>
@@ -3341,7 +3586,7 @@
           <a:p>
             <a:fld id="{C6106440-8C5F-4111-9AD5-D0C1FDF01CE9}" type="datetime1">
               <a:rPr lang="en-US" smtClean="0"/>
-              <a:t>12/13/2025</a:t>
+              <a:t>12/15/2025</a:t>
             </a:fld>
             <a:endParaRPr lang="en-US"/>
           </a:p>
@@ -3557,7 +3802,7 @@
           <a:p>
             <a:fld id="{2A16FEB8-5B01-4F5E-B573-CC516A2AD5E4}" type="datetime1">
               <a:rPr lang="en-US" smtClean="0"/>
-              <a:t>12/13/2025</a:t>
+              <a:t>12/15/2025</a:t>
             </a:fld>
             <a:endParaRPr lang="en-US"/>
           </a:p>
